--- a/IN501_Mai_Robinson_Samos_Turner_Vega_Unit9_Assignment.pptx
+++ b/IN501_Mai_Robinson_Samos_Turner_Vega_Unit9_Assignment.pptx
@@ -8,7 +8,11 @@
     <p:sldId id="256" r:id="rId2"/>
     <p:sldId id="257" r:id="rId3"/>
     <p:sldId id="258" r:id="rId4"/>
-    <p:sldId id="259" r:id="rId5"/>
+    <p:sldId id="261" r:id="rId5"/>
+    <p:sldId id="262" r:id="rId6"/>
+    <p:sldId id="263" r:id="rId7"/>
+    <p:sldId id="260" r:id="rId8"/>
+    <p:sldId id="259" r:id="rId9"/>
   </p:sldIdLst>
   <p:sldSz cx="12192000" cy="6858000"/>
   <p:notesSz cx="6858000" cy="9144000"/>
@@ -113,7 +117,9 @@
 <file path=ppt/revisionInfo.xml><?xml version="1.0" encoding="utf-8"?>
 <p1510:revInfo xmlns:a="http://schemas.openxmlformats.org/drawingml/2006/main" xmlns:r="http://schemas.openxmlformats.org/officeDocument/2006/relationships" xmlns:p1510="http://schemas.microsoft.com/office/powerpoint/2015/10/main">
   <p1510:revLst>
-    <p1510:client id="{3106B81E-A919-496D-9FA4-A8C857C6917F}" v="14" dt="2026-03-05T17:13:37.142"/>
+    <p1510:client id="{3106B81E-A919-496D-9FA4-A8C857C6917F}" v="65" dt="2026-03-07T20:49:40.377"/>
+    <p1510:client id="{4B232746-762D-DE8C-7D01-26173855CD31}" v="294" dt="2026-03-07T20:59:10.562"/>
+    <p1510:client id="{4F8CDE41-BC36-BDCF-6662-9346E004DDBF}" v="6" dt="2026-03-07T20:38:14.909"/>
   </p1510:revLst>
 </p1510:revInfo>
 </file>
@@ -123,7 +129,7 @@
   <pc:docChgLst>
     <pc:chgData name="Elliot Mai" userId="1c49b37007f9488b" providerId="LiveId" clId="{3EDB10E2-DA7D-4765-B207-53B47556FA45}"/>
     <pc:docChg chg="undo custSel addSld delSld modSld">
-      <pc:chgData name="Elliot Mai" userId="1c49b37007f9488b" providerId="LiveId" clId="{3EDB10E2-DA7D-4765-B207-53B47556FA45}" dt="2026-03-05T17:13:37.142" v="286"/>
+      <pc:chgData name="Elliot Mai" userId="1c49b37007f9488b" providerId="LiveId" clId="{3EDB10E2-DA7D-4765-B207-53B47556FA45}" dt="2026-03-07T20:49:40.377" v="351" actId="20577"/>
       <pc:docMkLst>
         <pc:docMk/>
       </pc:docMkLst>
@@ -147,54 +153,6 @@
             <pc:docMk/>
             <pc:sldMk cId="540900252" sldId="256"/>
             <ac:spMk id="3" creationId="{06B55207-CD41-87F2-68F4-2F3A8F48C6AE}"/>
-          </ac:spMkLst>
-        </pc:spChg>
-        <pc:spChg chg="add del">
-          <ac:chgData name="Elliot Mai" userId="1c49b37007f9488b" providerId="LiveId" clId="{3EDB10E2-DA7D-4765-B207-53B47556FA45}" dt="2026-03-05T02:14:49.121" v="225" actId="26606"/>
-          <ac:spMkLst>
-            <pc:docMk/>
-            <pc:sldMk cId="540900252" sldId="256"/>
-            <ac:spMk id="8" creationId="{6F5A5072-7B47-4D32-B52A-4EBBF590B8A5}"/>
-          </ac:spMkLst>
-        </pc:spChg>
-        <pc:spChg chg="add">
-          <ac:chgData name="Elliot Mai" userId="1c49b37007f9488b" providerId="LiveId" clId="{3EDB10E2-DA7D-4765-B207-53B47556FA45}" dt="2026-03-05T02:12:12.047" v="183" actId="26606"/>
-          <ac:spMkLst>
-            <pc:docMk/>
-            <pc:sldMk cId="540900252" sldId="256"/>
-            <ac:spMk id="10" creationId="{9715DAF0-AE1B-46C9-8A6B-DB2AA05AB91D}"/>
-          </ac:spMkLst>
-        </pc:spChg>
-        <pc:spChg chg="add del">
-          <ac:chgData name="Elliot Mai" userId="1c49b37007f9488b" providerId="LiveId" clId="{3EDB10E2-DA7D-4765-B207-53B47556FA45}" dt="2026-03-05T02:14:49.121" v="225" actId="26606"/>
-          <ac:spMkLst>
-            <pc:docMk/>
-            <pc:sldMk cId="540900252" sldId="256"/>
-            <ac:spMk id="12" creationId="{6016219D-510E-4184-9090-6D5578A87BD1}"/>
-          </ac:spMkLst>
-        </pc:spChg>
-        <pc:spChg chg="add">
-          <ac:chgData name="Elliot Mai" userId="1c49b37007f9488b" providerId="LiveId" clId="{3EDB10E2-DA7D-4765-B207-53B47556FA45}" dt="2026-03-05T02:12:12.047" v="183" actId="26606"/>
-          <ac:spMkLst>
-            <pc:docMk/>
-            <pc:sldMk cId="540900252" sldId="256"/>
-            <ac:spMk id="14" creationId="{AFF4A713-7B75-4B21-90D7-5AB19547C728}"/>
-          </ac:spMkLst>
-        </pc:spChg>
-        <pc:spChg chg="add del">
-          <ac:chgData name="Elliot Mai" userId="1c49b37007f9488b" providerId="LiveId" clId="{3EDB10E2-DA7D-4765-B207-53B47556FA45}" dt="2026-03-05T02:14:49.121" v="225" actId="26606"/>
-          <ac:spMkLst>
-            <pc:docMk/>
-            <pc:sldMk cId="540900252" sldId="256"/>
-            <ac:spMk id="16" creationId="{DC631C0B-6DA6-4E57-8231-CE32B3434A7E}"/>
-          </ac:spMkLst>
-        </pc:spChg>
-        <pc:spChg chg="add del">
-          <ac:chgData name="Elliot Mai" userId="1c49b37007f9488b" providerId="LiveId" clId="{3EDB10E2-DA7D-4765-B207-53B47556FA45}" dt="2026-03-05T02:14:49.121" v="225" actId="26606"/>
-          <ac:spMkLst>
-            <pc:docMk/>
-            <pc:sldMk cId="540900252" sldId="256"/>
-            <ac:spMk id="18" creationId="{C29501E6-A978-4A61-9689-9085AF97A53A}"/>
           </ac:spMkLst>
         </pc:spChg>
         <pc:spChg chg="add">
@@ -245,14 +203,6 @@
             <ac:spMk id="33" creationId="{C29501E6-A978-4A61-9689-9085AF97A53A}"/>
           </ac:spMkLst>
         </pc:spChg>
-        <pc:graphicFrameChg chg="add mod">
-          <ac:chgData name="Elliot Mai" userId="1c49b37007f9488b" providerId="LiveId" clId="{3EDB10E2-DA7D-4765-B207-53B47556FA45}" dt="2026-03-05T17:13:12.754" v="272"/>
-          <ac:graphicFrameMkLst>
-            <pc:docMk/>
-            <pc:sldMk cId="540900252" sldId="256"/>
-            <ac:graphicFrameMk id="4" creationId="{3FEC1664-B7DF-5297-468F-BA65010ED60B}"/>
-          </ac:graphicFrameMkLst>
-        </pc:graphicFrameChg>
       </pc:sldChg>
       <pc:sldChg chg="addSp delSp modSp new mod setBg modClrScheme addAnim delDesignElem chgLayout">
         <pc:chgData name="Elliot Mai" userId="1c49b37007f9488b" providerId="LiveId" clId="{3EDB10E2-DA7D-4765-B207-53B47556FA45}" dt="2026-03-05T02:15:28.449" v="241" actId="20577"/>
@@ -268,14 +218,6 @@
             <ac:spMk id="2" creationId="{B47A62DE-F7EA-87EE-E23C-C4E6C881AA10}"/>
           </ac:spMkLst>
         </pc:spChg>
-        <pc:spChg chg="del mod ord">
-          <ac:chgData name="Elliot Mai" userId="1c49b37007f9488b" providerId="LiveId" clId="{3EDB10E2-DA7D-4765-B207-53B47556FA45}" dt="2026-03-05T02:13:31.952" v="189" actId="700"/>
-          <ac:spMkLst>
-            <pc:docMk/>
-            <pc:sldMk cId="1909686191" sldId="257"/>
-            <ac:spMk id="3" creationId="{0B23AB9E-402B-45DD-2C9C-C780CE1CC67F}"/>
-          </ac:spMkLst>
-        </pc:spChg>
         <pc:spChg chg="add mod ord">
           <ac:chgData name="Elliot Mai" userId="1c49b37007f9488b" providerId="LiveId" clId="{3EDB10E2-DA7D-4765-B207-53B47556FA45}" dt="2026-03-05T02:15:28.449" v="241" actId="20577"/>
           <ac:spMkLst>
@@ -284,92 +226,12 @@
             <ac:spMk id="4" creationId="{C2BF2A73-CB38-4C3C-B0DF-AFB619494CC3}"/>
           </ac:spMkLst>
         </pc:spChg>
-        <pc:spChg chg="add del mod ord">
-          <ac:chgData name="Elliot Mai" userId="1c49b37007f9488b" providerId="LiveId" clId="{3EDB10E2-DA7D-4765-B207-53B47556FA45}" dt="2026-03-05T02:15:15.988" v="230" actId="478"/>
-          <ac:spMkLst>
-            <pc:docMk/>
-            <pc:sldMk cId="1909686191" sldId="257"/>
-            <ac:spMk id="5" creationId="{81E19B97-5313-0395-34EA-17A06A11C727}"/>
-          </ac:spMkLst>
-        </pc:spChg>
-        <pc:spChg chg="add del mod">
-          <ac:chgData name="Elliot Mai" userId="1c49b37007f9488b" providerId="LiveId" clId="{3EDB10E2-DA7D-4765-B207-53B47556FA45}" dt="2026-03-05T02:15:00.578" v="228" actId="6264"/>
-          <ac:spMkLst>
-            <pc:docMk/>
-            <pc:sldMk cId="1909686191" sldId="257"/>
-            <ac:spMk id="6" creationId="{98B891D3-EC6E-0F10-704A-47F72EF3BE1F}"/>
-          </ac:spMkLst>
-        </pc:spChg>
-        <pc:spChg chg="add del">
-          <ac:chgData name="Elliot Mai" userId="1c49b37007f9488b" providerId="LiveId" clId="{3EDB10E2-DA7D-4765-B207-53B47556FA45}" dt="2026-03-05T02:15:00.578" v="228" actId="6264"/>
-          <ac:spMkLst>
-            <pc:docMk/>
-            <pc:sldMk cId="1909686191" sldId="257"/>
-            <ac:spMk id="7" creationId="{4C608BEB-860E-4094-8511-78603564A75E}"/>
-          </ac:spMkLst>
-        </pc:spChg>
-        <pc:spChg chg="add del">
-          <ac:chgData name="Elliot Mai" userId="1c49b37007f9488b" providerId="LiveId" clId="{3EDB10E2-DA7D-4765-B207-53B47556FA45}" dt="2026-03-05T02:13:31.952" v="189" actId="700"/>
-          <ac:spMkLst>
-            <pc:docMk/>
-            <pc:sldMk cId="1909686191" sldId="257"/>
-            <ac:spMk id="8" creationId="{1B15ED52-F352-441B-82BF-E0EA34836D08}"/>
-          </ac:spMkLst>
-        </pc:spChg>
-        <pc:spChg chg="add del">
-          <ac:chgData name="Elliot Mai" userId="1c49b37007f9488b" providerId="LiveId" clId="{3EDB10E2-DA7D-4765-B207-53B47556FA45}" dt="2026-03-05T02:13:31.952" v="189" actId="700"/>
-          <ac:spMkLst>
-            <pc:docMk/>
-            <pc:sldMk cId="1909686191" sldId="257"/>
-            <ac:spMk id="10" creationId="{3B2E3793-BFE6-45A2-9B7B-E18844431C99}"/>
-          </ac:spMkLst>
-        </pc:spChg>
-        <pc:spChg chg="add del mod">
-          <ac:chgData name="Elliot Mai" userId="1c49b37007f9488b" providerId="LiveId" clId="{3EDB10E2-DA7D-4765-B207-53B47556FA45}" dt="2026-03-05T02:15:00.578" v="228" actId="6264"/>
-          <ac:spMkLst>
-            <pc:docMk/>
-            <pc:sldMk cId="1909686191" sldId="257"/>
-            <ac:spMk id="11" creationId="{6C82ADDF-3A8A-3763-0E3D-1B1350124729}"/>
-          </ac:spMkLst>
-        </pc:spChg>
-        <pc:spChg chg="add del">
-          <ac:chgData name="Elliot Mai" userId="1c49b37007f9488b" providerId="LiveId" clId="{3EDB10E2-DA7D-4765-B207-53B47556FA45}" dt="2026-03-05T02:13:31.952" v="189" actId="700"/>
-          <ac:spMkLst>
-            <pc:docMk/>
-            <pc:sldMk cId="1909686191" sldId="257"/>
-            <ac:spMk id="12" creationId="{BC4C4868-CB8F-4AF9-9CDB-8108F2C19B67}"/>
-          </ac:spMkLst>
-        </pc:spChg>
-        <pc:spChg chg="add del mod">
-          <ac:chgData name="Elliot Mai" userId="1c49b37007f9488b" providerId="LiveId" clId="{3EDB10E2-DA7D-4765-B207-53B47556FA45}" dt="2026-03-05T02:15:00.578" v="228" actId="6264"/>
-          <ac:spMkLst>
-            <pc:docMk/>
-            <pc:sldMk cId="1909686191" sldId="257"/>
-            <ac:spMk id="13" creationId="{DC2D0F96-1B8E-F2CB-01E2-8CA52C4F7DFE}"/>
-          </ac:spMkLst>
-        </pc:spChg>
-        <pc:spChg chg="add del">
-          <ac:chgData name="Elliot Mai" userId="1c49b37007f9488b" providerId="LiveId" clId="{3EDB10E2-DA7D-4765-B207-53B47556FA45}" dt="2026-03-05T02:13:31.952" v="189" actId="700"/>
-          <ac:spMkLst>
-            <pc:docMk/>
-            <pc:sldMk cId="1909686191" sldId="257"/>
-            <ac:spMk id="14" creationId="{375E0459-6403-40CD-989D-56A4407CA12E}"/>
-          </ac:spMkLst>
-        </pc:spChg>
         <pc:spChg chg="add">
           <ac:chgData name="Elliot Mai" userId="1c49b37007f9488b" providerId="LiveId" clId="{3EDB10E2-DA7D-4765-B207-53B47556FA45}" dt="2026-03-05T02:15:22.654" v="231" actId="26606"/>
           <ac:spMkLst>
             <pc:docMk/>
             <pc:sldMk cId="1909686191" sldId="257"/>
             <ac:spMk id="15" creationId="{375E0459-6403-40CD-989D-56A4407CA12E}"/>
-          </ac:spMkLst>
-        </pc:spChg>
-        <pc:spChg chg="add del">
-          <ac:chgData name="Elliot Mai" userId="1c49b37007f9488b" providerId="LiveId" clId="{3EDB10E2-DA7D-4765-B207-53B47556FA45}" dt="2026-03-05T02:13:31.952" v="189" actId="700"/>
-          <ac:spMkLst>
-            <pc:docMk/>
-            <pc:sldMk cId="1909686191" sldId="257"/>
-            <ac:spMk id="16" creationId="{53E5B1A8-3AC9-4BD1-9BBC-78CA94F2D1BA}"/>
           </ac:spMkLst>
         </pc:spChg>
         <pc:spChg chg="add">
@@ -404,51 +266,19 @@
             <ac:spMk id="20" creationId="{BC4C4868-CB8F-4AF9-9CDB-8108F2C19B67}"/>
           </ac:spMkLst>
         </pc:spChg>
-        <pc:cxnChg chg="add del">
-          <ac:chgData name="Elliot Mai" userId="1c49b37007f9488b" providerId="LiveId" clId="{3EDB10E2-DA7D-4765-B207-53B47556FA45}" dt="2026-03-05T02:15:00.578" v="228" actId="6264"/>
-          <ac:cxnSpMkLst>
-            <pc:docMk/>
-            <pc:sldMk cId="1909686191" sldId="257"/>
-            <ac:cxnSpMk id="9" creationId="{1F16A8D4-FE87-4604-88B2-394B5D1EB437}"/>
-          </ac:cxnSpMkLst>
-        </pc:cxnChg>
       </pc:sldChg>
       <pc:sldChg chg="addSp delSp modSp new mod setBg modClrScheme chgLayout">
-        <pc:chgData name="Elliot Mai" userId="1c49b37007f9488b" providerId="LiveId" clId="{3EDB10E2-DA7D-4765-B207-53B47556FA45}" dt="2026-03-05T02:16:06.484" v="253" actId="26606"/>
+        <pc:chgData name="Elliot Mai" userId="1c49b37007f9488b" providerId="LiveId" clId="{3EDB10E2-DA7D-4765-B207-53B47556FA45}" dt="2026-03-07T20:48:40.472" v="304" actId="20577"/>
         <pc:sldMkLst>
           <pc:docMk/>
           <pc:sldMk cId="1823981096" sldId="258"/>
         </pc:sldMkLst>
-        <pc:spChg chg="del mod ord">
-          <ac:chgData name="Elliot Mai" userId="1c49b37007f9488b" providerId="LiveId" clId="{3EDB10E2-DA7D-4765-B207-53B47556FA45}" dt="2026-03-05T02:10:53.261" v="86" actId="700"/>
-          <ac:spMkLst>
-            <pc:docMk/>
-            <pc:sldMk cId="1823981096" sldId="258"/>
-            <ac:spMk id="2" creationId="{67F4E547-F830-F778-0F28-46FCD083EC98}"/>
-          </ac:spMkLst>
-        </pc:spChg>
-        <pc:spChg chg="del mod ord">
-          <ac:chgData name="Elliot Mai" userId="1c49b37007f9488b" providerId="LiveId" clId="{3EDB10E2-DA7D-4765-B207-53B47556FA45}" dt="2026-03-05T02:10:53.261" v="86" actId="700"/>
-          <ac:spMkLst>
-            <pc:docMk/>
-            <pc:sldMk cId="1823981096" sldId="258"/>
-            <ac:spMk id="3" creationId="{7C39BA3E-AC10-9C37-B438-7D2D6E9F26DC}"/>
-          </ac:spMkLst>
-        </pc:spChg>
         <pc:spChg chg="add mod ord">
-          <ac:chgData name="Elliot Mai" userId="1c49b37007f9488b" providerId="LiveId" clId="{3EDB10E2-DA7D-4765-B207-53B47556FA45}" dt="2026-03-05T02:16:06.484" v="253" actId="26606"/>
+          <ac:chgData name="Elliot Mai" userId="1c49b37007f9488b" providerId="LiveId" clId="{3EDB10E2-DA7D-4765-B207-53B47556FA45}" dt="2026-03-07T20:48:40.472" v="304" actId="20577"/>
           <ac:spMkLst>
             <pc:docMk/>
             <pc:sldMk cId="1823981096" sldId="258"/>
             <ac:spMk id="4" creationId="{4A0FBBEF-80E3-1D77-AC2D-89F96A94C0C1}"/>
-          </ac:spMkLst>
-        </pc:spChg>
-        <pc:spChg chg="add del mod ord">
-          <ac:chgData name="Elliot Mai" userId="1c49b37007f9488b" providerId="LiveId" clId="{3EDB10E2-DA7D-4765-B207-53B47556FA45}" dt="2026-03-05T02:15:35.083" v="242" actId="700"/>
-          <ac:spMkLst>
-            <pc:docMk/>
-            <pc:sldMk cId="1823981096" sldId="258"/>
-            <ac:spMk id="5" creationId="{BFA38CD0-59E3-4981-B263-5A47F0EE9D80}"/>
           </ac:spMkLst>
         </pc:spChg>
         <pc:spChg chg="add mod ord">
@@ -457,46 +287,6 @@
             <pc:docMk/>
             <pc:sldMk cId="1823981096" sldId="258"/>
             <ac:spMk id="6" creationId="{72B352EF-DE90-69E1-4DC1-284688B26B2E}"/>
-          </ac:spMkLst>
-        </pc:spChg>
-        <pc:spChg chg="add del">
-          <ac:chgData name="Elliot Mai" userId="1c49b37007f9488b" providerId="LiveId" clId="{3EDB10E2-DA7D-4765-B207-53B47556FA45}" dt="2026-03-05T02:16:06.484" v="253" actId="26606"/>
-          <ac:spMkLst>
-            <pc:docMk/>
-            <pc:sldMk cId="1823981096" sldId="258"/>
-            <ac:spMk id="11" creationId="{1B15ED52-F352-441B-82BF-E0EA34836D08}"/>
-          </ac:spMkLst>
-        </pc:spChg>
-        <pc:spChg chg="add del">
-          <ac:chgData name="Elliot Mai" userId="1c49b37007f9488b" providerId="LiveId" clId="{3EDB10E2-DA7D-4765-B207-53B47556FA45}" dt="2026-03-05T02:16:06.484" v="253" actId="26606"/>
-          <ac:spMkLst>
-            <pc:docMk/>
-            <pc:sldMk cId="1823981096" sldId="258"/>
-            <ac:spMk id="13" creationId="{3B2E3793-BFE6-45A2-9B7B-E18844431C99}"/>
-          </ac:spMkLst>
-        </pc:spChg>
-        <pc:spChg chg="add">
-          <ac:chgData name="Elliot Mai" userId="1c49b37007f9488b" providerId="LiveId" clId="{3EDB10E2-DA7D-4765-B207-53B47556FA45}" dt="2026-03-05T02:15:41.520" v="243" actId="26606"/>
-          <ac:spMkLst>
-            <pc:docMk/>
-            <pc:sldMk cId="1823981096" sldId="258"/>
-            <ac:spMk id="15" creationId="{BC4C4868-CB8F-4AF9-9CDB-8108F2C19B67}"/>
-          </ac:spMkLst>
-        </pc:spChg>
-        <pc:spChg chg="add del">
-          <ac:chgData name="Elliot Mai" userId="1c49b37007f9488b" providerId="LiveId" clId="{3EDB10E2-DA7D-4765-B207-53B47556FA45}" dt="2026-03-05T02:16:06.484" v="253" actId="26606"/>
-          <ac:spMkLst>
-            <pc:docMk/>
-            <pc:sldMk cId="1823981096" sldId="258"/>
-            <ac:spMk id="17" creationId="{375E0459-6403-40CD-989D-56A4407CA12E}"/>
-          </ac:spMkLst>
-        </pc:spChg>
-        <pc:spChg chg="add del">
-          <ac:chgData name="Elliot Mai" userId="1c49b37007f9488b" providerId="LiveId" clId="{3EDB10E2-DA7D-4765-B207-53B47556FA45}" dt="2026-03-05T02:16:06.484" v="253" actId="26606"/>
-          <ac:spMkLst>
-            <pc:docMk/>
-            <pc:sldMk cId="1823981096" sldId="258"/>
-            <ac:spMk id="19" creationId="{53E5B1A8-3AC9-4BD1-9BBC-78CA94F2D1BA}"/>
           </ac:spMkLst>
         </pc:spChg>
         <pc:spChg chg="add">
@@ -603,84 +393,130 @@
           </ac:spMkLst>
         </pc:spChg>
       </pc:sldChg>
-      <pc:sldChg chg="addSp delSp modSp add del mod modClrScheme delDesignElem chgLayout">
-        <pc:chgData name="Elliot Mai" userId="1c49b37007f9488b" providerId="LiveId" clId="{3EDB10E2-DA7D-4765-B207-53B47556FA45}" dt="2026-03-05T02:12:53.605" v="188" actId="2890"/>
+      <pc:sldChg chg="modSp add mod">
+        <pc:chgData name="Elliot Mai" userId="1c49b37007f9488b" providerId="LiveId" clId="{3EDB10E2-DA7D-4765-B207-53B47556FA45}" dt="2026-03-07T20:49:13.416" v="324" actId="20577"/>
         <pc:sldMkLst>
           <pc:docMk/>
-          <pc:sldMk cId="3430437250" sldId="259"/>
+          <pc:sldMk cId="1049300616" sldId="261"/>
         </pc:sldMkLst>
-        <pc:spChg chg="mod ord">
-          <ac:chgData name="Elliot Mai" userId="1c49b37007f9488b" providerId="LiveId" clId="{3EDB10E2-DA7D-4765-B207-53B47556FA45}" dt="2026-03-05T02:12:52.075" v="187" actId="700"/>
+        <pc:spChg chg="mod">
+          <ac:chgData name="Elliot Mai" userId="1c49b37007f9488b" providerId="LiveId" clId="{3EDB10E2-DA7D-4765-B207-53B47556FA45}" dt="2026-03-07T20:49:13.416" v="324" actId="20577"/>
           <ac:spMkLst>
             <pc:docMk/>
-            <pc:sldMk cId="3430437250" sldId="259"/>
-            <ac:spMk id="2" creationId="{46553FBA-6335-51D5-9E32-937BAA6A17F4}"/>
+            <pc:sldMk cId="1049300616" sldId="261"/>
+            <ac:spMk id="4" creationId="{BD8DAD57-5C6E-5384-181C-936F2C3C9A25}"/>
           </ac:spMkLst>
         </pc:spChg>
-        <pc:spChg chg="add del mod ord">
-          <ac:chgData name="Elliot Mai" userId="1c49b37007f9488b" providerId="LiveId" clId="{3EDB10E2-DA7D-4765-B207-53B47556FA45}" dt="2026-03-05T02:12:52.075" v="187" actId="700"/>
+      </pc:sldChg>
+      <pc:sldChg chg="modSp add mod">
+        <pc:chgData name="Elliot Mai" userId="1c49b37007f9488b" providerId="LiveId" clId="{3EDB10E2-DA7D-4765-B207-53B47556FA45}" dt="2026-03-07T20:49:29.571" v="338" actId="20577"/>
+        <pc:sldMkLst>
+          <pc:docMk/>
+          <pc:sldMk cId="311887172" sldId="262"/>
+        </pc:sldMkLst>
+        <pc:spChg chg="mod">
+          <ac:chgData name="Elliot Mai" userId="1c49b37007f9488b" providerId="LiveId" clId="{3EDB10E2-DA7D-4765-B207-53B47556FA45}" dt="2026-03-07T20:49:29.571" v="338" actId="20577"/>
           <ac:spMkLst>
             <pc:docMk/>
-            <pc:sldMk cId="3430437250" sldId="259"/>
-            <ac:spMk id="3" creationId="{97699074-648C-45DC-96E8-257B62A8EA2E}"/>
+            <pc:sldMk cId="311887172" sldId="262"/>
+            <ac:spMk id="4" creationId="{7F259041-F5AF-4E81-84C2-467F68486086}"/>
           </ac:spMkLst>
         </pc:spChg>
-        <pc:spChg chg="add del mod ord">
-          <ac:chgData name="Elliot Mai" userId="1c49b37007f9488b" providerId="LiveId" clId="{3EDB10E2-DA7D-4765-B207-53B47556FA45}" dt="2026-03-05T02:12:52.075" v="187" actId="700"/>
+      </pc:sldChg>
+      <pc:sldChg chg="modSp add mod">
+        <pc:chgData name="Elliot Mai" userId="1c49b37007f9488b" providerId="LiveId" clId="{3EDB10E2-DA7D-4765-B207-53B47556FA45}" dt="2026-03-07T20:49:40.377" v="351" actId="20577"/>
+        <pc:sldMkLst>
+          <pc:docMk/>
+          <pc:sldMk cId="1688651266" sldId="263"/>
+        </pc:sldMkLst>
+        <pc:spChg chg="mod">
+          <ac:chgData name="Elliot Mai" userId="1c49b37007f9488b" providerId="LiveId" clId="{3EDB10E2-DA7D-4765-B207-53B47556FA45}" dt="2026-03-07T20:49:40.377" v="351" actId="20577"/>
           <ac:spMkLst>
             <pc:docMk/>
-            <pc:sldMk cId="3430437250" sldId="259"/>
-            <ac:spMk id="4" creationId="{00A9095F-CA3A-FAF2-D7B4-005589E106D5}"/>
+            <pc:sldMk cId="1688651266" sldId="263"/>
+            <ac:spMk id="4" creationId="{231F8F56-FF93-B428-6088-9DEAC89E5C04}"/>
           </ac:spMkLst>
         </pc:spChg>
-        <pc:spChg chg="add del mod ord">
-          <ac:chgData name="Elliot Mai" userId="1c49b37007f9488b" providerId="LiveId" clId="{3EDB10E2-DA7D-4765-B207-53B47556FA45}" dt="2026-03-05T02:12:52.075" v="187" actId="700"/>
+      </pc:sldChg>
+    </pc:docChg>
+  </pc:docChgLst>
+  <pc:docChgLst>
+    <pc:chgData name="Guest User" providerId="Windows Live" clId="Web-{4F8CDE41-BC36-BDCF-6662-9346E004DDBF}"/>
+    <pc:docChg chg="addSld modSld">
+      <pc:chgData name="Guest User" userId="" providerId="Windows Live" clId="Web-{4F8CDE41-BC36-BDCF-6662-9346E004DDBF}" dt="2026-03-07T20:38:14.909" v="5" actId="20577"/>
+      <pc:docMkLst>
+        <pc:docMk/>
+      </pc:docMkLst>
+      <pc:sldChg chg="modSp add replId">
+        <pc:chgData name="Guest User" userId="" providerId="Windows Live" clId="Web-{4F8CDE41-BC36-BDCF-6662-9346E004DDBF}" dt="2026-03-07T20:38:14.909" v="5" actId="20577"/>
+        <pc:sldMkLst>
+          <pc:docMk/>
+          <pc:sldMk cId="3910318035" sldId="260"/>
+        </pc:sldMkLst>
+        <pc:spChg chg="mod">
+          <ac:chgData name="Guest User" userId="" providerId="Windows Live" clId="Web-{4F8CDE41-BC36-BDCF-6662-9346E004DDBF}" dt="2026-03-07T20:38:14.909" v="5" actId="20577"/>
           <ac:spMkLst>
             <pc:docMk/>
-            <pc:sldMk cId="3430437250" sldId="259"/>
-            <ac:spMk id="5" creationId="{32AB94CB-C802-7CF5-ACA6-1D2957740516}"/>
+            <pc:sldMk cId="3910318035" sldId="260"/>
+            <ac:spMk id="4" creationId="{5C94464B-3659-1D3E-E08B-F862EA7D786E}"/>
           </ac:spMkLst>
         </pc:spChg>
-        <pc:spChg chg="add del">
-          <ac:chgData name="Elliot Mai" userId="1c49b37007f9488b" providerId="LiveId" clId="{3EDB10E2-DA7D-4765-B207-53B47556FA45}" dt="2026-03-05T02:12:52.075" v="187" actId="700"/>
+      </pc:sldChg>
+    </pc:docChg>
+  </pc:docChgLst>
+  <pc:docChgLst>
+    <pc:chgData name="Guest User" providerId="Windows Live" clId="Web-{4B232746-762D-DE8C-7D01-26173855CD31}"/>
+    <pc:docChg chg="modSld">
+      <pc:chgData name="Guest User" userId="" providerId="Windows Live" clId="Web-{4B232746-762D-DE8C-7D01-26173855CD31}" dt="2026-03-07T20:59:10.562" v="275"/>
+      <pc:docMkLst>
+        <pc:docMk/>
+      </pc:docMkLst>
+      <pc:sldChg chg="addSp delSp modSp">
+        <pc:chgData name="Guest User" userId="" providerId="Windows Live" clId="Web-{4B232746-762D-DE8C-7D01-26173855CD31}" dt="2026-03-07T20:59:10.562" v="275"/>
+        <pc:sldMkLst>
+          <pc:docMk/>
+          <pc:sldMk cId="1823981096" sldId="258"/>
+        </pc:sldMkLst>
+        <pc:spChg chg="mod">
+          <ac:chgData name="Guest User" userId="" providerId="Windows Live" clId="Web-{4B232746-762D-DE8C-7D01-26173855CD31}" dt="2026-03-07T20:57:40.764" v="271" actId="14100"/>
           <ac:spMkLst>
             <pc:docMk/>
-            <pc:sldMk cId="3430437250" sldId="259"/>
-            <ac:spMk id="8" creationId="{2B6262B6-AF10-743A-22CB-6F05A0AF501A}"/>
+            <pc:sldMk cId="1823981096" sldId="258"/>
+            <ac:spMk id="6" creationId="{72B352EF-DE90-69E1-4DC1-284688B26B2E}"/>
           </ac:spMkLst>
         </pc:spChg>
-        <pc:spChg chg="add del">
-          <ac:chgData name="Elliot Mai" userId="1c49b37007f9488b" providerId="LiveId" clId="{3EDB10E2-DA7D-4765-B207-53B47556FA45}" dt="2026-03-05T02:12:52.075" v="187" actId="700"/>
-          <ac:spMkLst>
+        <pc:graphicFrameChg chg="add mod modGraphic">
+          <ac:chgData name="Guest User" userId="" providerId="Windows Live" clId="Web-{4B232746-762D-DE8C-7D01-26173855CD31}" dt="2026-03-07T20:59:10.562" v="275"/>
+          <ac:graphicFrameMkLst>
             <pc:docMk/>
-            <pc:sldMk cId="3430437250" sldId="259"/>
-            <ac:spMk id="10" creationId="{7ED294A3-9F73-74AC-1E88-8DD720DC895B}"/>
-          </ac:spMkLst>
-        </pc:spChg>
-        <pc:spChg chg="add del">
-          <ac:chgData name="Elliot Mai" userId="1c49b37007f9488b" providerId="LiveId" clId="{3EDB10E2-DA7D-4765-B207-53B47556FA45}" dt="2026-03-05T02:12:52.075" v="187" actId="700"/>
-          <ac:spMkLst>
+            <pc:sldMk cId="1823981096" sldId="258"/>
+            <ac:graphicFrameMk id="2" creationId="{97FBE674-9B9D-3B6A-DD4F-0E9E0EB4B527}"/>
+          </ac:graphicFrameMkLst>
+        </pc:graphicFrameChg>
+        <pc:graphicFrameChg chg="add del mod">
+          <ac:chgData name="Guest User" userId="" providerId="Windows Live" clId="Web-{4B232746-762D-DE8C-7D01-26173855CD31}" dt="2026-03-07T20:53:35.870" v="18"/>
+          <ac:graphicFrameMkLst>
             <pc:docMk/>
-            <pc:sldMk cId="3430437250" sldId="259"/>
-            <ac:spMk id="12" creationId="{BE7F61B9-C718-4E50-C6D8-B856394D4549}"/>
-          </ac:spMkLst>
-        </pc:spChg>
-        <pc:spChg chg="add del">
-          <ac:chgData name="Elliot Mai" userId="1c49b37007f9488b" providerId="LiveId" clId="{3EDB10E2-DA7D-4765-B207-53B47556FA45}" dt="2026-03-05T02:12:52.075" v="187" actId="700"/>
-          <ac:spMkLst>
+            <pc:sldMk cId="1823981096" sldId="258"/>
+            <ac:graphicFrameMk id="5" creationId="{8502DC54-70B1-7C73-47C0-2B1D959F9079}"/>
+          </ac:graphicFrameMkLst>
+        </pc:graphicFrameChg>
+        <pc:picChg chg="add mod">
+          <ac:chgData name="Guest User" userId="" providerId="Windows Live" clId="Web-{4B232746-762D-DE8C-7D01-26173855CD31}" dt="2026-03-07T20:57:57.186" v="273" actId="1076"/>
+          <ac:picMkLst>
             <pc:docMk/>
-            <pc:sldMk cId="3430437250" sldId="259"/>
-            <ac:spMk id="14" creationId="{62AE639E-5ECF-A047-327C-C073992EE0B4}"/>
-          </ac:spMkLst>
-        </pc:spChg>
-        <pc:spChg chg="add del">
-          <ac:chgData name="Elliot Mai" userId="1c49b37007f9488b" providerId="LiveId" clId="{3EDB10E2-DA7D-4765-B207-53B47556FA45}" dt="2026-03-05T02:12:52.075" v="187" actId="700"/>
-          <ac:spMkLst>
+            <pc:sldMk cId="1823981096" sldId="258"/>
+            <ac:picMk id="7" creationId="{67065725-5FD7-1C36-723A-B649980F626C}"/>
+          </ac:picMkLst>
+        </pc:picChg>
+        <pc:picChg chg="add mod">
+          <ac:chgData name="Guest User" userId="" providerId="Windows Live" clId="Web-{4B232746-762D-DE8C-7D01-26173855CD31}" dt="2026-03-07T20:58:03.342" v="274" actId="1076"/>
+          <ac:picMkLst>
             <pc:docMk/>
-            <pc:sldMk cId="3430437250" sldId="259"/>
-            <ac:spMk id="16" creationId="{23ACA4C4-DDC6-7480-6802-413C8EB3E2F4}"/>
-          </ac:spMkLst>
-        </pc:spChg>
+            <pc:sldMk cId="1823981096" sldId="258"/>
+            <ac:picMk id="8" creationId="{56482691-3CC1-39DA-E022-0F9496855775}"/>
+          </ac:picMkLst>
+        </pc:picChg>
       </pc:sldChg>
     </pc:docChg>
   </pc:docChgLst>
@@ -836,7 +672,7 @@
           <a:p>
             <a:fld id="{C23B7E13-4BB4-4C47-BBB0-099F19561DE7}" type="datetimeFigureOut">
               <a:rPr lang="en-150" smtClean="0"/>
-              <a:t>04/03/2026</a:t>
+              <a:t>07/03/2026</a:t>
             </a:fld>
             <a:endParaRPr lang="en-150"/>
           </a:p>
@@ -1036,7 +872,7 @@
           <a:p>
             <a:fld id="{C23B7E13-4BB4-4C47-BBB0-099F19561DE7}" type="datetimeFigureOut">
               <a:rPr lang="en-150" smtClean="0"/>
-              <a:t>04/03/2026</a:t>
+              <a:t>07/03/2026</a:t>
             </a:fld>
             <a:endParaRPr lang="en-150"/>
           </a:p>
@@ -1246,7 +1082,7 @@
           <a:p>
             <a:fld id="{C23B7E13-4BB4-4C47-BBB0-099F19561DE7}" type="datetimeFigureOut">
               <a:rPr lang="en-150" smtClean="0"/>
-              <a:t>04/03/2026</a:t>
+              <a:t>07/03/2026</a:t>
             </a:fld>
             <a:endParaRPr lang="en-150"/>
           </a:p>
@@ -1446,7 +1282,7 @@
           <a:p>
             <a:fld id="{C23B7E13-4BB4-4C47-BBB0-099F19561DE7}" type="datetimeFigureOut">
               <a:rPr lang="en-150" smtClean="0"/>
-              <a:t>04/03/2026</a:t>
+              <a:t>07/03/2026</a:t>
             </a:fld>
             <a:endParaRPr lang="en-150"/>
           </a:p>
@@ -1722,7 +1558,7 @@
           <a:p>
             <a:fld id="{C23B7E13-4BB4-4C47-BBB0-099F19561DE7}" type="datetimeFigureOut">
               <a:rPr lang="en-150" smtClean="0"/>
-              <a:t>04/03/2026</a:t>
+              <a:t>07/03/2026</a:t>
             </a:fld>
             <a:endParaRPr lang="en-150"/>
           </a:p>
@@ -1990,7 +1826,7 @@
           <a:p>
             <a:fld id="{C23B7E13-4BB4-4C47-BBB0-099F19561DE7}" type="datetimeFigureOut">
               <a:rPr lang="en-150" smtClean="0"/>
-              <a:t>04/03/2026</a:t>
+              <a:t>07/03/2026</a:t>
             </a:fld>
             <a:endParaRPr lang="en-150"/>
           </a:p>
@@ -2405,7 +2241,7 @@
           <a:p>
             <a:fld id="{C23B7E13-4BB4-4C47-BBB0-099F19561DE7}" type="datetimeFigureOut">
               <a:rPr lang="en-150" smtClean="0"/>
-              <a:t>04/03/2026</a:t>
+              <a:t>07/03/2026</a:t>
             </a:fld>
             <a:endParaRPr lang="en-150"/>
           </a:p>
@@ -2547,7 +2383,7 @@
           <a:p>
             <a:fld id="{C23B7E13-4BB4-4C47-BBB0-099F19561DE7}" type="datetimeFigureOut">
               <a:rPr lang="en-150" smtClean="0"/>
-              <a:t>04/03/2026</a:t>
+              <a:t>07/03/2026</a:t>
             </a:fld>
             <a:endParaRPr lang="en-150"/>
           </a:p>
@@ -2660,7 +2496,7 @@
           <a:p>
             <a:fld id="{C23B7E13-4BB4-4C47-BBB0-099F19561DE7}" type="datetimeFigureOut">
               <a:rPr lang="en-150" smtClean="0"/>
-              <a:t>04/03/2026</a:t>
+              <a:t>07/03/2026</a:t>
             </a:fld>
             <a:endParaRPr lang="en-150"/>
           </a:p>
@@ -2973,7 +2809,7 @@
           <a:p>
             <a:fld id="{C23B7E13-4BB4-4C47-BBB0-099F19561DE7}" type="datetimeFigureOut">
               <a:rPr lang="en-150" smtClean="0"/>
-              <a:t>04/03/2026</a:t>
+              <a:t>07/03/2026</a:t>
             </a:fld>
             <a:endParaRPr lang="en-150"/>
           </a:p>
@@ -3262,7 +3098,7 @@
           <a:p>
             <a:fld id="{C23B7E13-4BB4-4C47-BBB0-099F19561DE7}" type="datetimeFigureOut">
               <a:rPr lang="en-150" smtClean="0"/>
-              <a:t>04/03/2026</a:t>
+              <a:t>07/03/2026</a:t>
             </a:fld>
             <a:endParaRPr lang="en-150"/>
           </a:p>
@@ -3505,7 +3341,7 @@
           <a:p>
             <a:fld id="{C23B7E13-4BB4-4C47-BBB0-099F19561DE7}" type="datetimeFigureOut">
               <a:rPr lang="en-150" smtClean="0"/>
-              <a:t>04/03/2026</a:t>
+              <a:t>07/03/2026</a:t>
             </a:fld>
             <a:endParaRPr lang="en-150"/>
           </a:p>
@@ -4446,7 +4282,7 @@
           <a:lstStyle/>
           <a:p>
             <a:pPr algn="ctr"/>
-            <a:endParaRPr lang="en-US" dirty="0"/>
+            <a:endParaRPr lang="en-US"/>
           </a:p>
         </p:txBody>
       </p:sp>
@@ -4525,18 +4361,18 @@
           <a:p>
             <a:pPr algn="l"/>
             <a:r>
-              <a:rPr lang="en-US" dirty="0"/>
+              <a:rPr lang="en-US"/>
               <a:t>Mai, Elliot | Robinson, </a:t>
             </a:r>
             <a:r>
-              <a:rPr lang="en-US" dirty="0" err="1"/>
+              <a:rPr lang="en-US" err="1"/>
               <a:t>Cj</a:t>
             </a:r>
             <a:r>
-              <a:rPr lang="en-US" dirty="0"/>
+              <a:rPr lang="en-US"/>
               <a:t> | Samos, Adrienne | Turner, Gerald | Vega, Israel</a:t>
             </a:r>
-            <a:endParaRPr lang="en-150" dirty="0"/>
+            <a:endParaRPr lang="en-150"/>
           </a:p>
         </p:txBody>
       </p:sp>
@@ -5166,19 +5002,19 @@
           <a:lstStyle/>
           <a:p>
             <a:r>
-              <a:rPr lang="en-US" sz="2000" dirty="0"/>
+              <a:rPr lang="en-US" sz="2000"/>
               <a:t>Description</a:t>
             </a:r>
           </a:p>
           <a:p>
-            <a:endParaRPr lang="en-US" sz="2000" dirty="0"/>
-          </a:p>
-          <a:p>
-            <a:r>
-              <a:rPr lang="en-US" sz="2000" dirty="0"/>
+            <a:endParaRPr lang="en-US" sz="2000"/>
+          </a:p>
+          <a:p>
+            <a:r>
+              <a:rPr lang="en-US" sz="2000"/>
               <a:t>Results</a:t>
             </a:r>
-            <a:endParaRPr lang="en-150" sz="2000" dirty="0"/>
+            <a:endParaRPr lang="en-150" sz="2000"/>
           </a:p>
         </p:txBody>
       </p:sp>
@@ -5722,7 +5558,7 @@
                   <a:srgbClr val="FFFFFF"/>
                 </a:solidFill>
               </a:rPr>
-              <a:t>Variation [#]: [name]</a:t>
+              <a:t>Variation 1: Adrienne Samos</a:t>
             </a:r>
             <a:endParaRPr lang="en-150" sz="4000">
               <a:solidFill>
@@ -5750,8 +5586,8 @@
         </p:nvSpPr>
         <p:spPr>
           <a:xfrm>
-            <a:off x="1371599" y="2318197"/>
-            <a:ext cx="9724031" cy="3683358"/>
+            <a:off x="149188" y="1598434"/>
+            <a:ext cx="4232975" cy="4965828"/>
           </a:xfrm>
         </p:spPr>
         <p:txBody>
@@ -5761,35 +5597,483 @@
           <a:lstStyle/>
           <a:p>
             <a:r>
+              <a:rPr lang="en-US" sz="2000" b="1"/>
+              <a:t>Parameters Changed: </a:t>
+            </a:r>
+            <a:r>
               <a:rPr lang="en-US" sz="2000"/>
-              <a:t>Parameters Changed:</a:t>
-            </a:r>
-          </a:p>
-          <a:p>
-            <a:pPr marL="285750" indent="-285750">
-              <a:buFont typeface="Arial" panose="020B0604020202020204" pitchFamily="34" charset="0"/>
-              <a:buChar char="•"/>
-            </a:pPr>
-            <a:endParaRPr lang="en-US" sz="2000"/>
-          </a:p>
-          <a:p>
+              <a:t>Batch Size increased from 32 (baseline) to 64</a:t>
+            </a:r>
+          </a:p>
+          <a:p>
+            <a:r>
+              <a:rPr lang="en-US" sz="2000" b="1"/>
+              <a:t>Hypothesis: </a:t>
+            </a:r>
             <a:r>
               <a:rPr lang="en-US" sz="2000"/>
-              <a:t>Hypothesis:</a:t>
-            </a:r>
-          </a:p>
-          <a:p>
-            <a:endParaRPr lang="en-US" sz="2000"/>
-          </a:p>
-          <a:p>
+              <a:t>Increasing the batch size should make training faster, but accuracy may decrease slightly due to less frequent updates.</a:t>
+            </a:r>
+            <a:endParaRPr lang="en-US"/>
+          </a:p>
+          <a:p>
+            <a:r>
+              <a:rPr lang="en-US" sz="2000" b="1"/>
+              <a:t>Results: </a:t>
+            </a:r>
             <a:r>
               <a:rPr lang="en-US" sz="2000"/>
-              <a:t>Results:</a:t>
-            </a:r>
-            <a:endParaRPr lang="en-150" sz="2000"/>
-          </a:p>
-        </p:txBody>
-      </p:sp>
+              <a:t>Hypothesis is correct. The increase in batch size made training faster by 29% with a small 0.23% accuracy drop.</a:t>
+            </a:r>
+            <a:endParaRPr lang="en-US"/>
+          </a:p>
+        </p:txBody>
+      </p:sp>
+      <p:graphicFrame>
+        <p:nvGraphicFramePr>
+          <p:cNvPr id="2" name="Table 1">
+            <a:extLst>
+              <a:ext uri="{FF2B5EF4-FFF2-40B4-BE49-F238E27FC236}">
+                <a16:creationId xmlns:a16="http://schemas.microsoft.com/office/drawing/2014/main" id="{97FBE674-9B9D-3B6A-DD4F-0E9E0EB4B527}"/>
+              </a:ext>
+            </a:extLst>
+          </p:cNvPr>
+          <p:cNvGraphicFramePr>
+            <a:graphicFrameLocks noGrp="1"/>
+          </p:cNvGraphicFramePr>
+          <p:nvPr>
+            <p:extLst>
+              <p:ext uri="{D42A27DB-BD31-4B8C-83A1-F6EECF244321}">
+                <p14:modId xmlns:p14="http://schemas.microsoft.com/office/powerpoint/2010/main" val="2978902649"/>
+              </p:ext>
+            </p:extLst>
+          </p:nvPr>
+        </p:nvGraphicFramePr>
+        <p:xfrm>
+          <a:off x="4489938" y="2039815"/>
+          <a:ext cx="7309833" cy="2021840"/>
+        </p:xfrm>
+        <a:graphic>
+          <a:graphicData uri="http://schemas.openxmlformats.org/drawingml/2006/table">
+            <a:tbl>
+              <a:tblPr firstRow="1" bandRow="1">
+                <a:tableStyleId>{5C22544A-7EE6-4342-B048-85BDC9FD1C3A}</a:tableStyleId>
+              </a:tblPr>
+              <a:tblGrid>
+                <a:gridCol w="1719122">
+                  <a:extLst>
+                    <a:ext uri="{9D8B030D-6E8A-4147-A177-3AD203B41FA5}">
+                      <a16:colId xmlns:a16="http://schemas.microsoft.com/office/drawing/2014/main" val="2586573604"/>
+                    </a:ext>
+                  </a:extLst>
+                </a:gridCol>
+                <a:gridCol w="1786802">
+                  <a:extLst>
+                    <a:ext uri="{9D8B030D-6E8A-4147-A177-3AD203B41FA5}">
+                      <a16:colId xmlns:a16="http://schemas.microsoft.com/office/drawing/2014/main" val="2458279350"/>
+                    </a:ext>
+                  </a:extLst>
+                </a:gridCol>
+                <a:gridCol w="1746193">
+                  <a:extLst>
+                    <a:ext uri="{9D8B030D-6E8A-4147-A177-3AD203B41FA5}">
+                      <a16:colId xmlns:a16="http://schemas.microsoft.com/office/drawing/2014/main" val="3364385815"/>
+                    </a:ext>
+                  </a:extLst>
+                </a:gridCol>
+                <a:gridCol w="2057716">
+                  <a:extLst>
+                    <a:ext uri="{9D8B030D-6E8A-4147-A177-3AD203B41FA5}">
+                      <a16:colId xmlns:a16="http://schemas.microsoft.com/office/drawing/2014/main" val="1940697532"/>
+                    </a:ext>
+                  </a:extLst>
+                </a:gridCol>
+              </a:tblGrid>
+              <a:tr h="370840">
+                <a:tc>
+                  <a:txBody>
+                    <a:bodyPr/>
+                    <a:lstStyle/>
+                    <a:p>
+                      <a:r>
+                        <a:rPr lang="en-US"/>
+                        <a:t>Metric</a:t>
+                      </a:r>
+                    </a:p>
+                  </a:txBody>
+                  <a:tcPr/>
+                </a:tc>
+                <a:tc>
+                  <a:txBody>
+                    <a:bodyPr/>
+                    <a:lstStyle/>
+                    <a:p>
+                      <a:r>
+                        <a:rPr lang="en-US"/>
+                        <a:t>Baseline</a:t>
+                      </a:r>
+                      <a:br>
+                        <a:rPr lang="en-US"/>
+                      </a:br>
+                      <a:r>
+                        <a:rPr lang="en-US"/>
+                        <a:t>(batch size 32)</a:t>
+                      </a:r>
+                    </a:p>
+                  </a:txBody>
+                  <a:tcPr/>
+                </a:tc>
+                <a:tc>
+                  <a:txBody>
+                    <a:bodyPr/>
+                    <a:lstStyle/>
+                    <a:p>
+                      <a:r>
+                        <a:rPr lang="en-US"/>
+                        <a:t>Variation</a:t>
+                      </a:r>
+                      <a:br>
+                        <a:rPr lang="en-US"/>
+                      </a:br>
+                      <a:r>
+                        <a:rPr lang="en-US"/>
+                        <a:t>(batch size 64)</a:t>
+                      </a:r>
+                    </a:p>
+                  </a:txBody>
+                  <a:tcPr/>
+                </a:tc>
+                <a:tc>
+                  <a:txBody>
+                    <a:bodyPr/>
+                    <a:lstStyle/>
+                    <a:p>
+                      <a:r>
+                        <a:rPr lang="en-US"/>
+                        <a:t>Change</a:t>
+                      </a:r>
+                    </a:p>
+                  </a:txBody>
+                  <a:tcPr/>
+                </a:tc>
+                <a:extLst>
+                  <a:ext uri="{0D108BD9-81ED-4DB2-BD59-A6C34878D82A}">
+                    <a16:rowId xmlns:a16="http://schemas.microsoft.com/office/drawing/2014/main" val="3037472087"/>
+                  </a:ext>
+                </a:extLst>
+              </a:tr>
+              <a:tr h="370840">
+                <a:tc>
+                  <a:txBody>
+                    <a:bodyPr/>
+                    <a:lstStyle/>
+                    <a:p>
+                      <a:r>
+                        <a:rPr lang="en-US"/>
+                        <a:t>Test Accuracy</a:t>
+                      </a:r>
+                    </a:p>
+                  </a:txBody>
+                  <a:tcPr/>
+                </a:tc>
+                <a:tc>
+                  <a:txBody>
+                    <a:bodyPr/>
+                    <a:lstStyle/>
+                    <a:p>
+                      <a:r>
+                        <a:rPr lang="en-US"/>
+                        <a:t>98.70%</a:t>
+                      </a:r>
+                    </a:p>
+                  </a:txBody>
+                  <a:tcPr/>
+                </a:tc>
+                <a:tc>
+                  <a:txBody>
+                    <a:bodyPr/>
+                    <a:lstStyle/>
+                    <a:p>
+                      <a:r>
+                        <a:rPr lang="en-US"/>
+                        <a:t>98.47%</a:t>
+                      </a:r>
+                    </a:p>
+                  </a:txBody>
+                  <a:tcPr/>
+                </a:tc>
+                <a:tc>
+                  <a:txBody>
+                    <a:bodyPr/>
+                    <a:lstStyle/>
+                    <a:p>
+                      <a:pPr lvl="0" algn="l">
+                        <a:lnSpc>
+                          <a:spcPct val="100000"/>
+                        </a:lnSpc>
+                        <a:spcBef>
+                          <a:spcPts val="0"/>
+                        </a:spcBef>
+                        <a:spcAft>
+                          <a:spcPts val="0"/>
+                        </a:spcAft>
+                        <a:buNone/>
+                      </a:pPr>
+                      <a:r>
+                        <a:rPr lang="en-US" sz="1800" b="0" i="0" u="none" strike="noStrike" noProof="0">
+                          <a:solidFill>
+                            <a:srgbClr val="000000"/>
+                          </a:solidFill>
+                          <a:latin typeface="Aptos"/>
+                        </a:rPr>
+                        <a:t>↓ 0.23%</a:t>
+                      </a:r>
+                      <a:endParaRPr lang="en-US" sz="1800"/>
+                    </a:p>
+                  </a:txBody>
+                  <a:tcPr/>
+                </a:tc>
+                <a:extLst>
+                  <a:ext uri="{0D108BD9-81ED-4DB2-BD59-A6C34878D82A}">
+                    <a16:rowId xmlns:a16="http://schemas.microsoft.com/office/drawing/2014/main" val="3529623298"/>
+                  </a:ext>
+                </a:extLst>
+              </a:tr>
+              <a:tr h="370840">
+                <a:tc>
+                  <a:txBody>
+                    <a:bodyPr/>
+                    <a:lstStyle/>
+                    <a:p>
+                      <a:r>
+                        <a:rPr lang="en-US"/>
+                        <a:t>Test Loss</a:t>
+                      </a:r>
+                    </a:p>
+                  </a:txBody>
+                  <a:tcPr/>
+                </a:tc>
+                <a:tc>
+                  <a:txBody>
+                    <a:bodyPr/>
+                    <a:lstStyle/>
+                    <a:p>
+                      <a:r>
+                        <a:rPr lang="en-US"/>
+                        <a:t>0.04499</a:t>
+                      </a:r>
+                    </a:p>
+                  </a:txBody>
+                  <a:tcPr/>
+                </a:tc>
+                <a:tc>
+                  <a:txBody>
+                    <a:bodyPr/>
+                    <a:lstStyle/>
+                    <a:p>
+                      <a:r>
+                        <a:rPr lang="en-US"/>
+                        <a:t>0.0465</a:t>
+                      </a:r>
+                    </a:p>
+                  </a:txBody>
+                  <a:tcPr/>
+                </a:tc>
+                <a:tc>
+                  <a:txBody>
+                    <a:bodyPr/>
+                    <a:lstStyle/>
+                    <a:p>
+                      <a:pPr lvl="0" algn="l">
+                        <a:lnSpc>
+                          <a:spcPct val="100000"/>
+                        </a:lnSpc>
+                        <a:spcBef>
+                          <a:spcPts val="0"/>
+                        </a:spcBef>
+                        <a:spcAft>
+                          <a:spcPts val="0"/>
+                        </a:spcAft>
+                        <a:buNone/>
+                      </a:pPr>
+                      <a:r>
+                        <a:rPr lang="en-US" sz="1800" b="0" i="0" u="none" strike="noStrike" noProof="0">
+                          <a:solidFill>
+                            <a:srgbClr val="000000"/>
+                          </a:solidFill>
+                          <a:latin typeface="Aptos"/>
+                        </a:rPr>
+                        <a:t>↑ 0.00151</a:t>
+                      </a:r>
+                      <a:endParaRPr lang="en-US" sz="1800"/>
+                    </a:p>
+                  </a:txBody>
+                  <a:tcPr/>
+                </a:tc>
+                <a:extLst>
+                  <a:ext uri="{0D108BD9-81ED-4DB2-BD59-A6C34878D82A}">
+                    <a16:rowId xmlns:a16="http://schemas.microsoft.com/office/drawing/2014/main" val="2569721203"/>
+                  </a:ext>
+                </a:extLst>
+              </a:tr>
+              <a:tr h="370840">
+                <a:tc>
+                  <a:txBody>
+                    <a:bodyPr/>
+                    <a:lstStyle/>
+                    <a:p>
+                      <a:r>
+                        <a:rPr lang="en-US"/>
+                        <a:t>Training Time</a:t>
+                      </a:r>
+                    </a:p>
+                  </a:txBody>
+                  <a:tcPr/>
+                </a:tc>
+                <a:tc>
+                  <a:txBody>
+                    <a:bodyPr/>
+                    <a:lstStyle/>
+                    <a:p>
+                      <a:r>
+                        <a:rPr lang="en-US"/>
+                        <a:t>54.80 seconds</a:t>
+                      </a:r>
+                    </a:p>
+                  </a:txBody>
+                  <a:tcPr/>
+                </a:tc>
+                <a:tc>
+                  <a:txBody>
+                    <a:bodyPr/>
+                    <a:lstStyle/>
+                    <a:p>
+                      <a:r>
+                        <a:rPr lang="en-US"/>
+                        <a:t>38.75 seconds</a:t>
+                      </a:r>
+                    </a:p>
+                  </a:txBody>
+                  <a:tcPr/>
+                </a:tc>
+                <a:tc>
+                  <a:txBody>
+                    <a:bodyPr/>
+                    <a:lstStyle/>
+                    <a:p>
+                      <a:pPr lvl="0" algn="l">
+                        <a:lnSpc>
+                          <a:spcPct val="100000"/>
+                        </a:lnSpc>
+                        <a:spcBef>
+                          <a:spcPts val="0"/>
+                        </a:spcBef>
+                        <a:spcAft>
+                          <a:spcPts val="0"/>
+                        </a:spcAft>
+                        <a:buNone/>
+                      </a:pPr>
+                      <a:r>
+                        <a:rPr lang="en-US" sz="1800" b="0" i="0" u="none" strike="noStrike" noProof="0">
+                          <a:solidFill>
+                            <a:srgbClr val="000000"/>
+                          </a:solidFill>
+                          <a:latin typeface="Aptos"/>
+                        </a:rPr>
+                        <a:t>↓ 16.05 seconds</a:t>
+                      </a:r>
+                      <a:br>
+                        <a:rPr lang="en-US" sz="1800" b="0" i="0" u="none" strike="noStrike" noProof="0">
+                          <a:solidFill>
+                            <a:srgbClr val="000000"/>
+                          </a:solidFill>
+                          <a:latin typeface="Aptos"/>
+                        </a:rPr>
+                      </a:br>
+                      <a:r>
+                        <a:rPr lang="en-US" sz="1800" b="0" i="0" u="none" strike="noStrike" noProof="0">
+                          <a:solidFill>
+                            <a:srgbClr val="000000"/>
+                          </a:solidFill>
+                          <a:latin typeface="Aptos"/>
+                        </a:rPr>
+                        <a:t>     (29% faster)</a:t>
+                      </a:r>
+                      <a:endParaRPr lang="en-US" sz="1800"/>
+                    </a:p>
+                  </a:txBody>
+                  <a:tcPr/>
+                </a:tc>
+                <a:extLst>
+                  <a:ext uri="{0D108BD9-81ED-4DB2-BD59-A6C34878D82A}">
+                    <a16:rowId xmlns:a16="http://schemas.microsoft.com/office/drawing/2014/main" val="1248109256"/>
+                  </a:ext>
+                </a:extLst>
+              </a:tr>
+            </a:tbl>
+          </a:graphicData>
+        </a:graphic>
+      </p:graphicFrame>
+      <p:pic>
+        <p:nvPicPr>
+          <p:cNvPr id="7" name="Picture 6" descr="A screenshot of a computer&#10;&#10;AI-generated content may be incorrect.">
+            <a:extLst>
+              <a:ext uri="{FF2B5EF4-FFF2-40B4-BE49-F238E27FC236}">
+                <a16:creationId xmlns:a16="http://schemas.microsoft.com/office/drawing/2014/main" id="{67065725-5FD7-1C36-723A-B649980F626C}"/>
+              </a:ext>
+            </a:extLst>
+          </p:cNvPr>
+          <p:cNvPicPr>
+            <a:picLocks noChangeAspect="1"/>
+          </p:cNvPicPr>
+          <p:nvPr/>
+        </p:nvPicPr>
+        <p:blipFill>
+          <a:blip r:embed="rId2"/>
+          <a:stretch>
+            <a:fillRect/>
+          </a:stretch>
+        </p:blipFill>
+        <p:spPr>
+          <a:xfrm>
+            <a:off x="4386996" y="4300171"/>
+            <a:ext cx="3898656" cy="1715966"/>
+          </a:xfrm>
+          <a:prstGeom prst="rect">
+            <a:avLst/>
+          </a:prstGeom>
+        </p:spPr>
+      </p:pic>
+      <p:pic>
+        <p:nvPicPr>
+          <p:cNvPr id="8" name="Picture 7" descr="A screenshot of a computer&#10;&#10;AI-generated content may be incorrect.">
+            <a:extLst>
+              <a:ext uri="{FF2B5EF4-FFF2-40B4-BE49-F238E27FC236}">
+                <a16:creationId xmlns:a16="http://schemas.microsoft.com/office/drawing/2014/main" id="{56482691-3CC1-39DA-E022-0F9496855775}"/>
+              </a:ext>
+            </a:extLst>
+          </p:cNvPr>
+          <p:cNvPicPr>
+            <a:picLocks noChangeAspect="1"/>
+          </p:cNvPicPr>
+          <p:nvPr/>
+        </p:nvPicPr>
+        <p:blipFill>
+          <a:blip r:embed="rId3"/>
+          <a:stretch>
+            <a:fillRect/>
+          </a:stretch>
+        </p:blipFill>
+        <p:spPr>
+          <a:xfrm>
+            <a:off x="8460032" y="4300171"/>
+            <a:ext cx="3407752" cy="1704243"/>
+          </a:xfrm>
+          <a:prstGeom prst="rect">
+            <a:avLst/>
+          </a:prstGeom>
+        </p:spPr>
+      </p:pic>
     </p:spTree>
     <p:extLst>
       <p:ext uri="{BB962C8B-B14F-4D97-AF65-F5344CB8AC3E}">
@@ -5816,7 +6100,13 @@
     </p:bg>
     <p:spTree>
       <p:nvGrpSpPr>
-        <p:cNvPr id="1" name=""/>
+        <p:cNvPr id="1" name="">
+          <a:extLst>
+            <a:ext uri="{FF2B5EF4-FFF2-40B4-BE49-F238E27FC236}">
+              <a16:creationId xmlns:a16="http://schemas.microsoft.com/office/drawing/2014/main" id="{5C577C50-6E7D-834F-DB71-614B1DA0C46A}"/>
+            </a:ext>
+          </a:extLst>
+        </p:cNvPr>
         <p:cNvGrpSpPr/>
         <p:nvPr/>
       </p:nvGrpSpPr>
@@ -5830,10 +6120,10 @@
       </p:grpSpPr>
       <p:sp useBgFill="1">
         <p:nvSpPr>
-          <p:cNvPr id="8" name="Rectangle 7">
-            <a:extLst>
-              <a:ext uri="{FF2B5EF4-FFF2-40B4-BE49-F238E27FC236}">
-                <a16:creationId xmlns:a16="http://schemas.microsoft.com/office/drawing/2014/main" id="{1B15ED52-F352-441B-82BF-E0EA34836D08}"/>
+          <p:cNvPr id="24" name="Rectangle 23">
+            <a:extLst>
+              <a:ext uri="{FF2B5EF4-FFF2-40B4-BE49-F238E27FC236}">
+                <a16:creationId xmlns:a16="http://schemas.microsoft.com/office/drawing/2014/main" id="{4A1E6E0C-24E7-D400-4437-9E7D28A7C06E}"/>
               </a:ext>
               <a:ext uri="{C183D7F6-B498-43B3-948B-1728B52AA6E4}">
                 <adec:decorative xmlns:adec="http://schemas.microsoft.com/office/drawing/2017/decorative" val="1"/>
@@ -5906,10 +6196,10 @@
       </p:sp>
       <p:sp>
         <p:nvSpPr>
-          <p:cNvPr id="10" name="Rectangle 9">
-            <a:extLst>
-              <a:ext uri="{FF2B5EF4-FFF2-40B4-BE49-F238E27FC236}">
-                <a16:creationId xmlns:a16="http://schemas.microsoft.com/office/drawing/2014/main" id="{3B2E3793-BFE6-45A2-9B7B-E18844431C99}"/>
+          <p:cNvPr id="26" name="Rectangle 25">
+            <a:extLst>
+              <a:ext uri="{FF2B5EF4-FFF2-40B4-BE49-F238E27FC236}">
+                <a16:creationId xmlns:a16="http://schemas.microsoft.com/office/drawing/2014/main" id="{4BDC98BA-11BB-F882-3DE2-BE7764DCE6E8}"/>
               </a:ext>
               <a:ext uri="{C183D7F6-B498-43B3-948B-1728B52AA6E4}">
                 <adec:decorative xmlns:adec="http://schemas.microsoft.com/office/drawing/2017/decorative" val="1"/>
@@ -5979,10 +6269,10 @@
       </p:sp>
       <p:sp>
         <p:nvSpPr>
-          <p:cNvPr id="12" name="Rectangle 11">
-            <a:extLst>
-              <a:ext uri="{FF2B5EF4-FFF2-40B4-BE49-F238E27FC236}">
-                <a16:creationId xmlns:a16="http://schemas.microsoft.com/office/drawing/2014/main" id="{BC4C4868-CB8F-4AF9-9CDB-8108F2C19B67}"/>
+          <p:cNvPr id="28" name="Rectangle 27">
+            <a:extLst>
+              <a:ext uri="{FF2B5EF4-FFF2-40B4-BE49-F238E27FC236}">
+                <a16:creationId xmlns:a16="http://schemas.microsoft.com/office/drawing/2014/main" id="{FD5EC7B8-C439-4F22-9C03-C8E8FD185235}"/>
               </a:ext>
               <a:ext uri="{C183D7F6-B498-43B3-948B-1728B52AA6E4}">
                 <adec:decorative xmlns:adec="http://schemas.microsoft.com/office/drawing/2017/decorative" val="1"/>
@@ -6055,10 +6345,10 @@
       </p:sp>
       <p:sp>
         <p:nvSpPr>
-          <p:cNvPr id="14" name="Rectangle 13">
-            <a:extLst>
-              <a:ext uri="{FF2B5EF4-FFF2-40B4-BE49-F238E27FC236}">
-                <a16:creationId xmlns:a16="http://schemas.microsoft.com/office/drawing/2014/main" id="{375E0459-6403-40CD-989D-56A4407CA12E}"/>
+          <p:cNvPr id="30" name="Rectangle 29">
+            <a:extLst>
+              <a:ext uri="{FF2B5EF4-FFF2-40B4-BE49-F238E27FC236}">
+                <a16:creationId xmlns:a16="http://schemas.microsoft.com/office/drawing/2014/main" id="{8FE91515-1725-255A-184C-F97061B77D1E}"/>
               </a:ext>
               <a:ext uri="{C183D7F6-B498-43B3-948B-1728B52AA6E4}">
                 <adec:decorative xmlns:adec="http://schemas.microsoft.com/office/drawing/2017/decorative" val="1"/>
@@ -6130,10 +6420,10 @@
       </p:sp>
       <p:sp>
         <p:nvSpPr>
-          <p:cNvPr id="16" name="Rectangle 15">
-            <a:extLst>
-              <a:ext uri="{FF2B5EF4-FFF2-40B4-BE49-F238E27FC236}">
-                <a16:creationId xmlns:a16="http://schemas.microsoft.com/office/drawing/2014/main" id="{53E5B1A8-3AC9-4BD1-9BBC-78CA94F2D1BA}"/>
+          <p:cNvPr id="32" name="Rectangle 31">
+            <a:extLst>
+              <a:ext uri="{FF2B5EF4-FFF2-40B4-BE49-F238E27FC236}">
+                <a16:creationId xmlns:a16="http://schemas.microsoft.com/office/drawing/2014/main" id="{C1F23D83-D012-20B4-8B2F-475E6B8A3B56}"/>
               </a:ext>
               <a:ext uri="{C183D7F6-B498-43B3-948B-1728B52AA6E4}">
                 <adec:decorative xmlns:adec="http://schemas.microsoft.com/office/drawing/2017/decorative" val="1"/>
@@ -6206,10 +6496,10 @@
       </p:sp>
       <p:sp>
         <p:nvSpPr>
-          <p:cNvPr id="2" name="Title 1">
-            <a:extLst>
-              <a:ext uri="{FF2B5EF4-FFF2-40B4-BE49-F238E27FC236}">
-                <a16:creationId xmlns:a16="http://schemas.microsoft.com/office/drawing/2014/main" id="{BAEBB9E1-117A-0077-012B-4FE1BA4DA1D1}"/>
+          <p:cNvPr id="4" name="Title 3">
+            <a:extLst>
+              <a:ext uri="{FF2B5EF4-FFF2-40B4-BE49-F238E27FC236}">
+                <a16:creationId xmlns:a16="http://schemas.microsoft.com/office/drawing/2014/main" id="{BD8DAD57-5C6E-5384-181C-936F2C3C9A25}"/>
               </a:ext>
             </a:extLst>
           </p:cNvPr>
@@ -6238,7 +6528,23 @@
                   <a:srgbClr val="FFFFFF"/>
                 </a:solidFill>
               </a:rPr>
-              <a:t>Summary</a:t>
+              <a:t>Variation 2: </a:t>
+            </a:r>
+            <a:r>
+              <a:rPr lang="en-US" sz="4000" err="1">
+                <a:solidFill>
+                  <a:srgbClr val="FFFFFF"/>
+                </a:solidFill>
+              </a:rPr>
+              <a:t>Conregan</a:t>
+            </a:r>
+            <a:r>
+              <a:rPr lang="en-US" sz="4000">
+                <a:solidFill>
+                  <a:srgbClr val="FFFFFF"/>
+                </a:solidFill>
+              </a:rPr>
+              <a:t> Robinson</a:t>
             </a:r>
             <a:endParaRPr lang="en-150" sz="4000">
               <a:solidFill>
@@ -6250,10 +6556,10 @@
       </p:sp>
       <p:sp>
         <p:nvSpPr>
-          <p:cNvPr id="3" name="Content Placeholder 2">
-            <a:extLst>
-              <a:ext uri="{FF2B5EF4-FFF2-40B4-BE49-F238E27FC236}">
-                <a16:creationId xmlns:a16="http://schemas.microsoft.com/office/drawing/2014/main" id="{9B7AD769-5324-7BFE-0BD3-4AFF7CF57314}"/>
+          <p:cNvPr id="6" name="Text Placeholder 5">
+            <a:extLst>
+              <a:ext uri="{FF2B5EF4-FFF2-40B4-BE49-F238E27FC236}">
+                <a16:creationId xmlns:a16="http://schemas.microsoft.com/office/drawing/2014/main" id="{91527E4D-03C7-B8BA-C39D-40937737458E}"/>
               </a:ext>
             </a:extLst>
           </p:cNvPr>
@@ -6276,7 +6582,2105 @@
           </a:bodyPr>
           <a:lstStyle/>
           <a:p>
-            <a:endParaRPr lang="en-150" sz="2000" dirty="0"/>
+            <a:r>
+              <a:rPr lang="en-US" sz="2000"/>
+              <a:t>Parameters Changed:</a:t>
+            </a:r>
+          </a:p>
+          <a:p>
+            <a:pPr marL="285750" indent="-285750">
+              <a:buFont typeface="Arial" panose="020B0604020202020204" pitchFamily="34" charset="0"/>
+              <a:buChar char="•"/>
+            </a:pPr>
+            <a:endParaRPr lang="en-US" sz="2000"/>
+          </a:p>
+          <a:p>
+            <a:r>
+              <a:rPr lang="en-US" sz="2000"/>
+              <a:t>Hypothesis:</a:t>
+            </a:r>
+          </a:p>
+          <a:p>
+            <a:endParaRPr lang="en-US" sz="2000"/>
+          </a:p>
+          <a:p>
+            <a:r>
+              <a:rPr lang="en-US" sz="2000"/>
+              <a:t>Results:</a:t>
+            </a:r>
+            <a:endParaRPr lang="en-150" sz="2000"/>
+          </a:p>
+        </p:txBody>
+      </p:sp>
+    </p:spTree>
+    <p:extLst>
+      <p:ext uri="{BB962C8B-B14F-4D97-AF65-F5344CB8AC3E}">
+        <p14:creationId xmlns:p14="http://schemas.microsoft.com/office/powerpoint/2010/main" val="1049300616"/>
+      </p:ext>
+    </p:extLst>
+  </p:cSld>
+  <p:clrMapOvr>
+    <a:masterClrMapping/>
+  </p:clrMapOvr>
+</p:sld>
+</file>
+
+<file path=ppt/slides/slide5.xml><?xml version="1.0" encoding="utf-8"?>
+<p:sld xmlns:a="http://schemas.openxmlformats.org/drawingml/2006/main" xmlns:r="http://schemas.openxmlformats.org/officeDocument/2006/relationships" xmlns:p="http://schemas.openxmlformats.org/presentationml/2006/main">
+  <p:cSld>
+    <p:bg>
+      <p:bgPr>
+        <a:solidFill>
+          <a:schemeClr val="bg1"/>
+        </a:solidFill>
+        <a:effectLst/>
+      </p:bgPr>
+    </p:bg>
+    <p:spTree>
+      <p:nvGrpSpPr>
+        <p:cNvPr id="1" name="">
+          <a:extLst>
+            <a:ext uri="{FF2B5EF4-FFF2-40B4-BE49-F238E27FC236}">
+              <a16:creationId xmlns:a16="http://schemas.microsoft.com/office/drawing/2014/main" id="{00C59B27-E828-5DA8-8A98-1414DDE9308B}"/>
+            </a:ext>
+          </a:extLst>
+        </p:cNvPr>
+        <p:cNvGrpSpPr/>
+        <p:nvPr/>
+      </p:nvGrpSpPr>
+      <p:grpSpPr>
+        <a:xfrm>
+          <a:off x="0" y="0"/>
+          <a:ext cx="0" cy="0"/>
+          <a:chOff x="0" y="0"/>
+          <a:chExt cx="0" cy="0"/>
+        </a:xfrm>
+      </p:grpSpPr>
+      <p:sp useBgFill="1">
+        <p:nvSpPr>
+          <p:cNvPr id="24" name="Rectangle 23">
+            <a:extLst>
+              <a:ext uri="{FF2B5EF4-FFF2-40B4-BE49-F238E27FC236}">
+                <a16:creationId xmlns:a16="http://schemas.microsoft.com/office/drawing/2014/main" id="{E514315A-5A24-2A37-FFC0-1543DAA58114}"/>
+              </a:ext>
+              <a:ext uri="{C183D7F6-B498-43B3-948B-1728B52AA6E4}">
+                <adec:decorative xmlns:adec="http://schemas.microsoft.com/office/drawing/2017/decorative" val="1"/>
+              </a:ext>
+            </a:extLst>
+          </p:cNvPr>
+          <p:cNvSpPr>
+            <a:spLocks noGrp="1" noRot="1" noChangeAspect="1" noMove="1" noResize="1" noEditPoints="1" noAdjustHandles="1" noChangeArrowheads="1" noChangeShapeType="1" noTextEdit="1"/>
+          </p:cNvSpPr>
+          <p:nvPr>
+            <p:extLst>
+              <p:ext uri="{386F3935-93C4-4BCD-93E2-E3B085C9AB24}">
+                <p16:designElem xmlns:p16="http://schemas.microsoft.com/office/powerpoint/2015/main" val="1"/>
+              </p:ext>
+            </p:extLst>
+          </p:nvPr>
+        </p:nvSpPr>
+        <p:spPr>
+          <a:xfrm>
+            <a:off x="0" y="0"/>
+            <a:ext cx="12192000" cy="6858000"/>
+          </a:xfrm>
+          <a:prstGeom prst="rect">
+            <a:avLst/>
+          </a:prstGeom>
+          <a:ln w="12700" cap="flat" cmpd="sng" algn="ctr">
+            <a:noFill/>
+            <a:prstDash val="solid"/>
+            <a:miter lim="800000"/>
+          </a:ln>
+          <a:effectLst/>
+          <a:extLst>
+            <a:ext uri="{91240B29-F687-4F45-9708-019B960494DF}">
+              <a14:hiddenLine xmlns:a14="http://schemas.microsoft.com/office/drawing/2010/main" w="12700" cap="flat" cmpd="sng" algn="ctr">
+                <a:solidFill>
+                  <a:schemeClr val="accent1">
+                    <a:shade val="50000"/>
+                  </a:schemeClr>
+                </a:solidFill>
+                <a:prstDash val="solid"/>
+                <a:miter lim="800000"/>
+              </a14:hiddenLine>
+            </a:ext>
+          </a:extLst>
+        </p:spPr>
+        <p:style>
+          <a:lnRef idx="2">
+            <a:schemeClr val="accent1">
+              <a:shade val="50000"/>
+            </a:schemeClr>
+          </a:lnRef>
+          <a:fillRef idx="1">
+            <a:schemeClr val="accent1"/>
+          </a:fillRef>
+          <a:effectRef idx="0">
+            <a:schemeClr val="accent1"/>
+          </a:effectRef>
+          <a:fontRef idx="minor">
+            <a:schemeClr val="lt1"/>
+          </a:fontRef>
+        </p:style>
+        <p:txBody>
+          <a:bodyPr rtlCol="0" anchor="ctr"/>
+          <a:lstStyle/>
+          <a:p>
+            <a:pPr algn="ctr"/>
+            <a:endParaRPr lang="en-US"/>
+          </a:p>
+        </p:txBody>
+      </p:sp>
+      <p:sp>
+        <p:nvSpPr>
+          <p:cNvPr id="26" name="Rectangle 25">
+            <a:extLst>
+              <a:ext uri="{FF2B5EF4-FFF2-40B4-BE49-F238E27FC236}">
+                <a16:creationId xmlns:a16="http://schemas.microsoft.com/office/drawing/2014/main" id="{0A67D0A6-B19F-002E-9C96-FB5AA4019340}"/>
+              </a:ext>
+              <a:ext uri="{C183D7F6-B498-43B3-948B-1728B52AA6E4}">
+                <adec:decorative xmlns:adec="http://schemas.microsoft.com/office/drawing/2017/decorative" val="1"/>
+              </a:ext>
+            </a:extLst>
+          </p:cNvPr>
+          <p:cNvSpPr>
+            <a:spLocks noGrp="1" noRot="1" noChangeAspect="1" noMove="1" noResize="1" noEditPoints="1" noAdjustHandles="1" noChangeArrowheads="1" noChangeShapeType="1" noTextEdit="1"/>
+          </p:cNvSpPr>
+          <p:nvPr>
+            <p:extLst>
+              <p:ext uri="{386F3935-93C4-4BCD-93E2-E3B085C9AB24}">
+                <p16:designElem xmlns:p16="http://schemas.microsoft.com/office/powerpoint/2015/main" val="1"/>
+              </p:ext>
+            </p:extLst>
+          </p:nvPr>
+        </p:nvSpPr>
+        <p:spPr>
+          <a:xfrm flipH="1">
+            <a:off x="-1" y="-1"/>
+            <a:ext cx="12191998" cy="1590742"/>
+          </a:xfrm>
+          <a:prstGeom prst="rect">
+            <a:avLst/>
+          </a:prstGeom>
+          <a:gradFill>
+            <a:gsLst>
+              <a:gs pos="0">
+                <a:srgbClr val="000000"/>
+              </a:gs>
+              <a:gs pos="100000">
+                <a:schemeClr val="accent1">
+                  <a:lumMod val="75000"/>
+                </a:schemeClr>
+              </a:gs>
+            </a:gsLst>
+            <a:lin ang="8400000" scaled="0"/>
+          </a:gradFill>
+          <a:ln>
+            <a:noFill/>
+          </a:ln>
+        </p:spPr>
+        <p:style>
+          <a:lnRef idx="2">
+            <a:schemeClr val="accent1">
+              <a:shade val="50000"/>
+            </a:schemeClr>
+          </a:lnRef>
+          <a:fillRef idx="1">
+            <a:schemeClr val="accent1"/>
+          </a:fillRef>
+          <a:effectRef idx="0">
+            <a:schemeClr val="accent1"/>
+          </a:effectRef>
+          <a:fontRef idx="minor">
+            <a:schemeClr val="lt1"/>
+          </a:fontRef>
+        </p:style>
+        <p:txBody>
+          <a:bodyPr rtlCol="0" anchor="ctr"/>
+          <a:lstStyle/>
+          <a:p>
+            <a:pPr algn="ctr"/>
+            <a:endParaRPr lang="en-US"/>
+          </a:p>
+        </p:txBody>
+      </p:sp>
+      <p:sp>
+        <p:nvSpPr>
+          <p:cNvPr id="28" name="Rectangle 27">
+            <a:extLst>
+              <a:ext uri="{FF2B5EF4-FFF2-40B4-BE49-F238E27FC236}">
+                <a16:creationId xmlns:a16="http://schemas.microsoft.com/office/drawing/2014/main" id="{B185A967-754F-615F-2DDE-DE4E7753F346}"/>
+              </a:ext>
+              <a:ext uri="{C183D7F6-B498-43B3-948B-1728B52AA6E4}">
+                <adec:decorative xmlns:adec="http://schemas.microsoft.com/office/drawing/2017/decorative" val="1"/>
+              </a:ext>
+            </a:extLst>
+          </p:cNvPr>
+          <p:cNvSpPr>
+            <a:spLocks noGrp="1" noRot="1" noChangeAspect="1" noMove="1" noResize="1" noEditPoints="1" noAdjustHandles="1" noChangeArrowheads="1" noChangeShapeType="1" noTextEdit="1"/>
+          </p:cNvSpPr>
+          <p:nvPr>
+            <p:extLst>
+              <p:ext uri="{386F3935-93C4-4BCD-93E2-E3B085C9AB24}">
+                <p16:designElem xmlns:p16="http://schemas.microsoft.com/office/powerpoint/2015/main" val="1"/>
+              </p:ext>
+            </p:extLst>
+          </p:nvPr>
+        </p:nvSpPr>
+        <p:spPr>
+          <a:xfrm rot="10800000" flipH="1">
+            <a:off x="-3" y="0"/>
+            <a:ext cx="8115306" cy="1590742"/>
+          </a:xfrm>
+          <a:prstGeom prst="rect">
+            <a:avLst/>
+          </a:prstGeom>
+          <a:gradFill>
+            <a:gsLst>
+              <a:gs pos="20000">
+                <a:schemeClr val="accent1">
+                  <a:alpha val="0"/>
+                </a:schemeClr>
+              </a:gs>
+              <a:gs pos="100000">
+                <a:schemeClr val="accent1">
+                  <a:lumMod val="50000"/>
+                  <a:alpha val="55000"/>
+                </a:schemeClr>
+              </a:gs>
+            </a:gsLst>
+            <a:lin ang="13800000" scaled="0"/>
+          </a:gradFill>
+          <a:ln>
+            <a:noFill/>
+          </a:ln>
+        </p:spPr>
+        <p:style>
+          <a:lnRef idx="2">
+            <a:schemeClr val="accent1">
+              <a:shade val="50000"/>
+            </a:schemeClr>
+          </a:lnRef>
+          <a:fillRef idx="1">
+            <a:schemeClr val="accent1"/>
+          </a:fillRef>
+          <a:effectRef idx="0">
+            <a:schemeClr val="accent1"/>
+          </a:effectRef>
+          <a:fontRef idx="minor">
+            <a:schemeClr val="lt1"/>
+          </a:fontRef>
+        </p:style>
+        <p:txBody>
+          <a:bodyPr rtlCol="0" anchor="ctr"/>
+          <a:lstStyle/>
+          <a:p>
+            <a:pPr algn="ctr"/>
+            <a:endParaRPr lang="en-US"/>
+          </a:p>
+        </p:txBody>
+      </p:sp>
+      <p:sp>
+        <p:nvSpPr>
+          <p:cNvPr id="30" name="Rectangle 29">
+            <a:extLst>
+              <a:ext uri="{FF2B5EF4-FFF2-40B4-BE49-F238E27FC236}">
+                <a16:creationId xmlns:a16="http://schemas.microsoft.com/office/drawing/2014/main" id="{FBF68E18-F4E6-8CE8-010F-70C85DEC9565}"/>
+              </a:ext>
+              <a:ext uri="{C183D7F6-B498-43B3-948B-1728B52AA6E4}">
+                <adec:decorative xmlns:adec="http://schemas.microsoft.com/office/drawing/2017/decorative" val="1"/>
+              </a:ext>
+            </a:extLst>
+          </p:cNvPr>
+          <p:cNvSpPr>
+            <a:spLocks noGrp="1" noRot="1" noChangeAspect="1" noMove="1" noResize="1" noEditPoints="1" noAdjustHandles="1" noChangeArrowheads="1" noChangeShapeType="1" noTextEdit="1"/>
+          </p:cNvSpPr>
+          <p:nvPr>
+            <p:extLst>
+              <p:ext uri="{386F3935-93C4-4BCD-93E2-E3B085C9AB24}">
+                <p16:designElem xmlns:p16="http://schemas.microsoft.com/office/powerpoint/2015/main" val="1"/>
+              </p:ext>
+            </p:extLst>
+          </p:nvPr>
+        </p:nvSpPr>
+        <p:spPr>
+          <a:xfrm flipH="1">
+            <a:off x="8115299" y="-1"/>
+            <a:ext cx="4076698" cy="1590742"/>
+          </a:xfrm>
+          <a:prstGeom prst="rect">
+            <a:avLst/>
+          </a:prstGeom>
+          <a:gradFill>
+            <a:gsLst>
+              <a:gs pos="0">
+                <a:schemeClr val="accent1">
+                  <a:alpha val="66000"/>
+                </a:schemeClr>
+              </a:gs>
+              <a:gs pos="100000">
+                <a:srgbClr val="000000">
+                  <a:alpha val="30000"/>
+                </a:srgbClr>
+              </a:gs>
+            </a:gsLst>
+            <a:lin ang="13200000" scaled="0"/>
+          </a:gradFill>
+          <a:ln>
+            <a:noFill/>
+          </a:ln>
+        </p:spPr>
+        <p:style>
+          <a:lnRef idx="2">
+            <a:schemeClr val="accent1">
+              <a:shade val="50000"/>
+            </a:schemeClr>
+          </a:lnRef>
+          <a:fillRef idx="1">
+            <a:schemeClr val="accent1"/>
+          </a:fillRef>
+          <a:effectRef idx="0">
+            <a:schemeClr val="accent1"/>
+          </a:effectRef>
+          <a:fontRef idx="minor">
+            <a:schemeClr val="lt1"/>
+          </a:fontRef>
+        </p:style>
+        <p:txBody>
+          <a:bodyPr rtlCol="0" anchor="ctr"/>
+          <a:lstStyle/>
+          <a:p>
+            <a:pPr algn="ctr"/>
+            <a:endParaRPr lang="en-US"/>
+          </a:p>
+        </p:txBody>
+      </p:sp>
+      <p:sp>
+        <p:nvSpPr>
+          <p:cNvPr id="32" name="Rectangle 31">
+            <a:extLst>
+              <a:ext uri="{FF2B5EF4-FFF2-40B4-BE49-F238E27FC236}">
+                <a16:creationId xmlns:a16="http://schemas.microsoft.com/office/drawing/2014/main" id="{A56390F2-C7FE-3792-0D3B-2629A94E366A}"/>
+              </a:ext>
+              <a:ext uri="{C183D7F6-B498-43B3-948B-1728B52AA6E4}">
+                <adec:decorative xmlns:adec="http://schemas.microsoft.com/office/drawing/2017/decorative" val="1"/>
+              </a:ext>
+            </a:extLst>
+          </p:cNvPr>
+          <p:cNvSpPr>
+            <a:spLocks noGrp="1" noRot="1" noChangeAspect="1" noMove="1" noResize="1" noEditPoints="1" noAdjustHandles="1" noChangeArrowheads="1" noChangeShapeType="1" noTextEdit="1"/>
+          </p:cNvSpPr>
+          <p:nvPr>
+            <p:extLst>
+              <p:ext uri="{386F3935-93C4-4BCD-93E2-E3B085C9AB24}">
+                <p16:designElem xmlns:p16="http://schemas.microsoft.com/office/powerpoint/2015/main" val="1"/>
+              </p:ext>
+            </p:extLst>
+          </p:nvPr>
+        </p:nvSpPr>
+        <p:spPr>
+          <a:xfrm>
+            <a:off x="459350" y="-1"/>
+            <a:ext cx="11732646" cy="1597433"/>
+          </a:xfrm>
+          <a:prstGeom prst="rect">
+            <a:avLst/>
+          </a:prstGeom>
+          <a:gradFill>
+            <a:gsLst>
+              <a:gs pos="50000">
+                <a:srgbClr val="000000">
+                  <a:alpha val="0"/>
+                </a:srgbClr>
+              </a:gs>
+              <a:gs pos="99000">
+                <a:schemeClr val="accent1">
+                  <a:lumMod val="50000"/>
+                  <a:alpha val="52000"/>
+                </a:schemeClr>
+              </a:gs>
+            </a:gsLst>
+            <a:lin ang="16800000" scaled="0"/>
+          </a:gradFill>
+          <a:ln>
+            <a:noFill/>
+          </a:ln>
+        </p:spPr>
+        <p:style>
+          <a:lnRef idx="2">
+            <a:schemeClr val="accent1">
+              <a:shade val="50000"/>
+            </a:schemeClr>
+          </a:lnRef>
+          <a:fillRef idx="1">
+            <a:schemeClr val="accent1"/>
+          </a:fillRef>
+          <a:effectRef idx="0">
+            <a:schemeClr val="accent1"/>
+          </a:effectRef>
+          <a:fontRef idx="minor">
+            <a:schemeClr val="lt1"/>
+          </a:fontRef>
+        </p:style>
+        <p:txBody>
+          <a:bodyPr rtlCol="0" anchor="ctr"/>
+          <a:lstStyle/>
+          <a:p>
+            <a:pPr algn="ctr"/>
+            <a:endParaRPr lang="en-US"/>
+          </a:p>
+        </p:txBody>
+      </p:sp>
+      <p:sp>
+        <p:nvSpPr>
+          <p:cNvPr id="4" name="Title 3">
+            <a:extLst>
+              <a:ext uri="{FF2B5EF4-FFF2-40B4-BE49-F238E27FC236}">
+                <a16:creationId xmlns:a16="http://schemas.microsoft.com/office/drawing/2014/main" id="{7F259041-F5AF-4E81-84C2-467F68486086}"/>
+              </a:ext>
+            </a:extLst>
+          </p:cNvPr>
+          <p:cNvSpPr>
+            <a:spLocks noGrp="1"/>
+          </p:cNvSpPr>
+          <p:nvPr>
+            <p:ph type="title"/>
+          </p:nvPr>
+        </p:nvSpPr>
+        <p:spPr>
+          <a:xfrm>
+            <a:off x="1371599" y="294538"/>
+            <a:ext cx="9895951" cy="1033669"/>
+          </a:xfrm>
+        </p:spPr>
+        <p:txBody>
+          <a:bodyPr>
+            <a:normAutofit/>
+          </a:bodyPr>
+          <a:lstStyle/>
+          <a:p>
+            <a:r>
+              <a:rPr lang="en-US" sz="4000">
+                <a:solidFill>
+                  <a:srgbClr val="FFFFFF"/>
+                </a:solidFill>
+              </a:rPr>
+              <a:t>Variation 3: Israel Vega</a:t>
+            </a:r>
+            <a:endParaRPr lang="en-150" sz="4000">
+              <a:solidFill>
+                <a:srgbClr val="FFFFFF"/>
+              </a:solidFill>
+            </a:endParaRPr>
+          </a:p>
+        </p:txBody>
+      </p:sp>
+      <p:sp>
+        <p:nvSpPr>
+          <p:cNvPr id="6" name="Text Placeholder 5">
+            <a:extLst>
+              <a:ext uri="{FF2B5EF4-FFF2-40B4-BE49-F238E27FC236}">
+                <a16:creationId xmlns:a16="http://schemas.microsoft.com/office/drawing/2014/main" id="{ECE90CDC-CD48-63CC-4D15-9563C697C7E5}"/>
+              </a:ext>
+            </a:extLst>
+          </p:cNvPr>
+          <p:cNvSpPr>
+            <a:spLocks noGrp="1"/>
+          </p:cNvSpPr>
+          <p:nvPr>
+            <p:ph idx="1"/>
+          </p:nvPr>
+        </p:nvSpPr>
+        <p:spPr>
+          <a:xfrm>
+            <a:off x="1371599" y="2318197"/>
+            <a:ext cx="9724031" cy="3683358"/>
+          </a:xfrm>
+        </p:spPr>
+        <p:txBody>
+          <a:bodyPr anchor="ctr">
+            <a:normAutofit/>
+          </a:bodyPr>
+          <a:lstStyle/>
+          <a:p>
+            <a:r>
+              <a:rPr lang="en-US" sz="2000"/>
+              <a:t>Parameters Changed:</a:t>
+            </a:r>
+          </a:p>
+          <a:p>
+            <a:pPr marL="285750" indent="-285750">
+              <a:buFont typeface="Arial" panose="020B0604020202020204" pitchFamily="34" charset="0"/>
+              <a:buChar char="•"/>
+            </a:pPr>
+            <a:endParaRPr lang="en-US" sz="2000"/>
+          </a:p>
+          <a:p>
+            <a:r>
+              <a:rPr lang="en-US" sz="2000"/>
+              <a:t>Hypothesis:</a:t>
+            </a:r>
+          </a:p>
+          <a:p>
+            <a:endParaRPr lang="en-US" sz="2000"/>
+          </a:p>
+          <a:p>
+            <a:r>
+              <a:rPr lang="en-US" sz="2000"/>
+              <a:t>Results:</a:t>
+            </a:r>
+            <a:endParaRPr lang="en-150" sz="2000"/>
+          </a:p>
+        </p:txBody>
+      </p:sp>
+    </p:spTree>
+    <p:extLst>
+      <p:ext uri="{BB962C8B-B14F-4D97-AF65-F5344CB8AC3E}">
+        <p14:creationId xmlns:p14="http://schemas.microsoft.com/office/powerpoint/2010/main" val="311887172"/>
+      </p:ext>
+    </p:extLst>
+  </p:cSld>
+  <p:clrMapOvr>
+    <a:masterClrMapping/>
+  </p:clrMapOvr>
+</p:sld>
+</file>
+
+<file path=ppt/slides/slide6.xml><?xml version="1.0" encoding="utf-8"?>
+<p:sld xmlns:a="http://schemas.openxmlformats.org/drawingml/2006/main" xmlns:r="http://schemas.openxmlformats.org/officeDocument/2006/relationships" xmlns:p="http://schemas.openxmlformats.org/presentationml/2006/main">
+  <p:cSld>
+    <p:bg>
+      <p:bgPr>
+        <a:solidFill>
+          <a:schemeClr val="bg1"/>
+        </a:solidFill>
+        <a:effectLst/>
+      </p:bgPr>
+    </p:bg>
+    <p:spTree>
+      <p:nvGrpSpPr>
+        <p:cNvPr id="1" name="">
+          <a:extLst>
+            <a:ext uri="{FF2B5EF4-FFF2-40B4-BE49-F238E27FC236}">
+              <a16:creationId xmlns:a16="http://schemas.microsoft.com/office/drawing/2014/main" id="{BEF23FBA-33A6-22E0-907B-C6B5C721A925}"/>
+            </a:ext>
+          </a:extLst>
+        </p:cNvPr>
+        <p:cNvGrpSpPr/>
+        <p:nvPr/>
+      </p:nvGrpSpPr>
+      <p:grpSpPr>
+        <a:xfrm>
+          <a:off x="0" y="0"/>
+          <a:ext cx="0" cy="0"/>
+          <a:chOff x="0" y="0"/>
+          <a:chExt cx="0" cy="0"/>
+        </a:xfrm>
+      </p:grpSpPr>
+      <p:sp useBgFill="1">
+        <p:nvSpPr>
+          <p:cNvPr id="24" name="Rectangle 23">
+            <a:extLst>
+              <a:ext uri="{FF2B5EF4-FFF2-40B4-BE49-F238E27FC236}">
+                <a16:creationId xmlns:a16="http://schemas.microsoft.com/office/drawing/2014/main" id="{82A26D69-694F-4B8B-E84E-87063F66F896}"/>
+              </a:ext>
+              <a:ext uri="{C183D7F6-B498-43B3-948B-1728B52AA6E4}">
+                <adec:decorative xmlns:adec="http://schemas.microsoft.com/office/drawing/2017/decorative" val="1"/>
+              </a:ext>
+            </a:extLst>
+          </p:cNvPr>
+          <p:cNvSpPr>
+            <a:spLocks noGrp="1" noRot="1" noChangeAspect="1" noMove="1" noResize="1" noEditPoints="1" noAdjustHandles="1" noChangeArrowheads="1" noChangeShapeType="1" noTextEdit="1"/>
+          </p:cNvSpPr>
+          <p:nvPr>
+            <p:extLst>
+              <p:ext uri="{386F3935-93C4-4BCD-93E2-E3B085C9AB24}">
+                <p16:designElem xmlns:p16="http://schemas.microsoft.com/office/powerpoint/2015/main" val="1"/>
+              </p:ext>
+            </p:extLst>
+          </p:nvPr>
+        </p:nvSpPr>
+        <p:spPr>
+          <a:xfrm>
+            <a:off x="0" y="0"/>
+            <a:ext cx="12192000" cy="6858000"/>
+          </a:xfrm>
+          <a:prstGeom prst="rect">
+            <a:avLst/>
+          </a:prstGeom>
+          <a:ln w="12700" cap="flat" cmpd="sng" algn="ctr">
+            <a:noFill/>
+            <a:prstDash val="solid"/>
+            <a:miter lim="800000"/>
+          </a:ln>
+          <a:effectLst/>
+          <a:extLst>
+            <a:ext uri="{91240B29-F687-4F45-9708-019B960494DF}">
+              <a14:hiddenLine xmlns:a14="http://schemas.microsoft.com/office/drawing/2010/main" w="12700" cap="flat" cmpd="sng" algn="ctr">
+                <a:solidFill>
+                  <a:schemeClr val="accent1">
+                    <a:shade val="50000"/>
+                  </a:schemeClr>
+                </a:solidFill>
+                <a:prstDash val="solid"/>
+                <a:miter lim="800000"/>
+              </a14:hiddenLine>
+            </a:ext>
+          </a:extLst>
+        </p:spPr>
+        <p:style>
+          <a:lnRef idx="2">
+            <a:schemeClr val="accent1">
+              <a:shade val="50000"/>
+            </a:schemeClr>
+          </a:lnRef>
+          <a:fillRef idx="1">
+            <a:schemeClr val="accent1"/>
+          </a:fillRef>
+          <a:effectRef idx="0">
+            <a:schemeClr val="accent1"/>
+          </a:effectRef>
+          <a:fontRef idx="minor">
+            <a:schemeClr val="lt1"/>
+          </a:fontRef>
+        </p:style>
+        <p:txBody>
+          <a:bodyPr rtlCol="0" anchor="ctr"/>
+          <a:lstStyle/>
+          <a:p>
+            <a:pPr algn="ctr"/>
+            <a:endParaRPr lang="en-US"/>
+          </a:p>
+        </p:txBody>
+      </p:sp>
+      <p:sp>
+        <p:nvSpPr>
+          <p:cNvPr id="26" name="Rectangle 25">
+            <a:extLst>
+              <a:ext uri="{FF2B5EF4-FFF2-40B4-BE49-F238E27FC236}">
+                <a16:creationId xmlns:a16="http://schemas.microsoft.com/office/drawing/2014/main" id="{6830B809-6AB8-8FBB-2197-A61AD5A96908}"/>
+              </a:ext>
+              <a:ext uri="{C183D7F6-B498-43B3-948B-1728B52AA6E4}">
+                <adec:decorative xmlns:adec="http://schemas.microsoft.com/office/drawing/2017/decorative" val="1"/>
+              </a:ext>
+            </a:extLst>
+          </p:cNvPr>
+          <p:cNvSpPr>
+            <a:spLocks noGrp="1" noRot="1" noChangeAspect="1" noMove="1" noResize="1" noEditPoints="1" noAdjustHandles="1" noChangeArrowheads="1" noChangeShapeType="1" noTextEdit="1"/>
+          </p:cNvSpPr>
+          <p:nvPr>
+            <p:extLst>
+              <p:ext uri="{386F3935-93C4-4BCD-93E2-E3B085C9AB24}">
+                <p16:designElem xmlns:p16="http://schemas.microsoft.com/office/powerpoint/2015/main" val="1"/>
+              </p:ext>
+            </p:extLst>
+          </p:nvPr>
+        </p:nvSpPr>
+        <p:spPr>
+          <a:xfrm flipH="1">
+            <a:off x="-1" y="-1"/>
+            <a:ext cx="12191998" cy="1590742"/>
+          </a:xfrm>
+          <a:prstGeom prst="rect">
+            <a:avLst/>
+          </a:prstGeom>
+          <a:gradFill>
+            <a:gsLst>
+              <a:gs pos="0">
+                <a:srgbClr val="000000"/>
+              </a:gs>
+              <a:gs pos="100000">
+                <a:schemeClr val="accent1">
+                  <a:lumMod val="75000"/>
+                </a:schemeClr>
+              </a:gs>
+            </a:gsLst>
+            <a:lin ang="8400000" scaled="0"/>
+          </a:gradFill>
+          <a:ln>
+            <a:noFill/>
+          </a:ln>
+        </p:spPr>
+        <p:style>
+          <a:lnRef idx="2">
+            <a:schemeClr val="accent1">
+              <a:shade val="50000"/>
+            </a:schemeClr>
+          </a:lnRef>
+          <a:fillRef idx="1">
+            <a:schemeClr val="accent1"/>
+          </a:fillRef>
+          <a:effectRef idx="0">
+            <a:schemeClr val="accent1"/>
+          </a:effectRef>
+          <a:fontRef idx="minor">
+            <a:schemeClr val="lt1"/>
+          </a:fontRef>
+        </p:style>
+        <p:txBody>
+          <a:bodyPr rtlCol="0" anchor="ctr"/>
+          <a:lstStyle/>
+          <a:p>
+            <a:pPr algn="ctr"/>
+            <a:endParaRPr lang="en-US"/>
+          </a:p>
+        </p:txBody>
+      </p:sp>
+      <p:sp>
+        <p:nvSpPr>
+          <p:cNvPr id="28" name="Rectangle 27">
+            <a:extLst>
+              <a:ext uri="{FF2B5EF4-FFF2-40B4-BE49-F238E27FC236}">
+                <a16:creationId xmlns:a16="http://schemas.microsoft.com/office/drawing/2014/main" id="{48DE6388-7208-8207-CB3D-9AD12FEFAF4D}"/>
+              </a:ext>
+              <a:ext uri="{C183D7F6-B498-43B3-948B-1728B52AA6E4}">
+                <adec:decorative xmlns:adec="http://schemas.microsoft.com/office/drawing/2017/decorative" val="1"/>
+              </a:ext>
+            </a:extLst>
+          </p:cNvPr>
+          <p:cNvSpPr>
+            <a:spLocks noGrp="1" noRot="1" noChangeAspect="1" noMove="1" noResize="1" noEditPoints="1" noAdjustHandles="1" noChangeArrowheads="1" noChangeShapeType="1" noTextEdit="1"/>
+          </p:cNvSpPr>
+          <p:nvPr>
+            <p:extLst>
+              <p:ext uri="{386F3935-93C4-4BCD-93E2-E3B085C9AB24}">
+                <p16:designElem xmlns:p16="http://schemas.microsoft.com/office/powerpoint/2015/main" val="1"/>
+              </p:ext>
+            </p:extLst>
+          </p:nvPr>
+        </p:nvSpPr>
+        <p:spPr>
+          <a:xfrm rot="10800000" flipH="1">
+            <a:off x="-3" y="0"/>
+            <a:ext cx="8115306" cy="1590742"/>
+          </a:xfrm>
+          <a:prstGeom prst="rect">
+            <a:avLst/>
+          </a:prstGeom>
+          <a:gradFill>
+            <a:gsLst>
+              <a:gs pos="20000">
+                <a:schemeClr val="accent1">
+                  <a:alpha val="0"/>
+                </a:schemeClr>
+              </a:gs>
+              <a:gs pos="100000">
+                <a:schemeClr val="accent1">
+                  <a:lumMod val="50000"/>
+                  <a:alpha val="55000"/>
+                </a:schemeClr>
+              </a:gs>
+            </a:gsLst>
+            <a:lin ang="13800000" scaled="0"/>
+          </a:gradFill>
+          <a:ln>
+            <a:noFill/>
+          </a:ln>
+        </p:spPr>
+        <p:style>
+          <a:lnRef idx="2">
+            <a:schemeClr val="accent1">
+              <a:shade val="50000"/>
+            </a:schemeClr>
+          </a:lnRef>
+          <a:fillRef idx="1">
+            <a:schemeClr val="accent1"/>
+          </a:fillRef>
+          <a:effectRef idx="0">
+            <a:schemeClr val="accent1"/>
+          </a:effectRef>
+          <a:fontRef idx="minor">
+            <a:schemeClr val="lt1"/>
+          </a:fontRef>
+        </p:style>
+        <p:txBody>
+          <a:bodyPr rtlCol="0" anchor="ctr"/>
+          <a:lstStyle/>
+          <a:p>
+            <a:pPr algn="ctr"/>
+            <a:endParaRPr lang="en-US"/>
+          </a:p>
+        </p:txBody>
+      </p:sp>
+      <p:sp>
+        <p:nvSpPr>
+          <p:cNvPr id="30" name="Rectangle 29">
+            <a:extLst>
+              <a:ext uri="{FF2B5EF4-FFF2-40B4-BE49-F238E27FC236}">
+                <a16:creationId xmlns:a16="http://schemas.microsoft.com/office/drawing/2014/main" id="{98D23B5C-A4EE-0F7E-9B05-145F280DEF81}"/>
+              </a:ext>
+              <a:ext uri="{C183D7F6-B498-43B3-948B-1728B52AA6E4}">
+                <adec:decorative xmlns:adec="http://schemas.microsoft.com/office/drawing/2017/decorative" val="1"/>
+              </a:ext>
+            </a:extLst>
+          </p:cNvPr>
+          <p:cNvSpPr>
+            <a:spLocks noGrp="1" noRot="1" noChangeAspect="1" noMove="1" noResize="1" noEditPoints="1" noAdjustHandles="1" noChangeArrowheads="1" noChangeShapeType="1" noTextEdit="1"/>
+          </p:cNvSpPr>
+          <p:nvPr>
+            <p:extLst>
+              <p:ext uri="{386F3935-93C4-4BCD-93E2-E3B085C9AB24}">
+                <p16:designElem xmlns:p16="http://schemas.microsoft.com/office/powerpoint/2015/main" val="1"/>
+              </p:ext>
+            </p:extLst>
+          </p:nvPr>
+        </p:nvSpPr>
+        <p:spPr>
+          <a:xfrm flipH="1">
+            <a:off x="8115299" y="-1"/>
+            <a:ext cx="4076698" cy="1590742"/>
+          </a:xfrm>
+          <a:prstGeom prst="rect">
+            <a:avLst/>
+          </a:prstGeom>
+          <a:gradFill>
+            <a:gsLst>
+              <a:gs pos="0">
+                <a:schemeClr val="accent1">
+                  <a:alpha val="66000"/>
+                </a:schemeClr>
+              </a:gs>
+              <a:gs pos="100000">
+                <a:srgbClr val="000000">
+                  <a:alpha val="30000"/>
+                </a:srgbClr>
+              </a:gs>
+            </a:gsLst>
+            <a:lin ang="13200000" scaled="0"/>
+          </a:gradFill>
+          <a:ln>
+            <a:noFill/>
+          </a:ln>
+        </p:spPr>
+        <p:style>
+          <a:lnRef idx="2">
+            <a:schemeClr val="accent1">
+              <a:shade val="50000"/>
+            </a:schemeClr>
+          </a:lnRef>
+          <a:fillRef idx="1">
+            <a:schemeClr val="accent1"/>
+          </a:fillRef>
+          <a:effectRef idx="0">
+            <a:schemeClr val="accent1"/>
+          </a:effectRef>
+          <a:fontRef idx="minor">
+            <a:schemeClr val="lt1"/>
+          </a:fontRef>
+        </p:style>
+        <p:txBody>
+          <a:bodyPr rtlCol="0" anchor="ctr"/>
+          <a:lstStyle/>
+          <a:p>
+            <a:pPr algn="ctr"/>
+            <a:endParaRPr lang="en-US"/>
+          </a:p>
+        </p:txBody>
+      </p:sp>
+      <p:sp>
+        <p:nvSpPr>
+          <p:cNvPr id="32" name="Rectangle 31">
+            <a:extLst>
+              <a:ext uri="{FF2B5EF4-FFF2-40B4-BE49-F238E27FC236}">
+                <a16:creationId xmlns:a16="http://schemas.microsoft.com/office/drawing/2014/main" id="{CEC34A50-188A-6D63-F62B-DAB5F37EA921}"/>
+              </a:ext>
+              <a:ext uri="{C183D7F6-B498-43B3-948B-1728B52AA6E4}">
+                <adec:decorative xmlns:adec="http://schemas.microsoft.com/office/drawing/2017/decorative" val="1"/>
+              </a:ext>
+            </a:extLst>
+          </p:cNvPr>
+          <p:cNvSpPr>
+            <a:spLocks noGrp="1" noRot="1" noChangeAspect="1" noMove="1" noResize="1" noEditPoints="1" noAdjustHandles="1" noChangeArrowheads="1" noChangeShapeType="1" noTextEdit="1"/>
+          </p:cNvSpPr>
+          <p:nvPr>
+            <p:extLst>
+              <p:ext uri="{386F3935-93C4-4BCD-93E2-E3B085C9AB24}">
+                <p16:designElem xmlns:p16="http://schemas.microsoft.com/office/powerpoint/2015/main" val="1"/>
+              </p:ext>
+            </p:extLst>
+          </p:nvPr>
+        </p:nvSpPr>
+        <p:spPr>
+          <a:xfrm>
+            <a:off x="459350" y="-1"/>
+            <a:ext cx="11732646" cy="1597433"/>
+          </a:xfrm>
+          <a:prstGeom prst="rect">
+            <a:avLst/>
+          </a:prstGeom>
+          <a:gradFill>
+            <a:gsLst>
+              <a:gs pos="50000">
+                <a:srgbClr val="000000">
+                  <a:alpha val="0"/>
+                </a:srgbClr>
+              </a:gs>
+              <a:gs pos="99000">
+                <a:schemeClr val="accent1">
+                  <a:lumMod val="50000"/>
+                  <a:alpha val="52000"/>
+                </a:schemeClr>
+              </a:gs>
+            </a:gsLst>
+            <a:lin ang="16800000" scaled="0"/>
+          </a:gradFill>
+          <a:ln>
+            <a:noFill/>
+          </a:ln>
+        </p:spPr>
+        <p:style>
+          <a:lnRef idx="2">
+            <a:schemeClr val="accent1">
+              <a:shade val="50000"/>
+            </a:schemeClr>
+          </a:lnRef>
+          <a:fillRef idx="1">
+            <a:schemeClr val="accent1"/>
+          </a:fillRef>
+          <a:effectRef idx="0">
+            <a:schemeClr val="accent1"/>
+          </a:effectRef>
+          <a:fontRef idx="minor">
+            <a:schemeClr val="lt1"/>
+          </a:fontRef>
+        </p:style>
+        <p:txBody>
+          <a:bodyPr rtlCol="0" anchor="ctr"/>
+          <a:lstStyle/>
+          <a:p>
+            <a:pPr algn="ctr"/>
+            <a:endParaRPr lang="en-US"/>
+          </a:p>
+        </p:txBody>
+      </p:sp>
+      <p:sp>
+        <p:nvSpPr>
+          <p:cNvPr id="4" name="Title 3">
+            <a:extLst>
+              <a:ext uri="{FF2B5EF4-FFF2-40B4-BE49-F238E27FC236}">
+                <a16:creationId xmlns:a16="http://schemas.microsoft.com/office/drawing/2014/main" id="{231F8F56-FF93-B428-6088-9DEAC89E5C04}"/>
+              </a:ext>
+            </a:extLst>
+          </p:cNvPr>
+          <p:cNvSpPr>
+            <a:spLocks noGrp="1"/>
+          </p:cNvSpPr>
+          <p:nvPr>
+            <p:ph type="title"/>
+          </p:nvPr>
+        </p:nvSpPr>
+        <p:spPr>
+          <a:xfrm>
+            <a:off x="1371599" y="294538"/>
+            <a:ext cx="9895951" cy="1033669"/>
+          </a:xfrm>
+        </p:spPr>
+        <p:txBody>
+          <a:bodyPr>
+            <a:normAutofit/>
+          </a:bodyPr>
+          <a:lstStyle/>
+          <a:p>
+            <a:r>
+              <a:rPr lang="en-US" sz="4000">
+                <a:solidFill>
+                  <a:srgbClr val="FFFFFF"/>
+                </a:solidFill>
+              </a:rPr>
+              <a:t>Variation 4: Elliot Mai</a:t>
+            </a:r>
+            <a:endParaRPr lang="en-150" sz="4000">
+              <a:solidFill>
+                <a:srgbClr val="FFFFFF"/>
+              </a:solidFill>
+            </a:endParaRPr>
+          </a:p>
+        </p:txBody>
+      </p:sp>
+      <p:sp>
+        <p:nvSpPr>
+          <p:cNvPr id="6" name="Text Placeholder 5">
+            <a:extLst>
+              <a:ext uri="{FF2B5EF4-FFF2-40B4-BE49-F238E27FC236}">
+                <a16:creationId xmlns:a16="http://schemas.microsoft.com/office/drawing/2014/main" id="{53BDE638-0B07-6572-0623-44A0C9BCEAA8}"/>
+              </a:ext>
+            </a:extLst>
+          </p:cNvPr>
+          <p:cNvSpPr>
+            <a:spLocks noGrp="1"/>
+          </p:cNvSpPr>
+          <p:nvPr>
+            <p:ph idx="1"/>
+          </p:nvPr>
+        </p:nvSpPr>
+        <p:spPr>
+          <a:xfrm>
+            <a:off x="1371599" y="2318197"/>
+            <a:ext cx="9724031" cy="3683358"/>
+          </a:xfrm>
+        </p:spPr>
+        <p:txBody>
+          <a:bodyPr anchor="ctr">
+            <a:normAutofit/>
+          </a:bodyPr>
+          <a:lstStyle/>
+          <a:p>
+            <a:r>
+              <a:rPr lang="en-US" sz="2000"/>
+              <a:t>Parameters Changed:</a:t>
+            </a:r>
+          </a:p>
+          <a:p>
+            <a:pPr marL="285750" indent="-285750">
+              <a:buFont typeface="Arial" panose="020B0604020202020204" pitchFamily="34" charset="0"/>
+              <a:buChar char="•"/>
+            </a:pPr>
+            <a:endParaRPr lang="en-US" sz="2000"/>
+          </a:p>
+          <a:p>
+            <a:r>
+              <a:rPr lang="en-US" sz="2000"/>
+              <a:t>Hypothesis:</a:t>
+            </a:r>
+          </a:p>
+          <a:p>
+            <a:endParaRPr lang="en-US" sz="2000"/>
+          </a:p>
+          <a:p>
+            <a:r>
+              <a:rPr lang="en-US" sz="2000"/>
+              <a:t>Results:</a:t>
+            </a:r>
+            <a:endParaRPr lang="en-150" sz="2000"/>
+          </a:p>
+        </p:txBody>
+      </p:sp>
+    </p:spTree>
+    <p:extLst>
+      <p:ext uri="{BB962C8B-B14F-4D97-AF65-F5344CB8AC3E}">
+        <p14:creationId xmlns:p14="http://schemas.microsoft.com/office/powerpoint/2010/main" val="1688651266"/>
+      </p:ext>
+    </p:extLst>
+  </p:cSld>
+  <p:clrMapOvr>
+    <a:masterClrMapping/>
+  </p:clrMapOvr>
+</p:sld>
+</file>
+
+<file path=ppt/slides/slide7.xml><?xml version="1.0" encoding="utf-8"?>
+<p:sld xmlns:a="http://schemas.openxmlformats.org/drawingml/2006/main" xmlns:r="http://schemas.openxmlformats.org/officeDocument/2006/relationships" xmlns:p="http://schemas.openxmlformats.org/presentationml/2006/main">
+  <p:cSld>
+    <p:bg>
+      <p:bgPr>
+        <a:solidFill>
+          <a:schemeClr val="bg1"/>
+        </a:solidFill>
+        <a:effectLst/>
+      </p:bgPr>
+    </p:bg>
+    <p:spTree>
+      <p:nvGrpSpPr>
+        <p:cNvPr id="1" name="">
+          <a:extLst>
+            <a:ext uri="{FF2B5EF4-FFF2-40B4-BE49-F238E27FC236}">
+              <a16:creationId xmlns:a16="http://schemas.microsoft.com/office/drawing/2014/main" id="{0BAFC57A-B69F-BD69-D798-DEF7FEDEE701}"/>
+            </a:ext>
+          </a:extLst>
+        </p:cNvPr>
+        <p:cNvGrpSpPr/>
+        <p:nvPr/>
+      </p:nvGrpSpPr>
+      <p:grpSpPr>
+        <a:xfrm>
+          <a:off x="0" y="0"/>
+          <a:ext cx="0" cy="0"/>
+          <a:chOff x="0" y="0"/>
+          <a:chExt cx="0" cy="0"/>
+        </a:xfrm>
+      </p:grpSpPr>
+      <p:sp useBgFill="1">
+        <p:nvSpPr>
+          <p:cNvPr id="24" name="Rectangle 23">
+            <a:extLst>
+              <a:ext uri="{FF2B5EF4-FFF2-40B4-BE49-F238E27FC236}">
+                <a16:creationId xmlns:a16="http://schemas.microsoft.com/office/drawing/2014/main" id="{A8A38846-AAE6-E8DC-B8CA-2DEE1BA2AA90}"/>
+              </a:ext>
+              <a:ext uri="{C183D7F6-B498-43B3-948B-1728B52AA6E4}">
+                <adec:decorative xmlns:adec="http://schemas.microsoft.com/office/drawing/2017/decorative" val="1"/>
+              </a:ext>
+            </a:extLst>
+          </p:cNvPr>
+          <p:cNvSpPr>
+            <a:spLocks noGrp="1" noRot="1" noChangeAspect="1" noMove="1" noResize="1" noEditPoints="1" noAdjustHandles="1" noChangeArrowheads="1" noChangeShapeType="1" noTextEdit="1"/>
+          </p:cNvSpPr>
+          <p:nvPr>
+            <p:extLst>
+              <p:ext uri="{386F3935-93C4-4BCD-93E2-E3B085C9AB24}">
+                <p16:designElem xmlns:p16="http://schemas.microsoft.com/office/powerpoint/2015/main" val="1"/>
+              </p:ext>
+            </p:extLst>
+          </p:nvPr>
+        </p:nvSpPr>
+        <p:spPr>
+          <a:xfrm>
+            <a:off x="0" y="0"/>
+            <a:ext cx="12192000" cy="6858000"/>
+          </a:xfrm>
+          <a:prstGeom prst="rect">
+            <a:avLst/>
+          </a:prstGeom>
+          <a:ln w="12700" cap="flat" cmpd="sng" algn="ctr">
+            <a:noFill/>
+            <a:prstDash val="solid"/>
+            <a:miter lim="800000"/>
+          </a:ln>
+          <a:effectLst/>
+          <a:extLst>
+            <a:ext uri="{91240B29-F687-4F45-9708-019B960494DF}">
+              <a14:hiddenLine xmlns:a14="http://schemas.microsoft.com/office/drawing/2010/main" w="12700" cap="flat" cmpd="sng" algn="ctr">
+                <a:solidFill>
+                  <a:schemeClr val="accent1">
+                    <a:shade val="50000"/>
+                  </a:schemeClr>
+                </a:solidFill>
+                <a:prstDash val="solid"/>
+                <a:miter lim="800000"/>
+              </a14:hiddenLine>
+            </a:ext>
+          </a:extLst>
+        </p:spPr>
+        <p:style>
+          <a:lnRef idx="2">
+            <a:schemeClr val="accent1">
+              <a:shade val="50000"/>
+            </a:schemeClr>
+          </a:lnRef>
+          <a:fillRef idx="1">
+            <a:schemeClr val="accent1"/>
+          </a:fillRef>
+          <a:effectRef idx="0">
+            <a:schemeClr val="accent1"/>
+          </a:effectRef>
+          <a:fontRef idx="minor">
+            <a:schemeClr val="lt1"/>
+          </a:fontRef>
+        </p:style>
+        <p:txBody>
+          <a:bodyPr rtlCol="0" anchor="ctr"/>
+          <a:lstStyle/>
+          <a:p>
+            <a:pPr algn="ctr"/>
+            <a:endParaRPr lang="en-US"/>
+          </a:p>
+        </p:txBody>
+      </p:sp>
+      <p:sp>
+        <p:nvSpPr>
+          <p:cNvPr id="26" name="Rectangle 25">
+            <a:extLst>
+              <a:ext uri="{FF2B5EF4-FFF2-40B4-BE49-F238E27FC236}">
+                <a16:creationId xmlns:a16="http://schemas.microsoft.com/office/drawing/2014/main" id="{0FFCFE7F-2425-7994-A13C-AF782CE8D275}"/>
+              </a:ext>
+              <a:ext uri="{C183D7F6-B498-43B3-948B-1728B52AA6E4}">
+                <adec:decorative xmlns:adec="http://schemas.microsoft.com/office/drawing/2017/decorative" val="1"/>
+              </a:ext>
+            </a:extLst>
+          </p:cNvPr>
+          <p:cNvSpPr>
+            <a:spLocks noGrp="1" noRot="1" noChangeAspect="1" noMove="1" noResize="1" noEditPoints="1" noAdjustHandles="1" noChangeArrowheads="1" noChangeShapeType="1" noTextEdit="1"/>
+          </p:cNvSpPr>
+          <p:nvPr>
+            <p:extLst>
+              <p:ext uri="{386F3935-93C4-4BCD-93E2-E3B085C9AB24}">
+                <p16:designElem xmlns:p16="http://schemas.microsoft.com/office/powerpoint/2015/main" val="1"/>
+              </p:ext>
+            </p:extLst>
+          </p:nvPr>
+        </p:nvSpPr>
+        <p:spPr>
+          <a:xfrm flipH="1">
+            <a:off x="-1" y="-1"/>
+            <a:ext cx="12191998" cy="1590742"/>
+          </a:xfrm>
+          <a:prstGeom prst="rect">
+            <a:avLst/>
+          </a:prstGeom>
+          <a:gradFill>
+            <a:gsLst>
+              <a:gs pos="0">
+                <a:srgbClr val="000000"/>
+              </a:gs>
+              <a:gs pos="100000">
+                <a:schemeClr val="accent1">
+                  <a:lumMod val="75000"/>
+                </a:schemeClr>
+              </a:gs>
+            </a:gsLst>
+            <a:lin ang="8400000" scaled="0"/>
+          </a:gradFill>
+          <a:ln>
+            <a:noFill/>
+          </a:ln>
+        </p:spPr>
+        <p:style>
+          <a:lnRef idx="2">
+            <a:schemeClr val="accent1">
+              <a:shade val="50000"/>
+            </a:schemeClr>
+          </a:lnRef>
+          <a:fillRef idx="1">
+            <a:schemeClr val="accent1"/>
+          </a:fillRef>
+          <a:effectRef idx="0">
+            <a:schemeClr val="accent1"/>
+          </a:effectRef>
+          <a:fontRef idx="minor">
+            <a:schemeClr val="lt1"/>
+          </a:fontRef>
+        </p:style>
+        <p:txBody>
+          <a:bodyPr rtlCol="0" anchor="ctr"/>
+          <a:lstStyle/>
+          <a:p>
+            <a:pPr algn="ctr"/>
+            <a:endParaRPr lang="en-US"/>
+          </a:p>
+        </p:txBody>
+      </p:sp>
+      <p:sp>
+        <p:nvSpPr>
+          <p:cNvPr id="28" name="Rectangle 27">
+            <a:extLst>
+              <a:ext uri="{FF2B5EF4-FFF2-40B4-BE49-F238E27FC236}">
+                <a16:creationId xmlns:a16="http://schemas.microsoft.com/office/drawing/2014/main" id="{63862266-6EBA-68BB-C9F5-972282E8F403}"/>
+              </a:ext>
+              <a:ext uri="{C183D7F6-B498-43B3-948B-1728B52AA6E4}">
+                <adec:decorative xmlns:adec="http://schemas.microsoft.com/office/drawing/2017/decorative" val="1"/>
+              </a:ext>
+            </a:extLst>
+          </p:cNvPr>
+          <p:cNvSpPr>
+            <a:spLocks noGrp="1" noRot="1" noChangeAspect="1" noMove="1" noResize="1" noEditPoints="1" noAdjustHandles="1" noChangeArrowheads="1" noChangeShapeType="1" noTextEdit="1"/>
+          </p:cNvSpPr>
+          <p:nvPr>
+            <p:extLst>
+              <p:ext uri="{386F3935-93C4-4BCD-93E2-E3B085C9AB24}">
+                <p16:designElem xmlns:p16="http://schemas.microsoft.com/office/powerpoint/2015/main" val="1"/>
+              </p:ext>
+            </p:extLst>
+          </p:nvPr>
+        </p:nvSpPr>
+        <p:spPr>
+          <a:xfrm rot="10800000" flipH="1">
+            <a:off x="-3" y="0"/>
+            <a:ext cx="8115306" cy="1590742"/>
+          </a:xfrm>
+          <a:prstGeom prst="rect">
+            <a:avLst/>
+          </a:prstGeom>
+          <a:gradFill>
+            <a:gsLst>
+              <a:gs pos="20000">
+                <a:schemeClr val="accent1">
+                  <a:alpha val="0"/>
+                </a:schemeClr>
+              </a:gs>
+              <a:gs pos="100000">
+                <a:schemeClr val="accent1">
+                  <a:lumMod val="50000"/>
+                  <a:alpha val="55000"/>
+                </a:schemeClr>
+              </a:gs>
+            </a:gsLst>
+            <a:lin ang="13800000" scaled="0"/>
+          </a:gradFill>
+          <a:ln>
+            <a:noFill/>
+          </a:ln>
+        </p:spPr>
+        <p:style>
+          <a:lnRef idx="2">
+            <a:schemeClr val="accent1">
+              <a:shade val="50000"/>
+            </a:schemeClr>
+          </a:lnRef>
+          <a:fillRef idx="1">
+            <a:schemeClr val="accent1"/>
+          </a:fillRef>
+          <a:effectRef idx="0">
+            <a:schemeClr val="accent1"/>
+          </a:effectRef>
+          <a:fontRef idx="minor">
+            <a:schemeClr val="lt1"/>
+          </a:fontRef>
+        </p:style>
+        <p:txBody>
+          <a:bodyPr rtlCol="0" anchor="ctr"/>
+          <a:lstStyle/>
+          <a:p>
+            <a:pPr algn="ctr"/>
+            <a:endParaRPr lang="en-US"/>
+          </a:p>
+        </p:txBody>
+      </p:sp>
+      <p:sp>
+        <p:nvSpPr>
+          <p:cNvPr id="30" name="Rectangle 29">
+            <a:extLst>
+              <a:ext uri="{FF2B5EF4-FFF2-40B4-BE49-F238E27FC236}">
+                <a16:creationId xmlns:a16="http://schemas.microsoft.com/office/drawing/2014/main" id="{3F6EEC86-87B4-6C68-3C93-6F7FEF671C18}"/>
+              </a:ext>
+              <a:ext uri="{C183D7F6-B498-43B3-948B-1728B52AA6E4}">
+                <adec:decorative xmlns:adec="http://schemas.microsoft.com/office/drawing/2017/decorative" val="1"/>
+              </a:ext>
+            </a:extLst>
+          </p:cNvPr>
+          <p:cNvSpPr>
+            <a:spLocks noGrp="1" noRot="1" noChangeAspect="1" noMove="1" noResize="1" noEditPoints="1" noAdjustHandles="1" noChangeArrowheads="1" noChangeShapeType="1" noTextEdit="1"/>
+          </p:cNvSpPr>
+          <p:nvPr>
+            <p:extLst>
+              <p:ext uri="{386F3935-93C4-4BCD-93E2-E3B085C9AB24}">
+                <p16:designElem xmlns:p16="http://schemas.microsoft.com/office/powerpoint/2015/main" val="1"/>
+              </p:ext>
+            </p:extLst>
+          </p:nvPr>
+        </p:nvSpPr>
+        <p:spPr>
+          <a:xfrm flipH="1">
+            <a:off x="8115299" y="-1"/>
+            <a:ext cx="4076698" cy="1590742"/>
+          </a:xfrm>
+          <a:prstGeom prst="rect">
+            <a:avLst/>
+          </a:prstGeom>
+          <a:gradFill>
+            <a:gsLst>
+              <a:gs pos="0">
+                <a:schemeClr val="accent1">
+                  <a:alpha val="66000"/>
+                </a:schemeClr>
+              </a:gs>
+              <a:gs pos="100000">
+                <a:srgbClr val="000000">
+                  <a:alpha val="30000"/>
+                </a:srgbClr>
+              </a:gs>
+            </a:gsLst>
+            <a:lin ang="13200000" scaled="0"/>
+          </a:gradFill>
+          <a:ln>
+            <a:noFill/>
+          </a:ln>
+        </p:spPr>
+        <p:style>
+          <a:lnRef idx="2">
+            <a:schemeClr val="accent1">
+              <a:shade val="50000"/>
+            </a:schemeClr>
+          </a:lnRef>
+          <a:fillRef idx="1">
+            <a:schemeClr val="accent1"/>
+          </a:fillRef>
+          <a:effectRef idx="0">
+            <a:schemeClr val="accent1"/>
+          </a:effectRef>
+          <a:fontRef idx="minor">
+            <a:schemeClr val="lt1"/>
+          </a:fontRef>
+        </p:style>
+        <p:txBody>
+          <a:bodyPr rtlCol="0" anchor="ctr"/>
+          <a:lstStyle/>
+          <a:p>
+            <a:pPr algn="ctr"/>
+            <a:endParaRPr lang="en-US"/>
+          </a:p>
+        </p:txBody>
+      </p:sp>
+      <p:sp>
+        <p:nvSpPr>
+          <p:cNvPr id="32" name="Rectangle 31">
+            <a:extLst>
+              <a:ext uri="{FF2B5EF4-FFF2-40B4-BE49-F238E27FC236}">
+                <a16:creationId xmlns:a16="http://schemas.microsoft.com/office/drawing/2014/main" id="{E585E242-ACC3-4D2C-AFC7-6FB9AAA8B0DC}"/>
+              </a:ext>
+              <a:ext uri="{C183D7F6-B498-43B3-948B-1728B52AA6E4}">
+                <adec:decorative xmlns:adec="http://schemas.microsoft.com/office/drawing/2017/decorative" val="1"/>
+              </a:ext>
+            </a:extLst>
+          </p:cNvPr>
+          <p:cNvSpPr>
+            <a:spLocks noGrp="1" noRot="1" noChangeAspect="1" noMove="1" noResize="1" noEditPoints="1" noAdjustHandles="1" noChangeArrowheads="1" noChangeShapeType="1" noTextEdit="1"/>
+          </p:cNvSpPr>
+          <p:nvPr>
+            <p:extLst>
+              <p:ext uri="{386F3935-93C4-4BCD-93E2-E3B085C9AB24}">
+                <p16:designElem xmlns:p16="http://schemas.microsoft.com/office/powerpoint/2015/main" val="1"/>
+              </p:ext>
+            </p:extLst>
+          </p:nvPr>
+        </p:nvSpPr>
+        <p:spPr>
+          <a:xfrm>
+            <a:off x="459350" y="-1"/>
+            <a:ext cx="11732646" cy="1597433"/>
+          </a:xfrm>
+          <a:prstGeom prst="rect">
+            <a:avLst/>
+          </a:prstGeom>
+          <a:gradFill>
+            <a:gsLst>
+              <a:gs pos="50000">
+                <a:srgbClr val="000000">
+                  <a:alpha val="0"/>
+                </a:srgbClr>
+              </a:gs>
+              <a:gs pos="99000">
+                <a:schemeClr val="accent1">
+                  <a:lumMod val="50000"/>
+                  <a:alpha val="52000"/>
+                </a:schemeClr>
+              </a:gs>
+            </a:gsLst>
+            <a:lin ang="16800000" scaled="0"/>
+          </a:gradFill>
+          <a:ln>
+            <a:noFill/>
+          </a:ln>
+        </p:spPr>
+        <p:style>
+          <a:lnRef idx="2">
+            <a:schemeClr val="accent1">
+              <a:shade val="50000"/>
+            </a:schemeClr>
+          </a:lnRef>
+          <a:fillRef idx="1">
+            <a:schemeClr val="accent1"/>
+          </a:fillRef>
+          <a:effectRef idx="0">
+            <a:schemeClr val="accent1"/>
+          </a:effectRef>
+          <a:fontRef idx="minor">
+            <a:schemeClr val="lt1"/>
+          </a:fontRef>
+        </p:style>
+        <p:txBody>
+          <a:bodyPr rtlCol="0" anchor="ctr"/>
+          <a:lstStyle/>
+          <a:p>
+            <a:pPr algn="ctr"/>
+            <a:endParaRPr lang="en-US"/>
+          </a:p>
+        </p:txBody>
+      </p:sp>
+      <p:sp>
+        <p:nvSpPr>
+          <p:cNvPr id="4" name="Title 3">
+            <a:extLst>
+              <a:ext uri="{FF2B5EF4-FFF2-40B4-BE49-F238E27FC236}">
+                <a16:creationId xmlns:a16="http://schemas.microsoft.com/office/drawing/2014/main" id="{5C94464B-3659-1D3E-E08B-F862EA7D786E}"/>
+              </a:ext>
+            </a:extLst>
+          </p:cNvPr>
+          <p:cNvSpPr>
+            <a:spLocks noGrp="1"/>
+          </p:cNvSpPr>
+          <p:nvPr>
+            <p:ph type="title"/>
+          </p:nvPr>
+        </p:nvSpPr>
+        <p:spPr>
+          <a:xfrm>
+            <a:off x="1371599" y="294538"/>
+            <a:ext cx="9895951" cy="1033669"/>
+          </a:xfrm>
+        </p:spPr>
+        <p:txBody>
+          <a:bodyPr>
+            <a:normAutofit/>
+          </a:bodyPr>
+          <a:lstStyle/>
+          <a:p>
+            <a:r>
+              <a:rPr lang="en-US" sz="4000">
+                <a:solidFill>
+                  <a:srgbClr val="FFFFFF"/>
+                </a:solidFill>
+              </a:rPr>
+              <a:t>Variation [#]: [</a:t>
+            </a:r>
+            <a:r>
+              <a:rPr lang="en-US" sz="4000" err="1">
+                <a:solidFill>
+                  <a:srgbClr val="FFFFFF"/>
+                </a:solidFill>
+              </a:rPr>
+              <a:t>vega</a:t>
+            </a:r>
+            <a:r>
+              <a:rPr lang="en-US" sz="4000">
+                <a:solidFill>
+                  <a:srgbClr val="FFFFFF"/>
+                </a:solidFill>
+              </a:rPr>
+              <a:t>]</a:t>
+            </a:r>
+            <a:endParaRPr lang="en-150" sz="4000">
+              <a:solidFill>
+                <a:srgbClr val="FFFFFF"/>
+              </a:solidFill>
+            </a:endParaRPr>
+          </a:p>
+        </p:txBody>
+      </p:sp>
+      <p:sp>
+        <p:nvSpPr>
+          <p:cNvPr id="6" name="Text Placeholder 5">
+            <a:extLst>
+              <a:ext uri="{FF2B5EF4-FFF2-40B4-BE49-F238E27FC236}">
+                <a16:creationId xmlns:a16="http://schemas.microsoft.com/office/drawing/2014/main" id="{7EFDB171-1C00-CF20-11C7-6A224CB757D5}"/>
+              </a:ext>
+            </a:extLst>
+          </p:cNvPr>
+          <p:cNvSpPr>
+            <a:spLocks noGrp="1"/>
+          </p:cNvSpPr>
+          <p:nvPr>
+            <p:ph idx="1"/>
+          </p:nvPr>
+        </p:nvSpPr>
+        <p:spPr>
+          <a:xfrm>
+            <a:off x="1371599" y="2318197"/>
+            <a:ext cx="9724031" cy="3683358"/>
+          </a:xfrm>
+        </p:spPr>
+        <p:txBody>
+          <a:bodyPr anchor="ctr">
+            <a:normAutofit/>
+          </a:bodyPr>
+          <a:lstStyle/>
+          <a:p>
+            <a:r>
+              <a:rPr lang="en-US" sz="2000"/>
+              <a:t>Parameters Changed:</a:t>
+            </a:r>
+          </a:p>
+          <a:p>
+            <a:pPr marL="285750" indent="-285750">
+              <a:buFont typeface="Arial" panose="020B0604020202020204" pitchFamily="34" charset="0"/>
+              <a:buChar char="•"/>
+            </a:pPr>
+            <a:endParaRPr lang="en-US" sz="2000"/>
+          </a:p>
+          <a:p>
+            <a:r>
+              <a:rPr lang="en-US" sz="2000"/>
+              <a:t>Hypothesis:</a:t>
+            </a:r>
+          </a:p>
+          <a:p>
+            <a:endParaRPr lang="en-US" sz="2000"/>
+          </a:p>
+          <a:p>
+            <a:r>
+              <a:rPr lang="en-US" sz="2000"/>
+              <a:t>Results:</a:t>
+            </a:r>
+            <a:endParaRPr lang="en-150" sz="2000"/>
+          </a:p>
+        </p:txBody>
+      </p:sp>
+    </p:spTree>
+    <p:extLst>
+      <p:ext uri="{BB962C8B-B14F-4D97-AF65-F5344CB8AC3E}">
+        <p14:creationId xmlns:p14="http://schemas.microsoft.com/office/powerpoint/2010/main" val="3910318035"/>
+      </p:ext>
+    </p:extLst>
+  </p:cSld>
+  <p:clrMapOvr>
+    <a:masterClrMapping/>
+  </p:clrMapOvr>
+</p:sld>
+</file>
+
+<file path=ppt/slides/slide8.xml><?xml version="1.0" encoding="utf-8"?>
+<p:sld xmlns:a="http://schemas.openxmlformats.org/drawingml/2006/main" xmlns:r="http://schemas.openxmlformats.org/officeDocument/2006/relationships" xmlns:p="http://schemas.openxmlformats.org/presentationml/2006/main">
+  <p:cSld>
+    <p:bg>
+      <p:bgPr>
+        <a:solidFill>
+          <a:schemeClr val="bg1"/>
+        </a:solidFill>
+        <a:effectLst/>
+      </p:bgPr>
+    </p:bg>
+    <p:spTree>
+      <p:nvGrpSpPr>
+        <p:cNvPr id="1" name=""/>
+        <p:cNvGrpSpPr/>
+        <p:nvPr/>
+      </p:nvGrpSpPr>
+      <p:grpSpPr>
+        <a:xfrm>
+          <a:off x="0" y="0"/>
+          <a:ext cx="0" cy="0"/>
+          <a:chOff x="0" y="0"/>
+          <a:chExt cx="0" cy="0"/>
+        </a:xfrm>
+      </p:grpSpPr>
+      <p:sp useBgFill="1">
+        <p:nvSpPr>
+          <p:cNvPr id="8" name="Rectangle 7">
+            <a:extLst>
+              <a:ext uri="{FF2B5EF4-FFF2-40B4-BE49-F238E27FC236}">
+                <a16:creationId xmlns:a16="http://schemas.microsoft.com/office/drawing/2014/main" id="{1B15ED52-F352-441B-82BF-E0EA34836D08}"/>
+              </a:ext>
+              <a:ext uri="{C183D7F6-B498-43B3-948B-1728B52AA6E4}">
+                <adec:decorative xmlns:adec="http://schemas.microsoft.com/office/drawing/2017/decorative" val="1"/>
+              </a:ext>
+            </a:extLst>
+          </p:cNvPr>
+          <p:cNvSpPr>
+            <a:spLocks noGrp="1" noRot="1" noChangeAspect="1" noMove="1" noResize="1" noEditPoints="1" noAdjustHandles="1" noChangeArrowheads="1" noChangeShapeType="1" noTextEdit="1"/>
+          </p:cNvSpPr>
+          <p:nvPr>
+            <p:extLst>
+              <p:ext uri="{386F3935-93C4-4BCD-93E2-E3B085C9AB24}">
+                <p16:designElem xmlns:p16="http://schemas.microsoft.com/office/powerpoint/2015/main" val="1"/>
+              </p:ext>
+            </p:extLst>
+          </p:nvPr>
+        </p:nvSpPr>
+        <p:spPr>
+          <a:xfrm>
+            <a:off x="0" y="0"/>
+            <a:ext cx="12192000" cy="6858000"/>
+          </a:xfrm>
+          <a:prstGeom prst="rect">
+            <a:avLst/>
+          </a:prstGeom>
+          <a:ln w="12700" cap="flat" cmpd="sng" algn="ctr">
+            <a:noFill/>
+            <a:prstDash val="solid"/>
+            <a:miter lim="800000"/>
+          </a:ln>
+          <a:effectLst/>
+          <a:extLst>
+            <a:ext uri="{91240B29-F687-4F45-9708-019B960494DF}">
+              <a14:hiddenLine xmlns:a14="http://schemas.microsoft.com/office/drawing/2010/main" w="12700" cap="flat" cmpd="sng" algn="ctr">
+                <a:solidFill>
+                  <a:schemeClr val="accent1">
+                    <a:shade val="50000"/>
+                  </a:schemeClr>
+                </a:solidFill>
+                <a:prstDash val="solid"/>
+                <a:miter lim="800000"/>
+              </a14:hiddenLine>
+            </a:ext>
+          </a:extLst>
+        </p:spPr>
+        <p:style>
+          <a:lnRef idx="2">
+            <a:schemeClr val="accent1">
+              <a:shade val="50000"/>
+            </a:schemeClr>
+          </a:lnRef>
+          <a:fillRef idx="1">
+            <a:schemeClr val="accent1"/>
+          </a:fillRef>
+          <a:effectRef idx="0">
+            <a:schemeClr val="accent1"/>
+          </a:effectRef>
+          <a:fontRef idx="minor">
+            <a:schemeClr val="lt1"/>
+          </a:fontRef>
+        </p:style>
+        <p:txBody>
+          <a:bodyPr rtlCol="0" anchor="ctr"/>
+          <a:lstStyle/>
+          <a:p>
+            <a:pPr algn="ctr"/>
+            <a:endParaRPr lang="en-US"/>
+          </a:p>
+        </p:txBody>
+      </p:sp>
+      <p:sp>
+        <p:nvSpPr>
+          <p:cNvPr id="10" name="Rectangle 9">
+            <a:extLst>
+              <a:ext uri="{FF2B5EF4-FFF2-40B4-BE49-F238E27FC236}">
+                <a16:creationId xmlns:a16="http://schemas.microsoft.com/office/drawing/2014/main" id="{3B2E3793-BFE6-45A2-9B7B-E18844431C99}"/>
+              </a:ext>
+              <a:ext uri="{C183D7F6-B498-43B3-948B-1728B52AA6E4}">
+                <adec:decorative xmlns:adec="http://schemas.microsoft.com/office/drawing/2017/decorative" val="1"/>
+              </a:ext>
+            </a:extLst>
+          </p:cNvPr>
+          <p:cNvSpPr>
+            <a:spLocks noGrp="1" noRot="1" noChangeAspect="1" noMove="1" noResize="1" noEditPoints="1" noAdjustHandles="1" noChangeArrowheads="1" noChangeShapeType="1" noTextEdit="1"/>
+          </p:cNvSpPr>
+          <p:nvPr>
+            <p:extLst>
+              <p:ext uri="{386F3935-93C4-4BCD-93E2-E3B085C9AB24}">
+                <p16:designElem xmlns:p16="http://schemas.microsoft.com/office/powerpoint/2015/main" val="1"/>
+              </p:ext>
+            </p:extLst>
+          </p:nvPr>
+        </p:nvSpPr>
+        <p:spPr>
+          <a:xfrm flipH="1">
+            <a:off x="-1" y="-1"/>
+            <a:ext cx="12191998" cy="1590742"/>
+          </a:xfrm>
+          <a:prstGeom prst="rect">
+            <a:avLst/>
+          </a:prstGeom>
+          <a:gradFill>
+            <a:gsLst>
+              <a:gs pos="0">
+                <a:srgbClr val="000000"/>
+              </a:gs>
+              <a:gs pos="100000">
+                <a:schemeClr val="accent1">
+                  <a:lumMod val="75000"/>
+                </a:schemeClr>
+              </a:gs>
+            </a:gsLst>
+            <a:lin ang="8400000" scaled="0"/>
+          </a:gradFill>
+          <a:ln>
+            <a:noFill/>
+          </a:ln>
+        </p:spPr>
+        <p:style>
+          <a:lnRef idx="2">
+            <a:schemeClr val="accent1">
+              <a:shade val="50000"/>
+            </a:schemeClr>
+          </a:lnRef>
+          <a:fillRef idx="1">
+            <a:schemeClr val="accent1"/>
+          </a:fillRef>
+          <a:effectRef idx="0">
+            <a:schemeClr val="accent1"/>
+          </a:effectRef>
+          <a:fontRef idx="minor">
+            <a:schemeClr val="lt1"/>
+          </a:fontRef>
+        </p:style>
+        <p:txBody>
+          <a:bodyPr rtlCol="0" anchor="ctr"/>
+          <a:lstStyle/>
+          <a:p>
+            <a:pPr algn="ctr"/>
+            <a:endParaRPr lang="en-US"/>
+          </a:p>
+        </p:txBody>
+      </p:sp>
+      <p:sp>
+        <p:nvSpPr>
+          <p:cNvPr id="12" name="Rectangle 11">
+            <a:extLst>
+              <a:ext uri="{FF2B5EF4-FFF2-40B4-BE49-F238E27FC236}">
+                <a16:creationId xmlns:a16="http://schemas.microsoft.com/office/drawing/2014/main" id="{BC4C4868-CB8F-4AF9-9CDB-8108F2C19B67}"/>
+              </a:ext>
+              <a:ext uri="{C183D7F6-B498-43B3-948B-1728B52AA6E4}">
+                <adec:decorative xmlns:adec="http://schemas.microsoft.com/office/drawing/2017/decorative" val="1"/>
+              </a:ext>
+            </a:extLst>
+          </p:cNvPr>
+          <p:cNvSpPr>
+            <a:spLocks noGrp="1" noRot="1" noChangeAspect="1" noMove="1" noResize="1" noEditPoints="1" noAdjustHandles="1" noChangeArrowheads="1" noChangeShapeType="1" noTextEdit="1"/>
+          </p:cNvSpPr>
+          <p:nvPr>
+            <p:extLst>
+              <p:ext uri="{386F3935-93C4-4BCD-93E2-E3B085C9AB24}">
+                <p16:designElem xmlns:p16="http://schemas.microsoft.com/office/powerpoint/2015/main" val="1"/>
+              </p:ext>
+            </p:extLst>
+          </p:nvPr>
+        </p:nvSpPr>
+        <p:spPr>
+          <a:xfrm rot="10800000" flipH="1">
+            <a:off x="-3" y="0"/>
+            <a:ext cx="8115306" cy="1590742"/>
+          </a:xfrm>
+          <a:prstGeom prst="rect">
+            <a:avLst/>
+          </a:prstGeom>
+          <a:gradFill>
+            <a:gsLst>
+              <a:gs pos="20000">
+                <a:schemeClr val="accent1">
+                  <a:alpha val="0"/>
+                </a:schemeClr>
+              </a:gs>
+              <a:gs pos="100000">
+                <a:schemeClr val="accent1">
+                  <a:lumMod val="50000"/>
+                  <a:alpha val="55000"/>
+                </a:schemeClr>
+              </a:gs>
+            </a:gsLst>
+            <a:lin ang="13800000" scaled="0"/>
+          </a:gradFill>
+          <a:ln>
+            <a:noFill/>
+          </a:ln>
+        </p:spPr>
+        <p:style>
+          <a:lnRef idx="2">
+            <a:schemeClr val="accent1">
+              <a:shade val="50000"/>
+            </a:schemeClr>
+          </a:lnRef>
+          <a:fillRef idx="1">
+            <a:schemeClr val="accent1"/>
+          </a:fillRef>
+          <a:effectRef idx="0">
+            <a:schemeClr val="accent1"/>
+          </a:effectRef>
+          <a:fontRef idx="minor">
+            <a:schemeClr val="lt1"/>
+          </a:fontRef>
+        </p:style>
+        <p:txBody>
+          <a:bodyPr rtlCol="0" anchor="ctr"/>
+          <a:lstStyle/>
+          <a:p>
+            <a:pPr algn="ctr"/>
+            <a:endParaRPr lang="en-US"/>
+          </a:p>
+        </p:txBody>
+      </p:sp>
+      <p:sp>
+        <p:nvSpPr>
+          <p:cNvPr id="14" name="Rectangle 13">
+            <a:extLst>
+              <a:ext uri="{FF2B5EF4-FFF2-40B4-BE49-F238E27FC236}">
+                <a16:creationId xmlns:a16="http://schemas.microsoft.com/office/drawing/2014/main" id="{375E0459-6403-40CD-989D-56A4407CA12E}"/>
+              </a:ext>
+              <a:ext uri="{C183D7F6-B498-43B3-948B-1728B52AA6E4}">
+                <adec:decorative xmlns:adec="http://schemas.microsoft.com/office/drawing/2017/decorative" val="1"/>
+              </a:ext>
+            </a:extLst>
+          </p:cNvPr>
+          <p:cNvSpPr>
+            <a:spLocks noGrp="1" noRot="1" noChangeAspect="1" noMove="1" noResize="1" noEditPoints="1" noAdjustHandles="1" noChangeArrowheads="1" noChangeShapeType="1" noTextEdit="1"/>
+          </p:cNvSpPr>
+          <p:nvPr>
+            <p:extLst>
+              <p:ext uri="{386F3935-93C4-4BCD-93E2-E3B085C9AB24}">
+                <p16:designElem xmlns:p16="http://schemas.microsoft.com/office/powerpoint/2015/main" val="1"/>
+              </p:ext>
+            </p:extLst>
+          </p:nvPr>
+        </p:nvSpPr>
+        <p:spPr>
+          <a:xfrm flipH="1">
+            <a:off x="8115299" y="-1"/>
+            <a:ext cx="4076698" cy="1590742"/>
+          </a:xfrm>
+          <a:prstGeom prst="rect">
+            <a:avLst/>
+          </a:prstGeom>
+          <a:gradFill>
+            <a:gsLst>
+              <a:gs pos="0">
+                <a:schemeClr val="accent1">
+                  <a:alpha val="66000"/>
+                </a:schemeClr>
+              </a:gs>
+              <a:gs pos="100000">
+                <a:srgbClr val="000000">
+                  <a:alpha val="30000"/>
+                </a:srgbClr>
+              </a:gs>
+            </a:gsLst>
+            <a:lin ang="13200000" scaled="0"/>
+          </a:gradFill>
+          <a:ln>
+            <a:noFill/>
+          </a:ln>
+        </p:spPr>
+        <p:style>
+          <a:lnRef idx="2">
+            <a:schemeClr val="accent1">
+              <a:shade val="50000"/>
+            </a:schemeClr>
+          </a:lnRef>
+          <a:fillRef idx="1">
+            <a:schemeClr val="accent1"/>
+          </a:fillRef>
+          <a:effectRef idx="0">
+            <a:schemeClr val="accent1"/>
+          </a:effectRef>
+          <a:fontRef idx="minor">
+            <a:schemeClr val="lt1"/>
+          </a:fontRef>
+        </p:style>
+        <p:txBody>
+          <a:bodyPr rtlCol="0" anchor="ctr"/>
+          <a:lstStyle/>
+          <a:p>
+            <a:pPr algn="ctr"/>
+            <a:endParaRPr lang="en-US"/>
+          </a:p>
+        </p:txBody>
+      </p:sp>
+      <p:sp>
+        <p:nvSpPr>
+          <p:cNvPr id="16" name="Rectangle 15">
+            <a:extLst>
+              <a:ext uri="{FF2B5EF4-FFF2-40B4-BE49-F238E27FC236}">
+                <a16:creationId xmlns:a16="http://schemas.microsoft.com/office/drawing/2014/main" id="{53E5B1A8-3AC9-4BD1-9BBC-78CA94F2D1BA}"/>
+              </a:ext>
+              <a:ext uri="{C183D7F6-B498-43B3-948B-1728B52AA6E4}">
+                <adec:decorative xmlns:adec="http://schemas.microsoft.com/office/drawing/2017/decorative" val="1"/>
+              </a:ext>
+            </a:extLst>
+          </p:cNvPr>
+          <p:cNvSpPr>
+            <a:spLocks noGrp="1" noRot="1" noChangeAspect="1" noMove="1" noResize="1" noEditPoints="1" noAdjustHandles="1" noChangeArrowheads="1" noChangeShapeType="1" noTextEdit="1"/>
+          </p:cNvSpPr>
+          <p:nvPr>
+            <p:extLst>
+              <p:ext uri="{386F3935-93C4-4BCD-93E2-E3B085C9AB24}">
+                <p16:designElem xmlns:p16="http://schemas.microsoft.com/office/powerpoint/2015/main" val="1"/>
+              </p:ext>
+            </p:extLst>
+          </p:nvPr>
+        </p:nvSpPr>
+        <p:spPr>
+          <a:xfrm>
+            <a:off x="459350" y="-1"/>
+            <a:ext cx="11732646" cy="1597433"/>
+          </a:xfrm>
+          <a:prstGeom prst="rect">
+            <a:avLst/>
+          </a:prstGeom>
+          <a:gradFill>
+            <a:gsLst>
+              <a:gs pos="50000">
+                <a:srgbClr val="000000">
+                  <a:alpha val="0"/>
+                </a:srgbClr>
+              </a:gs>
+              <a:gs pos="99000">
+                <a:schemeClr val="accent1">
+                  <a:lumMod val="50000"/>
+                  <a:alpha val="52000"/>
+                </a:schemeClr>
+              </a:gs>
+            </a:gsLst>
+            <a:lin ang="16800000" scaled="0"/>
+          </a:gradFill>
+          <a:ln>
+            <a:noFill/>
+          </a:ln>
+        </p:spPr>
+        <p:style>
+          <a:lnRef idx="2">
+            <a:schemeClr val="accent1">
+              <a:shade val="50000"/>
+            </a:schemeClr>
+          </a:lnRef>
+          <a:fillRef idx="1">
+            <a:schemeClr val="accent1"/>
+          </a:fillRef>
+          <a:effectRef idx="0">
+            <a:schemeClr val="accent1"/>
+          </a:effectRef>
+          <a:fontRef idx="minor">
+            <a:schemeClr val="lt1"/>
+          </a:fontRef>
+        </p:style>
+        <p:txBody>
+          <a:bodyPr rtlCol="0" anchor="ctr"/>
+          <a:lstStyle/>
+          <a:p>
+            <a:pPr algn="ctr"/>
+            <a:endParaRPr lang="en-US"/>
+          </a:p>
+        </p:txBody>
+      </p:sp>
+      <p:sp>
+        <p:nvSpPr>
+          <p:cNvPr id="2" name="Title 1">
+            <a:extLst>
+              <a:ext uri="{FF2B5EF4-FFF2-40B4-BE49-F238E27FC236}">
+                <a16:creationId xmlns:a16="http://schemas.microsoft.com/office/drawing/2014/main" id="{BAEBB9E1-117A-0077-012B-4FE1BA4DA1D1}"/>
+              </a:ext>
+            </a:extLst>
+          </p:cNvPr>
+          <p:cNvSpPr>
+            <a:spLocks noGrp="1"/>
+          </p:cNvSpPr>
+          <p:nvPr>
+            <p:ph type="title"/>
+          </p:nvPr>
+        </p:nvSpPr>
+        <p:spPr>
+          <a:xfrm>
+            <a:off x="1371599" y="294538"/>
+            <a:ext cx="9895951" cy="1033669"/>
+          </a:xfrm>
+        </p:spPr>
+        <p:txBody>
+          <a:bodyPr>
+            <a:normAutofit/>
+          </a:bodyPr>
+          <a:lstStyle/>
+          <a:p>
+            <a:r>
+              <a:rPr lang="en-US" sz="4000">
+                <a:solidFill>
+                  <a:srgbClr val="FFFFFF"/>
+                </a:solidFill>
+              </a:rPr>
+              <a:t>Summary</a:t>
+            </a:r>
+            <a:endParaRPr lang="en-150" sz="4000">
+              <a:solidFill>
+                <a:srgbClr val="FFFFFF"/>
+              </a:solidFill>
+            </a:endParaRPr>
+          </a:p>
+        </p:txBody>
+      </p:sp>
+      <p:sp>
+        <p:nvSpPr>
+          <p:cNvPr id="3" name="Content Placeholder 2">
+            <a:extLst>
+              <a:ext uri="{FF2B5EF4-FFF2-40B4-BE49-F238E27FC236}">
+                <a16:creationId xmlns:a16="http://schemas.microsoft.com/office/drawing/2014/main" id="{9B7AD769-5324-7BFE-0BD3-4AFF7CF57314}"/>
+              </a:ext>
+            </a:extLst>
+          </p:cNvPr>
+          <p:cNvSpPr>
+            <a:spLocks noGrp="1"/>
+          </p:cNvSpPr>
+          <p:nvPr>
+            <p:ph idx="1"/>
+          </p:nvPr>
+        </p:nvSpPr>
+        <p:spPr>
+          <a:xfrm>
+            <a:off x="1371599" y="2318197"/>
+            <a:ext cx="9724031" cy="3683358"/>
+          </a:xfrm>
+        </p:spPr>
+        <p:txBody>
+          <a:bodyPr anchor="ctr">
+            <a:normAutofit/>
+          </a:bodyPr>
+          <a:lstStyle/>
+          <a:p>
+            <a:endParaRPr lang="en-150" sz="2000"/>
           </a:p>
         </p:txBody>
       </p:sp>

--- a/IN501_Mai_Robinson_Samos_Turner_Vega_Unit9_Assignment.pptx
+++ b/IN501_Mai_Robinson_Samos_Turner_Vega_Unit9_Assignment.pptx
@@ -11,7 +11,7 @@
     <p:sldId id="261" r:id="rId5"/>
     <p:sldId id="262" r:id="rId6"/>
     <p:sldId id="263" r:id="rId7"/>
-    <p:sldId id="260" r:id="rId8"/>
+    <p:sldId id="265" r:id="rId8"/>
     <p:sldId id="259" r:id="rId9"/>
   </p:sldIdLst>
   <p:sldSz cx="12192000" cy="6858000"/>
@@ -111,15 +111,20 @@
       </a:defRPr>
     </a:lvl9pPr>
   </p:defaultTextStyle>
+  <p:extLst>
+    <p:ext uri="{EFAFB233-063F-42B5-8137-9DF3F51BA10A}">
+      <p15:sldGuideLst xmlns:p15="http://schemas.microsoft.com/office/powerpoint/2012/main"/>
+    </p:ext>
+  </p:extLst>
 </p:presentation>
 </file>
 
 <file path=ppt/revisionInfo.xml><?xml version="1.0" encoding="utf-8"?>
 <p1510:revInfo xmlns:a="http://schemas.openxmlformats.org/drawingml/2006/main" xmlns:r="http://schemas.openxmlformats.org/officeDocument/2006/relationships" xmlns:p1510="http://schemas.microsoft.com/office/powerpoint/2015/10/main">
   <p1510:revLst>
-    <p1510:client id="{3106B81E-A919-496D-9FA4-A8C857C6917F}" v="65" dt="2026-03-07T20:49:40.377"/>
-    <p1510:client id="{4B232746-762D-DE8C-7D01-26173855CD31}" v="294" dt="2026-03-07T20:59:10.562"/>
-    <p1510:client id="{4F8CDE41-BC36-BDCF-6662-9346E004DDBF}" v="6" dt="2026-03-07T20:38:14.909"/>
+    <p1510:client id="{3106B81E-A919-496D-9FA4-A8C857C6917F}" v="16" dt="2026-03-11T01:15:57.652"/>
+    <p1510:client id="{577698A0-1A60-7063-E0B8-2C44C44DF615}" v="148" dt="2026-03-10T12:11:39.229"/>
+    <p1510:client id="{D329C2A9-23FA-8530-4A61-CFC0F5EF7899}" v="1" dt="2026-03-10T05:18:02.227"/>
   </p1510:revLst>
 </p1510:revInfo>
 </file>
@@ -127,9 +132,137 @@
 <file path=ppt/changesInfos/changesInfo1.xml><?xml version="1.0" encoding="utf-8"?>
 <pc:chgInfo xmlns:a="http://schemas.openxmlformats.org/drawingml/2006/main" xmlns:r="http://schemas.openxmlformats.org/officeDocument/2006/relationships" xmlns:ac="http://schemas.microsoft.com/office/drawing/2013/main/command" xmlns:pc="http://schemas.microsoft.com/office/powerpoint/2013/main/command">
   <pc:docChgLst>
+    <pc:chgData name="Guest User" providerId="Windows Live" clId="Web-{4F8CDE41-BC36-BDCF-6662-9346E004DDBF}"/>
+    <pc:docChg chg="addSld modSld">
+      <pc:chgData name="Guest User" userId="" providerId="Windows Live" clId="Web-{4F8CDE41-BC36-BDCF-6662-9346E004DDBF}" dt="2026-03-08T18:59:47.335" v="394" actId="20577"/>
+      <pc:docMkLst>
+        <pc:docMk/>
+      </pc:docMkLst>
+      <pc:sldChg chg="addSp delSp modSp">
+        <pc:chgData name="Guest User" userId="" providerId="Windows Live" clId="Web-{4F8CDE41-BC36-BDCF-6662-9346E004DDBF}" dt="2026-03-08T18:59:47.335" v="394" actId="20577"/>
+        <pc:sldMkLst>
+          <pc:docMk/>
+          <pc:sldMk cId="311887172" sldId="262"/>
+        </pc:sldMkLst>
+        <pc:spChg chg="mod">
+          <ac:chgData name="Guest User" userId="" providerId="Windows Live" clId="Web-{4F8CDE41-BC36-BDCF-6662-9346E004DDBF}" dt="2026-03-08T18:59:47.335" v="394" actId="20577"/>
+          <ac:spMkLst>
+            <pc:docMk/>
+            <pc:sldMk cId="311887172" sldId="262"/>
+            <ac:spMk id="6" creationId="{ECE90CDC-CD48-63CC-4D15-9563C697C7E5}"/>
+          </ac:spMkLst>
+        </pc:spChg>
+        <pc:graphicFrameChg chg="add mod modGraphic">
+          <ac:chgData name="Guest User" userId="" providerId="Windows Live" clId="Web-{4F8CDE41-BC36-BDCF-6662-9346E004DDBF}" dt="2026-03-08T18:49:38.775" v="260"/>
+          <ac:graphicFrameMkLst>
+            <pc:docMk/>
+            <pc:sldMk cId="311887172" sldId="262"/>
+            <ac:graphicFrameMk id="7" creationId="{C014C83C-B42D-F15F-0A27-D8C9CD41FAD6}"/>
+          </ac:graphicFrameMkLst>
+        </pc:graphicFrameChg>
+        <pc:picChg chg="add mod modCrop">
+          <ac:chgData name="Guest User" userId="" providerId="Windows Live" clId="Web-{4F8CDE41-BC36-BDCF-6662-9346E004DDBF}" dt="2026-03-08T18:50:27.779" v="267" actId="1076"/>
+          <ac:picMkLst>
+            <pc:docMk/>
+            <pc:sldMk cId="311887172" sldId="262"/>
+            <ac:picMk id="10" creationId="{F94A079D-C04F-7921-EB3F-20B43A83855D}"/>
+          </ac:picMkLst>
+        </pc:picChg>
+        <pc:picChg chg="add mod modCrop">
+          <ac:chgData name="Guest User" userId="" providerId="Windows Live" clId="Web-{4F8CDE41-BC36-BDCF-6662-9346E004DDBF}" dt="2026-03-08T18:50:22.513" v="265" actId="1076"/>
+          <ac:picMkLst>
+            <pc:docMk/>
+            <pc:sldMk cId="311887172" sldId="262"/>
+            <ac:picMk id="12" creationId="{CDBC54CA-4859-0F94-EEA1-1F9796BB69BB}"/>
+          </ac:picMkLst>
+        </pc:picChg>
+      </pc:sldChg>
+    </pc:docChg>
+  </pc:docChgLst>
+  <pc:docChgLst>
+    <pc:chgData name="Guest User" providerId="Windows Live" clId="Web-{D329C2A9-23FA-8530-4A61-CFC0F5EF7899}"/>
+    <pc:docChg chg="delSld">
+      <pc:chgData name="Guest User" userId="" providerId="Windows Live" clId="Web-{D329C2A9-23FA-8530-4A61-CFC0F5EF7899}" dt="2026-03-10T05:18:02.227" v="0"/>
+      <pc:docMkLst>
+        <pc:docMk/>
+      </pc:docMkLst>
+      <pc:sldChg chg="del">
+        <pc:chgData name="Guest User" userId="" providerId="Windows Live" clId="Web-{D329C2A9-23FA-8530-4A61-CFC0F5EF7899}" dt="2026-03-10T05:18:02.227" v="0"/>
+        <pc:sldMkLst>
+          <pc:docMk/>
+          <pc:sldMk cId="3910318035" sldId="260"/>
+        </pc:sldMkLst>
+      </pc:sldChg>
+    </pc:docChg>
+  </pc:docChgLst>
+  <pc:docChgLst>
+    <pc:chgData name="Guest User" providerId="Windows Live" clId="Web-{577698A0-1A60-7063-E0B8-2C44C44DF615}"/>
+    <pc:docChg chg="addSld modSld sldOrd">
+      <pc:chgData name="Guest User" userId="" providerId="Windows Live" clId="Web-{577698A0-1A60-7063-E0B8-2C44C44DF615}" dt="2026-03-10T12:12:16.182" v="152"/>
+      <pc:docMkLst>
+        <pc:docMk/>
+      </pc:docMkLst>
+      <pc:sldChg chg="addSp modSp new mod ord setBg">
+        <pc:chgData name="Guest User" userId="" providerId="Windows Live" clId="Web-{577698A0-1A60-7063-E0B8-2C44C44DF615}" dt="2026-03-10T12:12:16.182" v="152"/>
+        <pc:sldMkLst>
+          <pc:docMk/>
+          <pc:sldMk cId="3143798579" sldId="264"/>
+        </pc:sldMkLst>
+        <pc:spChg chg="mod">
+          <ac:chgData name="Guest User" userId="" providerId="Windows Live" clId="Web-{577698A0-1A60-7063-E0B8-2C44C44DF615}" dt="2026-03-10T12:12:16.182" v="152"/>
+          <ac:spMkLst>
+            <pc:docMk/>
+            <pc:sldMk cId="3143798579" sldId="264"/>
+            <ac:spMk id="2" creationId="{80120BF1-958B-BFA8-9449-CAF203C3E6EF}"/>
+          </ac:spMkLst>
+        </pc:spChg>
+        <pc:spChg chg="mod">
+          <ac:chgData name="Guest User" userId="" providerId="Windows Live" clId="Web-{577698A0-1A60-7063-E0B8-2C44C44DF615}" dt="2026-03-10T12:12:16.182" v="152"/>
+          <ac:spMkLst>
+            <pc:docMk/>
+            <pc:sldMk cId="3143798579" sldId="264"/>
+            <ac:spMk id="3" creationId="{55B4B20D-E33F-3BA8-33B6-853552CC5339}"/>
+          </ac:spMkLst>
+        </pc:spChg>
+        <pc:spChg chg="add">
+          <ac:chgData name="Guest User" userId="" providerId="Windows Live" clId="Web-{577698A0-1A60-7063-E0B8-2C44C44DF615}" dt="2026-03-10T12:12:16.182" v="152"/>
+          <ac:spMkLst>
+            <pc:docMk/>
+            <pc:sldMk cId="3143798579" sldId="264"/>
+            <ac:spMk id="10" creationId="{B6FACB3C-9069-4791-BC5C-0DB7CD19B853}"/>
+          </ac:spMkLst>
+        </pc:spChg>
+        <pc:spChg chg="add">
+          <ac:chgData name="Guest User" userId="" providerId="Windows Live" clId="Web-{577698A0-1A60-7063-E0B8-2C44C44DF615}" dt="2026-03-10T12:12:16.182" v="152"/>
+          <ac:spMkLst>
+            <pc:docMk/>
+            <pc:sldMk cId="3143798579" sldId="264"/>
+            <ac:spMk id="12" creationId="{71F2038E-D777-4B76-81DD-DD13EE91B9DD}"/>
+          </ac:spMkLst>
+        </pc:spChg>
+        <pc:grpChg chg="add">
+          <ac:chgData name="Guest User" userId="" providerId="Windows Live" clId="Web-{577698A0-1A60-7063-E0B8-2C44C44DF615}" dt="2026-03-10T12:12:16.182" v="152"/>
+          <ac:grpSpMkLst>
+            <pc:docMk/>
+            <pc:sldMk cId="3143798579" sldId="264"/>
+            <ac:grpSpMk id="14" creationId="{DD354807-230F-4402-B1B9-F733A8F1F190}"/>
+          </ac:grpSpMkLst>
+        </pc:grpChg>
+        <pc:graphicFrameChg chg="add mod modGraphic">
+          <ac:chgData name="Guest User" userId="" providerId="Windows Live" clId="Web-{577698A0-1A60-7063-E0B8-2C44C44DF615}" dt="2026-03-10T12:12:16.182" v="152"/>
+          <ac:graphicFrameMkLst>
+            <pc:docMk/>
+            <pc:sldMk cId="3143798579" sldId="264"/>
+            <ac:graphicFrameMk id="5" creationId="{D1FFC06C-AA64-9BCD-F1D8-AAF549EC052C}"/>
+          </ac:graphicFrameMkLst>
+        </pc:graphicFrameChg>
+      </pc:sldChg>
+    </pc:docChg>
+  </pc:docChgLst>
+  <pc:docChgLst>
     <pc:chgData name="Elliot Mai" userId="1c49b37007f9488b" providerId="LiveId" clId="{3EDB10E2-DA7D-4765-B207-53B47556FA45}"/>
-    <pc:docChg chg="undo custSel addSld delSld modSld">
-      <pc:chgData name="Elliot Mai" userId="1c49b37007f9488b" providerId="LiveId" clId="{3EDB10E2-DA7D-4765-B207-53B47556FA45}" dt="2026-03-07T20:49:40.377" v="351" actId="20577"/>
+    <pc:docChg chg="undo redo custSel addSld delSld modSld">
+      <pc:chgData name="Elliot Mai" userId="1c49b37007f9488b" providerId="LiveId" clId="{3EDB10E2-DA7D-4765-B207-53B47556FA45}" dt="2026-03-11T01:17:16.075" v="512" actId="403"/>
       <pc:docMkLst>
         <pc:docMk/>
       </pc:docMkLst>
@@ -205,13 +338,13 @@
         </pc:spChg>
       </pc:sldChg>
       <pc:sldChg chg="addSp delSp modSp new mod setBg modClrScheme addAnim delDesignElem chgLayout">
-        <pc:chgData name="Elliot Mai" userId="1c49b37007f9488b" providerId="LiveId" clId="{3EDB10E2-DA7D-4765-B207-53B47556FA45}" dt="2026-03-05T02:15:28.449" v="241" actId="20577"/>
+        <pc:chgData name="Elliot Mai" userId="1c49b37007f9488b" providerId="LiveId" clId="{3EDB10E2-DA7D-4765-B207-53B47556FA45}" dt="2026-03-07T21:19:14.019" v="437" actId="1076"/>
         <pc:sldMkLst>
           <pc:docMk/>
           <pc:sldMk cId="1909686191" sldId="257"/>
         </pc:sldMkLst>
         <pc:spChg chg="mod ord">
-          <ac:chgData name="Elliot Mai" userId="1c49b37007f9488b" providerId="LiveId" clId="{3EDB10E2-DA7D-4765-B207-53B47556FA45}" dt="2026-03-05T02:15:22.654" v="231" actId="26606"/>
+          <ac:chgData name="Elliot Mai" userId="1c49b37007f9488b" providerId="LiveId" clId="{3EDB10E2-DA7D-4765-B207-53B47556FA45}" dt="2026-03-07T21:13:58.735" v="375" actId="26606"/>
           <ac:spMkLst>
             <pc:docMk/>
             <pc:sldMk cId="1909686191" sldId="257"/>
@@ -219,56 +352,72 @@
           </ac:spMkLst>
         </pc:spChg>
         <pc:spChg chg="add mod ord">
-          <ac:chgData name="Elliot Mai" userId="1c49b37007f9488b" providerId="LiveId" clId="{3EDB10E2-DA7D-4765-B207-53B47556FA45}" dt="2026-03-05T02:15:28.449" v="241" actId="20577"/>
+          <ac:chgData name="Elliot Mai" userId="1c49b37007f9488b" providerId="LiveId" clId="{3EDB10E2-DA7D-4765-B207-53B47556FA45}" dt="2026-03-07T21:18:54.676" v="435" actId="14100"/>
           <ac:spMkLst>
             <pc:docMk/>
             <pc:sldMk cId="1909686191" sldId="257"/>
             <ac:spMk id="4" creationId="{C2BF2A73-CB38-4C3C-B0DF-AFB619494CC3}"/>
           </ac:spMkLst>
         </pc:spChg>
-        <pc:spChg chg="add">
-          <ac:chgData name="Elliot Mai" userId="1c49b37007f9488b" providerId="LiveId" clId="{3EDB10E2-DA7D-4765-B207-53B47556FA45}" dt="2026-03-05T02:15:22.654" v="231" actId="26606"/>
+        <pc:spChg chg="add mod">
+          <ac:chgData name="Elliot Mai" userId="1c49b37007f9488b" providerId="LiveId" clId="{3EDB10E2-DA7D-4765-B207-53B47556FA45}" dt="2026-03-07T21:18:13.909" v="422" actId="14100"/>
           <ac:spMkLst>
             <pc:docMk/>
             <pc:sldMk cId="1909686191" sldId="257"/>
-            <ac:spMk id="15" creationId="{375E0459-6403-40CD-989D-56A4407CA12E}"/>
+            <ac:spMk id="11" creationId="{C872659E-7831-5A60-EDD2-D7C382D4F38F}"/>
           </ac:spMkLst>
         </pc:spChg>
         <pc:spChg chg="add">
-          <ac:chgData name="Elliot Mai" userId="1c49b37007f9488b" providerId="LiveId" clId="{3EDB10E2-DA7D-4765-B207-53B47556FA45}" dt="2026-03-05T02:15:22.654" v="231" actId="26606"/>
+          <ac:chgData name="Elliot Mai" userId="1c49b37007f9488b" providerId="LiveId" clId="{3EDB10E2-DA7D-4765-B207-53B47556FA45}" dt="2026-03-07T21:13:58.735" v="375" actId="26606"/>
           <ac:spMkLst>
             <pc:docMk/>
             <pc:sldMk cId="1909686191" sldId="257"/>
-            <ac:spMk id="17" creationId="{53E5B1A8-3AC9-4BD1-9BBC-78CA94F2D1BA}"/>
+            <ac:spMk id="27" creationId="{5184EE59-3061-456B-9FB5-98A8E0E74B02}"/>
           </ac:spMkLst>
         </pc:spChg>
         <pc:spChg chg="add">
-          <ac:chgData name="Elliot Mai" userId="1c49b37007f9488b" providerId="LiveId" clId="{3EDB10E2-DA7D-4765-B207-53B47556FA45}" dt="2026-03-05T02:15:22.654" v="231" actId="26606"/>
+          <ac:chgData name="Elliot Mai" userId="1c49b37007f9488b" providerId="LiveId" clId="{3EDB10E2-DA7D-4765-B207-53B47556FA45}" dt="2026-03-07T21:13:58.735" v="375" actId="26606"/>
           <ac:spMkLst>
             <pc:docMk/>
             <pc:sldMk cId="1909686191" sldId="257"/>
-            <ac:spMk id="18" creationId="{1B15ED52-F352-441B-82BF-E0EA34836D08}"/>
+            <ac:spMk id="29" creationId="{F7E07B5E-9FB5-4C91-8BE4-6167EB58D0A7}"/>
           </ac:spMkLst>
         </pc:spChg>
         <pc:spChg chg="add">
-          <ac:chgData name="Elliot Mai" userId="1c49b37007f9488b" providerId="LiveId" clId="{3EDB10E2-DA7D-4765-B207-53B47556FA45}" dt="2026-03-05T02:15:22.654" v="231" actId="26606"/>
+          <ac:chgData name="Elliot Mai" userId="1c49b37007f9488b" providerId="LiveId" clId="{3EDB10E2-DA7D-4765-B207-53B47556FA45}" dt="2026-03-07T21:13:58.735" v="375" actId="26606"/>
           <ac:spMkLst>
             <pc:docMk/>
             <pc:sldMk cId="1909686191" sldId="257"/>
-            <ac:spMk id="19" creationId="{3B2E3793-BFE6-45A2-9B7B-E18844431C99}"/>
+            <ac:spMk id="31" creationId="{37524947-EB09-4DD9-973B-9F75BBCD7269}"/>
           </ac:spMkLst>
         </pc:spChg>
         <pc:spChg chg="add">
-          <ac:chgData name="Elliot Mai" userId="1c49b37007f9488b" providerId="LiveId" clId="{3EDB10E2-DA7D-4765-B207-53B47556FA45}" dt="2026-03-05T02:15:22.654" v="231" actId="26606"/>
+          <ac:chgData name="Elliot Mai" userId="1c49b37007f9488b" providerId="LiveId" clId="{3EDB10E2-DA7D-4765-B207-53B47556FA45}" dt="2026-03-07T21:13:58.735" v="375" actId="26606"/>
           <ac:spMkLst>
             <pc:docMk/>
             <pc:sldMk cId="1909686191" sldId="257"/>
-            <ac:spMk id="20" creationId="{BC4C4868-CB8F-4AF9-9CDB-8108F2C19B67}"/>
+            <ac:spMk id="35" creationId="{BC57EA3C-C239-4132-A618-5CBE9F896B2F}"/>
           </ac:spMkLst>
         </pc:spChg>
+        <pc:picChg chg="add mod modCrop">
+          <ac:chgData name="Elliot Mai" userId="1c49b37007f9488b" providerId="LiveId" clId="{3EDB10E2-DA7D-4765-B207-53B47556FA45}" dt="2026-03-07T21:19:14.019" v="437" actId="1076"/>
+          <ac:picMkLst>
+            <pc:docMk/>
+            <pc:sldMk cId="1909686191" sldId="257"/>
+            <ac:picMk id="5" creationId="{794F0AB5-F22B-D3D8-69A2-48E52CEAD532}"/>
+          </ac:picMkLst>
+        </pc:picChg>
+        <pc:picChg chg="add mod modCrop">
+          <ac:chgData name="Elliot Mai" userId="1c49b37007f9488b" providerId="LiveId" clId="{3EDB10E2-DA7D-4765-B207-53B47556FA45}" dt="2026-03-07T21:18:37.963" v="427" actId="1076"/>
+          <ac:picMkLst>
+            <pc:docMk/>
+            <pc:sldMk cId="1909686191" sldId="257"/>
+            <ac:picMk id="7" creationId="{A50F79F1-1DC7-48B2-93E9-04CCA5B16C41}"/>
+          </ac:picMkLst>
+        </pc:picChg>
       </pc:sldChg>
       <pc:sldChg chg="addSp delSp modSp new mod setBg modClrScheme chgLayout">
-        <pc:chgData name="Elliot Mai" userId="1c49b37007f9488b" providerId="LiveId" clId="{3EDB10E2-DA7D-4765-B207-53B47556FA45}" dt="2026-03-07T20:48:40.472" v="304" actId="20577"/>
+        <pc:chgData name="Elliot Mai" userId="1c49b37007f9488b" providerId="LiveId" clId="{3EDB10E2-DA7D-4765-B207-53B47556FA45}" dt="2026-03-10T23:48:34.355" v="475"/>
         <pc:sldMkLst>
           <pc:docMk/>
           <pc:sldMk cId="1823981096" sldId="258"/>
@@ -329,23 +478,31 @@
             <ac:spMk id="32" creationId="{53E5B1A8-3AC9-4BD1-9BBC-78CA94F2D1BA}"/>
           </ac:spMkLst>
         </pc:spChg>
+        <pc:graphicFrameChg chg="mod">
+          <ac:chgData name="Elliot Mai" userId="1c49b37007f9488b" providerId="LiveId" clId="{3EDB10E2-DA7D-4765-B207-53B47556FA45}" dt="2026-03-10T23:48:34.355" v="475"/>
+          <ac:graphicFrameMkLst>
+            <pc:docMk/>
+            <pc:sldMk cId="1823981096" sldId="258"/>
+            <ac:graphicFrameMk id="2" creationId="{97FBE674-9B9D-3B6A-DD4F-0E9E0EB4B527}"/>
+          </ac:graphicFrameMkLst>
+        </pc:graphicFrameChg>
       </pc:sldChg>
-      <pc:sldChg chg="addSp modSp new mod setBg addAnim">
-        <pc:chgData name="Elliot Mai" userId="1c49b37007f9488b" providerId="LiveId" clId="{3EDB10E2-DA7D-4765-B207-53B47556FA45}" dt="2026-03-05T02:16:57.704" v="271" actId="20577"/>
+      <pc:sldChg chg="addSp delSp modSp new mod setBg addAnim">
+        <pc:chgData name="Elliot Mai" userId="1c49b37007f9488b" providerId="LiveId" clId="{3EDB10E2-DA7D-4765-B207-53B47556FA45}" dt="2026-03-11T01:17:16.075" v="512" actId="403"/>
         <pc:sldMkLst>
           <pc:docMk/>
           <pc:sldMk cId="1917191119" sldId="259"/>
         </pc:sldMkLst>
         <pc:spChg chg="mod">
-          <ac:chgData name="Elliot Mai" userId="1c49b37007f9488b" providerId="LiveId" clId="{3EDB10E2-DA7D-4765-B207-53B47556FA45}" dt="2026-03-05T02:16:52.668" v="269" actId="26606"/>
+          <ac:chgData name="Elliot Mai" userId="1c49b37007f9488b" providerId="LiveId" clId="{3EDB10E2-DA7D-4765-B207-53B47556FA45}" dt="2026-03-11T01:16:20.404" v="495" actId="26606"/>
           <ac:spMkLst>
             <pc:docMk/>
             <pc:sldMk cId="1917191119" sldId="259"/>
             <ac:spMk id="2" creationId="{BAEBB9E1-117A-0077-012B-4FE1BA4DA1D1}"/>
           </ac:spMkLst>
         </pc:spChg>
-        <pc:spChg chg="mod">
-          <ac:chgData name="Elliot Mai" userId="1c49b37007f9488b" providerId="LiveId" clId="{3EDB10E2-DA7D-4765-B207-53B47556FA45}" dt="2026-03-05T02:16:57.704" v="271" actId="20577"/>
+        <pc:spChg chg="add del mod">
+          <ac:chgData name="Elliot Mai" userId="1c49b37007f9488b" providerId="LiveId" clId="{3EDB10E2-DA7D-4765-B207-53B47556FA45}" dt="2026-03-11T01:16:20.439" v="496" actId="26606"/>
           <ac:spMkLst>
             <pc:docMk/>
             <pc:sldMk cId="1917191119" sldId="259"/>
@@ -360,38 +517,118 @@
             <ac:spMk id="8" creationId="{1B15ED52-F352-441B-82BF-E0EA34836D08}"/>
           </ac:spMkLst>
         </pc:spChg>
-        <pc:spChg chg="add">
-          <ac:chgData name="Elliot Mai" userId="1c49b37007f9488b" providerId="LiveId" clId="{3EDB10E2-DA7D-4765-B207-53B47556FA45}" dt="2026-03-05T02:16:52.668" v="269" actId="26606"/>
+        <pc:spChg chg="add del">
+          <ac:chgData name="Elliot Mai" userId="1c49b37007f9488b" providerId="LiveId" clId="{3EDB10E2-DA7D-4765-B207-53B47556FA45}" dt="2026-03-11T01:16:20.439" v="496" actId="26606"/>
           <ac:spMkLst>
             <pc:docMk/>
             <pc:sldMk cId="1917191119" sldId="259"/>
             <ac:spMk id="10" creationId="{3B2E3793-BFE6-45A2-9B7B-E18844431C99}"/>
           </ac:spMkLst>
         </pc:spChg>
-        <pc:spChg chg="add">
-          <ac:chgData name="Elliot Mai" userId="1c49b37007f9488b" providerId="LiveId" clId="{3EDB10E2-DA7D-4765-B207-53B47556FA45}" dt="2026-03-05T02:16:52.668" v="269" actId="26606"/>
+        <pc:spChg chg="add del">
+          <ac:chgData name="Elliot Mai" userId="1c49b37007f9488b" providerId="LiveId" clId="{3EDB10E2-DA7D-4765-B207-53B47556FA45}" dt="2026-03-11T01:16:20.439" v="496" actId="26606"/>
           <ac:spMkLst>
             <pc:docMk/>
             <pc:sldMk cId="1917191119" sldId="259"/>
             <ac:spMk id="12" creationId="{BC4C4868-CB8F-4AF9-9CDB-8108F2C19B67}"/>
           </ac:spMkLst>
         </pc:spChg>
-        <pc:spChg chg="add">
-          <ac:chgData name="Elliot Mai" userId="1c49b37007f9488b" providerId="LiveId" clId="{3EDB10E2-DA7D-4765-B207-53B47556FA45}" dt="2026-03-05T02:16:52.668" v="269" actId="26606"/>
+        <pc:spChg chg="add del">
+          <ac:chgData name="Elliot Mai" userId="1c49b37007f9488b" providerId="LiveId" clId="{3EDB10E2-DA7D-4765-B207-53B47556FA45}" dt="2026-03-11T01:16:20.439" v="496" actId="26606"/>
           <ac:spMkLst>
             <pc:docMk/>
             <pc:sldMk cId="1917191119" sldId="259"/>
             <ac:spMk id="14" creationId="{375E0459-6403-40CD-989D-56A4407CA12E}"/>
           </ac:spMkLst>
         </pc:spChg>
-        <pc:spChg chg="add">
-          <ac:chgData name="Elliot Mai" userId="1c49b37007f9488b" providerId="LiveId" clId="{3EDB10E2-DA7D-4765-B207-53B47556FA45}" dt="2026-03-05T02:16:52.668" v="269" actId="26606"/>
+        <pc:spChg chg="add del">
+          <ac:chgData name="Elliot Mai" userId="1c49b37007f9488b" providerId="LiveId" clId="{3EDB10E2-DA7D-4765-B207-53B47556FA45}" dt="2026-03-11T01:16:20.439" v="496" actId="26606"/>
           <ac:spMkLst>
             <pc:docMk/>
             <pc:sldMk cId="1917191119" sldId="259"/>
             <ac:spMk id="16" creationId="{53E5B1A8-3AC9-4BD1-9BBC-78CA94F2D1BA}"/>
           </ac:spMkLst>
         </pc:spChg>
+        <pc:spChg chg="add del">
+          <ac:chgData name="Elliot Mai" userId="1c49b37007f9488b" providerId="LiveId" clId="{3EDB10E2-DA7D-4765-B207-53B47556FA45}" dt="2026-03-11T01:16:20.404" v="495" actId="26606"/>
+          <ac:spMkLst>
+            <pc:docMk/>
+            <pc:sldMk cId="1917191119" sldId="259"/>
+            <ac:spMk id="22" creationId="{BACC6370-2D7E-4714-9D71-7542949D7D5D}"/>
+          </ac:spMkLst>
+        </pc:spChg>
+        <pc:spChg chg="add del">
+          <ac:chgData name="Elliot Mai" userId="1c49b37007f9488b" providerId="LiveId" clId="{3EDB10E2-DA7D-4765-B207-53B47556FA45}" dt="2026-03-11T01:16:20.404" v="495" actId="26606"/>
+          <ac:spMkLst>
+            <pc:docMk/>
+            <pc:sldMk cId="1917191119" sldId="259"/>
+            <ac:spMk id="26" creationId="{3847E18C-932D-4C95-AABA-FEC7C9499AD7}"/>
+          </ac:spMkLst>
+        </pc:spChg>
+        <pc:spChg chg="add del">
+          <ac:chgData name="Elliot Mai" userId="1c49b37007f9488b" providerId="LiveId" clId="{3EDB10E2-DA7D-4765-B207-53B47556FA45}" dt="2026-03-11T01:16:20.404" v="495" actId="26606"/>
+          <ac:spMkLst>
+            <pc:docMk/>
+            <pc:sldMk cId="1917191119" sldId="259"/>
+            <ac:spMk id="30" creationId="{43F8A58B-5155-44CE-A5FF-7647B47D0A7A}"/>
+          </ac:spMkLst>
+        </pc:spChg>
+        <pc:spChg chg="add del">
+          <ac:chgData name="Elliot Mai" userId="1c49b37007f9488b" providerId="LiveId" clId="{3EDB10E2-DA7D-4765-B207-53B47556FA45}" dt="2026-03-11T01:16:20.404" v="495" actId="26606"/>
+          <ac:spMkLst>
+            <pc:docMk/>
+            <pc:sldMk cId="1917191119" sldId="259"/>
+            <ac:spMk id="32" creationId="{443F2ACA-E6D6-4028-82DD-F03C262D5DE6}"/>
+          </ac:spMkLst>
+        </pc:spChg>
+        <pc:spChg chg="add">
+          <ac:chgData name="Elliot Mai" userId="1c49b37007f9488b" providerId="LiveId" clId="{3EDB10E2-DA7D-4765-B207-53B47556FA45}" dt="2026-03-11T01:16:20.439" v="496" actId="26606"/>
+          <ac:spMkLst>
+            <pc:docMk/>
+            <pc:sldMk cId="1917191119" sldId="259"/>
+            <ac:spMk id="34" creationId="{1B15ED52-F352-441B-82BF-E0EA34836D08}"/>
+          </ac:spMkLst>
+        </pc:spChg>
+        <pc:spChg chg="add">
+          <ac:chgData name="Elliot Mai" userId="1c49b37007f9488b" providerId="LiveId" clId="{3EDB10E2-DA7D-4765-B207-53B47556FA45}" dt="2026-03-11T01:16:20.439" v="496" actId="26606"/>
+          <ac:spMkLst>
+            <pc:docMk/>
+            <pc:sldMk cId="1917191119" sldId="259"/>
+            <ac:spMk id="35" creationId="{3B2E3793-BFE6-45A2-9B7B-E18844431C99}"/>
+          </ac:spMkLst>
+        </pc:spChg>
+        <pc:spChg chg="add">
+          <ac:chgData name="Elliot Mai" userId="1c49b37007f9488b" providerId="LiveId" clId="{3EDB10E2-DA7D-4765-B207-53B47556FA45}" dt="2026-03-11T01:16:20.439" v="496" actId="26606"/>
+          <ac:spMkLst>
+            <pc:docMk/>
+            <pc:sldMk cId="1917191119" sldId="259"/>
+            <ac:spMk id="36" creationId="{BC4C4868-CB8F-4AF9-9CDB-8108F2C19B67}"/>
+          </ac:spMkLst>
+        </pc:spChg>
+        <pc:spChg chg="add">
+          <ac:chgData name="Elliot Mai" userId="1c49b37007f9488b" providerId="LiveId" clId="{3EDB10E2-DA7D-4765-B207-53B47556FA45}" dt="2026-03-11T01:16:20.439" v="496" actId="26606"/>
+          <ac:spMkLst>
+            <pc:docMk/>
+            <pc:sldMk cId="1917191119" sldId="259"/>
+            <ac:spMk id="37" creationId="{375E0459-6403-40CD-989D-56A4407CA12E}"/>
+          </ac:spMkLst>
+        </pc:spChg>
+        <pc:spChg chg="add">
+          <ac:chgData name="Elliot Mai" userId="1c49b37007f9488b" providerId="LiveId" clId="{3EDB10E2-DA7D-4765-B207-53B47556FA45}" dt="2026-03-11T01:16:20.439" v="496" actId="26606"/>
+          <ac:spMkLst>
+            <pc:docMk/>
+            <pc:sldMk cId="1917191119" sldId="259"/>
+            <ac:spMk id="38" creationId="{53E5B1A8-3AC9-4BD1-9BBC-78CA94F2D1BA}"/>
+          </ac:spMkLst>
+        </pc:spChg>
+        <pc:graphicFrameChg chg="mod modGraphic">
+          <ac:chgData name="Elliot Mai" userId="1c49b37007f9488b" providerId="LiveId" clId="{3EDB10E2-DA7D-4765-B207-53B47556FA45}" dt="2026-03-11T01:17:16.075" v="512" actId="403"/>
+          <ac:graphicFrameMkLst>
+            <pc:docMk/>
+            <pc:sldMk cId="1917191119" sldId="259"/>
+            <ac:graphicFrameMk id="39" creationId="{3A054AE5-A1BF-BD60-2138-EF539969EEC2}"/>
+          </ac:graphicFrameMkLst>
+        </pc:graphicFrameChg>
       </pc:sldChg>
       <pc:sldChg chg="modSp add mod">
         <pc:chgData name="Elliot Mai" userId="1c49b37007f9488b" providerId="LiveId" clId="{3EDB10E2-DA7D-4765-B207-53B47556FA45}" dt="2026-03-07T20:49:13.416" v="324" actId="20577"/>
@@ -409,7 +646,7 @@
         </pc:spChg>
       </pc:sldChg>
       <pc:sldChg chg="modSp add mod">
-        <pc:chgData name="Elliot Mai" userId="1c49b37007f9488b" providerId="LiveId" clId="{3EDB10E2-DA7D-4765-B207-53B47556FA45}" dt="2026-03-07T20:49:29.571" v="338" actId="20577"/>
+        <pc:chgData name="Elliot Mai" userId="1c49b37007f9488b" providerId="LiveId" clId="{3EDB10E2-DA7D-4765-B207-53B47556FA45}" dt="2026-03-10T23:49:36.210" v="483" actId="12385"/>
         <pc:sldMkLst>
           <pc:docMk/>
           <pc:sldMk cId="311887172" sldId="262"/>
@@ -422,9 +659,17 @@
             <ac:spMk id="4" creationId="{7F259041-F5AF-4E81-84C2-467F68486086}"/>
           </ac:spMkLst>
         </pc:spChg>
+        <pc:graphicFrameChg chg="modGraphic">
+          <ac:chgData name="Elliot Mai" userId="1c49b37007f9488b" providerId="LiveId" clId="{3EDB10E2-DA7D-4765-B207-53B47556FA45}" dt="2026-03-10T23:49:36.210" v="483" actId="12385"/>
+          <ac:graphicFrameMkLst>
+            <pc:docMk/>
+            <pc:sldMk cId="311887172" sldId="262"/>
+            <ac:graphicFrameMk id="7" creationId="{C014C83C-B42D-F15F-0A27-D8C9CD41FAD6}"/>
+          </ac:graphicFrameMkLst>
+        </pc:graphicFrameChg>
       </pc:sldChg>
-      <pc:sldChg chg="modSp add mod">
-        <pc:chgData name="Elliot Mai" userId="1c49b37007f9488b" providerId="LiveId" clId="{3EDB10E2-DA7D-4765-B207-53B47556FA45}" dt="2026-03-07T20:49:40.377" v="351" actId="20577"/>
+      <pc:sldChg chg="addSp modSp add mod">
+        <pc:chgData name="Elliot Mai" userId="1c49b37007f9488b" providerId="LiveId" clId="{3EDB10E2-DA7D-4765-B207-53B47556FA45}" dt="2026-03-07T21:10:15.671" v="371" actId="166"/>
         <pc:sldMkLst>
           <pc:docMk/>
           <pc:sldMk cId="1688651266" sldId="263"/>
@@ -437,28 +682,167 @@
             <ac:spMk id="4" creationId="{231F8F56-FF93-B428-6088-9DEAC89E5C04}"/>
           </ac:spMkLst>
         </pc:spChg>
+        <pc:spChg chg="mod ord">
+          <ac:chgData name="Elliot Mai" userId="1c49b37007f9488b" providerId="LiveId" clId="{3EDB10E2-DA7D-4765-B207-53B47556FA45}" dt="2026-03-07T21:10:15.671" v="371" actId="166"/>
+          <ac:spMkLst>
+            <pc:docMk/>
+            <pc:sldMk cId="1688651266" sldId="263"/>
+            <ac:spMk id="6" creationId="{53BDE638-0B07-6572-0623-44A0C9BCEAA8}"/>
+          </ac:spMkLst>
+        </pc:spChg>
+        <pc:picChg chg="add mod">
+          <ac:chgData name="Elliot Mai" userId="1c49b37007f9488b" providerId="LiveId" clId="{3EDB10E2-DA7D-4765-B207-53B47556FA45}" dt="2026-03-07T21:10:10.486" v="370" actId="1076"/>
+          <ac:picMkLst>
+            <pc:docMk/>
+            <pc:sldMk cId="1688651266" sldId="263"/>
+            <ac:picMk id="3" creationId="{FF40C100-B6A3-EDB3-F7AD-007ABD7FD925}"/>
+          </ac:picMkLst>
+        </pc:picChg>
       </pc:sldChg>
-    </pc:docChg>
-  </pc:docChgLst>
-  <pc:docChgLst>
-    <pc:chgData name="Guest User" providerId="Windows Live" clId="Web-{4F8CDE41-BC36-BDCF-6662-9346E004DDBF}"/>
-    <pc:docChg chg="addSld modSld">
-      <pc:chgData name="Guest User" userId="" providerId="Windows Live" clId="Web-{4F8CDE41-BC36-BDCF-6662-9346E004DDBF}" dt="2026-03-07T20:38:14.909" v="5" actId="20577"/>
-      <pc:docMkLst>
-        <pc:docMk/>
-      </pc:docMkLst>
-      <pc:sldChg chg="modSp add replId">
-        <pc:chgData name="Guest User" userId="" providerId="Windows Live" clId="Web-{4F8CDE41-BC36-BDCF-6662-9346E004DDBF}" dt="2026-03-07T20:38:14.909" v="5" actId="20577"/>
+      <pc:sldChg chg="del">
+        <pc:chgData name="Elliot Mai" userId="1c49b37007f9488b" providerId="LiveId" clId="{3EDB10E2-DA7D-4765-B207-53B47556FA45}" dt="2026-03-10T23:51:05.324" v="491" actId="2696"/>
         <pc:sldMkLst>
           <pc:docMk/>
-          <pc:sldMk cId="3910318035" sldId="260"/>
+          <pc:sldMk cId="3143798579" sldId="264"/>
+        </pc:sldMkLst>
+      </pc:sldChg>
+      <pc:sldChg chg="delSp add del setBg delDesignElem">
+        <pc:chgData name="Elliot Mai" userId="1c49b37007f9488b" providerId="LiveId" clId="{3EDB10E2-DA7D-4765-B207-53B47556FA45}" dt="2026-03-10T23:46:21.714" v="442" actId="2696"/>
+        <pc:sldMkLst>
+          <pc:docMk/>
+          <pc:sldMk cId="1189908222" sldId="265"/>
+        </pc:sldMkLst>
+        <pc:spChg chg="del">
+          <ac:chgData name="Elliot Mai" userId="1c49b37007f9488b" providerId="LiveId" clId="{3EDB10E2-DA7D-4765-B207-53B47556FA45}" dt="2026-03-10T23:46:11.441" v="441"/>
+          <ac:spMkLst>
+            <pc:docMk/>
+            <pc:sldMk cId="1189908222" sldId="265"/>
+            <ac:spMk id="24" creationId="{19A3DFDE-3918-3CD6-7F8A-89BDDCCB230B}"/>
+          </ac:spMkLst>
+        </pc:spChg>
+        <pc:spChg chg="del">
+          <ac:chgData name="Elliot Mai" userId="1c49b37007f9488b" providerId="LiveId" clId="{3EDB10E2-DA7D-4765-B207-53B47556FA45}" dt="2026-03-10T23:46:11.441" v="441"/>
+          <ac:spMkLst>
+            <pc:docMk/>
+            <pc:sldMk cId="1189908222" sldId="265"/>
+            <ac:spMk id="26" creationId="{A9D0B3B4-7FE4-9509-E7FF-6882F999DF0D}"/>
+          </ac:spMkLst>
+        </pc:spChg>
+        <pc:spChg chg="del">
+          <ac:chgData name="Elliot Mai" userId="1c49b37007f9488b" providerId="LiveId" clId="{3EDB10E2-DA7D-4765-B207-53B47556FA45}" dt="2026-03-10T23:46:11.441" v="441"/>
+          <ac:spMkLst>
+            <pc:docMk/>
+            <pc:sldMk cId="1189908222" sldId="265"/>
+            <ac:spMk id="28" creationId="{F920737D-3444-7151-3526-99CD610D87B8}"/>
+          </ac:spMkLst>
+        </pc:spChg>
+        <pc:spChg chg="del">
+          <ac:chgData name="Elliot Mai" userId="1c49b37007f9488b" providerId="LiveId" clId="{3EDB10E2-DA7D-4765-B207-53B47556FA45}" dt="2026-03-10T23:46:11.441" v="441"/>
+          <ac:spMkLst>
+            <pc:docMk/>
+            <pc:sldMk cId="1189908222" sldId="265"/>
+            <ac:spMk id="30" creationId="{6D2C186C-6EFA-778B-1A2D-3162119CFB66}"/>
+          </ac:spMkLst>
+        </pc:spChg>
+        <pc:spChg chg="del">
+          <ac:chgData name="Elliot Mai" userId="1c49b37007f9488b" providerId="LiveId" clId="{3EDB10E2-DA7D-4765-B207-53B47556FA45}" dt="2026-03-10T23:46:11.441" v="441"/>
+          <ac:spMkLst>
+            <pc:docMk/>
+            <pc:sldMk cId="1189908222" sldId="265"/>
+            <ac:spMk id="32" creationId="{8AFF51E3-F6D2-1273-0A11-1FED143B8121}"/>
+          </ac:spMkLst>
+        </pc:spChg>
+      </pc:sldChg>
+      <pc:sldChg chg="new del">
+        <pc:chgData name="Elliot Mai" userId="1c49b37007f9488b" providerId="LiveId" clId="{3EDB10E2-DA7D-4765-B207-53B47556FA45}" dt="2026-03-10T23:46:02.219" v="439" actId="680"/>
+        <pc:sldMkLst>
+          <pc:docMk/>
+          <pc:sldMk cId="1750510601" sldId="265"/>
+        </pc:sldMkLst>
+      </pc:sldChg>
+      <pc:sldChg chg="addSp delSp modSp add mod">
+        <pc:chgData name="Elliot Mai" userId="1c49b37007f9488b" providerId="LiveId" clId="{3EDB10E2-DA7D-4765-B207-53B47556FA45}" dt="2026-03-10T23:50:16.671" v="490" actId="14100"/>
+        <pc:sldMkLst>
+          <pc:docMk/>
+          <pc:sldMk cId="3554631781" sldId="265"/>
         </pc:sldMkLst>
         <pc:spChg chg="mod">
-          <ac:chgData name="Guest User" userId="" providerId="Windows Live" clId="Web-{4F8CDE41-BC36-BDCF-6662-9346E004DDBF}" dt="2026-03-07T20:38:14.909" v="5" actId="20577"/>
+          <ac:chgData name="Elliot Mai" userId="1c49b37007f9488b" providerId="LiveId" clId="{3EDB10E2-DA7D-4765-B207-53B47556FA45}" dt="2026-03-10T23:46:57.152" v="450"/>
           <ac:spMkLst>
             <pc:docMk/>
-            <pc:sldMk cId="3910318035" sldId="260"/>
-            <ac:spMk id="4" creationId="{5C94464B-3659-1D3E-E08B-F862EA7D786E}"/>
+            <pc:sldMk cId="3554631781" sldId="265"/>
+            <ac:spMk id="4" creationId="{6B555A65-D691-8BA6-1405-4571EB324A45}"/>
+          </ac:spMkLst>
+        </pc:spChg>
+        <pc:spChg chg="mod">
+          <ac:chgData name="Elliot Mai" userId="1c49b37007f9488b" providerId="LiveId" clId="{3EDB10E2-DA7D-4765-B207-53B47556FA45}" dt="2026-03-10T23:50:07.768" v="489" actId="27636"/>
+          <ac:spMkLst>
+            <pc:docMk/>
+            <pc:sldMk cId="3554631781" sldId="265"/>
+            <ac:spMk id="6" creationId="{D51FF78F-E65B-C86B-FD89-E10C13406F82}"/>
+          </ac:spMkLst>
+        </pc:spChg>
+        <pc:graphicFrameChg chg="add mod modGraphic">
+          <ac:chgData name="Elliot Mai" userId="1c49b37007f9488b" providerId="LiveId" clId="{3EDB10E2-DA7D-4765-B207-53B47556FA45}" dt="2026-03-10T23:50:16.671" v="490" actId="14100"/>
+          <ac:graphicFrameMkLst>
+            <pc:docMk/>
+            <pc:sldMk cId="3554631781" sldId="265"/>
+            <ac:graphicFrameMk id="2" creationId="{32243835-685A-C8C7-CC13-9D21F582DF50}"/>
+          </ac:graphicFrameMkLst>
+        </pc:graphicFrameChg>
+        <pc:picChg chg="del">
+          <ac:chgData name="Elliot Mai" userId="1c49b37007f9488b" providerId="LiveId" clId="{3EDB10E2-DA7D-4765-B207-53B47556FA45}" dt="2026-03-10T23:48:11.538" v="471" actId="478"/>
+          <ac:picMkLst>
+            <pc:docMk/>
+            <pc:sldMk cId="3554631781" sldId="265"/>
+            <ac:picMk id="3" creationId="{833ECAB8-39BF-E782-D976-A59BCEC4D90A}"/>
+          </ac:picMkLst>
+        </pc:picChg>
+      </pc:sldChg>
+      <pc:sldChg chg="addSp delSp add del setBg delDesignElem">
+        <pc:chgData name="Elliot Mai" userId="1c49b37007f9488b" providerId="LiveId" clId="{3EDB10E2-DA7D-4765-B207-53B47556FA45}" dt="2026-03-10T23:46:25.761" v="445"/>
+        <pc:sldMkLst>
+          <pc:docMk/>
+          <pc:sldMk cId="3680739687" sldId="265"/>
+        </pc:sldMkLst>
+        <pc:spChg chg="add del">
+          <ac:chgData name="Elliot Mai" userId="1c49b37007f9488b" providerId="LiveId" clId="{3EDB10E2-DA7D-4765-B207-53B47556FA45}" dt="2026-03-10T23:46:25.761" v="445"/>
+          <ac:spMkLst>
+            <pc:docMk/>
+            <pc:sldMk cId="3680739687" sldId="265"/>
+            <ac:spMk id="24" creationId="{A2065D23-4DEA-B3A1-2561-B9217F8E10A4}"/>
+          </ac:spMkLst>
+        </pc:spChg>
+        <pc:spChg chg="add del">
+          <ac:chgData name="Elliot Mai" userId="1c49b37007f9488b" providerId="LiveId" clId="{3EDB10E2-DA7D-4765-B207-53B47556FA45}" dt="2026-03-10T23:46:25.761" v="445"/>
+          <ac:spMkLst>
+            <pc:docMk/>
+            <pc:sldMk cId="3680739687" sldId="265"/>
+            <ac:spMk id="26" creationId="{DD3A536B-9B85-0A79-81E1-3DCB854E40C5}"/>
+          </ac:spMkLst>
+        </pc:spChg>
+        <pc:spChg chg="add del">
+          <ac:chgData name="Elliot Mai" userId="1c49b37007f9488b" providerId="LiveId" clId="{3EDB10E2-DA7D-4765-B207-53B47556FA45}" dt="2026-03-10T23:46:25.761" v="445"/>
+          <ac:spMkLst>
+            <pc:docMk/>
+            <pc:sldMk cId="3680739687" sldId="265"/>
+            <ac:spMk id="28" creationId="{40174B32-FF9C-A4CC-7A81-FD922AA3E5FA}"/>
+          </ac:spMkLst>
+        </pc:spChg>
+        <pc:spChg chg="add del">
+          <ac:chgData name="Elliot Mai" userId="1c49b37007f9488b" providerId="LiveId" clId="{3EDB10E2-DA7D-4765-B207-53B47556FA45}" dt="2026-03-10T23:46:25.761" v="445"/>
+          <ac:spMkLst>
+            <pc:docMk/>
+            <pc:sldMk cId="3680739687" sldId="265"/>
+            <ac:spMk id="30" creationId="{BF32B8D6-6651-9702-206C-43B07EE5A757}"/>
+          </ac:spMkLst>
+        </pc:spChg>
+        <pc:spChg chg="add del">
+          <ac:chgData name="Elliot Mai" userId="1c49b37007f9488b" providerId="LiveId" clId="{3EDB10E2-DA7D-4765-B207-53B47556FA45}" dt="2026-03-10T23:46:25.761" v="445"/>
+          <ac:spMkLst>
+            <pc:docMk/>
+            <pc:sldMk cId="3680739687" sldId="265"/>
+            <ac:spMk id="32" creationId="{1F4A656E-3CE0-4461-5F12-0C809C08FAF7}"/>
           </ac:spMkLst>
         </pc:spChg>
       </pc:sldChg>
@@ -493,14 +877,6 @@
             <ac:graphicFrameMk id="2" creationId="{97FBE674-9B9D-3B6A-DD4F-0E9E0EB4B527}"/>
           </ac:graphicFrameMkLst>
         </pc:graphicFrameChg>
-        <pc:graphicFrameChg chg="add del mod">
-          <ac:chgData name="Guest User" userId="" providerId="Windows Live" clId="Web-{4B232746-762D-DE8C-7D01-26173855CD31}" dt="2026-03-07T20:53:35.870" v="18"/>
-          <ac:graphicFrameMkLst>
-            <pc:docMk/>
-            <pc:sldMk cId="1823981096" sldId="258"/>
-            <ac:graphicFrameMk id="5" creationId="{8502DC54-70B1-7C73-47C0-2B1D959F9079}"/>
-          </ac:graphicFrameMkLst>
-        </pc:graphicFrameChg>
         <pc:picChg chg="add mod">
           <ac:chgData name="Guest User" userId="" providerId="Windows Live" clId="Web-{4B232746-762D-DE8C-7D01-26173855CD31}" dt="2026-03-07T20:57:57.186" v="273" actId="1076"/>
           <ac:picMkLst>
@@ -521,6 +897,3013 @@
     </pc:docChg>
   </pc:docChgLst>
 </pc:chgInfo>
+</file>
+
+<file path=ppt/diagrams/colors1.xml><?xml version="1.0" encoding="utf-8"?>
+<dgm:colorsDef xmlns:dgm="http://schemas.openxmlformats.org/drawingml/2006/diagram" xmlns:a="http://schemas.openxmlformats.org/drawingml/2006/main" uniqueId="urn:microsoft.com/office/officeart/2005/8/colors/accent1_2">
+  <dgm:title val=""/>
+  <dgm:desc val=""/>
+  <dgm:catLst>
+    <dgm:cat type="accent1" pri="11200"/>
+  </dgm:catLst>
+  <dgm:styleLbl name="node0">
+    <dgm:fillClrLst meth="repeat">
+      <a:schemeClr val="accent1"/>
+    </dgm:fillClrLst>
+    <dgm:linClrLst meth="repeat">
+      <a:schemeClr val="lt1"/>
+    </dgm:linClrLst>
+    <dgm:effectClrLst/>
+    <dgm:txLinClrLst/>
+    <dgm:txFillClrLst/>
+    <dgm:txEffectClrLst/>
+  </dgm:styleLbl>
+  <dgm:styleLbl name="alignNode1">
+    <dgm:fillClrLst meth="repeat">
+      <a:schemeClr val="accent1"/>
+    </dgm:fillClrLst>
+    <dgm:linClrLst meth="repeat">
+      <a:schemeClr val="accent1"/>
+    </dgm:linClrLst>
+    <dgm:effectClrLst/>
+    <dgm:txLinClrLst/>
+    <dgm:txFillClrLst/>
+    <dgm:txEffectClrLst/>
+  </dgm:styleLbl>
+  <dgm:styleLbl name="node1">
+    <dgm:fillClrLst meth="repeat">
+      <a:schemeClr val="accent1"/>
+    </dgm:fillClrLst>
+    <dgm:linClrLst meth="repeat">
+      <a:schemeClr val="lt1"/>
+    </dgm:linClrLst>
+    <dgm:effectClrLst/>
+    <dgm:txLinClrLst/>
+    <dgm:txFillClrLst/>
+    <dgm:txEffectClrLst/>
+  </dgm:styleLbl>
+  <dgm:styleLbl name="lnNode1">
+    <dgm:fillClrLst meth="repeat">
+      <a:schemeClr val="accent1"/>
+    </dgm:fillClrLst>
+    <dgm:linClrLst meth="repeat">
+      <a:schemeClr val="lt1"/>
+    </dgm:linClrLst>
+    <dgm:effectClrLst/>
+    <dgm:txLinClrLst/>
+    <dgm:txFillClrLst/>
+    <dgm:txEffectClrLst/>
+  </dgm:styleLbl>
+  <dgm:styleLbl name="vennNode1">
+    <dgm:fillClrLst meth="repeat">
+      <a:schemeClr val="accent1">
+        <a:alpha val="50000"/>
+      </a:schemeClr>
+    </dgm:fillClrLst>
+    <dgm:linClrLst meth="repeat">
+      <a:schemeClr val="lt1"/>
+    </dgm:linClrLst>
+    <dgm:effectClrLst/>
+    <dgm:txLinClrLst/>
+    <dgm:txFillClrLst/>
+    <dgm:txEffectClrLst/>
+  </dgm:styleLbl>
+  <dgm:styleLbl name="node2">
+    <dgm:fillClrLst meth="repeat">
+      <a:schemeClr val="accent1"/>
+    </dgm:fillClrLst>
+    <dgm:linClrLst meth="repeat">
+      <a:schemeClr val="lt1"/>
+    </dgm:linClrLst>
+    <dgm:effectClrLst/>
+    <dgm:txLinClrLst/>
+    <dgm:txFillClrLst/>
+    <dgm:txEffectClrLst/>
+  </dgm:styleLbl>
+  <dgm:styleLbl name="node3">
+    <dgm:fillClrLst meth="repeat">
+      <a:schemeClr val="accent1"/>
+    </dgm:fillClrLst>
+    <dgm:linClrLst meth="repeat">
+      <a:schemeClr val="lt1"/>
+    </dgm:linClrLst>
+    <dgm:effectClrLst/>
+    <dgm:txLinClrLst/>
+    <dgm:txFillClrLst/>
+    <dgm:txEffectClrLst/>
+  </dgm:styleLbl>
+  <dgm:styleLbl name="node4">
+    <dgm:fillClrLst meth="repeat">
+      <a:schemeClr val="accent1"/>
+    </dgm:fillClrLst>
+    <dgm:linClrLst meth="repeat">
+      <a:schemeClr val="lt1"/>
+    </dgm:linClrLst>
+    <dgm:effectClrLst/>
+    <dgm:txLinClrLst/>
+    <dgm:txFillClrLst/>
+    <dgm:txEffectClrLst/>
+  </dgm:styleLbl>
+  <dgm:styleLbl name="fgImgPlace1">
+    <dgm:fillClrLst meth="repeat">
+      <a:schemeClr val="accent1">
+        <a:tint val="50000"/>
+      </a:schemeClr>
+    </dgm:fillClrLst>
+    <dgm:linClrLst meth="repeat">
+      <a:schemeClr val="lt1"/>
+    </dgm:linClrLst>
+    <dgm:effectClrLst/>
+    <dgm:txLinClrLst/>
+    <dgm:txFillClrLst meth="repeat">
+      <a:schemeClr val="lt1"/>
+    </dgm:txFillClrLst>
+    <dgm:txEffectClrLst/>
+  </dgm:styleLbl>
+  <dgm:styleLbl name="alignImgPlace1">
+    <dgm:fillClrLst meth="repeat">
+      <a:schemeClr val="accent1">
+        <a:tint val="50000"/>
+      </a:schemeClr>
+    </dgm:fillClrLst>
+    <dgm:linClrLst meth="repeat">
+      <a:schemeClr val="lt1"/>
+    </dgm:linClrLst>
+    <dgm:effectClrLst/>
+    <dgm:txLinClrLst/>
+    <dgm:txFillClrLst meth="repeat">
+      <a:schemeClr val="lt1"/>
+    </dgm:txFillClrLst>
+    <dgm:txEffectClrLst/>
+  </dgm:styleLbl>
+  <dgm:styleLbl name="bgImgPlace1">
+    <dgm:fillClrLst meth="repeat">
+      <a:schemeClr val="accent1">
+        <a:tint val="50000"/>
+      </a:schemeClr>
+    </dgm:fillClrLst>
+    <dgm:linClrLst meth="repeat">
+      <a:schemeClr val="lt1"/>
+    </dgm:linClrLst>
+    <dgm:effectClrLst/>
+    <dgm:txLinClrLst/>
+    <dgm:txFillClrLst meth="repeat">
+      <a:schemeClr val="lt1"/>
+    </dgm:txFillClrLst>
+    <dgm:txEffectClrLst/>
+  </dgm:styleLbl>
+  <dgm:styleLbl name="sibTrans2D1">
+    <dgm:fillClrLst meth="repeat">
+      <a:schemeClr val="accent1">
+        <a:tint val="60000"/>
+      </a:schemeClr>
+    </dgm:fillClrLst>
+    <dgm:linClrLst meth="repeat">
+      <a:schemeClr val="accent1">
+        <a:tint val="60000"/>
+      </a:schemeClr>
+    </dgm:linClrLst>
+    <dgm:effectClrLst/>
+    <dgm:txLinClrLst/>
+    <dgm:txFillClrLst/>
+    <dgm:txEffectClrLst/>
+  </dgm:styleLbl>
+  <dgm:styleLbl name="fgSibTrans2D1">
+    <dgm:fillClrLst meth="repeat">
+      <a:schemeClr val="accent1">
+        <a:tint val="60000"/>
+      </a:schemeClr>
+    </dgm:fillClrLst>
+    <dgm:linClrLst meth="repeat">
+      <a:schemeClr val="accent1">
+        <a:tint val="60000"/>
+      </a:schemeClr>
+    </dgm:linClrLst>
+    <dgm:effectClrLst/>
+    <dgm:txLinClrLst/>
+    <dgm:txFillClrLst/>
+    <dgm:txEffectClrLst/>
+  </dgm:styleLbl>
+  <dgm:styleLbl name="bgSibTrans2D1">
+    <dgm:fillClrLst meth="repeat">
+      <a:schemeClr val="accent1">
+        <a:tint val="60000"/>
+      </a:schemeClr>
+    </dgm:fillClrLst>
+    <dgm:linClrLst meth="repeat">
+      <a:schemeClr val="accent1">
+        <a:tint val="60000"/>
+      </a:schemeClr>
+    </dgm:linClrLst>
+    <dgm:effectClrLst/>
+    <dgm:txLinClrLst/>
+    <dgm:txFillClrLst/>
+    <dgm:txEffectClrLst/>
+  </dgm:styleLbl>
+  <dgm:styleLbl name="sibTrans1D1">
+    <dgm:fillClrLst meth="repeat">
+      <a:schemeClr val="accent1"/>
+    </dgm:fillClrLst>
+    <dgm:linClrLst meth="repeat">
+      <a:schemeClr val="accent1"/>
+    </dgm:linClrLst>
+    <dgm:effectClrLst/>
+    <dgm:txLinClrLst/>
+    <dgm:txFillClrLst meth="repeat">
+      <a:schemeClr val="tx1"/>
+    </dgm:txFillClrLst>
+    <dgm:txEffectClrLst/>
+  </dgm:styleLbl>
+  <dgm:styleLbl name="callout">
+    <dgm:fillClrLst meth="repeat">
+      <a:schemeClr val="accent1"/>
+    </dgm:fillClrLst>
+    <dgm:linClrLst meth="repeat">
+      <a:schemeClr val="accent1">
+        <a:tint val="50000"/>
+      </a:schemeClr>
+    </dgm:linClrLst>
+    <dgm:effectClrLst/>
+    <dgm:txLinClrLst/>
+    <dgm:txFillClrLst meth="repeat">
+      <a:schemeClr val="tx1"/>
+    </dgm:txFillClrLst>
+    <dgm:txEffectClrLst/>
+  </dgm:styleLbl>
+  <dgm:styleLbl name="asst0">
+    <dgm:fillClrLst meth="repeat">
+      <a:schemeClr val="accent1"/>
+    </dgm:fillClrLst>
+    <dgm:linClrLst meth="repeat">
+      <a:schemeClr val="lt1"/>
+    </dgm:linClrLst>
+    <dgm:effectClrLst/>
+    <dgm:txLinClrLst/>
+    <dgm:txFillClrLst/>
+    <dgm:txEffectClrLst/>
+  </dgm:styleLbl>
+  <dgm:styleLbl name="asst1">
+    <dgm:fillClrLst meth="repeat">
+      <a:schemeClr val="accent1"/>
+    </dgm:fillClrLst>
+    <dgm:linClrLst meth="repeat">
+      <a:schemeClr val="lt1"/>
+    </dgm:linClrLst>
+    <dgm:effectClrLst/>
+    <dgm:txLinClrLst/>
+    <dgm:txFillClrLst/>
+    <dgm:txEffectClrLst/>
+  </dgm:styleLbl>
+  <dgm:styleLbl name="asst2">
+    <dgm:fillClrLst meth="repeat">
+      <a:schemeClr val="accent1"/>
+    </dgm:fillClrLst>
+    <dgm:linClrLst meth="repeat">
+      <a:schemeClr val="lt1"/>
+    </dgm:linClrLst>
+    <dgm:effectClrLst/>
+    <dgm:txLinClrLst/>
+    <dgm:txFillClrLst/>
+    <dgm:txEffectClrLst/>
+  </dgm:styleLbl>
+  <dgm:styleLbl name="asst3">
+    <dgm:fillClrLst meth="repeat">
+      <a:schemeClr val="accent1"/>
+    </dgm:fillClrLst>
+    <dgm:linClrLst meth="repeat">
+      <a:schemeClr val="lt1"/>
+    </dgm:linClrLst>
+    <dgm:effectClrLst/>
+    <dgm:txLinClrLst/>
+    <dgm:txFillClrLst/>
+    <dgm:txEffectClrLst/>
+  </dgm:styleLbl>
+  <dgm:styleLbl name="asst4">
+    <dgm:fillClrLst meth="repeat">
+      <a:schemeClr val="accent1"/>
+    </dgm:fillClrLst>
+    <dgm:linClrLst meth="repeat">
+      <a:schemeClr val="lt1"/>
+    </dgm:linClrLst>
+    <dgm:effectClrLst/>
+    <dgm:txLinClrLst/>
+    <dgm:txFillClrLst/>
+    <dgm:txEffectClrLst/>
+  </dgm:styleLbl>
+  <dgm:styleLbl name="parChTrans2D1">
+    <dgm:fillClrLst meth="repeat">
+      <a:schemeClr val="accent1">
+        <a:tint val="60000"/>
+      </a:schemeClr>
+    </dgm:fillClrLst>
+    <dgm:linClrLst meth="repeat">
+      <a:schemeClr val="accent1">
+        <a:tint val="60000"/>
+      </a:schemeClr>
+    </dgm:linClrLst>
+    <dgm:effectClrLst/>
+    <dgm:txLinClrLst/>
+    <dgm:txFillClrLst meth="repeat">
+      <a:schemeClr val="lt1"/>
+    </dgm:txFillClrLst>
+    <dgm:txEffectClrLst/>
+  </dgm:styleLbl>
+  <dgm:styleLbl name="parChTrans2D2">
+    <dgm:fillClrLst meth="repeat">
+      <a:schemeClr val="accent1"/>
+    </dgm:fillClrLst>
+    <dgm:linClrLst meth="repeat">
+      <a:schemeClr val="accent1"/>
+    </dgm:linClrLst>
+    <dgm:effectClrLst/>
+    <dgm:txLinClrLst/>
+    <dgm:txFillClrLst meth="repeat">
+      <a:schemeClr val="lt1"/>
+    </dgm:txFillClrLst>
+    <dgm:txEffectClrLst/>
+  </dgm:styleLbl>
+  <dgm:styleLbl name="parChTrans2D3">
+    <dgm:fillClrLst meth="repeat">
+      <a:schemeClr val="accent1"/>
+    </dgm:fillClrLst>
+    <dgm:linClrLst meth="repeat">
+      <a:schemeClr val="accent1"/>
+    </dgm:linClrLst>
+    <dgm:effectClrLst/>
+    <dgm:txLinClrLst/>
+    <dgm:txFillClrLst meth="repeat">
+      <a:schemeClr val="lt1"/>
+    </dgm:txFillClrLst>
+    <dgm:txEffectClrLst/>
+  </dgm:styleLbl>
+  <dgm:styleLbl name="parChTrans2D4">
+    <dgm:fillClrLst meth="repeat">
+      <a:schemeClr val="accent1"/>
+    </dgm:fillClrLst>
+    <dgm:linClrLst meth="repeat">
+      <a:schemeClr val="accent1"/>
+    </dgm:linClrLst>
+    <dgm:effectClrLst/>
+    <dgm:txLinClrLst/>
+    <dgm:txFillClrLst meth="repeat">
+      <a:schemeClr val="lt1"/>
+    </dgm:txFillClrLst>
+    <dgm:txEffectClrLst/>
+  </dgm:styleLbl>
+  <dgm:styleLbl name="parChTrans1D1">
+    <dgm:fillClrLst meth="repeat">
+      <a:schemeClr val="accent1"/>
+    </dgm:fillClrLst>
+    <dgm:linClrLst meth="repeat">
+      <a:schemeClr val="accent1">
+        <a:shade val="60000"/>
+      </a:schemeClr>
+    </dgm:linClrLst>
+    <dgm:effectClrLst/>
+    <dgm:txLinClrLst/>
+    <dgm:txFillClrLst meth="repeat">
+      <a:schemeClr val="tx1"/>
+    </dgm:txFillClrLst>
+    <dgm:txEffectClrLst/>
+  </dgm:styleLbl>
+  <dgm:styleLbl name="parChTrans1D2">
+    <dgm:fillClrLst meth="repeat">
+      <a:schemeClr val="accent1"/>
+    </dgm:fillClrLst>
+    <dgm:linClrLst meth="repeat">
+      <a:schemeClr val="accent1">
+        <a:shade val="60000"/>
+      </a:schemeClr>
+    </dgm:linClrLst>
+    <dgm:effectClrLst/>
+    <dgm:txLinClrLst/>
+    <dgm:txFillClrLst meth="repeat">
+      <a:schemeClr val="tx1"/>
+    </dgm:txFillClrLst>
+    <dgm:txEffectClrLst/>
+  </dgm:styleLbl>
+  <dgm:styleLbl name="parChTrans1D3">
+    <dgm:fillClrLst meth="repeat">
+      <a:schemeClr val="accent1"/>
+    </dgm:fillClrLst>
+    <dgm:linClrLst meth="repeat">
+      <a:schemeClr val="accent1">
+        <a:shade val="80000"/>
+      </a:schemeClr>
+    </dgm:linClrLst>
+    <dgm:effectClrLst/>
+    <dgm:txLinClrLst/>
+    <dgm:txFillClrLst meth="repeat">
+      <a:schemeClr val="tx1"/>
+    </dgm:txFillClrLst>
+    <dgm:txEffectClrLst/>
+  </dgm:styleLbl>
+  <dgm:styleLbl name="parChTrans1D4">
+    <dgm:fillClrLst meth="repeat">
+      <a:schemeClr val="accent1"/>
+    </dgm:fillClrLst>
+    <dgm:linClrLst meth="repeat">
+      <a:schemeClr val="accent1">
+        <a:shade val="80000"/>
+      </a:schemeClr>
+    </dgm:linClrLst>
+    <dgm:effectClrLst/>
+    <dgm:txLinClrLst/>
+    <dgm:txFillClrLst meth="repeat">
+      <a:schemeClr val="tx1"/>
+    </dgm:txFillClrLst>
+    <dgm:txEffectClrLst/>
+  </dgm:styleLbl>
+  <dgm:styleLbl name="fgAcc1">
+    <dgm:fillClrLst meth="repeat">
+      <a:schemeClr val="lt1">
+        <a:alpha val="90000"/>
+      </a:schemeClr>
+    </dgm:fillClrLst>
+    <dgm:linClrLst meth="repeat">
+      <a:schemeClr val="accent1"/>
+    </dgm:linClrLst>
+    <dgm:effectClrLst/>
+    <dgm:txLinClrLst/>
+    <dgm:txFillClrLst meth="repeat">
+      <a:schemeClr val="dk1"/>
+    </dgm:txFillClrLst>
+    <dgm:txEffectClrLst/>
+  </dgm:styleLbl>
+  <dgm:styleLbl name="conFgAcc1">
+    <dgm:fillClrLst meth="repeat">
+      <a:schemeClr val="lt1">
+        <a:alpha val="90000"/>
+      </a:schemeClr>
+    </dgm:fillClrLst>
+    <dgm:linClrLst meth="repeat">
+      <a:schemeClr val="accent1"/>
+    </dgm:linClrLst>
+    <dgm:effectClrLst/>
+    <dgm:txLinClrLst/>
+    <dgm:txFillClrLst meth="repeat">
+      <a:schemeClr val="dk1"/>
+    </dgm:txFillClrLst>
+    <dgm:txEffectClrLst/>
+  </dgm:styleLbl>
+  <dgm:styleLbl name="alignAcc1">
+    <dgm:fillClrLst meth="repeat">
+      <a:schemeClr val="lt1">
+        <a:alpha val="90000"/>
+      </a:schemeClr>
+    </dgm:fillClrLst>
+    <dgm:linClrLst meth="repeat">
+      <a:schemeClr val="accent1"/>
+    </dgm:linClrLst>
+    <dgm:effectClrLst/>
+    <dgm:txLinClrLst/>
+    <dgm:txFillClrLst meth="repeat">
+      <a:schemeClr val="dk1"/>
+    </dgm:txFillClrLst>
+    <dgm:txEffectClrLst/>
+  </dgm:styleLbl>
+  <dgm:styleLbl name="trAlignAcc1">
+    <dgm:fillClrLst meth="repeat">
+      <a:schemeClr val="lt1">
+        <a:alpha val="40000"/>
+      </a:schemeClr>
+    </dgm:fillClrLst>
+    <dgm:linClrLst meth="repeat">
+      <a:schemeClr val="accent1"/>
+    </dgm:linClrLst>
+    <dgm:effectClrLst/>
+    <dgm:txLinClrLst/>
+    <dgm:txFillClrLst meth="repeat">
+      <a:schemeClr val="dk1"/>
+    </dgm:txFillClrLst>
+    <dgm:txEffectClrLst/>
+  </dgm:styleLbl>
+  <dgm:styleLbl name="bgAcc1">
+    <dgm:fillClrLst meth="repeat">
+      <a:schemeClr val="lt1">
+        <a:alpha val="90000"/>
+      </a:schemeClr>
+    </dgm:fillClrLst>
+    <dgm:linClrLst meth="repeat">
+      <a:schemeClr val="accent1"/>
+    </dgm:linClrLst>
+    <dgm:effectClrLst/>
+    <dgm:txLinClrLst/>
+    <dgm:txFillClrLst meth="repeat">
+      <a:schemeClr val="dk1"/>
+    </dgm:txFillClrLst>
+    <dgm:txEffectClrLst/>
+  </dgm:styleLbl>
+  <dgm:styleLbl name="solidFgAcc1">
+    <dgm:fillClrLst meth="repeat">
+      <a:schemeClr val="lt1"/>
+    </dgm:fillClrLst>
+    <dgm:linClrLst meth="repeat">
+      <a:schemeClr val="accent1"/>
+    </dgm:linClrLst>
+    <dgm:effectClrLst/>
+    <dgm:txLinClrLst/>
+    <dgm:txFillClrLst meth="repeat">
+      <a:schemeClr val="dk1"/>
+    </dgm:txFillClrLst>
+    <dgm:txEffectClrLst/>
+  </dgm:styleLbl>
+  <dgm:styleLbl name="solidAlignAcc1">
+    <dgm:fillClrLst meth="repeat">
+      <a:schemeClr val="lt1"/>
+    </dgm:fillClrLst>
+    <dgm:linClrLst meth="repeat">
+      <a:schemeClr val="accent1"/>
+    </dgm:linClrLst>
+    <dgm:effectClrLst/>
+    <dgm:txLinClrLst/>
+    <dgm:txFillClrLst meth="repeat">
+      <a:schemeClr val="dk1"/>
+    </dgm:txFillClrLst>
+    <dgm:txEffectClrLst/>
+  </dgm:styleLbl>
+  <dgm:styleLbl name="solidBgAcc1">
+    <dgm:fillClrLst meth="repeat">
+      <a:schemeClr val="lt1"/>
+    </dgm:fillClrLst>
+    <dgm:linClrLst meth="repeat">
+      <a:schemeClr val="accent1"/>
+    </dgm:linClrLst>
+    <dgm:effectClrLst/>
+    <dgm:txLinClrLst/>
+    <dgm:txFillClrLst meth="repeat">
+      <a:schemeClr val="dk1"/>
+    </dgm:txFillClrLst>
+    <dgm:txEffectClrLst/>
+  </dgm:styleLbl>
+  <dgm:styleLbl name="fgAccFollowNode1">
+    <dgm:fillClrLst meth="repeat">
+      <a:schemeClr val="accent1">
+        <a:alpha val="90000"/>
+        <a:tint val="40000"/>
+      </a:schemeClr>
+    </dgm:fillClrLst>
+    <dgm:linClrLst meth="repeat">
+      <a:schemeClr val="accent1">
+        <a:alpha val="90000"/>
+        <a:tint val="40000"/>
+      </a:schemeClr>
+    </dgm:linClrLst>
+    <dgm:effectClrLst/>
+    <dgm:txLinClrLst/>
+    <dgm:txFillClrLst meth="repeat">
+      <a:schemeClr val="dk1"/>
+    </dgm:txFillClrLst>
+    <dgm:txEffectClrLst/>
+  </dgm:styleLbl>
+  <dgm:styleLbl name="alignAccFollowNode1">
+    <dgm:fillClrLst meth="repeat">
+      <a:schemeClr val="accent1">
+        <a:alpha val="90000"/>
+        <a:tint val="40000"/>
+      </a:schemeClr>
+    </dgm:fillClrLst>
+    <dgm:linClrLst meth="repeat">
+      <a:schemeClr val="accent1">
+        <a:alpha val="90000"/>
+        <a:tint val="40000"/>
+      </a:schemeClr>
+    </dgm:linClrLst>
+    <dgm:effectClrLst/>
+    <dgm:txLinClrLst/>
+    <dgm:txFillClrLst meth="repeat">
+      <a:schemeClr val="dk1"/>
+    </dgm:txFillClrLst>
+    <dgm:txEffectClrLst/>
+  </dgm:styleLbl>
+  <dgm:styleLbl name="bgAccFollowNode1">
+    <dgm:fillClrLst meth="repeat">
+      <a:schemeClr val="accent1">
+        <a:alpha val="90000"/>
+        <a:tint val="40000"/>
+      </a:schemeClr>
+    </dgm:fillClrLst>
+    <dgm:linClrLst meth="repeat">
+      <a:schemeClr val="accent1">
+        <a:alpha val="90000"/>
+        <a:tint val="40000"/>
+      </a:schemeClr>
+    </dgm:linClrLst>
+    <dgm:effectClrLst/>
+    <dgm:txLinClrLst/>
+    <dgm:txFillClrLst meth="repeat">
+      <a:schemeClr val="dk1"/>
+    </dgm:txFillClrLst>
+    <dgm:txEffectClrLst/>
+  </dgm:styleLbl>
+  <dgm:styleLbl name="fgAcc0">
+    <dgm:fillClrLst meth="repeat">
+      <a:schemeClr val="lt1">
+        <a:alpha val="90000"/>
+      </a:schemeClr>
+    </dgm:fillClrLst>
+    <dgm:linClrLst meth="repeat">
+      <a:schemeClr val="accent1"/>
+    </dgm:linClrLst>
+    <dgm:effectClrLst/>
+    <dgm:txLinClrLst/>
+    <dgm:txFillClrLst meth="repeat">
+      <a:schemeClr val="dk1"/>
+    </dgm:txFillClrLst>
+    <dgm:txEffectClrLst/>
+  </dgm:styleLbl>
+  <dgm:styleLbl name="fgAcc2">
+    <dgm:fillClrLst meth="repeat">
+      <a:schemeClr val="lt1">
+        <a:alpha val="90000"/>
+      </a:schemeClr>
+    </dgm:fillClrLst>
+    <dgm:linClrLst meth="repeat">
+      <a:schemeClr val="accent1"/>
+    </dgm:linClrLst>
+    <dgm:effectClrLst/>
+    <dgm:txLinClrLst/>
+    <dgm:txFillClrLst meth="repeat">
+      <a:schemeClr val="dk1"/>
+    </dgm:txFillClrLst>
+    <dgm:txEffectClrLst/>
+  </dgm:styleLbl>
+  <dgm:styleLbl name="fgAcc3">
+    <dgm:fillClrLst meth="repeat">
+      <a:schemeClr val="lt1">
+        <a:alpha val="90000"/>
+      </a:schemeClr>
+    </dgm:fillClrLst>
+    <dgm:linClrLst meth="repeat">
+      <a:schemeClr val="accent1"/>
+    </dgm:linClrLst>
+    <dgm:effectClrLst/>
+    <dgm:txLinClrLst/>
+    <dgm:txFillClrLst meth="repeat">
+      <a:schemeClr val="dk1"/>
+    </dgm:txFillClrLst>
+    <dgm:txEffectClrLst/>
+  </dgm:styleLbl>
+  <dgm:styleLbl name="fgAcc4">
+    <dgm:fillClrLst meth="repeat">
+      <a:schemeClr val="lt1">
+        <a:alpha val="90000"/>
+      </a:schemeClr>
+    </dgm:fillClrLst>
+    <dgm:linClrLst meth="repeat">
+      <a:schemeClr val="accent1"/>
+    </dgm:linClrLst>
+    <dgm:effectClrLst/>
+    <dgm:txLinClrLst/>
+    <dgm:txFillClrLst meth="repeat">
+      <a:schemeClr val="dk1"/>
+    </dgm:txFillClrLst>
+    <dgm:txEffectClrLst/>
+  </dgm:styleLbl>
+  <dgm:styleLbl name="bgShp">
+    <dgm:fillClrLst meth="repeat">
+      <a:schemeClr val="accent1">
+        <a:tint val="40000"/>
+      </a:schemeClr>
+    </dgm:fillClrLst>
+    <dgm:linClrLst meth="repeat">
+      <a:schemeClr val="accent1"/>
+    </dgm:linClrLst>
+    <dgm:effectClrLst/>
+    <dgm:txLinClrLst/>
+    <dgm:txFillClrLst meth="repeat">
+      <a:schemeClr val="dk1"/>
+    </dgm:txFillClrLst>
+    <dgm:txEffectClrLst/>
+  </dgm:styleLbl>
+  <dgm:styleLbl name="dkBgShp">
+    <dgm:fillClrLst meth="repeat">
+      <a:schemeClr val="accent1">
+        <a:shade val="80000"/>
+      </a:schemeClr>
+    </dgm:fillClrLst>
+    <dgm:linClrLst meth="repeat">
+      <a:schemeClr val="accent1"/>
+    </dgm:linClrLst>
+    <dgm:effectClrLst/>
+    <dgm:txLinClrLst/>
+    <dgm:txFillClrLst meth="repeat">
+      <a:schemeClr val="lt1"/>
+    </dgm:txFillClrLst>
+    <dgm:txEffectClrLst/>
+  </dgm:styleLbl>
+  <dgm:styleLbl name="trBgShp">
+    <dgm:fillClrLst meth="repeat">
+      <a:schemeClr val="accent1">
+        <a:tint val="50000"/>
+        <a:alpha val="40000"/>
+      </a:schemeClr>
+    </dgm:fillClrLst>
+    <dgm:linClrLst meth="repeat">
+      <a:schemeClr val="accent1"/>
+    </dgm:linClrLst>
+    <dgm:effectClrLst/>
+    <dgm:txLinClrLst/>
+    <dgm:txFillClrLst meth="repeat">
+      <a:schemeClr val="lt1"/>
+    </dgm:txFillClrLst>
+    <dgm:txEffectClrLst/>
+  </dgm:styleLbl>
+  <dgm:styleLbl name="fgShp">
+    <dgm:fillClrLst meth="repeat">
+      <a:schemeClr val="accent1">
+        <a:tint val="60000"/>
+      </a:schemeClr>
+    </dgm:fillClrLst>
+    <dgm:linClrLst meth="repeat">
+      <a:schemeClr val="lt1"/>
+    </dgm:linClrLst>
+    <dgm:effectClrLst/>
+    <dgm:txLinClrLst/>
+    <dgm:txFillClrLst meth="repeat">
+      <a:schemeClr val="dk1"/>
+    </dgm:txFillClrLst>
+    <dgm:txEffectClrLst/>
+  </dgm:styleLbl>
+  <dgm:styleLbl name="revTx">
+    <dgm:fillClrLst meth="repeat">
+      <a:schemeClr val="lt1">
+        <a:alpha val="0"/>
+      </a:schemeClr>
+    </dgm:fillClrLst>
+    <dgm:linClrLst meth="repeat">
+      <a:schemeClr val="dk1">
+        <a:alpha val="0"/>
+      </a:schemeClr>
+    </dgm:linClrLst>
+    <dgm:effectClrLst/>
+    <dgm:txLinClrLst/>
+    <dgm:txFillClrLst meth="repeat">
+      <a:schemeClr val="tx1"/>
+    </dgm:txFillClrLst>
+    <dgm:txEffectClrLst/>
+  </dgm:styleLbl>
+</dgm:colorsDef>
+</file>
+
+<file path=ppt/diagrams/data1.xml><?xml version="1.0" encoding="utf-8"?>
+<dgm:dataModel xmlns:dgm="http://schemas.openxmlformats.org/drawingml/2006/diagram" xmlns:a="http://schemas.openxmlformats.org/drawingml/2006/main">
+  <dgm:ptLst>
+    <dgm:pt modelId="{8A6F1477-8474-47E8-8A0E-9A4847AE78D9}" type="doc">
+      <dgm:prSet loTypeId="urn:microsoft.com/office/officeart/2018/2/layout/IconLabelList" loCatId="icon" qsTypeId="urn:microsoft.com/office/officeart/2005/8/quickstyle/simple1" qsCatId="simple" csTypeId="urn:microsoft.com/office/officeart/2005/8/colors/accent1_2" csCatId="accent1" phldr="1"/>
+      <dgm:spPr/>
+      <dgm:t>
+        <a:bodyPr/>
+        <a:lstStyle/>
+        <a:p>
+          <a:endParaRPr lang="en-US"/>
+        </a:p>
+      </dgm:t>
+    </dgm:pt>
+    <dgm:pt modelId="{C67AE771-CE72-4C07-99EA-F01B05575451}">
+      <dgm:prSet custT="1"/>
+      <dgm:spPr/>
+      <dgm:t>
+        <a:bodyPr/>
+        <a:lstStyle/>
+        <a:p>
+          <a:pPr>
+            <a:lnSpc>
+              <a:spcPct val="100000"/>
+            </a:lnSpc>
+          </a:pPr>
+          <a:r>
+            <a:rPr lang="en-US" sz="1400" b="1" dirty="0"/>
+            <a:t>Larger batch size trades minimal accuracy for faster training.</a:t>
+          </a:r>
+          <a:r>
+            <a:rPr lang="en-US" sz="1400" dirty="0"/>
+            <a:t> </a:t>
+          </a:r>
+        </a:p>
+        <a:p>
+          <a:pPr>
+            <a:lnSpc>
+              <a:spcPct val="100000"/>
+            </a:lnSpc>
+          </a:pPr>
+          <a:r>
+            <a:rPr lang="en-US" sz="1400" dirty="0"/>
+            <a:t>Increasing batch size from 32 to 64 reduced training time by 29% with only a 0.23% drop in accuracy.</a:t>
+          </a:r>
+        </a:p>
+      </dgm:t>
+    </dgm:pt>
+    <dgm:pt modelId="{409190EA-6F98-49EE-9F76-A8C8ECC874EE}" type="parTrans" cxnId="{9F362A70-E190-4ACF-B5A9-F0970A698EE1}">
+      <dgm:prSet/>
+      <dgm:spPr/>
+      <dgm:t>
+        <a:bodyPr/>
+        <a:lstStyle/>
+        <a:p>
+          <a:endParaRPr lang="en-US" sz="2400"/>
+        </a:p>
+      </dgm:t>
+    </dgm:pt>
+    <dgm:pt modelId="{075CE9EF-8EF1-416C-BC7E-FF9DD19AE0E8}" type="sibTrans" cxnId="{9F362A70-E190-4ACF-B5A9-F0970A698EE1}">
+      <dgm:prSet/>
+      <dgm:spPr/>
+      <dgm:t>
+        <a:bodyPr/>
+        <a:lstStyle/>
+        <a:p>
+          <a:endParaRPr lang="en-US" sz="2400"/>
+        </a:p>
+      </dgm:t>
+    </dgm:pt>
+    <dgm:pt modelId="{3BAC4AC2-95BE-4F79-A890-9F45D127CC9F}">
+      <dgm:prSet custT="1"/>
+      <dgm:spPr/>
+      <dgm:t>
+        <a:bodyPr/>
+        <a:lstStyle/>
+        <a:p>
+          <a:pPr>
+            <a:lnSpc>
+              <a:spcPct val="100000"/>
+            </a:lnSpc>
+          </a:pPr>
+          <a:r>
+            <a:rPr lang="en-US" sz="1400" b="1" dirty="0"/>
+            <a:t>Model depth is the strongest driver of accuracy.</a:t>
+          </a:r>
+          <a:r>
+            <a:rPr lang="en-US" sz="1400" dirty="0"/>
+            <a:t> </a:t>
+          </a:r>
+        </a:p>
+        <a:p>
+          <a:pPr>
+            <a:lnSpc>
+              <a:spcPct val="100000"/>
+            </a:lnSpc>
+          </a:pPr>
+          <a:r>
+            <a:rPr lang="en-US" sz="1400" dirty="0"/>
+            <a:t>Adding two more Conv2D+Pooling blocks pushed training accuracy to ~99.3%, the highest of any version.</a:t>
+          </a:r>
+        </a:p>
+      </dgm:t>
+    </dgm:pt>
+    <dgm:pt modelId="{9AD7202F-0E60-4341-8AF3-2C9140E6F183}" type="parTrans" cxnId="{D03BA2FE-D14D-4A4E-BE5F-E3A426C9230C}">
+      <dgm:prSet/>
+      <dgm:spPr/>
+      <dgm:t>
+        <a:bodyPr/>
+        <a:lstStyle/>
+        <a:p>
+          <a:endParaRPr lang="en-US" sz="2400"/>
+        </a:p>
+      </dgm:t>
+    </dgm:pt>
+    <dgm:pt modelId="{6A9F8A51-4478-43D5-9F8E-912E9728AD84}" type="sibTrans" cxnId="{D03BA2FE-D14D-4A4E-BE5F-E3A426C9230C}">
+      <dgm:prSet/>
+      <dgm:spPr/>
+      <dgm:t>
+        <a:bodyPr/>
+        <a:lstStyle/>
+        <a:p>
+          <a:endParaRPr lang="en-US" sz="2400"/>
+        </a:p>
+      </dgm:t>
+    </dgm:pt>
+    <dgm:pt modelId="{C4B6D920-EFE4-4F70-8589-49EC2BFCF63C}">
+      <dgm:prSet custT="1"/>
+      <dgm:spPr/>
+      <dgm:t>
+        <a:bodyPr/>
+        <a:lstStyle/>
+        <a:p>
+          <a:pPr>
+            <a:lnSpc>
+              <a:spcPct val="100000"/>
+            </a:lnSpc>
+          </a:pPr>
+          <a:r>
+            <a:rPr lang="en-US" sz="1400" b="1" dirty="0"/>
+            <a:t>Over-reducing model size causes severe underfitting.</a:t>
+          </a:r>
+          <a:r>
+            <a:rPr lang="en-US" sz="1400" dirty="0"/>
+            <a:t> </a:t>
+          </a:r>
+        </a:p>
+        <a:p>
+          <a:pPr>
+            <a:lnSpc>
+              <a:spcPct val="100000"/>
+            </a:lnSpc>
+          </a:pPr>
+          <a:r>
+            <a:rPr lang="en-US" sz="1400" dirty="0"/>
+            <a:t>Shrinking filters, neurons, and epochs cut training time by 57% but collapsed accuracy to just 80.35%.</a:t>
+          </a:r>
+        </a:p>
+      </dgm:t>
+    </dgm:pt>
+    <dgm:pt modelId="{9DD87267-4B06-46C9-8119-CFFC2D93E2F6}" type="parTrans" cxnId="{E1A78AB8-2EE0-440E-8DAE-DA5028D6E338}">
+      <dgm:prSet/>
+      <dgm:spPr/>
+      <dgm:t>
+        <a:bodyPr/>
+        <a:lstStyle/>
+        <a:p>
+          <a:endParaRPr lang="en-US" sz="2400"/>
+        </a:p>
+      </dgm:t>
+    </dgm:pt>
+    <dgm:pt modelId="{48996BF2-921E-487C-A3A3-3D89F0117C64}" type="sibTrans" cxnId="{E1A78AB8-2EE0-440E-8DAE-DA5028D6E338}">
+      <dgm:prSet/>
+      <dgm:spPr/>
+      <dgm:t>
+        <a:bodyPr/>
+        <a:lstStyle/>
+        <a:p>
+          <a:endParaRPr lang="en-US" sz="2400"/>
+        </a:p>
+      </dgm:t>
+    </dgm:pt>
+    <dgm:pt modelId="{A6F06A8C-24DD-40A6-B113-3BE3173EB755}">
+      <dgm:prSet custT="1"/>
+      <dgm:spPr/>
+      <dgm:t>
+        <a:bodyPr/>
+        <a:lstStyle/>
+        <a:p>
+          <a:pPr>
+            <a:lnSpc>
+              <a:spcPct val="100000"/>
+            </a:lnSpc>
+          </a:pPr>
+          <a:r>
+            <a:rPr lang="en-US" sz="1400" b="1" dirty="0"/>
+            <a:t>Dropout improves stability without sacrificing accuracy.</a:t>
+          </a:r>
+          <a:r>
+            <a:rPr lang="en-US" sz="1400" dirty="0"/>
+            <a:t> </a:t>
+          </a:r>
+        </a:p>
+        <a:p>
+          <a:pPr>
+            <a:lnSpc>
+              <a:spcPct val="100000"/>
+            </a:lnSpc>
+          </a:pPr>
+          <a:r>
+            <a:rPr lang="en-US" sz="1400" dirty="0"/>
+            <a:t>Adding dropout layers slightly improved test accuracy to 98.80% and reduced loss compared to baseline.</a:t>
+          </a:r>
+        </a:p>
+      </dgm:t>
+    </dgm:pt>
+    <dgm:pt modelId="{86F72C9A-12A8-439D-8B97-6202B5F60186}" type="parTrans" cxnId="{944B4964-FCA8-4334-9605-EE5B01FCAB92}">
+      <dgm:prSet/>
+      <dgm:spPr/>
+      <dgm:t>
+        <a:bodyPr/>
+        <a:lstStyle/>
+        <a:p>
+          <a:endParaRPr lang="en-US" sz="2400"/>
+        </a:p>
+      </dgm:t>
+    </dgm:pt>
+    <dgm:pt modelId="{91EFF406-1556-4367-BADE-BC1A1E0B2020}" type="sibTrans" cxnId="{944B4964-FCA8-4334-9605-EE5B01FCAB92}">
+      <dgm:prSet/>
+      <dgm:spPr/>
+      <dgm:t>
+        <a:bodyPr/>
+        <a:lstStyle/>
+        <a:p>
+          <a:endParaRPr lang="en-US" sz="2400"/>
+        </a:p>
+      </dgm:t>
+    </dgm:pt>
+    <dgm:pt modelId="{96B57FF8-7A75-484C-A971-77830DC8E034}" type="pres">
+      <dgm:prSet presAssocID="{8A6F1477-8474-47E8-8A0E-9A4847AE78D9}" presName="root" presStyleCnt="0">
+        <dgm:presLayoutVars>
+          <dgm:dir/>
+          <dgm:resizeHandles val="exact"/>
+        </dgm:presLayoutVars>
+      </dgm:prSet>
+      <dgm:spPr/>
+    </dgm:pt>
+    <dgm:pt modelId="{D0EFCDA1-4193-478E-B896-1C25799FB51F}" type="pres">
+      <dgm:prSet presAssocID="{C67AE771-CE72-4C07-99EA-F01B05575451}" presName="compNode" presStyleCnt="0"/>
+      <dgm:spPr/>
+    </dgm:pt>
+    <dgm:pt modelId="{52CF68C6-29E1-43F6-B65D-7211D7C823D2}" type="pres">
+      <dgm:prSet presAssocID="{C67AE771-CE72-4C07-99EA-F01B05575451}" presName="iconRect" presStyleLbl="node1" presStyleIdx="0" presStyleCnt="4"/>
+      <dgm:spPr>
+        <a:blipFill>
+          <a:blip xmlns:r="http://schemas.openxmlformats.org/officeDocument/2006/relationships" r:embed="rId1">
+            <a:extLst>
+              <a:ext uri="{28A0092B-C50C-407E-A947-70E740481C1C}">
+                <a14:useLocalDpi xmlns:a14="http://schemas.microsoft.com/office/drawing/2010/main" val="0"/>
+              </a:ext>
+              <a:ext uri="{96DAC541-7B7A-43D3-8B79-37D633B846F1}">
+                <asvg:svgBlip xmlns:asvg="http://schemas.microsoft.com/office/drawing/2016/SVG/main" r:embed="rId2"/>
+              </a:ext>
+            </a:extLst>
+          </a:blip>
+          <a:stretch>
+            <a:fillRect/>
+          </a:stretch>
+        </a:blipFill>
+      </dgm:spPr>
+      <dgm:extLst>
+        <a:ext uri="{E40237B7-FDA0-4F09-8148-C483321AD2D9}">
+          <dgm14:cNvPr xmlns:dgm14="http://schemas.microsoft.com/office/drawing/2010/diagram" id="0" name="" descr="Stopwatch"/>
+        </a:ext>
+      </dgm:extLst>
+    </dgm:pt>
+    <dgm:pt modelId="{730BA43F-812F-4E20-880A-80DA9DE52463}" type="pres">
+      <dgm:prSet presAssocID="{C67AE771-CE72-4C07-99EA-F01B05575451}" presName="spaceRect" presStyleCnt="0"/>
+      <dgm:spPr/>
+    </dgm:pt>
+    <dgm:pt modelId="{486B61A9-5867-40CF-B6BE-B8C86A7CCA9D}" type="pres">
+      <dgm:prSet presAssocID="{C67AE771-CE72-4C07-99EA-F01B05575451}" presName="textRect" presStyleLbl="revTx" presStyleIdx="0" presStyleCnt="4">
+        <dgm:presLayoutVars>
+          <dgm:chMax val="1"/>
+          <dgm:chPref val="1"/>
+        </dgm:presLayoutVars>
+      </dgm:prSet>
+      <dgm:spPr/>
+    </dgm:pt>
+    <dgm:pt modelId="{874362DD-F005-466C-B9F7-7CC703C4A3AD}" type="pres">
+      <dgm:prSet presAssocID="{075CE9EF-8EF1-416C-BC7E-FF9DD19AE0E8}" presName="sibTrans" presStyleCnt="0"/>
+      <dgm:spPr/>
+    </dgm:pt>
+    <dgm:pt modelId="{631DE275-E268-4C9E-B1FC-96BD0D0F496D}" type="pres">
+      <dgm:prSet presAssocID="{3BAC4AC2-95BE-4F79-A890-9F45D127CC9F}" presName="compNode" presStyleCnt="0"/>
+      <dgm:spPr/>
+    </dgm:pt>
+    <dgm:pt modelId="{11B1251B-FFAE-4A53-B80D-007EC675C9A8}" type="pres">
+      <dgm:prSet presAssocID="{3BAC4AC2-95BE-4F79-A890-9F45D127CC9F}" presName="iconRect" presStyleLbl="node1" presStyleIdx="1" presStyleCnt="4"/>
+      <dgm:spPr>
+        <a:blipFill>
+          <a:blip xmlns:r="http://schemas.openxmlformats.org/officeDocument/2006/relationships" r:embed="rId3">
+            <a:extLst>
+              <a:ext uri="{28A0092B-C50C-407E-A947-70E740481C1C}">
+                <a14:useLocalDpi xmlns:a14="http://schemas.microsoft.com/office/drawing/2010/main" val="0"/>
+              </a:ext>
+              <a:ext uri="{96DAC541-7B7A-43D3-8B79-37D633B846F1}">
+                <asvg:svgBlip xmlns:asvg="http://schemas.microsoft.com/office/drawing/2016/SVG/main" r:embed="rId4"/>
+              </a:ext>
+            </a:extLst>
+          </a:blip>
+          <a:stretch>
+            <a:fillRect/>
+          </a:stretch>
+        </a:blipFill>
+      </dgm:spPr>
+      <dgm:extLst>
+        <a:ext uri="{E40237B7-FDA0-4F09-8148-C483321AD2D9}">
+          <dgm14:cNvPr xmlns:dgm14="http://schemas.microsoft.com/office/drawing/2010/diagram" id="0" name="" descr="Bullseye"/>
+        </a:ext>
+      </dgm:extLst>
+    </dgm:pt>
+    <dgm:pt modelId="{4CB7103D-9732-4B81-A44C-048140359BAD}" type="pres">
+      <dgm:prSet presAssocID="{3BAC4AC2-95BE-4F79-A890-9F45D127CC9F}" presName="spaceRect" presStyleCnt="0"/>
+      <dgm:spPr/>
+    </dgm:pt>
+    <dgm:pt modelId="{738924C7-D731-4E9D-863F-4D0DC59302E3}" type="pres">
+      <dgm:prSet presAssocID="{3BAC4AC2-95BE-4F79-A890-9F45D127CC9F}" presName="textRect" presStyleLbl="revTx" presStyleIdx="1" presStyleCnt="4">
+        <dgm:presLayoutVars>
+          <dgm:chMax val="1"/>
+          <dgm:chPref val="1"/>
+        </dgm:presLayoutVars>
+      </dgm:prSet>
+      <dgm:spPr/>
+    </dgm:pt>
+    <dgm:pt modelId="{DDF253AD-3FA6-46EC-8886-653535CECC25}" type="pres">
+      <dgm:prSet presAssocID="{6A9F8A51-4478-43D5-9F8E-912E9728AD84}" presName="sibTrans" presStyleCnt="0"/>
+      <dgm:spPr/>
+    </dgm:pt>
+    <dgm:pt modelId="{7A7EC9B4-9167-4F54-B884-45B326779A1B}" type="pres">
+      <dgm:prSet presAssocID="{C4B6D920-EFE4-4F70-8589-49EC2BFCF63C}" presName="compNode" presStyleCnt="0"/>
+      <dgm:spPr/>
+    </dgm:pt>
+    <dgm:pt modelId="{FA35E90F-EFC4-4950-9FB3-628E5AA0E546}" type="pres">
+      <dgm:prSet presAssocID="{C4B6D920-EFE4-4F70-8589-49EC2BFCF63C}" presName="iconRect" presStyleLbl="node1" presStyleIdx="2" presStyleCnt="4"/>
+      <dgm:spPr>
+        <a:blipFill>
+          <a:blip xmlns:r="http://schemas.openxmlformats.org/officeDocument/2006/relationships" r:embed="rId5">
+            <a:extLst>
+              <a:ext uri="{28A0092B-C50C-407E-A947-70E740481C1C}">
+                <a14:useLocalDpi xmlns:a14="http://schemas.microsoft.com/office/drawing/2010/main" val="0"/>
+              </a:ext>
+              <a:ext uri="{96DAC541-7B7A-43D3-8B79-37D633B846F1}">
+                <asvg:svgBlip xmlns:asvg="http://schemas.microsoft.com/office/drawing/2016/SVG/main" r:embed="rId6"/>
+              </a:ext>
+            </a:extLst>
+          </a:blip>
+          <a:stretch>
+            <a:fillRect/>
+          </a:stretch>
+        </a:blipFill>
+      </dgm:spPr>
+      <dgm:extLst>
+        <a:ext uri="{E40237B7-FDA0-4F09-8148-C483321AD2D9}">
+          <dgm14:cNvPr xmlns:dgm14="http://schemas.microsoft.com/office/drawing/2010/diagram" id="0" name="" descr="Brain"/>
+        </a:ext>
+      </dgm:extLst>
+    </dgm:pt>
+    <dgm:pt modelId="{FE03A202-D8BA-4589-87C7-43DFFBDBC26F}" type="pres">
+      <dgm:prSet presAssocID="{C4B6D920-EFE4-4F70-8589-49EC2BFCF63C}" presName="spaceRect" presStyleCnt="0"/>
+      <dgm:spPr/>
+    </dgm:pt>
+    <dgm:pt modelId="{567F7536-B00C-41A2-821B-5B54467CE285}" type="pres">
+      <dgm:prSet presAssocID="{C4B6D920-EFE4-4F70-8589-49EC2BFCF63C}" presName="textRect" presStyleLbl="revTx" presStyleIdx="2" presStyleCnt="4">
+        <dgm:presLayoutVars>
+          <dgm:chMax val="1"/>
+          <dgm:chPref val="1"/>
+        </dgm:presLayoutVars>
+      </dgm:prSet>
+      <dgm:spPr/>
+    </dgm:pt>
+    <dgm:pt modelId="{3EF3C0D7-88BD-40B4-9E9D-DCF7FBD593A9}" type="pres">
+      <dgm:prSet presAssocID="{48996BF2-921E-487C-A3A3-3D89F0117C64}" presName="sibTrans" presStyleCnt="0"/>
+      <dgm:spPr/>
+    </dgm:pt>
+    <dgm:pt modelId="{052FFAB9-2BE1-404F-83F7-B529C40A4535}" type="pres">
+      <dgm:prSet presAssocID="{A6F06A8C-24DD-40A6-B113-3BE3173EB755}" presName="compNode" presStyleCnt="0"/>
+      <dgm:spPr/>
+    </dgm:pt>
+    <dgm:pt modelId="{DB3A1ABE-AC0A-4BE2-8713-61BC0507EC2B}" type="pres">
+      <dgm:prSet presAssocID="{A6F06A8C-24DD-40A6-B113-3BE3173EB755}" presName="iconRect" presStyleLbl="node1" presStyleIdx="3" presStyleCnt="4"/>
+      <dgm:spPr>
+        <a:blipFill>
+          <a:blip xmlns:r="http://schemas.openxmlformats.org/officeDocument/2006/relationships" r:embed="rId7">
+            <a:extLst>
+              <a:ext uri="{28A0092B-C50C-407E-A947-70E740481C1C}">
+                <a14:useLocalDpi xmlns:a14="http://schemas.microsoft.com/office/drawing/2010/main" val="0"/>
+              </a:ext>
+              <a:ext uri="{96DAC541-7B7A-43D3-8B79-37D633B846F1}">
+                <asvg:svgBlip xmlns:asvg="http://schemas.microsoft.com/office/drawing/2016/SVG/main" r:embed="rId8"/>
+              </a:ext>
+            </a:extLst>
+          </a:blip>
+          <a:stretch>
+            <a:fillRect/>
+          </a:stretch>
+        </a:blipFill>
+      </dgm:spPr>
+      <dgm:extLst>
+        <a:ext uri="{E40237B7-FDA0-4F09-8148-C483321AD2D9}">
+          <dgm14:cNvPr xmlns:dgm14="http://schemas.microsoft.com/office/drawing/2010/diagram" id="0" name="" descr="Checkmark"/>
+        </a:ext>
+      </dgm:extLst>
+    </dgm:pt>
+    <dgm:pt modelId="{9E5BBC21-A4AF-4C76-9494-AF9CF7DF321B}" type="pres">
+      <dgm:prSet presAssocID="{A6F06A8C-24DD-40A6-B113-3BE3173EB755}" presName="spaceRect" presStyleCnt="0"/>
+      <dgm:spPr/>
+    </dgm:pt>
+    <dgm:pt modelId="{3F25968F-BCC1-4E8E-8630-137DC457953E}" type="pres">
+      <dgm:prSet presAssocID="{A6F06A8C-24DD-40A6-B113-3BE3173EB755}" presName="textRect" presStyleLbl="revTx" presStyleIdx="3" presStyleCnt="4">
+        <dgm:presLayoutVars>
+          <dgm:chMax val="1"/>
+          <dgm:chPref val="1"/>
+        </dgm:presLayoutVars>
+      </dgm:prSet>
+      <dgm:spPr/>
+    </dgm:pt>
+  </dgm:ptLst>
+  <dgm:cxnLst>
+    <dgm:cxn modelId="{C86AF12F-D7A5-44A7-AAC0-7C05393797B9}" type="presOf" srcId="{C4B6D920-EFE4-4F70-8589-49EC2BFCF63C}" destId="{567F7536-B00C-41A2-821B-5B54467CE285}" srcOrd="0" destOrd="0" presId="urn:microsoft.com/office/officeart/2018/2/layout/IconLabelList"/>
+    <dgm:cxn modelId="{8150733B-BD16-40E9-89AA-8E31E1AA8710}" type="presOf" srcId="{8A6F1477-8474-47E8-8A0E-9A4847AE78D9}" destId="{96B57FF8-7A75-484C-A971-77830DC8E034}" srcOrd="0" destOrd="0" presId="urn:microsoft.com/office/officeart/2018/2/layout/IconLabelList"/>
+    <dgm:cxn modelId="{AE07415F-5372-43B9-A6DD-BFE946203C6F}" type="presOf" srcId="{3BAC4AC2-95BE-4F79-A890-9F45D127CC9F}" destId="{738924C7-D731-4E9D-863F-4D0DC59302E3}" srcOrd="0" destOrd="0" presId="urn:microsoft.com/office/officeart/2018/2/layout/IconLabelList"/>
+    <dgm:cxn modelId="{944B4964-FCA8-4334-9605-EE5B01FCAB92}" srcId="{8A6F1477-8474-47E8-8A0E-9A4847AE78D9}" destId="{A6F06A8C-24DD-40A6-B113-3BE3173EB755}" srcOrd="3" destOrd="0" parTransId="{86F72C9A-12A8-439D-8B97-6202B5F60186}" sibTransId="{91EFF406-1556-4367-BADE-BC1A1E0B2020}"/>
+    <dgm:cxn modelId="{9F362A70-E190-4ACF-B5A9-F0970A698EE1}" srcId="{8A6F1477-8474-47E8-8A0E-9A4847AE78D9}" destId="{C67AE771-CE72-4C07-99EA-F01B05575451}" srcOrd="0" destOrd="0" parTransId="{409190EA-6F98-49EE-9F76-A8C8ECC874EE}" sibTransId="{075CE9EF-8EF1-416C-BC7E-FF9DD19AE0E8}"/>
+    <dgm:cxn modelId="{E1A78AB8-2EE0-440E-8DAE-DA5028D6E338}" srcId="{8A6F1477-8474-47E8-8A0E-9A4847AE78D9}" destId="{C4B6D920-EFE4-4F70-8589-49EC2BFCF63C}" srcOrd="2" destOrd="0" parTransId="{9DD87267-4B06-46C9-8119-CFFC2D93E2F6}" sibTransId="{48996BF2-921E-487C-A3A3-3D89F0117C64}"/>
+    <dgm:cxn modelId="{9AC90BCE-6D50-43F1-9ECE-E7F04003DADE}" type="presOf" srcId="{A6F06A8C-24DD-40A6-B113-3BE3173EB755}" destId="{3F25968F-BCC1-4E8E-8630-137DC457953E}" srcOrd="0" destOrd="0" presId="urn:microsoft.com/office/officeart/2018/2/layout/IconLabelList"/>
+    <dgm:cxn modelId="{DA5AD5E9-6D90-4F7B-92F9-2C36BBAD2425}" type="presOf" srcId="{C67AE771-CE72-4C07-99EA-F01B05575451}" destId="{486B61A9-5867-40CF-B6BE-B8C86A7CCA9D}" srcOrd="0" destOrd="0" presId="urn:microsoft.com/office/officeart/2018/2/layout/IconLabelList"/>
+    <dgm:cxn modelId="{D03BA2FE-D14D-4A4E-BE5F-E3A426C9230C}" srcId="{8A6F1477-8474-47E8-8A0E-9A4847AE78D9}" destId="{3BAC4AC2-95BE-4F79-A890-9F45D127CC9F}" srcOrd="1" destOrd="0" parTransId="{9AD7202F-0E60-4341-8AF3-2C9140E6F183}" sibTransId="{6A9F8A51-4478-43D5-9F8E-912E9728AD84}"/>
+    <dgm:cxn modelId="{889CC967-E345-4C61-B6D9-424CB607F3E1}" type="presParOf" srcId="{96B57FF8-7A75-484C-A971-77830DC8E034}" destId="{D0EFCDA1-4193-478E-B896-1C25799FB51F}" srcOrd="0" destOrd="0" presId="urn:microsoft.com/office/officeart/2018/2/layout/IconLabelList"/>
+    <dgm:cxn modelId="{6F3F81D3-F62D-41A5-A997-2D3EA1CB40A9}" type="presParOf" srcId="{D0EFCDA1-4193-478E-B896-1C25799FB51F}" destId="{52CF68C6-29E1-43F6-B65D-7211D7C823D2}" srcOrd="0" destOrd="0" presId="urn:microsoft.com/office/officeart/2018/2/layout/IconLabelList"/>
+    <dgm:cxn modelId="{C0F42A02-1323-4FE5-A0ED-CADAAE4DFDC3}" type="presParOf" srcId="{D0EFCDA1-4193-478E-B896-1C25799FB51F}" destId="{730BA43F-812F-4E20-880A-80DA9DE52463}" srcOrd="1" destOrd="0" presId="urn:microsoft.com/office/officeart/2018/2/layout/IconLabelList"/>
+    <dgm:cxn modelId="{49764099-D41E-4C1D-8AC3-9977D038846D}" type="presParOf" srcId="{D0EFCDA1-4193-478E-B896-1C25799FB51F}" destId="{486B61A9-5867-40CF-B6BE-B8C86A7CCA9D}" srcOrd="2" destOrd="0" presId="urn:microsoft.com/office/officeart/2018/2/layout/IconLabelList"/>
+    <dgm:cxn modelId="{3FC59A26-8BEB-4DC7-AEA7-828F1A41D9CD}" type="presParOf" srcId="{96B57FF8-7A75-484C-A971-77830DC8E034}" destId="{874362DD-F005-466C-B9F7-7CC703C4A3AD}" srcOrd="1" destOrd="0" presId="urn:microsoft.com/office/officeart/2018/2/layout/IconLabelList"/>
+    <dgm:cxn modelId="{251A303D-F8EC-4AF2-8562-C7C28F1DB7D0}" type="presParOf" srcId="{96B57FF8-7A75-484C-A971-77830DC8E034}" destId="{631DE275-E268-4C9E-B1FC-96BD0D0F496D}" srcOrd="2" destOrd="0" presId="urn:microsoft.com/office/officeart/2018/2/layout/IconLabelList"/>
+    <dgm:cxn modelId="{83D9D144-0F47-4DDD-A153-FFE7BE551C5C}" type="presParOf" srcId="{631DE275-E268-4C9E-B1FC-96BD0D0F496D}" destId="{11B1251B-FFAE-4A53-B80D-007EC675C9A8}" srcOrd="0" destOrd="0" presId="urn:microsoft.com/office/officeart/2018/2/layout/IconLabelList"/>
+    <dgm:cxn modelId="{2AC4E9A5-4640-4CCF-B8AE-FC54A7281A0D}" type="presParOf" srcId="{631DE275-E268-4C9E-B1FC-96BD0D0F496D}" destId="{4CB7103D-9732-4B81-A44C-048140359BAD}" srcOrd="1" destOrd="0" presId="urn:microsoft.com/office/officeart/2018/2/layout/IconLabelList"/>
+    <dgm:cxn modelId="{1EFA26C6-82D0-4CE2-B492-D51E573208EB}" type="presParOf" srcId="{631DE275-E268-4C9E-B1FC-96BD0D0F496D}" destId="{738924C7-D731-4E9D-863F-4D0DC59302E3}" srcOrd="2" destOrd="0" presId="urn:microsoft.com/office/officeart/2018/2/layout/IconLabelList"/>
+    <dgm:cxn modelId="{CFFF74DC-DBFE-4EB6-B014-8F7406E4BF75}" type="presParOf" srcId="{96B57FF8-7A75-484C-A971-77830DC8E034}" destId="{DDF253AD-3FA6-46EC-8886-653535CECC25}" srcOrd="3" destOrd="0" presId="urn:microsoft.com/office/officeart/2018/2/layout/IconLabelList"/>
+    <dgm:cxn modelId="{647BB26B-708D-4531-9F03-C6F8BF64C8D3}" type="presParOf" srcId="{96B57FF8-7A75-484C-A971-77830DC8E034}" destId="{7A7EC9B4-9167-4F54-B884-45B326779A1B}" srcOrd="4" destOrd="0" presId="urn:microsoft.com/office/officeart/2018/2/layout/IconLabelList"/>
+    <dgm:cxn modelId="{6E8C5922-4197-47DA-8D1D-F5B07E2BE91B}" type="presParOf" srcId="{7A7EC9B4-9167-4F54-B884-45B326779A1B}" destId="{FA35E90F-EFC4-4950-9FB3-628E5AA0E546}" srcOrd="0" destOrd="0" presId="urn:microsoft.com/office/officeart/2018/2/layout/IconLabelList"/>
+    <dgm:cxn modelId="{D33D8BC0-E0E4-4E14-8BAF-016319ADE917}" type="presParOf" srcId="{7A7EC9B4-9167-4F54-B884-45B326779A1B}" destId="{FE03A202-D8BA-4589-87C7-43DFFBDBC26F}" srcOrd="1" destOrd="0" presId="urn:microsoft.com/office/officeart/2018/2/layout/IconLabelList"/>
+    <dgm:cxn modelId="{1CE66624-5B9C-463D-BEA1-F013F4D219B3}" type="presParOf" srcId="{7A7EC9B4-9167-4F54-B884-45B326779A1B}" destId="{567F7536-B00C-41A2-821B-5B54467CE285}" srcOrd="2" destOrd="0" presId="urn:microsoft.com/office/officeart/2018/2/layout/IconLabelList"/>
+    <dgm:cxn modelId="{C6EEEF05-7AB7-4BD3-82F9-D38F4188F501}" type="presParOf" srcId="{96B57FF8-7A75-484C-A971-77830DC8E034}" destId="{3EF3C0D7-88BD-40B4-9E9D-DCF7FBD593A9}" srcOrd="5" destOrd="0" presId="urn:microsoft.com/office/officeart/2018/2/layout/IconLabelList"/>
+    <dgm:cxn modelId="{D7CCD71C-4516-4D08-A42E-E372A7F05E23}" type="presParOf" srcId="{96B57FF8-7A75-484C-A971-77830DC8E034}" destId="{052FFAB9-2BE1-404F-83F7-B529C40A4535}" srcOrd="6" destOrd="0" presId="urn:microsoft.com/office/officeart/2018/2/layout/IconLabelList"/>
+    <dgm:cxn modelId="{F27C0FCD-4CF8-4B96-A33D-A1579C652E2D}" type="presParOf" srcId="{052FFAB9-2BE1-404F-83F7-B529C40A4535}" destId="{DB3A1ABE-AC0A-4BE2-8713-61BC0507EC2B}" srcOrd="0" destOrd="0" presId="urn:microsoft.com/office/officeart/2018/2/layout/IconLabelList"/>
+    <dgm:cxn modelId="{263911BF-0059-43B4-8EE5-912B64BF26A6}" type="presParOf" srcId="{052FFAB9-2BE1-404F-83F7-B529C40A4535}" destId="{9E5BBC21-A4AF-4C76-9494-AF9CF7DF321B}" srcOrd="1" destOrd="0" presId="urn:microsoft.com/office/officeart/2018/2/layout/IconLabelList"/>
+    <dgm:cxn modelId="{DFE4DEA1-2AFC-49E4-A73C-7B34FD5ACE7E}" type="presParOf" srcId="{052FFAB9-2BE1-404F-83F7-B529C40A4535}" destId="{3F25968F-BCC1-4E8E-8630-137DC457953E}" srcOrd="2" destOrd="0" presId="urn:microsoft.com/office/officeart/2018/2/layout/IconLabelList"/>
+  </dgm:cxnLst>
+  <dgm:bg/>
+  <dgm:whole/>
+  <dgm:extLst>
+    <a:ext uri="http://schemas.microsoft.com/office/drawing/2008/diagram">
+      <dsp:dataModelExt xmlns:dsp="http://schemas.microsoft.com/office/drawing/2008/diagram" relId="rId6" minVer="http://schemas.openxmlformats.org/drawingml/2006/diagram"/>
+    </a:ext>
+  </dgm:extLst>
+</dgm:dataModel>
+</file>
+
+<file path=ppt/diagrams/drawing1.xml><?xml version="1.0" encoding="utf-8"?>
+<dsp:drawing xmlns:dgm="http://schemas.openxmlformats.org/drawingml/2006/diagram" xmlns:dsp="http://schemas.microsoft.com/office/drawing/2008/diagram" xmlns:a="http://schemas.openxmlformats.org/drawingml/2006/main">
+  <dsp:spTree>
+    <dsp:nvGrpSpPr>
+      <dsp:cNvPr id="0" name=""/>
+      <dsp:cNvGrpSpPr/>
+    </dsp:nvGrpSpPr>
+    <dsp:grpSpPr/>
+    <dsp:sp modelId="{52CF68C6-29E1-43F6-B65D-7211D7C823D2}">
+      <dsp:nvSpPr>
+        <dsp:cNvPr id="0" name=""/>
+        <dsp:cNvSpPr/>
+      </dsp:nvSpPr>
+      <dsp:spPr>
+        <a:xfrm>
+          <a:off x="1378844" y="192100"/>
+          <a:ext cx="788642" cy="788642"/>
+        </a:xfrm>
+        <a:prstGeom prst="rect">
+          <a:avLst/>
+        </a:prstGeom>
+        <a:blipFill>
+          <a:blip xmlns:r="http://schemas.openxmlformats.org/officeDocument/2006/relationships" r:embed="rId1">
+            <a:extLst>
+              <a:ext uri="{28A0092B-C50C-407E-A947-70E740481C1C}">
+                <a14:useLocalDpi xmlns:a14="http://schemas.microsoft.com/office/drawing/2010/main" val="0"/>
+              </a:ext>
+              <a:ext uri="{96DAC541-7B7A-43D3-8B79-37D633B846F1}">
+                <asvg:svgBlip xmlns:asvg="http://schemas.microsoft.com/office/drawing/2016/SVG/main" r:embed="rId2"/>
+              </a:ext>
+            </a:extLst>
+          </a:blip>
+          <a:stretch>
+            <a:fillRect/>
+          </a:stretch>
+        </a:blipFill>
+        <a:ln w="19050" cap="flat" cmpd="sng" algn="ctr">
+          <a:solidFill>
+            <a:schemeClr val="lt1">
+              <a:hueOff val="0"/>
+              <a:satOff val="0"/>
+              <a:lumOff val="0"/>
+              <a:alphaOff val="0"/>
+            </a:schemeClr>
+          </a:solidFill>
+          <a:prstDash val="solid"/>
+          <a:miter lim="800000"/>
+        </a:ln>
+        <a:effectLst/>
+      </dsp:spPr>
+      <dsp:style>
+        <a:lnRef idx="2">
+          <a:scrgbClr r="0" g="0" b="0"/>
+        </a:lnRef>
+        <a:fillRef idx="1">
+          <a:scrgbClr r="0" g="0" b="0"/>
+        </a:fillRef>
+        <a:effectRef idx="0">
+          <a:scrgbClr r="0" g="0" b="0"/>
+        </a:effectRef>
+        <a:fontRef idx="minor">
+          <a:schemeClr val="lt1"/>
+        </a:fontRef>
+      </dsp:style>
+    </dsp:sp>
+    <dsp:sp modelId="{486B61A9-5867-40CF-B6BE-B8C86A7CCA9D}">
+      <dsp:nvSpPr>
+        <dsp:cNvPr id="0" name=""/>
+        <dsp:cNvSpPr/>
+      </dsp:nvSpPr>
+      <dsp:spPr>
+        <a:xfrm>
+          <a:off x="896895" y="1475837"/>
+          <a:ext cx="1752539" cy="2015419"/>
+        </a:xfrm>
+        <a:prstGeom prst="rect">
+          <a:avLst/>
+        </a:prstGeom>
+        <a:noFill/>
+        <a:ln>
+          <a:noFill/>
+        </a:ln>
+        <a:effectLst/>
+      </dsp:spPr>
+      <dsp:style>
+        <a:lnRef idx="0">
+          <a:scrgbClr r="0" g="0" b="0"/>
+        </a:lnRef>
+        <a:fillRef idx="0">
+          <a:scrgbClr r="0" g="0" b="0"/>
+        </a:fillRef>
+        <a:effectRef idx="0">
+          <a:scrgbClr r="0" g="0" b="0"/>
+        </a:effectRef>
+        <a:fontRef idx="minor"/>
+      </dsp:style>
+      <dsp:txBody>
+        <a:bodyPr spcFirstLastPara="0" vert="horz" wrap="square" lIns="0" tIns="0" rIns="0" bIns="0" numCol="1" spcCol="1270" anchor="t" anchorCtr="0">
+          <a:noAutofit/>
+        </a:bodyPr>
+        <a:lstStyle/>
+        <a:p>
+          <a:pPr marL="0" lvl="0" indent="0" algn="ctr" defTabSz="622300">
+            <a:lnSpc>
+              <a:spcPct val="100000"/>
+            </a:lnSpc>
+            <a:spcBef>
+              <a:spcPct val="0"/>
+            </a:spcBef>
+            <a:spcAft>
+              <a:spcPct val="35000"/>
+            </a:spcAft>
+            <a:buNone/>
+          </a:pPr>
+          <a:r>
+            <a:rPr lang="en-US" sz="1400" b="1" kern="1200" dirty="0"/>
+            <a:t>Larger batch size trades minimal accuracy for faster training.</a:t>
+          </a:r>
+          <a:r>
+            <a:rPr lang="en-US" sz="1400" kern="1200" dirty="0"/>
+            <a:t> </a:t>
+          </a:r>
+        </a:p>
+        <a:p>
+          <a:pPr marL="0" lvl="0" indent="0" algn="ctr" defTabSz="622300">
+            <a:lnSpc>
+              <a:spcPct val="100000"/>
+            </a:lnSpc>
+            <a:spcBef>
+              <a:spcPct val="0"/>
+            </a:spcBef>
+            <a:spcAft>
+              <a:spcPct val="35000"/>
+            </a:spcAft>
+            <a:buNone/>
+          </a:pPr>
+          <a:r>
+            <a:rPr lang="en-US" sz="1400" kern="1200" dirty="0"/>
+            <a:t>Increasing batch size from 32 to 64 reduced training time by 29% with only a 0.23% drop in accuracy.</a:t>
+          </a:r>
+        </a:p>
+      </dsp:txBody>
+      <dsp:txXfrm>
+        <a:off x="896895" y="1475837"/>
+        <a:ext cx="1752539" cy="2015419"/>
+      </dsp:txXfrm>
+    </dsp:sp>
+    <dsp:sp modelId="{11B1251B-FFAE-4A53-B80D-007EC675C9A8}">
+      <dsp:nvSpPr>
+        <dsp:cNvPr id="0" name=""/>
+        <dsp:cNvSpPr/>
+      </dsp:nvSpPr>
+      <dsp:spPr>
+        <a:xfrm>
+          <a:off x="3438077" y="192100"/>
+          <a:ext cx="788642" cy="788642"/>
+        </a:xfrm>
+        <a:prstGeom prst="rect">
+          <a:avLst/>
+        </a:prstGeom>
+        <a:blipFill>
+          <a:blip xmlns:r="http://schemas.openxmlformats.org/officeDocument/2006/relationships" r:embed="rId3">
+            <a:extLst>
+              <a:ext uri="{28A0092B-C50C-407E-A947-70E740481C1C}">
+                <a14:useLocalDpi xmlns:a14="http://schemas.microsoft.com/office/drawing/2010/main" val="0"/>
+              </a:ext>
+              <a:ext uri="{96DAC541-7B7A-43D3-8B79-37D633B846F1}">
+                <asvg:svgBlip xmlns:asvg="http://schemas.microsoft.com/office/drawing/2016/SVG/main" r:embed="rId4"/>
+              </a:ext>
+            </a:extLst>
+          </a:blip>
+          <a:stretch>
+            <a:fillRect/>
+          </a:stretch>
+        </a:blipFill>
+        <a:ln w="19050" cap="flat" cmpd="sng" algn="ctr">
+          <a:solidFill>
+            <a:schemeClr val="lt1">
+              <a:hueOff val="0"/>
+              <a:satOff val="0"/>
+              <a:lumOff val="0"/>
+              <a:alphaOff val="0"/>
+            </a:schemeClr>
+          </a:solidFill>
+          <a:prstDash val="solid"/>
+          <a:miter lim="800000"/>
+        </a:ln>
+        <a:effectLst/>
+      </dsp:spPr>
+      <dsp:style>
+        <a:lnRef idx="2">
+          <a:scrgbClr r="0" g="0" b="0"/>
+        </a:lnRef>
+        <a:fillRef idx="1">
+          <a:scrgbClr r="0" g="0" b="0"/>
+        </a:fillRef>
+        <a:effectRef idx="0">
+          <a:scrgbClr r="0" g="0" b="0"/>
+        </a:effectRef>
+        <a:fontRef idx="minor">
+          <a:schemeClr val="lt1"/>
+        </a:fontRef>
+      </dsp:style>
+    </dsp:sp>
+    <dsp:sp modelId="{738924C7-D731-4E9D-863F-4D0DC59302E3}">
+      <dsp:nvSpPr>
+        <dsp:cNvPr id="0" name=""/>
+        <dsp:cNvSpPr/>
+      </dsp:nvSpPr>
+      <dsp:spPr>
+        <a:xfrm>
+          <a:off x="2956129" y="1475837"/>
+          <a:ext cx="1752539" cy="2015419"/>
+        </a:xfrm>
+        <a:prstGeom prst="rect">
+          <a:avLst/>
+        </a:prstGeom>
+        <a:noFill/>
+        <a:ln>
+          <a:noFill/>
+        </a:ln>
+        <a:effectLst/>
+      </dsp:spPr>
+      <dsp:style>
+        <a:lnRef idx="0">
+          <a:scrgbClr r="0" g="0" b="0"/>
+        </a:lnRef>
+        <a:fillRef idx="0">
+          <a:scrgbClr r="0" g="0" b="0"/>
+        </a:fillRef>
+        <a:effectRef idx="0">
+          <a:scrgbClr r="0" g="0" b="0"/>
+        </a:effectRef>
+        <a:fontRef idx="minor"/>
+      </dsp:style>
+      <dsp:txBody>
+        <a:bodyPr spcFirstLastPara="0" vert="horz" wrap="square" lIns="0" tIns="0" rIns="0" bIns="0" numCol="1" spcCol="1270" anchor="t" anchorCtr="0">
+          <a:noAutofit/>
+        </a:bodyPr>
+        <a:lstStyle/>
+        <a:p>
+          <a:pPr marL="0" lvl="0" indent="0" algn="ctr" defTabSz="622300">
+            <a:lnSpc>
+              <a:spcPct val="100000"/>
+            </a:lnSpc>
+            <a:spcBef>
+              <a:spcPct val="0"/>
+            </a:spcBef>
+            <a:spcAft>
+              <a:spcPct val="35000"/>
+            </a:spcAft>
+            <a:buNone/>
+          </a:pPr>
+          <a:r>
+            <a:rPr lang="en-US" sz="1400" b="1" kern="1200" dirty="0"/>
+            <a:t>Model depth is the strongest driver of accuracy.</a:t>
+          </a:r>
+          <a:r>
+            <a:rPr lang="en-US" sz="1400" kern="1200" dirty="0"/>
+            <a:t> </a:t>
+          </a:r>
+        </a:p>
+        <a:p>
+          <a:pPr marL="0" lvl="0" indent="0" algn="ctr" defTabSz="622300">
+            <a:lnSpc>
+              <a:spcPct val="100000"/>
+            </a:lnSpc>
+            <a:spcBef>
+              <a:spcPct val="0"/>
+            </a:spcBef>
+            <a:spcAft>
+              <a:spcPct val="35000"/>
+            </a:spcAft>
+            <a:buNone/>
+          </a:pPr>
+          <a:r>
+            <a:rPr lang="en-US" sz="1400" kern="1200" dirty="0"/>
+            <a:t>Adding two more Conv2D+Pooling blocks pushed training accuracy to ~99.3%, the highest of any version.</a:t>
+          </a:r>
+        </a:p>
+      </dsp:txBody>
+      <dsp:txXfrm>
+        <a:off x="2956129" y="1475837"/>
+        <a:ext cx="1752539" cy="2015419"/>
+      </dsp:txXfrm>
+    </dsp:sp>
+    <dsp:sp modelId="{FA35E90F-EFC4-4950-9FB3-628E5AA0E546}">
+      <dsp:nvSpPr>
+        <dsp:cNvPr id="0" name=""/>
+        <dsp:cNvSpPr/>
+      </dsp:nvSpPr>
+      <dsp:spPr>
+        <a:xfrm>
+          <a:off x="5497310" y="192100"/>
+          <a:ext cx="788642" cy="788642"/>
+        </a:xfrm>
+        <a:prstGeom prst="rect">
+          <a:avLst/>
+        </a:prstGeom>
+        <a:blipFill>
+          <a:blip xmlns:r="http://schemas.openxmlformats.org/officeDocument/2006/relationships" r:embed="rId5">
+            <a:extLst>
+              <a:ext uri="{28A0092B-C50C-407E-A947-70E740481C1C}">
+                <a14:useLocalDpi xmlns:a14="http://schemas.microsoft.com/office/drawing/2010/main" val="0"/>
+              </a:ext>
+              <a:ext uri="{96DAC541-7B7A-43D3-8B79-37D633B846F1}">
+                <asvg:svgBlip xmlns:asvg="http://schemas.microsoft.com/office/drawing/2016/SVG/main" r:embed="rId6"/>
+              </a:ext>
+            </a:extLst>
+          </a:blip>
+          <a:stretch>
+            <a:fillRect/>
+          </a:stretch>
+        </a:blipFill>
+        <a:ln w="19050" cap="flat" cmpd="sng" algn="ctr">
+          <a:solidFill>
+            <a:schemeClr val="lt1">
+              <a:hueOff val="0"/>
+              <a:satOff val="0"/>
+              <a:lumOff val="0"/>
+              <a:alphaOff val="0"/>
+            </a:schemeClr>
+          </a:solidFill>
+          <a:prstDash val="solid"/>
+          <a:miter lim="800000"/>
+        </a:ln>
+        <a:effectLst/>
+      </dsp:spPr>
+      <dsp:style>
+        <a:lnRef idx="2">
+          <a:scrgbClr r="0" g="0" b="0"/>
+        </a:lnRef>
+        <a:fillRef idx="1">
+          <a:scrgbClr r="0" g="0" b="0"/>
+        </a:fillRef>
+        <a:effectRef idx="0">
+          <a:scrgbClr r="0" g="0" b="0"/>
+        </a:effectRef>
+        <a:fontRef idx="minor">
+          <a:schemeClr val="lt1"/>
+        </a:fontRef>
+      </dsp:style>
+    </dsp:sp>
+    <dsp:sp modelId="{567F7536-B00C-41A2-821B-5B54467CE285}">
+      <dsp:nvSpPr>
+        <dsp:cNvPr id="0" name=""/>
+        <dsp:cNvSpPr/>
+      </dsp:nvSpPr>
+      <dsp:spPr>
+        <a:xfrm>
+          <a:off x="5015362" y="1475837"/>
+          <a:ext cx="1752539" cy="2015419"/>
+        </a:xfrm>
+        <a:prstGeom prst="rect">
+          <a:avLst/>
+        </a:prstGeom>
+        <a:noFill/>
+        <a:ln>
+          <a:noFill/>
+        </a:ln>
+        <a:effectLst/>
+      </dsp:spPr>
+      <dsp:style>
+        <a:lnRef idx="0">
+          <a:scrgbClr r="0" g="0" b="0"/>
+        </a:lnRef>
+        <a:fillRef idx="0">
+          <a:scrgbClr r="0" g="0" b="0"/>
+        </a:fillRef>
+        <a:effectRef idx="0">
+          <a:scrgbClr r="0" g="0" b="0"/>
+        </a:effectRef>
+        <a:fontRef idx="minor"/>
+      </dsp:style>
+      <dsp:txBody>
+        <a:bodyPr spcFirstLastPara="0" vert="horz" wrap="square" lIns="0" tIns="0" rIns="0" bIns="0" numCol="1" spcCol="1270" anchor="t" anchorCtr="0">
+          <a:noAutofit/>
+        </a:bodyPr>
+        <a:lstStyle/>
+        <a:p>
+          <a:pPr marL="0" lvl="0" indent="0" algn="ctr" defTabSz="622300">
+            <a:lnSpc>
+              <a:spcPct val="100000"/>
+            </a:lnSpc>
+            <a:spcBef>
+              <a:spcPct val="0"/>
+            </a:spcBef>
+            <a:spcAft>
+              <a:spcPct val="35000"/>
+            </a:spcAft>
+            <a:buNone/>
+          </a:pPr>
+          <a:r>
+            <a:rPr lang="en-US" sz="1400" b="1" kern="1200" dirty="0"/>
+            <a:t>Over-reducing model size causes severe underfitting.</a:t>
+          </a:r>
+          <a:r>
+            <a:rPr lang="en-US" sz="1400" kern="1200" dirty="0"/>
+            <a:t> </a:t>
+          </a:r>
+        </a:p>
+        <a:p>
+          <a:pPr marL="0" lvl="0" indent="0" algn="ctr" defTabSz="622300">
+            <a:lnSpc>
+              <a:spcPct val="100000"/>
+            </a:lnSpc>
+            <a:spcBef>
+              <a:spcPct val="0"/>
+            </a:spcBef>
+            <a:spcAft>
+              <a:spcPct val="35000"/>
+            </a:spcAft>
+            <a:buNone/>
+          </a:pPr>
+          <a:r>
+            <a:rPr lang="en-US" sz="1400" kern="1200" dirty="0"/>
+            <a:t>Shrinking filters, neurons, and epochs cut training time by 57% but collapsed accuracy to just 80.35%.</a:t>
+          </a:r>
+        </a:p>
+      </dsp:txBody>
+      <dsp:txXfrm>
+        <a:off x="5015362" y="1475837"/>
+        <a:ext cx="1752539" cy="2015419"/>
+      </dsp:txXfrm>
+    </dsp:sp>
+    <dsp:sp modelId="{DB3A1ABE-AC0A-4BE2-8713-61BC0507EC2B}">
+      <dsp:nvSpPr>
+        <dsp:cNvPr id="0" name=""/>
+        <dsp:cNvSpPr/>
+      </dsp:nvSpPr>
+      <dsp:spPr>
+        <a:xfrm>
+          <a:off x="7556544" y="192100"/>
+          <a:ext cx="788642" cy="788642"/>
+        </a:xfrm>
+        <a:prstGeom prst="rect">
+          <a:avLst/>
+        </a:prstGeom>
+        <a:blipFill>
+          <a:blip xmlns:r="http://schemas.openxmlformats.org/officeDocument/2006/relationships" r:embed="rId7">
+            <a:extLst>
+              <a:ext uri="{28A0092B-C50C-407E-A947-70E740481C1C}">
+                <a14:useLocalDpi xmlns:a14="http://schemas.microsoft.com/office/drawing/2010/main" val="0"/>
+              </a:ext>
+              <a:ext uri="{96DAC541-7B7A-43D3-8B79-37D633B846F1}">
+                <asvg:svgBlip xmlns:asvg="http://schemas.microsoft.com/office/drawing/2016/SVG/main" r:embed="rId8"/>
+              </a:ext>
+            </a:extLst>
+          </a:blip>
+          <a:stretch>
+            <a:fillRect/>
+          </a:stretch>
+        </a:blipFill>
+        <a:ln w="19050" cap="flat" cmpd="sng" algn="ctr">
+          <a:solidFill>
+            <a:schemeClr val="lt1">
+              <a:hueOff val="0"/>
+              <a:satOff val="0"/>
+              <a:lumOff val="0"/>
+              <a:alphaOff val="0"/>
+            </a:schemeClr>
+          </a:solidFill>
+          <a:prstDash val="solid"/>
+          <a:miter lim="800000"/>
+        </a:ln>
+        <a:effectLst/>
+      </dsp:spPr>
+      <dsp:style>
+        <a:lnRef idx="2">
+          <a:scrgbClr r="0" g="0" b="0"/>
+        </a:lnRef>
+        <a:fillRef idx="1">
+          <a:scrgbClr r="0" g="0" b="0"/>
+        </a:fillRef>
+        <a:effectRef idx="0">
+          <a:scrgbClr r="0" g="0" b="0"/>
+        </a:effectRef>
+        <a:fontRef idx="minor">
+          <a:schemeClr val="lt1"/>
+        </a:fontRef>
+      </dsp:style>
+    </dsp:sp>
+    <dsp:sp modelId="{3F25968F-BCC1-4E8E-8630-137DC457953E}">
+      <dsp:nvSpPr>
+        <dsp:cNvPr id="0" name=""/>
+        <dsp:cNvSpPr/>
+      </dsp:nvSpPr>
+      <dsp:spPr>
+        <a:xfrm>
+          <a:off x="7074596" y="1475837"/>
+          <a:ext cx="1752539" cy="2015419"/>
+        </a:xfrm>
+        <a:prstGeom prst="rect">
+          <a:avLst/>
+        </a:prstGeom>
+        <a:noFill/>
+        <a:ln>
+          <a:noFill/>
+        </a:ln>
+        <a:effectLst/>
+      </dsp:spPr>
+      <dsp:style>
+        <a:lnRef idx="0">
+          <a:scrgbClr r="0" g="0" b="0"/>
+        </a:lnRef>
+        <a:fillRef idx="0">
+          <a:scrgbClr r="0" g="0" b="0"/>
+        </a:fillRef>
+        <a:effectRef idx="0">
+          <a:scrgbClr r="0" g="0" b="0"/>
+        </a:effectRef>
+        <a:fontRef idx="minor"/>
+      </dsp:style>
+      <dsp:txBody>
+        <a:bodyPr spcFirstLastPara="0" vert="horz" wrap="square" lIns="0" tIns="0" rIns="0" bIns="0" numCol="1" spcCol="1270" anchor="t" anchorCtr="0">
+          <a:noAutofit/>
+        </a:bodyPr>
+        <a:lstStyle/>
+        <a:p>
+          <a:pPr marL="0" lvl="0" indent="0" algn="ctr" defTabSz="622300">
+            <a:lnSpc>
+              <a:spcPct val="100000"/>
+            </a:lnSpc>
+            <a:spcBef>
+              <a:spcPct val="0"/>
+            </a:spcBef>
+            <a:spcAft>
+              <a:spcPct val="35000"/>
+            </a:spcAft>
+            <a:buNone/>
+          </a:pPr>
+          <a:r>
+            <a:rPr lang="en-US" sz="1400" b="1" kern="1200" dirty="0"/>
+            <a:t>Dropout improves stability without sacrificing accuracy.</a:t>
+          </a:r>
+          <a:r>
+            <a:rPr lang="en-US" sz="1400" kern="1200" dirty="0"/>
+            <a:t> </a:t>
+          </a:r>
+        </a:p>
+        <a:p>
+          <a:pPr marL="0" lvl="0" indent="0" algn="ctr" defTabSz="622300">
+            <a:lnSpc>
+              <a:spcPct val="100000"/>
+            </a:lnSpc>
+            <a:spcBef>
+              <a:spcPct val="0"/>
+            </a:spcBef>
+            <a:spcAft>
+              <a:spcPct val="35000"/>
+            </a:spcAft>
+            <a:buNone/>
+          </a:pPr>
+          <a:r>
+            <a:rPr lang="en-US" sz="1400" kern="1200" dirty="0"/>
+            <a:t>Adding dropout layers slightly improved test accuracy to 98.80% and reduced loss compared to baseline.</a:t>
+          </a:r>
+        </a:p>
+      </dsp:txBody>
+      <dsp:txXfrm>
+        <a:off x="7074596" y="1475837"/>
+        <a:ext cx="1752539" cy="2015419"/>
+      </dsp:txXfrm>
+    </dsp:sp>
+  </dsp:spTree>
+</dsp:drawing>
+</file>
+
+<file path=ppt/diagrams/layout1.xml><?xml version="1.0" encoding="utf-8"?>
+<dgm:layoutDef xmlns:dgm="http://schemas.openxmlformats.org/drawingml/2006/diagram" xmlns:a="http://schemas.openxmlformats.org/drawingml/2006/main" uniqueId="urn:microsoft.com/office/officeart/2018/2/layout/IconLabelList">
+  <dgm:title val="Icon Label List"/>
+  <dgm:desc val="Use to show non-sequential or grouped chunks of information accompanied by a related visuals. Works best with icons or small pictures with short text captions."/>
+  <dgm:catLst>
+    <dgm:cat type="icon" pri="500"/>
+  </dgm:catLst>
+  <dgm:sampData useDef="1">
+    <dgm:dataModel>
+      <dgm:ptLst/>
+      <dgm:bg/>
+      <dgm:whole/>
+    </dgm:dataModel>
+  </dgm:sampData>
+  <dgm:styleData useDef="1">
+    <dgm:dataModel>
+      <dgm:ptLst/>
+      <dgm:bg/>
+      <dgm:whole/>
+    </dgm:dataModel>
+  </dgm:styleData>
+  <dgm:clrData useDef="1">
+    <dgm:dataModel>
+      <dgm:ptLst/>
+      <dgm:bg/>
+      <dgm:whole/>
+    </dgm:dataModel>
+  </dgm:clrData>
+  <dgm:layoutNode name="root">
+    <dgm:varLst>
+      <dgm:dir/>
+      <dgm:resizeHandles val="exact"/>
+    </dgm:varLst>
+    <dgm:choose name="Name0">
+      <dgm:if name="Name1" axis="self" func="var" arg="dir" op="equ" val="norm">
+        <dgm:alg type="snake">
+          <dgm:param type="grDir" val="tL"/>
+          <dgm:param type="flowDir" val="row"/>
+          <dgm:param type="contDir" val="sameDir"/>
+          <dgm:param type="off" val="ctr"/>
+          <dgm:param type="vertAlign" val="mid"/>
+          <dgm:param type="horzAlign" val="ctr"/>
+        </dgm:alg>
+      </dgm:if>
+      <dgm:else name="Name2">
+        <dgm:alg type="snake">
+          <dgm:param type="grDir" val="tR"/>
+          <dgm:param type="flowDir" val="row"/>
+          <dgm:param type="contDir" val="sameDir"/>
+          <dgm:param type="off" val="ctr"/>
+          <dgm:param type="vertAlign" val="mid"/>
+          <dgm:param type="horzAlign" val="ctr"/>
+        </dgm:alg>
+      </dgm:else>
+    </dgm:choose>
+    <dgm:shape xmlns:r="http://schemas.openxmlformats.org/officeDocument/2006/relationships" r:blip="">
+      <dgm:adjLst/>
+    </dgm:shape>
+    <dgm:presOf/>
+    <dgm:choose name="Name3">
+      <dgm:if name="Name4" axis="ch" ptType="node" func="cnt" op="lte" val="2">
+        <dgm:constrLst>
+          <dgm:constr type="h" for="ch" forName="compNode" refType="h" fact="0.4"/>
+          <dgm:constr type="w" for="ch" forName="compNode" val="120"/>
+          <dgm:constr type="w" for="ch" forName="sibTrans" refType="w" refFor="ch" refForName="compNode" fact="0.175"/>
+          <dgm:constr type="sp" refType="w" refFor="ch" refForName="compNode" op="equ" fact="0.25"/>
+          <dgm:constr type="primFontSz" for="des" ptType="node" op="equ" val="50"/>
+          <dgm:constr type="h" for="des" forName="compNode" op="equ"/>
+          <dgm:constr type="h" for="des" forName="textRect" op="equ"/>
+        </dgm:constrLst>
+      </dgm:if>
+      <dgm:if name="Name5" axis="ch" ptType="node" func="cnt" op="lte" val="4">
+        <dgm:constrLst>
+          <dgm:constr type="h" for="ch" forName="compNode" refType="h" fact="0.4"/>
+          <dgm:constr type="w" for="ch" forName="compNode" refType="w"/>
+          <dgm:constr type="w" for="ch" forName="sibTrans" refType="w" refFor="ch" refForName="compNode" fact="0.175"/>
+          <dgm:constr type="sp" refType="w" refFor="ch" refForName="compNode" op="equ" fact="0.25"/>
+          <dgm:constr type="primFontSz" for="des" ptType="node" op="equ" val="36"/>
+          <dgm:constr type="h" for="des" forName="compNode" op="equ"/>
+          <dgm:constr type="h" for="des" forName="textRect" op="equ"/>
+        </dgm:constrLst>
+      </dgm:if>
+      <dgm:else name="Name6">
+        <dgm:constrLst>
+          <dgm:constr type="h" for="ch" forName="compNode" refType="h" fact="0.4"/>
+          <dgm:constr type="w" for="ch" forName="compNode" refType="w"/>
+          <dgm:constr type="w" for="ch" forName="sibTrans" refType="w" refFor="ch" refForName="compNode" fact="0.175"/>
+          <dgm:constr type="sp" refType="w" refFor="ch" refForName="compNode" op="equ" fact="0.25"/>
+          <dgm:constr type="primFontSz" for="des" ptType="node" op="equ" val="24"/>
+          <dgm:constr type="h" for="des" forName="compNode" op="equ"/>
+          <dgm:constr type="h" for="des" forName="textRect" op="equ"/>
+        </dgm:constrLst>
+      </dgm:else>
+    </dgm:choose>
+    <dgm:ruleLst>
+      <dgm:rule type="w" for="ch" forName="compNode" val="50" fact="NaN" max="NaN"/>
+    </dgm:ruleLst>
+    <dgm:forEach name="Name7" axis="ch" ptType="node">
+      <dgm:layoutNode name="compNode">
+        <dgm:alg type="composite"/>
+        <dgm:shape xmlns:r="http://schemas.openxmlformats.org/officeDocument/2006/relationships" r:blip="">
+          <dgm:adjLst/>
+        </dgm:shape>
+        <dgm:presOf axis="self"/>
+        <dgm:constrLst>
+          <dgm:constr type="w" for="ch" forName="iconRect" refType="w" fact="0.45"/>
+          <dgm:constr type="h" for="ch" forName="iconRect" refType="w" refFor="ch" refForName="iconRect"/>
+          <dgm:constr type="ctrX" for="ch" forName="iconRect" refType="w" fact="0.5"/>
+          <dgm:constr type="t" for="ch" forName="iconRect"/>
+          <dgm:constr type="h" for="ch" forName="spaceRect" refType="h" fact="0.15"/>
+          <dgm:constr type="w" for="ch" forName="spaceRect" refType="w"/>
+          <dgm:constr type="l" for="ch" forName="spaceRect"/>
+          <dgm:constr type="t" for="ch" forName="spaceRect" refType="b" refFor="ch" refForName="iconRect"/>
+          <dgm:constr type="h" for="ch" forName="textRect" val="20"/>
+          <dgm:constr type="w" for="ch" forName="textRect" refType="w"/>
+          <dgm:constr type="l" for="ch" forName="textRect"/>
+          <dgm:constr type="t" for="ch" forName="textRect" refType="b" refFor="ch" refForName="spaceRect"/>
+        </dgm:constrLst>
+        <dgm:ruleLst>
+          <dgm:rule type="h" val="INF" fact="NaN" max="NaN"/>
+        </dgm:ruleLst>
+        <dgm:layoutNode name="iconRect" styleLbl="node1">
+          <dgm:alg type="sp"/>
+          <dgm:shape xmlns:r="http://schemas.openxmlformats.org/officeDocument/2006/relationships" type="rect" r:blip="" blipPhldr="1">
+            <dgm:adjLst/>
+          </dgm:shape>
+          <dgm:presOf/>
+          <dgm:constrLst/>
+          <dgm:ruleLst/>
+        </dgm:layoutNode>
+        <dgm:layoutNode name="spaceRect">
+          <dgm:alg type="sp"/>
+          <dgm:shape xmlns:r="http://schemas.openxmlformats.org/officeDocument/2006/relationships" r:blip="">
+            <dgm:adjLst/>
+          </dgm:shape>
+          <dgm:presOf/>
+          <dgm:constrLst/>
+          <dgm:ruleLst/>
+        </dgm:layoutNode>
+        <dgm:layoutNode name="textRect" styleLbl="revTx">
+          <dgm:varLst>
+            <dgm:chMax val="1"/>
+            <dgm:chPref val="1"/>
+          </dgm:varLst>
+          <dgm:alg type="tx">
+            <dgm:param type="txAnchorVert" val="t"/>
+          </dgm:alg>
+          <dgm:shape xmlns:r="http://schemas.openxmlformats.org/officeDocument/2006/relationships" type="rect" r:blip="">
+            <dgm:adjLst/>
+          </dgm:shape>
+          <dgm:presOf axis="self" ptType="node"/>
+          <dgm:constrLst>
+            <dgm:constr type="lMarg"/>
+            <dgm:constr type="rMarg"/>
+            <dgm:constr type="tMarg"/>
+            <dgm:constr type="bMarg"/>
+          </dgm:constrLst>
+          <dgm:ruleLst>
+            <dgm:rule type="primFontSz" val="11" fact="NaN" max="NaN"/>
+            <dgm:rule type="h" val="INF" fact="NaN" max="NaN"/>
+          </dgm:ruleLst>
+        </dgm:layoutNode>
+      </dgm:layoutNode>
+      <dgm:forEach name="Name8" axis="followSib" ptType="sibTrans" cnt="1">
+        <dgm:layoutNode name="sibTrans">
+          <dgm:alg type="sp"/>
+          <dgm:shape xmlns:r="http://schemas.openxmlformats.org/officeDocument/2006/relationships" r:blip="">
+            <dgm:adjLst/>
+          </dgm:shape>
+          <dgm:presOf axis="self"/>
+          <dgm:constrLst/>
+          <dgm:ruleLst/>
+        </dgm:layoutNode>
+      </dgm:forEach>
+    </dgm:forEach>
+  </dgm:layoutNode>
+  <dgm:extLst>
+    <a:ext uri="{68A01E43-0DF5-4B5B-8FA6-DAF915123BFB}">
+      <dgm1612:lstStyle xmlns:dgm1612="http://schemas.microsoft.com/office/drawing/2016/12/diagram">
+        <a:lvl1pPr>
+          <a:lnSpc>
+            <a:spcPct val="100000"/>
+          </a:lnSpc>
+        </a:lvl1pPr>
+      </dgm1612:lstStyle>
+    </a:ext>
+  </dgm:extLst>
+</dgm:layoutDef>
+</file>
+
+<file path=ppt/diagrams/quickStyle1.xml><?xml version="1.0" encoding="utf-8"?>
+<dgm:styleDef xmlns:dgm="http://schemas.openxmlformats.org/drawingml/2006/diagram" xmlns:a="http://schemas.openxmlformats.org/drawingml/2006/main" uniqueId="urn:microsoft.com/office/officeart/2005/8/quickstyle/simple1">
+  <dgm:title val=""/>
+  <dgm:desc val=""/>
+  <dgm:catLst>
+    <dgm:cat type="simple" pri="10100"/>
+  </dgm:catLst>
+  <dgm:scene3d>
+    <a:camera prst="orthographicFront"/>
+    <a:lightRig rig="threePt" dir="t"/>
+  </dgm:scene3d>
+  <dgm:styleLbl name="node0">
+    <dgm:scene3d>
+      <a:camera prst="orthographicFront"/>
+      <a:lightRig rig="threePt" dir="t"/>
+    </dgm:scene3d>
+    <dgm:sp3d/>
+    <dgm:txPr/>
+    <dgm:style>
+      <a:lnRef idx="2">
+        <a:scrgbClr r="0" g="0" b="0"/>
+      </a:lnRef>
+      <a:fillRef idx="1">
+        <a:scrgbClr r="0" g="0" b="0"/>
+      </a:fillRef>
+      <a:effectRef idx="0">
+        <a:scrgbClr r="0" g="0" b="0"/>
+      </a:effectRef>
+      <a:fontRef idx="minor">
+        <a:schemeClr val="lt1"/>
+      </a:fontRef>
+    </dgm:style>
+  </dgm:styleLbl>
+  <dgm:styleLbl name="lnNode1">
+    <dgm:scene3d>
+      <a:camera prst="orthographicFront"/>
+      <a:lightRig rig="threePt" dir="t"/>
+    </dgm:scene3d>
+    <dgm:sp3d/>
+    <dgm:txPr/>
+    <dgm:style>
+      <a:lnRef idx="2">
+        <a:scrgbClr r="0" g="0" b="0"/>
+      </a:lnRef>
+      <a:fillRef idx="1">
+        <a:scrgbClr r="0" g="0" b="0"/>
+      </a:fillRef>
+      <a:effectRef idx="0">
+        <a:scrgbClr r="0" g="0" b="0"/>
+      </a:effectRef>
+      <a:fontRef idx="minor">
+        <a:schemeClr val="lt1"/>
+      </a:fontRef>
+    </dgm:style>
+  </dgm:styleLbl>
+  <dgm:styleLbl name="vennNode1">
+    <dgm:scene3d>
+      <a:camera prst="orthographicFront"/>
+      <a:lightRig rig="threePt" dir="t"/>
+    </dgm:scene3d>
+    <dgm:sp3d/>
+    <dgm:txPr/>
+    <dgm:style>
+      <a:lnRef idx="2">
+        <a:scrgbClr r="0" g="0" b="0"/>
+      </a:lnRef>
+      <a:fillRef idx="1">
+        <a:scrgbClr r="0" g="0" b="0"/>
+      </a:fillRef>
+      <a:effectRef idx="0">
+        <a:scrgbClr r="0" g="0" b="0"/>
+      </a:effectRef>
+      <a:fontRef idx="minor">
+        <a:schemeClr val="tx1"/>
+      </a:fontRef>
+    </dgm:style>
+  </dgm:styleLbl>
+  <dgm:styleLbl name="alignNode1">
+    <dgm:scene3d>
+      <a:camera prst="orthographicFront"/>
+      <a:lightRig rig="threePt" dir="t"/>
+    </dgm:scene3d>
+    <dgm:sp3d/>
+    <dgm:txPr/>
+    <dgm:style>
+      <a:lnRef idx="2">
+        <a:scrgbClr r="0" g="0" b="0"/>
+      </a:lnRef>
+      <a:fillRef idx="1">
+        <a:scrgbClr r="0" g="0" b="0"/>
+      </a:fillRef>
+      <a:effectRef idx="0">
+        <a:scrgbClr r="0" g="0" b="0"/>
+      </a:effectRef>
+      <a:fontRef idx="minor">
+        <a:schemeClr val="lt1"/>
+      </a:fontRef>
+    </dgm:style>
+  </dgm:styleLbl>
+  <dgm:styleLbl name="node1">
+    <dgm:scene3d>
+      <a:camera prst="orthographicFront"/>
+      <a:lightRig rig="threePt" dir="t"/>
+    </dgm:scene3d>
+    <dgm:sp3d/>
+    <dgm:txPr/>
+    <dgm:style>
+      <a:lnRef idx="2">
+        <a:scrgbClr r="0" g="0" b="0"/>
+      </a:lnRef>
+      <a:fillRef idx="1">
+        <a:scrgbClr r="0" g="0" b="0"/>
+      </a:fillRef>
+      <a:effectRef idx="0">
+        <a:scrgbClr r="0" g="0" b="0"/>
+      </a:effectRef>
+      <a:fontRef idx="minor">
+        <a:schemeClr val="lt1"/>
+      </a:fontRef>
+    </dgm:style>
+  </dgm:styleLbl>
+  <dgm:styleLbl name="node2">
+    <dgm:scene3d>
+      <a:camera prst="orthographicFront"/>
+      <a:lightRig rig="threePt" dir="t"/>
+    </dgm:scene3d>
+    <dgm:sp3d/>
+    <dgm:txPr/>
+    <dgm:style>
+      <a:lnRef idx="2">
+        <a:scrgbClr r="0" g="0" b="0"/>
+      </a:lnRef>
+      <a:fillRef idx="1">
+        <a:scrgbClr r="0" g="0" b="0"/>
+      </a:fillRef>
+      <a:effectRef idx="0">
+        <a:scrgbClr r="0" g="0" b="0"/>
+      </a:effectRef>
+      <a:fontRef idx="minor">
+        <a:schemeClr val="lt1"/>
+      </a:fontRef>
+    </dgm:style>
+  </dgm:styleLbl>
+  <dgm:styleLbl name="node3">
+    <dgm:scene3d>
+      <a:camera prst="orthographicFront"/>
+      <a:lightRig rig="threePt" dir="t"/>
+    </dgm:scene3d>
+    <dgm:sp3d/>
+    <dgm:txPr/>
+    <dgm:style>
+      <a:lnRef idx="2">
+        <a:scrgbClr r="0" g="0" b="0"/>
+      </a:lnRef>
+      <a:fillRef idx="1">
+        <a:scrgbClr r="0" g="0" b="0"/>
+      </a:fillRef>
+      <a:effectRef idx="0">
+        <a:scrgbClr r="0" g="0" b="0"/>
+      </a:effectRef>
+      <a:fontRef idx="minor">
+        <a:schemeClr val="lt1"/>
+      </a:fontRef>
+    </dgm:style>
+  </dgm:styleLbl>
+  <dgm:styleLbl name="node4">
+    <dgm:scene3d>
+      <a:camera prst="orthographicFront"/>
+      <a:lightRig rig="threePt" dir="t"/>
+    </dgm:scene3d>
+    <dgm:sp3d/>
+    <dgm:txPr/>
+    <dgm:style>
+      <a:lnRef idx="2">
+        <a:scrgbClr r="0" g="0" b="0"/>
+      </a:lnRef>
+      <a:fillRef idx="1">
+        <a:scrgbClr r="0" g="0" b="0"/>
+      </a:fillRef>
+      <a:effectRef idx="0">
+        <a:scrgbClr r="0" g="0" b="0"/>
+      </a:effectRef>
+      <a:fontRef idx="minor">
+        <a:schemeClr val="lt1"/>
+      </a:fontRef>
+    </dgm:style>
+  </dgm:styleLbl>
+  <dgm:styleLbl name="fgImgPlace1">
+    <dgm:scene3d>
+      <a:camera prst="orthographicFront"/>
+      <a:lightRig rig="threePt" dir="t"/>
+    </dgm:scene3d>
+    <dgm:sp3d/>
+    <dgm:txPr/>
+    <dgm:style>
+      <a:lnRef idx="2">
+        <a:scrgbClr r="0" g="0" b="0"/>
+      </a:lnRef>
+      <a:fillRef idx="1">
+        <a:scrgbClr r="0" g="0" b="0"/>
+      </a:fillRef>
+      <a:effectRef idx="0">
+        <a:scrgbClr r="0" g="0" b="0"/>
+      </a:effectRef>
+      <a:fontRef idx="minor"/>
+    </dgm:style>
+  </dgm:styleLbl>
+  <dgm:styleLbl name="alignImgPlace1">
+    <dgm:scene3d>
+      <a:camera prst="orthographicFront"/>
+      <a:lightRig rig="threePt" dir="t"/>
+    </dgm:scene3d>
+    <dgm:sp3d/>
+    <dgm:txPr/>
+    <dgm:style>
+      <a:lnRef idx="2">
+        <a:scrgbClr r="0" g="0" b="0"/>
+      </a:lnRef>
+      <a:fillRef idx="1">
+        <a:scrgbClr r="0" g="0" b="0"/>
+      </a:fillRef>
+      <a:effectRef idx="0">
+        <a:scrgbClr r="0" g="0" b="0"/>
+      </a:effectRef>
+      <a:fontRef idx="minor"/>
+    </dgm:style>
+  </dgm:styleLbl>
+  <dgm:styleLbl name="bgImgPlace1">
+    <dgm:scene3d>
+      <a:camera prst="orthographicFront"/>
+      <a:lightRig rig="threePt" dir="t"/>
+    </dgm:scene3d>
+    <dgm:sp3d/>
+    <dgm:txPr/>
+    <dgm:style>
+      <a:lnRef idx="2">
+        <a:scrgbClr r="0" g="0" b="0"/>
+      </a:lnRef>
+      <a:fillRef idx="1">
+        <a:scrgbClr r="0" g="0" b="0"/>
+      </a:fillRef>
+      <a:effectRef idx="0">
+        <a:scrgbClr r="0" g="0" b="0"/>
+      </a:effectRef>
+      <a:fontRef idx="minor"/>
+    </dgm:style>
+  </dgm:styleLbl>
+  <dgm:styleLbl name="sibTrans2D1">
+    <dgm:scene3d>
+      <a:camera prst="orthographicFront"/>
+      <a:lightRig rig="threePt" dir="t"/>
+    </dgm:scene3d>
+    <dgm:sp3d/>
+    <dgm:txPr/>
+    <dgm:style>
+      <a:lnRef idx="0">
+        <a:scrgbClr r="0" g="0" b="0"/>
+      </a:lnRef>
+      <a:fillRef idx="1">
+        <a:scrgbClr r="0" g="0" b="0"/>
+      </a:fillRef>
+      <a:effectRef idx="0">
+        <a:scrgbClr r="0" g="0" b="0"/>
+      </a:effectRef>
+      <a:fontRef idx="minor">
+        <a:schemeClr val="lt1"/>
+      </a:fontRef>
+    </dgm:style>
+  </dgm:styleLbl>
+  <dgm:styleLbl name="fgSibTrans2D1">
+    <dgm:scene3d>
+      <a:camera prst="orthographicFront"/>
+      <a:lightRig rig="threePt" dir="t"/>
+    </dgm:scene3d>
+    <dgm:sp3d/>
+    <dgm:txPr/>
+    <dgm:style>
+      <a:lnRef idx="0">
+        <a:scrgbClr r="0" g="0" b="0"/>
+      </a:lnRef>
+      <a:fillRef idx="1">
+        <a:scrgbClr r="0" g="0" b="0"/>
+      </a:fillRef>
+      <a:effectRef idx="0">
+        <a:scrgbClr r="0" g="0" b="0"/>
+      </a:effectRef>
+      <a:fontRef idx="minor">
+        <a:schemeClr val="lt1"/>
+      </a:fontRef>
+    </dgm:style>
+  </dgm:styleLbl>
+  <dgm:styleLbl name="bgSibTrans2D1">
+    <dgm:scene3d>
+      <a:camera prst="orthographicFront"/>
+      <a:lightRig rig="threePt" dir="t"/>
+    </dgm:scene3d>
+    <dgm:sp3d/>
+    <dgm:txPr/>
+    <dgm:style>
+      <a:lnRef idx="0">
+        <a:scrgbClr r="0" g="0" b="0"/>
+      </a:lnRef>
+      <a:fillRef idx="1">
+        <a:scrgbClr r="0" g="0" b="0"/>
+      </a:fillRef>
+      <a:effectRef idx="0">
+        <a:scrgbClr r="0" g="0" b="0"/>
+      </a:effectRef>
+      <a:fontRef idx="minor">
+        <a:schemeClr val="lt1"/>
+      </a:fontRef>
+    </dgm:style>
+  </dgm:styleLbl>
+  <dgm:styleLbl name="sibTrans1D1">
+    <dgm:scene3d>
+      <a:camera prst="orthographicFront"/>
+      <a:lightRig rig="threePt" dir="t"/>
+    </dgm:scene3d>
+    <dgm:sp3d/>
+    <dgm:txPr/>
+    <dgm:style>
+      <a:lnRef idx="1">
+        <a:scrgbClr r="0" g="0" b="0"/>
+      </a:lnRef>
+      <a:fillRef idx="0">
+        <a:scrgbClr r="0" g="0" b="0"/>
+      </a:fillRef>
+      <a:effectRef idx="0">
+        <a:scrgbClr r="0" g="0" b="0"/>
+      </a:effectRef>
+      <a:fontRef idx="minor"/>
+    </dgm:style>
+  </dgm:styleLbl>
+  <dgm:styleLbl name="callout">
+    <dgm:scene3d>
+      <a:camera prst="orthographicFront"/>
+      <a:lightRig rig="threePt" dir="t"/>
+    </dgm:scene3d>
+    <dgm:sp3d/>
+    <dgm:txPr/>
+    <dgm:style>
+      <a:lnRef idx="2">
+        <a:scrgbClr r="0" g="0" b="0"/>
+      </a:lnRef>
+      <a:fillRef idx="1">
+        <a:scrgbClr r="0" g="0" b="0"/>
+      </a:fillRef>
+      <a:effectRef idx="0">
+        <a:scrgbClr r="0" g="0" b="0"/>
+      </a:effectRef>
+      <a:fontRef idx="minor"/>
+    </dgm:style>
+  </dgm:styleLbl>
+  <dgm:styleLbl name="asst0">
+    <dgm:scene3d>
+      <a:camera prst="orthographicFront"/>
+      <a:lightRig rig="threePt" dir="t"/>
+    </dgm:scene3d>
+    <dgm:sp3d/>
+    <dgm:txPr/>
+    <dgm:style>
+      <a:lnRef idx="2">
+        <a:scrgbClr r="0" g="0" b="0"/>
+      </a:lnRef>
+      <a:fillRef idx="1">
+        <a:scrgbClr r="0" g="0" b="0"/>
+      </a:fillRef>
+      <a:effectRef idx="0">
+        <a:scrgbClr r="0" g="0" b="0"/>
+      </a:effectRef>
+      <a:fontRef idx="minor">
+        <a:schemeClr val="lt1"/>
+      </a:fontRef>
+    </dgm:style>
+  </dgm:styleLbl>
+  <dgm:styleLbl name="asst1">
+    <dgm:scene3d>
+      <a:camera prst="orthographicFront"/>
+      <a:lightRig rig="threePt" dir="t"/>
+    </dgm:scene3d>
+    <dgm:sp3d/>
+    <dgm:txPr/>
+    <dgm:style>
+      <a:lnRef idx="2">
+        <a:scrgbClr r="0" g="0" b="0"/>
+      </a:lnRef>
+      <a:fillRef idx="1">
+        <a:scrgbClr r="0" g="0" b="0"/>
+      </a:fillRef>
+      <a:effectRef idx="0">
+        <a:scrgbClr r="0" g="0" b="0"/>
+      </a:effectRef>
+      <a:fontRef idx="minor">
+        <a:schemeClr val="lt1"/>
+      </a:fontRef>
+    </dgm:style>
+  </dgm:styleLbl>
+  <dgm:styleLbl name="asst2">
+    <dgm:scene3d>
+      <a:camera prst="orthographicFront"/>
+      <a:lightRig rig="threePt" dir="t"/>
+    </dgm:scene3d>
+    <dgm:sp3d/>
+    <dgm:txPr/>
+    <dgm:style>
+      <a:lnRef idx="2">
+        <a:scrgbClr r="0" g="0" b="0"/>
+      </a:lnRef>
+      <a:fillRef idx="1">
+        <a:scrgbClr r="0" g="0" b="0"/>
+      </a:fillRef>
+      <a:effectRef idx="0">
+        <a:scrgbClr r="0" g="0" b="0"/>
+      </a:effectRef>
+      <a:fontRef idx="minor">
+        <a:schemeClr val="lt1"/>
+      </a:fontRef>
+    </dgm:style>
+  </dgm:styleLbl>
+  <dgm:styleLbl name="asst3">
+    <dgm:scene3d>
+      <a:camera prst="orthographicFront"/>
+      <a:lightRig rig="threePt" dir="t"/>
+    </dgm:scene3d>
+    <dgm:sp3d/>
+    <dgm:txPr/>
+    <dgm:style>
+      <a:lnRef idx="2">
+        <a:scrgbClr r="0" g="0" b="0"/>
+      </a:lnRef>
+      <a:fillRef idx="1">
+        <a:scrgbClr r="0" g="0" b="0"/>
+      </a:fillRef>
+      <a:effectRef idx="0">
+        <a:scrgbClr r="0" g="0" b="0"/>
+      </a:effectRef>
+      <a:fontRef idx="minor">
+        <a:schemeClr val="lt1"/>
+      </a:fontRef>
+    </dgm:style>
+  </dgm:styleLbl>
+  <dgm:styleLbl name="asst4">
+    <dgm:scene3d>
+      <a:camera prst="orthographicFront"/>
+      <a:lightRig rig="threePt" dir="t"/>
+    </dgm:scene3d>
+    <dgm:sp3d/>
+    <dgm:txPr/>
+    <dgm:style>
+      <a:lnRef idx="2">
+        <a:scrgbClr r="0" g="0" b="0"/>
+      </a:lnRef>
+      <a:fillRef idx="1">
+        <a:scrgbClr r="0" g="0" b="0"/>
+      </a:fillRef>
+      <a:effectRef idx="0">
+        <a:scrgbClr r="0" g="0" b="0"/>
+      </a:effectRef>
+      <a:fontRef idx="minor">
+        <a:schemeClr val="lt1"/>
+      </a:fontRef>
+    </dgm:style>
+  </dgm:styleLbl>
+  <dgm:styleLbl name="parChTrans2D1">
+    <dgm:scene3d>
+      <a:camera prst="orthographicFront"/>
+      <a:lightRig rig="threePt" dir="t"/>
+    </dgm:scene3d>
+    <dgm:sp3d/>
+    <dgm:txPr/>
+    <dgm:style>
+      <a:lnRef idx="2">
+        <a:scrgbClr r="0" g="0" b="0"/>
+      </a:lnRef>
+      <a:fillRef idx="1">
+        <a:scrgbClr r="0" g="0" b="0"/>
+      </a:fillRef>
+      <a:effectRef idx="0">
+        <a:scrgbClr r="0" g="0" b="0"/>
+      </a:effectRef>
+      <a:fontRef idx="minor">
+        <a:schemeClr val="lt1"/>
+      </a:fontRef>
+    </dgm:style>
+  </dgm:styleLbl>
+  <dgm:styleLbl name="parChTrans2D2">
+    <dgm:scene3d>
+      <a:camera prst="orthographicFront"/>
+      <a:lightRig rig="threePt" dir="t"/>
+    </dgm:scene3d>
+    <dgm:sp3d/>
+    <dgm:txPr/>
+    <dgm:style>
+      <a:lnRef idx="2">
+        <a:scrgbClr r="0" g="0" b="0"/>
+      </a:lnRef>
+      <a:fillRef idx="1">
+        <a:scrgbClr r="0" g="0" b="0"/>
+      </a:fillRef>
+      <a:effectRef idx="0">
+        <a:scrgbClr r="0" g="0" b="0"/>
+      </a:effectRef>
+      <a:fontRef idx="minor">
+        <a:schemeClr val="lt1"/>
+      </a:fontRef>
+    </dgm:style>
+  </dgm:styleLbl>
+  <dgm:styleLbl name="parChTrans2D3">
+    <dgm:scene3d>
+      <a:camera prst="orthographicFront"/>
+      <a:lightRig rig="threePt" dir="t"/>
+    </dgm:scene3d>
+    <dgm:sp3d/>
+    <dgm:txPr/>
+    <dgm:style>
+      <a:lnRef idx="2">
+        <a:scrgbClr r="0" g="0" b="0"/>
+      </a:lnRef>
+      <a:fillRef idx="1">
+        <a:scrgbClr r="0" g="0" b="0"/>
+      </a:fillRef>
+      <a:effectRef idx="0">
+        <a:scrgbClr r="0" g="0" b="0"/>
+      </a:effectRef>
+      <a:fontRef idx="minor">
+        <a:schemeClr val="lt1"/>
+      </a:fontRef>
+    </dgm:style>
+  </dgm:styleLbl>
+  <dgm:styleLbl name="parChTrans2D4">
+    <dgm:scene3d>
+      <a:camera prst="orthographicFront"/>
+      <a:lightRig rig="threePt" dir="t"/>
+    </dgm:scene3d>
+    <dgm:sp3d/>
+    <dgm:txPr/>
+    <dgm:style>
+      <a:lnRef idx="2">
+        <a:scrgbClr r="0" g="0" b="0"/>
+      </a:lnRef>
+      <a:fillRef idx="1">
+        <a:scrgbClr r="0" g="0" b="0"/>
+      </a:fillRef>
+      <a:effectRef idx="0">
+        <a:scrgbClr r="0" g="0" b="0"/>
+      </a:effectRef>
+      <a:fontRef idx="minor">
+        <a:schemeClr val="lt1"/>
+      </a:fontRef>
+    </dgm:style>
+  </dgm:styleLbl>
+  <dgm:styleLbl name="parChTrans1D1">
+    <dgm:scene3d>
+      <a:camera prst="orthographicFront"/>
+      <a:lightRig rig="threePt" dir="t"/>
+    </dgm:scene3d>
+    <dgm:sp3d/>
+    <dgm:txPr/>
+    <dgm:style>
+      <a:lnRef idx="2">
+        <a:scrgbClr r="0" g="0" b="0"/>
+      </a:lnRef>
+      <a:fillRef idx="0">
+        <a:scrgbClr r="0" g="0" b="0"/>
+      </a:fillRef>
+      <a:effectRef idx="0">
+        <a:scrgbClr r="0" g="0" b="0"/>
+      </a:effectRef>
+      <a:fontRef idx="minor"/>
+    </dgm:style>
+  </dgm:styleLbl>
+  <dgm:styleLbl name="parChTrans1D2">
+    <dgm:scene3d>
+      <a:camera prst="orthographicFront"/>
+      <a:lightRig rig="threePt" dir="t"/>
+    </dgm:scene3d>
+    <dgm:sp3d/>
+    <dgm:txPr/>
+    <dgm:style>
+      <a:lnRef idx="2">
+        <a:scrgbClr r="0" g="0" b="0"/>
+      </a:lnRef>
+      <a:fillRef idx="0">
+        <a:scrgbClr r="0" g="0" b="0"/>
+      </a:fillRef>
+      <a:effectRef idx="0">
+        <a:scrgbClr r="0" g="0" b="0"/>
+      </a:effectRef>
+      <a:fontRef idx="minor"/>
+    </dgm:style>
+  </dgm:styleLbl>
+  <dgm:styleLbl name="parChTrans1D3">
+    <dgm:scene3d>
+      <a:camera prst="orthographicFront"/>
+      <a:lightRig rig="threePt" dir="t"/>
+    </dgm:scene3d>
+    <dgm:sp3d/>
+    <dgm:txPr/>
+    <dgm:style>
+      <a:lnRef idx="2">
+        <a:scrgbClr r="0" g="0" b="0"/>
+      </a:lnRef>
+      <a:fillRef idx="0">
+        <a:scrgbClr r="0" g="0" b="0"/>
+      </a:fillRef>
+      <a:effectRef idx="0">
+        <a:scrgbClr r="0" g="0" b="0"/>
+      </a:effectRef>
+      <a:fontRef idx="minor"/>
+    </dgm:style>
+  </dgm:styleLbl>
+  <dgm:styleLbl name="parChTrans1D4">
+    <dgm:scene3d>
+      <a:camera prst="orthographicFront"/>
+      <a:lightRig rig="threePt" dir="t"/>
+    </dgm:scene3d>
+    <dgm:sp3d/>
+    <dgm:txPr/>
+    <dgm:style>
+      <a:lnRef idx="2">
+        <a:scrgbClr r="0" g="0" b="0"/>
+      </a:lnRef>
+      <a:fillRef idx="0">
+        <a:scrgbClr r="0" g="0" b="0"/>
+      </a:fillRef>
+      <a:effectRef idx="0">
+        <a:scrgbClr r="0" g="0" b="0"/>
+      </a:effectRef>
+      <a:fontRef idx="minor"/>
+    </dgm:style>
+  </dgm:styleLbl>
+  <dgm:styleLbl name="fgAcc1">
+    <dgm:scene3d>
+      <a:camera prst="orthographicFront"/>
+      <a:lightRig rig="threePt" dir="t"/>
+    </dgm:scene3d>
+    <dgm:sp3d/>
+    <dgm:txPr/>
+    <dgm:style>
+      <a:lnRef idx="2">
+        <a:scrgbClr r="0" g="0" b="0"/>
+      </a:lnRef>
+      <a:fillRef idx="1">
+        <a:scrgbClr r="0" g="0" b="0"/>
+      </a:fillRef>
+      <a:effectRef idx="0">
+        <a:scrgbClr r="0" g="0" b="0"/>
+      </a:effectRef>
+      <a:fontRef idx="minor"/>
+    </dgm:style>
+  </dgm:styleLbl>
+  <dgm:styleLbl name="conFgAcc1">
+    <dgm:scene3d>
+      <a:camera prst="orthographicFront"/>
+      <a:lightRig rig="threePt" dir="t"/>
+    </dgm:scene3d>
+    <dgm:sp3d/>
+    <dgm:txPr/>
+    <dgm:style>
+      <a:lnRef idx="2">
+        <a:scrgbClr r="0" g="0" b="0"/>
+      </a:lnRef>
+      <a:fillRef idx="1">
+        <a:scrgbClr r="0" g="0" b="0"/>
+      </a:fillRef>
+      <a:effectRef idx="0">
+        <a:scrgbClr r="0" g="0" b="0"/>
+      </a:effectRef>
+      <a:fontRef idx="minor"/>
+    </dgm:style>
+  </dgm:styleLbl>
+  <dgm:styleLbl name="alignAcc1">
+    <dgm:scene3d>
+      <a:camera prst="orthographicFront"/>
+      <a:lightRig rig="threePt" dir="t"/>
+    </dgm:scene3d>
+    <dgm:sp3d/>
+    <dgm:txPr/>
+    <dgm:style>
+      <a:lnRef idx="2">
+        <a:scrgbClr r="0" g="0" b="0"/>
+      </a:lnRef>
+      <a:fillRef idx="1">
+        <a:scrgbClr r="0" g="0" b="0"/>
+      </a:fillRef>
+      <a:effectRef idx="0">
+        <a:scrgbClr r="0" g="0" b="0"/>
+      </a:effectRef>
+      <a:fontRef idx="minor"/>
+    </dgm:style>
+  </dgm:styleLbl>
+  <dgm:styleLbl name="trAlignAcc1">
+    <dgm:scene3d>
+      <a:camera prst="orthographicFront"/>
+      <a:lightRig rig="threePt" dir="t"/>
+    </dgm:scene3d>
+    <dgm:sp3d/>
+    <dgm:txPr/>
+    <dgm:style>
+      <a:lnRef idx="1">
+        <a:scrgbClr r="0" g="0" b="0"/>
+      </a:lnRef>
+      <a:fillRef idx="1">
+        <a:scrgbClr r="0" g="0" b="0"/>
+      </a:fillRef>
+      <a:effectRef idx="0">
+        <a:scrgbClr r="0" g="0" b="0"/>
+      </a:effectRef>
+      <a:fontRef idx="minor"/>
+    </dgm:style>
+  </dgm:styleLbl>
+  <dgm:styleLbl name="bgAcc1">
+    <dgm:scene3d>
+      <a:camera prst="orthographicFront"/>
+      <a:lightRig rig="threePt" dir="t"/>
+    </dgm:scene3d>
+    <dgm:sp3d/>
+    <dgm:txPr/>
+    <dgm:style>
+      <a:lnRef idx="2">
+        <a:scrgbClr r="0" g="0" b="0"/>
+      </a:lnRef>
+      <a:fillRef idx="1">
+        <a:scrgbClr r="0" g="0" b="0"/>
+      </a:fillRef>
+      <a:effectRef idx="0">
+        <a:scrgbClr r="0" g="0" b="0"/>
+      </a:effectRef>
+      <a:fontRef idx="minor"/>
+    </dgm:style>
+  </dgm:styleLbl>
+  <dgm:styleLbl name="solidFgAcc1">
+    <dgm:scene3d>
+      <a:camera prst="orthographicFront"/>
+      <a:lightRig rig="threePt" dir="t"/>
+    </dgm:scene3d>
+    <dgm:sp3d/>
+    <dgm:txPr/>
+    <dgm:style>
+      <a:lnRef idx="2">
+        <a:scrgbClr r="0" g="0" b="0"/>
+      </a:lnRef>
+      <a:fillRef idx="1">
+        <a:scrgbClr r="0" g="0" b="0"/>
+      </a:fillRef>
+      <a:effectRef idx="0">
+        <a:scrgbClr r="0" g="0" b="0"/>
+      </a:effectRef>
+      <a:fontRef idx="minor"/>
+    </dgm:style>
+  </dgm:styleLbl>
+  <dgm:styleLbl name="solidAlignAcc1">
+    <dgm:scene3d>
+      <a:camera prst="orthographicFront"/>
+      <a:lightRig rig="threePt" dir="t"/>
+    </dgm:scene3d>
+    <dgm:sp3d/>
+    <dgm:txPr/>
+    <dgm:style>
+      <a:lnRef idx="2">
+        <a:scrgbClr r="0" g="0" b="0"/>
+      </a:lnRef>
+      <a:fillRef idx="1">
+        <a:scrgbClr r="0" g="0" b="0"/>
+      </a:fillRef>
+      <a:effectRef idx="0">
+        <a:scrgbClr r="0" g="0" b="0"/>
+      </a:effectRef>
+      <a:fontRef idx="minor"/>
+    </dgm:style>
+  </dgm:styleLbl>
+  <dgm:styleLbl name="solidBgAcc1">
+    <dgm:scene3d>
+      <a:camera prst="orthographicFront"/>
+      <a:lightRig rig="threePt" dir="t"/>
+    </dgm:scene3d>
+    <dgm:sp3d/>
+    <dgm:txPr/>
+    <dgm:style>
+      <a:lnRef idx="2">
+        <a:scrgbClr r="0" g="0" b="0"/>
+      </a:lnRef>
+      <a:fillRef idx="1">
+        <a:scrgbClr r="0" g="0" b="0"/>
+      </a:fillRef>
+      <a:effectRef idx="0">
+        <a:scrgbClr r="0" g="0" b="0"/>
+      </a:effectRef>
+      <a:fontRef idx="minor"/>
+    </dgm:style>
+  </dgm:styleLbl>
+  <dgm:styleLbl name="fgAccFollowNode1">
+    <dgm:scene3d>
+      <a:camera prst="orthographicFront"/>
+      <a:lightRig rig="threePt" dir="t"/>
+    </dgm:scene3d>
+    <dgm:sp3d/>
+    <dgm:txPr/>
+    <dgm:style>
+      <a:lnRef idx="2">
+        <a:scrgbClr r="0" g="0" b="0"/>
+      </a:lnRef>
+      <a:fillRef idx="1">
+        <a:scrgbClr r="0" g="0" b="0"/>
+      </a:fillRef>
+      <a:effectRef idx="0">
+        <a:scrgbClr r="0" g="0" b="0"/>
+      </a:effectRef>
+      <a:fontRef idx="minor"/>
+    </dgm:style>
+  </dgm:styleLbl>
+  <dgm:styleLbl name="alignAccFollowNode1">
+    <dgm:scene3d>
+      <a:camera prst="orthographicFront"/>
+      <a:lightRig rig="threePt" dir="t"/>
+    </dgm:scene3d>
+    <dgm:sp3d/>
+    <dgm:txPr/>
+    <dgm:style>
+      <a:lnRef idx="2">
+        <a:scrgbClr r="0" g="0" b="0"/>
+      </a:lnRef>
+      <a:fillRef idx="1">
+        <a:scrgbClr r="0" g="0" b="0"/>
+      </a:fillRef>
+      <a:effectRef idx="0">
+        <a:scrgbClr r="0" g="0" b="0"/>
+      </a:effectRef>
+      <a:fontRef idx="minor"/>
+    </dgm:style>
+  </dgm:styleLbl>
+  <dgm:styleLbl name="bgAccFollowNode1">
+    <dgm:scene3d>
+      <a:camera prst="orthographicFront"/>
+      <a:lightRig rig="threePt" dir="t"/>
+    </dgm:scene3d>
+    <dgm:sp3d/>
+    <dgm:txPr/>
+    <dgm:style>
+      <a:lnRef idx="2">
+        <a:scrgbClr r="0" g="0" b="0"/>
+      </a:lnRef>
+      <a:fillRef idx="1">
+        <a:scrgbClr r="0" g="0" b="0"/>
+      </a:fillRef>
+      <a:effectRef idx="0">
+        <a:scrgbClr r="0" g="0" b="0"/>
+      </a:effectRef>
+      <a:fontRef idx="minor"/>
+    </dgm:style>
+  </dgm:styleLbl>
+  <dgm:styleLbl name="fgAcc0">
+    <dgm:scene3d>
+      <a:camera prst="orthographicFront"/>
+      <a:lightRig rig="threePt" dir="t"/>
+    </dgm:scene3d>
+    <dgm:sp3d/>
+    <dgm:txPr/>
+    <dgm:style>
+      <a:lnRef idx="2">
+        <a:scrgbClr r="0" g="0" b="0"/>
+      </a:lnRef>
+      <a:fillRef idx="1">
+        <a:scrgbClr r="0" g="0" b="0"/>
+      </a:fillRef>
+      <a:effectRef idx="0">
+        <a:scrgbClr r="0" g="0" b="0"/>
+      </a:effectRef>
+      <a:fontRef idx="minor"/>
+    </dgm:style>
+  </dgm:styleLbl>
+  <dgm:styleLbl name="fgAcc2">
+    <dgm:scene3d>
+      <a:camera prst="orthographicFront"/>
+      <a:lightRig rig="threePt" dir="t"/>
+    </dgm:scene3d>
+    <dgm:sp3d/>
+    <dgm:txPr/>
+    <dgm:style>
+      <a:lnRef idx="2">
+        <a:scrgbClr r="0" g="0" b="0"/>
+      </a:lnRef>
+      <a:fillRef idx="1">
+        <a:scrgbClr r="0" g="0" b="0"/>
+      </a:fillRef>
+      <a:effectRef idx="0">
+        <a:scrgbClr r="0" g="0" b="0"/>
+      </a:effectRef>
+      <a:fontRef idx="minor"/>
+    </dgm:style>
+  </dgm:styleLbl>
+  <dgm:styleLbl name="fgAcc3">
+    <dgm:scene3d>
+      <a:camera prst="orthographicFront"/>
+      <a:lightRig rig="threePt" dir="t"/>
+    </dgm:scene3d>
+    <dgm:sp3d/>
+    <dgm:txPr/>
+    <dgm:style>
+      <a:lnRef idx="2">
+        <a:scrgbClr r="0" g="0" b="0"/>
+      </a:lnRef>
+      <a:fillRef idx="1">
+        <a:scrgbClr r="0" g="0" b="0"/>
+      </a:fillRef>
+      <a:effectRef idx="0">
+        <a:scrgbClr r="0" g="0" b="0"/>
+      </a:effectRef>
+      <a:fontRef idx="minor"/>
+    </dgm:style>
+  </dgm:styleLbl>
+  <dgm:styleLbl name="fgAcc4">
+    <dgm:scene3d>
+      <a:camera prst="orthographicFront"/>
+      <a:lightRig rig="threePt" dir="t"/>
+    </dgm:scene3d>
+    <dgm:sp3d/>
+    <dgm:txPr/>
+    <dgm:style>
+      <a:lnRef idx="2">
+        <a:scrgbClr r="0" g="0" b="0"/>
+      </a:lnRef>
+      <a:fillRef idx="1">
+        <a:scrgbClr r="0" g="0" b="0"/>
+      </a:fillRef>
+      <a:effectRef idx="0">
+        <a:scrgbClr r="0" g="0" b="0"/>
+      </a:effectRef>
+      <a:fontRef idx="minor"/>
+    </dgm:style>
+  </dgm:styleLbl>
+  <dgm:styleLbl name="bgShp">
+    <dgm:scene3d>
+      <a:camera prst="orthographicFront"/>
+      <a:lightRig rig="threePt" dir="t"/>
+    </dgm:scene3d>
+    <dgm:sp3d/>
+    <dgm:txPr/>
+    <dgm:style>
+      <a:lnRef idx="0">
+        <a:scrgbClr r="0" g="0" b="0"/>
+      </a:lnRef>
+      <a:fillRef idx="1">
+        <a:scrgbClr r="0" g="0" b="0"/>
+      </a:fillRef>
+      <a:effectRef idx="0">
+        <a:scrgbClr r="0" g="0" b="0"/>
+      </a:effectRef>
+      <a:fontRef idx="minor"/>
+    </dgm:style>
+  </dgm:styleLbl>
+  <dgm:styleLbl name="dkBgShp">
+    <dgm:scene3d>
+      <a:camera prst="orthographicFront"/>
+      <a:lightRig rig="threePt" dir="t"/>
+    </dgm:scene3d>
+    <dgm:sp3d/>
+    <dgm:txPr/>
+    <dgm:style>
+      <a:lnRef idx="0">
+        <a:scrgbClr r="0" g="0" b="0"/>
+      </a:lnRef>
+      <a:fillRef idx="1">
+        <a:scrgbClr r="0" g="0" b="0"/>
+      </a:fillRef>
+      <a:effectRef idx="0">
+        <a:scrgbClr r="0" g="0" b="0"/>
+      </a:effectRef>
+      <a:fontRef idx="minor"/>
+    </dgm:style>
+  </dgm:styleLbl>
+  <dgm:styleLbl name="trBgShp">
+    <dgm:scene3d>
+      <a:camera prst="orthographicFront"/>
+      <a:lightRig rig="threePt" dir="t"/>
+    </dgm:scene3d>
+    <dgm:sp3d/>
+    <dgm:txPr/>
+    <dgm:style>
+      <a:lnRef idx="0">
+        <a:scrgbClr r="0" g="0" b="0"/>
+      </a:lnRef>
+      <a:fillRef idx="1">
+        <a:scrgbClr r="0" g="0" b="0"/>
+      </a:fillRef>
+      <a:effectRef idx="0">
+        <a:scrgbClr r="0" g="0" b="0"/>
+      </a:effectRef>
+      <a:fontRef idx="minor"/>
+    </dgm:style>
+  </dgm:styleLbl>
+  <dgm:styleLbl name="fgShp">
+    <dgm:scene3d>
+      <a:camera prst="orthographicFront"/>
+      <a:lightRig rig="threePt" dir="t"/>
+    </dgm:scene3d>
+    <dgm:sp3d/>
+    <dgm:txPr/>
+    <dgm:style>
+      <a:lnRef idx="2">
+        <a:scrgbClr r="0" g="0" b="0"/>
+      </a:lnRef>
+      <a:fillRef idx="1">
+        <a:scrgbClr r="0" g="0" b="0"/>
+      </a:fillRef>
+      <a:effectRef idx="0">
+        <a:scrgbClr r="0" g="0" b="0"/>
+      </a:effectRef>
+      <a:fontRef idx="minor"/>
+    </dgm:style>
+  </dgm:styleLbl>
+  <dgm:styleLbl name="revTx">
+    <dgm:scene3d>
+      <a:camera prst="orthographicFront"/>
+      <a:lightRig rig="threePt" dir="t"/>
+    </dgm:scene3d>
+    <dgm:sp3d/>
+    <dgm:txPr/>
+    <dgm:style>
+      <a:lnRef idx="0">
+        <a:scrgbClr r="0" g="0" b="0"/>
+      </a:lnRef>
+      <a:fillRef idx="0">
+        <a:scrgbClr r="0" g="0" b="0"/>
+      </a:fillRef>
+      <a:effectRef idx="0">
+        <a:scrgbClr r="0" g="0" b="0"/>
+      </a:effectRef>
+      <a:fontRef idx="minor"/>
+    </dgm:style>
+  </dgm:styleLbl>
+</dgm:styleDef>
 </file>
 
 <file path=ppt/slideLayouts/slideLayout1.xml><?xml version="1.0" encoding="utf-8"?>
@@ -672,7 +4055,7 @@
           <a:p>
             <a:fld id="{C23B7E13-4BB4-4C47-BBB0-099F19561DE7}" type="datetimeFigureOut">
               <a:rPr lang="en-150" smtClean="0"/>
-              <a:t>07/03/2026</a:t>
+              <a:t>10/03/2026</a:t>
             </a:fld>
             <a:endParaRPr lang="en-150"/>
           </a:p>
@@ -872,7 +4255,7 @@
           <a:p>
             <a:fld id="{C23B7E13-4BB4-4C47-BBB0-099F19561DE7}" type="datetimeFigureOut">
               <a:rPr lang="en-150" smtClean="0"/>
-              <a:t>07/03/2026</a:t>
+              <a:t>10/03/2026</a:t>
             </a:fld>
             <a:endParaRPr lang="en-150"/>
           </a:p>
@@ -1082,7 +4465,7 @@
           <a:p>
             <a:fld id="{C23B7E13-4BB4-4C47-BBB0-099F19561DE7}" type="datetimeFigureOut">
               <a:rPr lang="en-150" smtClean="0"/>
-              <a:t>07/03/2026</a:t>
+              <a:t>10/03/2026</a:t>
             </a:fld>
             <a:endParaRPr lang="en-150"/>
           </a:p>
@@ -1282,7 +4665,7 @@
           <a:p>
             <a:fld id="{C23B7E13-4BB4-4C47-BBB0-099F19561DE7}" type="datetimeFigureOut">
               <a:rPr lang="en-150" smtClean="0"/>
-              <a:t>07/03/2026</a:t>
+              <a:t>10/03/2026</a:t>
             </a:fld>
             <a:endParaRPr lang="en-150"/>
           </a:p>
@@ -1558,7 +4941,7 @@
           <a:p>
             <a:fld id="{C23B7E13-4BB4-4C47-BBB0-099F19561DE7}" type="datetimeFigureOut">
               <a:rPr lang="en-150" smtClean="0"/>
-              <a:t>07/03/2026</a:t>
+              <a:t>10/03/2026</a:t>
             </a:fld>
             <a:endParaRPr lang="en-150"/>
           </a:p>
@@ -1826,7 +5209,7 @@
           <a:p>
             <a:fld id="{C23B7E13-4BB4-4C47-BBB0-099F19561DE7}" type="datetimeFigureOut">
               <a:rPr lang="en-150" smtClean="0"/>
-              <a:t>07/03/2026</a:t>
+              <a:t>10/03/2026</a:t>
             </a:fld>
             <a:endParaRPr lang="en-150"/>
           </a:p>
@@ -2241,7 +5624,7 @@
           <a:p>
             <a:fld id="{C23B7E13-4BB4-4C47-BBB0-099F19561DE7}" type="datetimeFigureOut">
               <a:rPr lang="en-150" smtClean="0"/>
-              <a:t>07/03/2026</a:t>
+              <a:t>10/03/2026</a:t>
             </a:fld>
             <a:endParaRPr lang="en-150"/>
           </a:p>
@@ -2383,7 +5766,7 @@
           <a:p>
             <a:fld id="{C23B7E13-4BB4-4C47-BBB0-099F19561DE7}" type="datetimeFigureOut">
               <a:rPr lang="en-150" smtClean="0"/>
-              <a:t>07/03/2026</a:t>
+              <a:t>10/03/2026</a:t>
             </a:fld>
             <a:endParaRPr lang="en-150"/>
           </a:p>
@@ -2496,7 +5879,7 @@
           <a:p>
             <a:fld id="{C23B7E13-4BB4-4C47-BBB0-099F19561DE7}" type="datetimeFigureOut">
               <a:rPr lang="en-150" smtClean="0"/>
-              <a:t>07/03/2026</a:t>
+              <a:t>10/03/2026</a:t>
             </a:fld>
             <a:endParaRPr lang="en-150"/>
           </a:p>
@@ -2809,7 +6192,7 @@
           <a:p>
             <a:fld id="{C23B7E13-4BB4-4C47-BBB0-099F19561DE7}" type="datetimeFigureOut">
               <a:rPr lang="en-150" smtClean="0"/>
-              <a:t>07/03/2026</a:t>
+              <a:t>10/03/2026</a:t>
             </a:fld>
             <a:endParaRPr lang="en-150"/>
           </a:p>
@@ -3098,7 +6481,7 @@
           <a:p>
             <a:fld id="{C23B7E13-4BB4-4C47-BBB0-099F19561DE7}" type="datetimeFigureOut">
               <a:rPr lang="en-150" smtClean="0"/>
-              <a:t>07/03/2026</a:t>
+              <a:t>10/03/2026</a:t>
             </a:fld>
             <a:endParaRPr lang="en-150"/>
           </a:p>
@@ -3341,7 +6724,7 @@
           <a:p>
             <a:fld id="{C23B7E13-4BB4-4C47-BBB0-099F19561DE7}" type="datetimeFigureOut">
               <a:rPr lang="en-150" smtClean="0"/>
-              <a:t>07/03/2026</a:t>
+              <a:t>10/03/2026</a:t>
             </a:fld>
             <a:endParaRPr lang="en-150"/>
           </a:p>
@@ -4555,10 +7938,10 @@
       </p:grpSpPr>
       <p:sp useBgFill="1">
         <p:nvSpPr>
-          <p:cNvPr id="18" name="Rectangle 17">
+          <p:cNvPr id="25" name="Rectangle 24">
             <a:extLst>
               <a:ext uri="{FF2B5EF4-FFF2-40B4-BE49-F238E27FC236}">
-                <a16:creationId xmlns:a16="http://schemas.microsoft.com/office/drawing/2014/main" id="{1B15ED52-F352-441B-82BF-E0EA34836D08}"/>
+                <a16:creationId xmlns:a16="http://schemas.microsoft.com/office/drawing/2014/main" id="{D47F22ED-3A55-4EDE-A5A8-163D82B09265}"/>
               </a:ext>
               <a:ext uri="{C183D7F6-B498-43B3-948B-1728B52AA6E4}">
                 <adec:decorative xmlns:adec="http://schemas.microsoft.com/office/drawing/2017/decorative" val="1"/>
@@ -4631,10 +8014,10 @@
       </p:sp>
       <p:sp>
         <p:nvSpPr>
-          <p:cNvPr id="19" name="Rectangle 18">
+          <p:cNvPr id="27" name="Rectangle 26">
             <a:extLst>
               <a:ext uri="{FF2B5EF4-FFF2-40B4-BE49-F238E27FC236}">
-                <a16:creationId xmlns:a16="http://schemas.microsoft.com/office/drawing/2014/main" id="{3B2E3793-BFE6-45A2-9B7B-E18844431C99}"/>
+                <a16:creationId xmlns:a16="http://schemas.microsoft.com/office/drawing/2014/main" id="{5184EE59-3061-456B-9FB5-98A8E0E74B02}"/>
               </a:ext>
               <a:ext uri="{C183D7F6-B498-43B3-948B-1728B52AA6E4}">
                 <adec:decorative xmlns:adec="http://schemas.microsoft.com/office/drawing/2017/decorative" val="1"/>
@@ -4653,16 +8036,16 @@
           </p:nvPr>
         </p:nvSpPr>
         <p:spPr>
-          <a:xfrm flipH="1">
-            <a:off x="-1" y="-1"/>
-            <a:ext cx="12191998" cy="1590742"/>
+          <a:xfrm rot="5400000" flipH="1">
+            <a:off x="-1439326" y="1410082"/>
+            <a:ext cx="6858000" cy="4037836"/>
           </a:xfrm>
           <a:prstGeom prst="rect">
             <a:avLst/>
           </a:prstGeom>
           <a:gradFill>
             <a:gsLst>
-              <a:gs pos="0">
+              <a:gs pos="8000">
                 <a:srgbClr val="000000"/>
               </a:gs>
               <a:gs pos="100000">
@@ -4671,7 +8054,7 @@
                 </a:schemeClr>
               </a:gs>
             </a:gsLst>
-            <a:lin ang="8400000" scaled="0"/>
+            <a:lin ang="3000000" scaled="0"/>
           </a:gradFill>
           <a:ln>
             <a:noFill/>
@@ -4704,10 +8087,10 @@
       </p:sp>
       <p:sp>
         <p:nvSpPr>
-          <p:cNvPr id="20" name="Rectangle 19">
+          <p:cNvPr id="29" name="Rectangle 28">
             <a:extLst>
               <a:ext uri="{FF2B5EF4-FFF2-40B4-BE49-F238E27FC236}">
-                <a16:creationId xmlns:a16="http://schemas.microsoft.com/office/drawing/2014/main" id="{BC4C4868-CB8F-4AF9-9CDB-8108F2C19B67}"/>
+                <a16:creationId xmlns:a16="http://schemas.microsoft.com/office/drawing/2014/main" id="{F7E07B5E-9FB5-4C91-8BE4-6167EB58D0A7}"/>
               </a:ext>
               <a:ext uri="{C183D7F6-B498-43B3-948B-1728B52AA6E4}">
                 <adec:decorative xmlns:adec="http://schemas.microsoft.com/office/drawing/2017/decorative" val="1"/>
@@ -4726,28 +8109,27 @@
           </p:nvPr>
         </p:nvSpPr>
         <p:spPr>
-          <a:xfrm rot="10800000" flipH="1">
-            <a:off x="-3" y="0"/>
-            <a:ext cx="8115306" cy="1590742"/>
+          <a:xfrm rot="5400000" flipH="1">
+            <a:off x="-1439326" y="1410083"/>
+            <a:ext cx="6858000" cy="4037834"/>
           </a:xfrm>
           <a:prstGeom prst="rect">
             <a:avLst/>
           </a:prstGeom>
           <a:gradFill>
             <a:gsLst>
-              <a:gs pos="20000">
+              <a:gs pos="0">
+                <a:srgbClr val="000000">
+                  <a:alpha val="0"/>
+                </a:srgbClr>
+              </a:gs>
+              <a:gs pos="99000">
                 <a:schemeClr val="accent1">
-                  <a:alpha val="0"/>
-                </a:schemeClr>
-              </a:gs>
-              <a:gs pos="100000">
-                <a:schemeClr val="accent1">
-                  <a:lumMod val="50000"/>
-                  <a:alpha val="55000"/>
+                  <a:alpha val="46000"/>
                 </a:schemeClr>
               </a:gs>
             </a:gsLst>
-            <a:lin ang="13800000" scaled="0"/>
+            <a:lin ang="1800000" scaled="0"/>
           </a:gradFill>
           <a:ln>
             <a:noFill/>
@@ -4780,10 +8162,10 @@
       </p:sp>
       <p:sp>
         <p:nvSpPr>
-          <p:cNvPr id="15" name="Rectangle 14">
+          <p:cNvPr id="31" name="Rectangle 30">
             <a:extLst>
               <a:ext uri="{FF2B5EF4-FFF2-40B4-BE49-F238E27FC236}">
-                <a16:creationId xmlns:a16="http://schemas.microsoft.com/office/drawing/2014/main" id="{375E0459-6403-40CD-989D-56A4407CA12E}"/>
+                <a16:creationId xmlns:a16="http://schemas.microsoft.com/office/drawing/2014/main" id="{37524947-EB09-4DD9-973B-9F75BBCD7269}"/>
               </a:ext>
               <a:ext uri="{C183D7F6-B498-43B3-948B-1728B52AA6E4}">
                 <adec:decorative xmlns:adec="http://schemas.microsoft.com/office/drawing/2017/decorative" val="1"/>
@@ -4802,18 +8184,18 @@
           </p:nvPr>
         </p:nvSpPr>
         <p:spPr>
-          <a:xfrm flipH="1">
-            <a:off x="8115299" y="-1"/>
-            <a:ext cx="4076698" cy="1590742"/>
+          <a:xfrm rot="5400000" flipH="1">
+            <a:off x="726611" y="3576013"/>
+            <a:ext cx="2526132" cy="4037841"/>
           </a:xfrm>
           <a:prstGeom prst="rect">
             <a:avLst/>
           </a:prstGeom>
           <a:gradFill>
             <a:gsLst>
-              <a:gs pos="0">
+              <a:gs pos="2000">
                 <a:schemeClr val="accent1">
-                  <a:alpha val="66000"/>
+                  <a:alpha val="29000"/>
                 </a:schemeClr>
               </a:gs>
               <a:gs pos="100000">
@@ -4822,7 +8204,7 @@
                 </a:srgbClr>
               </a:gs>
             </a:gsLst>
-            <a:lin ang="13200000" scaled="0"/>
+            <a:lin ang="7800000" scaled="0"/>
           </a:gradFill>
           <a:ln>
             <a:noFill/>
@@ -4855,10 +8237,10 @@
       </p:sp>
       <p:sp>
         <p:nvSpPr>
-          <p:cNvPr id="17" name="Rectangle 16">
+          <p:cNvPr id="33" name="Rectangle 32">
             <a:extLst>
               <a:ext uri="{FF2B5EF4-FFF2-40B4-BE49-F238E27FC236}">
-                <a16:creationId xmlns:a16="http://schemas.microsoft.com/office/drawing/2014/main" id="{53E5B1A8-3AC9-4BD1-9BBC-78CA94F2D1BA}"/>
+                <a16:creationId xmlns:a16="http://schemas.microsoft.com/office/drawing/2014/main" id="{D30C8E25-2DD1-45C6-9F04-0F0CBF666021}"/>
               </a:ext>
               <a:ext uri="{C183D7F6-B498-43B3-948B-1728B52AA6E4}">
                 <adec:decorative xmlns:adec="http://schemas.microsoft.com/office/drawing/2017/decorative" val="1"/>
@@ -4877,28 +8259,29 @@
           </p:nvPr>
         </p:nvSpPr>
         <p:spPr>
-          <a:xfrm>
-            <a:off x="459350" y="-1"/>
-            <a:ext cx="11732646" cy="1597433"/>
+          <a:xfrm rot="5400000" flipH="1">
+            <a:off x="-1410083" y="1396067"/>
+            <a:ext cx="6858000" cy="4037833"/>
           </a:xfrm>
           <a:prstGeom prst="rect">
             <a:avLst/>
           </a:prstGeom>
           <a:gradFill>
             <a:gsLst>
-              <a:gs pos="50000">
+              <a:gs pos="0">
                 <a:srgbClr val="000000">
                   <a:alpha val="0"/>
                 </a:srgbClr>
               </a:gs>
               <a:gs pos="99000">
                 <a:schemeClr val="accent1">
-                  <a:lumMod val="50000"/>
-                  <a:alpha val="52000"/>
+                  <a:lumMod val="60000"/>
+                  <a:lumOff val="40000"/>
+                  <a:alpha val="11000"/>
                 </a:schemeClr>
               </a:gs>
             </a:gsLst>
-            <a:lin ang="16800000" scaled="0"/>
+            <a:lin ang="7200000" scaled="0"/>
           </a:gradFill>
           <a:ln>
             <a:noFill/>
@@ -4931,6 +8314,176 @@
       </p:sp>
       <p:sp>
         <p:nvSpPr>
+          <p:cNvPr id="35" name="Freeform: Shape 34">
+            <a:extLst>
+              <a:ext uri="{FF2B5EF4-FFF2-40B4-BE49-F238E27FC236}">
+                <a16:creationId xmlns:a16="http://schemas.microsoft.com/office/drawing/2014/main" id="{BC57EA3C-C239-4132-A618-5CBE9F896B2F}"/>
+              </a:ext>
+              <a:ext uri="{C183D7F6-B498-43B3-948B-1728B52AA6E4}">
+                <adec:decorative xmlns:adec="http://schemas.microsoft.com/office/drawing/2017/decorative" val="1"/>
+              </a:ext>
+            </a:extLst>
+          </p:cNvPr>
+          <p:cNvSpPr>
+            <a:spLocks noGrp="1" noRot="1" noChangeAspect="1" noMove="1" noResize="1" noEditPoints="1" noAdjustHandles="1" noChangeArrowheads="1" noChangeShapeType="1" noTextEdit="1"/>
+          </p:cNvSpPr>
+          <p:nvPr>
+            <p:extLst>
+              <p:ext uri="{386F3935-93C4-4BCD-93E2-E3B085C9AB24}">
+                <p16:designElem xmlns:p16="http://schemas.microsoft.com/office/powerpoint/2015/main" val="1"/>
+              </p:ext>
+            </p:extLst>
+          </p:nvPr>
+        </p:nvSpPr>
+        <p:spPr>
+          <a:xfrm rot="20635413">
+            <a:off x="-508268" y="982780"/>
+            <a:ext cx="3900357" cy="4178958"/>
+          </a:xfrm>
+          <a:custGeom>
+            <a:avLst/>
+            <a:gdLst>
+              <a:gd name="connsiteX0" fmla="*/ 2432225 w 3900357"/>
+              <a:gd name="connsiteY0" fmla="*/ 93939 h 4178958"/>
+              <a:gd name="connsiteX1" fmla="*/ 3900357 w 3900357"/>
+              <a:gd name="connsiteY1" fmla="*/ 2089479 h 4178958"/>
+              <a:gd name="connsiteX2" fmla="*/ 1810878 w 3900357"/>
+              <a:gd name="connsiteY2" fmla="*/ 4178958 h 4178958"/>
+              <a:gd name="connsiteX3" fmla="*/ 78249 w 3900357"/>
+              <a:gd name="connsiteY3" fmla="*/ 3257727 h 4178958"/>
+              <a:gd name="connsiteX4" fmla="*/ 0 w 3900357"/>
+              <a:gd name="connsiteY4" fmla="*/ 3128923 h 4178958"/>
+              <a:gd name="connsiteX5" fmla="*/ 831324 w 3900357"/>
+              <a:gd name="connsiteY5" fmla="*/ 244281 h 4178958"/>
+              <a:gd name="connsiteX6" fmla="*/ 997559 w 3900357"/>
+              <a:gd name="connsiteY6" fmla="*/ 164202 h 4178958"/>
+              <a:gd name="connsiteX7" fmla="*/ 1810878 w 3900357"/>
+              <a:gd name="connsiteY7" fmla="*/ 0 h 4178958"/>
+              <a:gd name="connsiteX8" fmla="*/ 2432225 w 3900357"/>
+              <a:gd name="connsiteY8" fmla="*/ 93939 h 4178958"/>
+            </a:gdLst>
+            <a:ahLst/>
+            <a:cxnLst>
+              <a:cxn ang="0">
+                <a:pos x="connsiteX0" y="connsiteY0"/>
+              </a:cxn>
+              <a:cxn ang="0">
+                <a:pos x="connsiteX1" y="connsiteY1"/>
+              </a:cxn>
+              <a:cxn ang="0">
+                <a:pos x="connsiteX2" y="connsiteY2"/>
+              </a:cxn>
+              <a:cxn ang="0">
+                <a:pos x="connsiteX3" y="connsiteY3"/>
+              </a:cxn>
+              <a:cxn ang="0">
+                <a:pos x="connsiteX4" y="connsiteY4"/>
+              </a:cxn>
+              <a:cxn ang="0">
+                <a:pos x="connsiteX5" y="connsiteY5"/>
+              </a:cxn>
+              <a:cxn ang="0">
+                <a:pos x="connsiteX6" y="connsiteY6"/>
+              </a:cxn>
+              <a:cxn ang="0">
+                <a:pos x="connsiteX7" y="connsiteY7"/>
+              </a:cxn>
+              <a:cxn ang="0">
+                <a:pos x="connsiteX8" y="connsiteY8"/>
+              </a:cxn>
+            </a:cxnLst>
+            <a:rect l="l" t="t" r="r" b="b"/>
+            <a:pathLst>
+              <a:path w="3900357" h="4178958">
+                <a:moveTo>
+                  <a:pt x="2432225" y="93939"/>
+                </a:moveTo>
+                <a:cubicBezTo>
+                  <a:pt x="3282786" y="358491"/>
+                  <a:pt x="3900357" y="1151865"/>
+                  <a:pt x="3900357" y="2089479"/>
+                </a:cubicBezTo>
+                <a:cubicBezTo>
+                  <a:pt x="3900357" y="3243466"/>
+                  <a:pt x="2964865" y="4178958"/>
+                  <a:pt x="1810878" y="4178958"/>
+                </a:cubicBezTo>
+                <a:cubicBezTo>
+                  <a:pt x="1089636" y="4178958"/>
+                  <a:pt x="453744" y="3813531"/>
+                  <a:pt x="78249" y="3257727"/>
+                </a:cubicBezTo>
+                <a:lnTo>
+                  <a:pt x="0" y="3128923"/>
+                </a:lnTo>
+                <a:lnTo>
+                  <a:pt x="831324" y="244281"/>
+                </a:lnTo>
+                <a:lnTo>
+                  <a:pt x="997559" y="164202"/>
+                </a:lnTo>
+                <a:cubicBezTo>
+                  <a:pt x="1247540" y="58468"/>
+                  <a:pt x="1522381" y="0"/>
+                  <a:pt x="1810878" y="0"/>
+                </a:cubicBezTo>
+                <a:cubicBezTo>
+                  <a:pt x="2027251" y="0"/>
+                  <a:pt x="2235942" y="32888"/>
+                  <a:pt x="2432225" y="93939"/>
+                </a:cubicBezTo>
+                <a:close/>
+              </a:path>
+            </a:pathLst>
+          </a:custGeom>
+          <a:gradFill>
+            <a:gsLst>
+              <a:gs pos="29000">
+                <a:srgbClr val="000000">
+                  <a:alpha val="0"/>
+                </a:srgbClr>
+              </a:gs>
+              <a:gs pos="100000">
+                <a:schemeClr val="accent1">
+                  <a:alpha val="43000"/>
+                </a:schemeClr>
+              </a:gs>
+            </a:gsLst>
+            <a:lin ang="1800000" scaled="0"/>
+          </a:gradFill>
+          <a:ln>
+            <a:noFill/>
+          </a:ln>
+        </p:spPr>
+        <p:style>
+          <a:lnRef idx="2">
+            <a:schemeClr val="accent1">
+              <a:shade val="50000"/>
+            </a:schemeClr>
+          </a:lnRef>
+          <a:fillRef idx="1">
+            <a:schemeClr val="accent1"/>
+          </a:fillRef>
+          <a:effectRef idx="0">
+            <a:schemeClr val="accent1"/>
+          </a:effectRef>
+          <a:fontRef idx="minor">
+            <a:schemeClr val="lt1"/>
+          </a:fontRef>
+        </p:style>
+        <p:txBody>
+          <a:bodyPr wrap="square" rtlCol="0" anchor="ctr">
+            <a:noAutofit/>
+          </a:bodyPr>
+          <a:lstStyle/>
+          <a:p>
+            <a:pPr algn="ctr"/>
+            <a:endParaRPr lang="en-US"/>
+          </a:p>
+        </p:txBody>
+      </p:sp>
+      <p:sp>
+        <p:nvSpPr>
           <p:cNvPr id="2" name="Title 1">
             <a:extLst>
               <a:ext uri="{FF2B5EF4-FFF2-40B4-BE49-F238E27FC236}">
@@ -4947,16 +8500,17 @@
         </p:nvSpPr>
         <p:spPr>
           <a:xfrm>
-            <a:off x="1371599" y="294538"/>
-            <a:ext cx="9895951" cy="1033669"/>
+            <a:off x="566382" y="456345"/>
+            <a:ext cx="3111690" cy="3556097"/>
           </a:xfrm>
         </p:spPr>
         <p:txBody>
-          <a:bodyPr>
+          <a:bodyPr anchor="b">
             <a:normAutofit/>
           </a:bodyPr>
           <a:lstStyle/>
           <a:p>
+            <a:pPr algn="r"/>
             <a:r>
               <a:rPr lang="en-US" sz="4000">
                 <a:solidFill>
@@ -4973,6 +8527,80 @@
           </a:p>
         </p:txBody>
       </p:sp>
+      <p:pic>
+        <p:nvPicPr>
+          <p:cNvPr id="5" name="Picture 4">
+            <a:extLst>
+              <a:ext uri="{FF2B5EF4-FFF2-40B4-BE49-F238E27FC236}">
+                <a16:creationId xmlns:a16="http://schemas.microsoft.com/office/drawing/2014/main" id="{794F0AB5-F22B-D3D8-69A2-48E52CEAD532}"/>
+              </a:ext>
+            </a:extLst>
+          </p:cNvPr>
+          <p:cNvPicPr>
+            <a:picLocks noChangeAspect="1"/>
+          </p:cNvPicPr>
+          <p:nvPr/>
+        </p:nvPicPr>
+        <p:blipFill>
+          <a:blip r:embed="rId2">
+            <a:extLst>
+              <a:ext uri="{28A0092B-C50C-407E-A947-70E740481C1C}">
+                <a14:useLocalDpi xmlns:a14="http://schemas.microsoft.com/office/drawing/2010/main" val="0"/>
+              </a:ext>
+            </a:extLst>
+          </a:blip>
+          <a:srcRect l="5277" r="7127"/>
+          <a:stretch>
+            <a:fillRect/>
+          </a:stretch>
+        </p:blipFill>
+        <p:spPr>
+          <a:xfrm>
+            <a:off x="3981014" y="4123955"/>
+            <a:ext cx="4104659" cy="2342957"/>
+          </a:xfrm>
+          <a:prstGeom prst="rect">
+            <a:avLst/>
+          </a:prstGeom>
+        </p:spPr>
+      </p:pic>
+      <p:pic>
+        <p:nvPicPr>
+          <p:cNvPr id="7" name="Picture 6">
+            <a:extLst>
+              <a:ext uri="{FF2B5EF4-FFF2-40B4-BE49-F238E27FC236}">
+                <a16:creationId xmlns:a16="http://schemas.microsoft.com/office/drawing/2014/main" id="{A50F79F1-1DC7-48B2-93E9-04CCA5B16C41}"/>
+              </a:ext>
+            </a:extLst>
+          </p:cNvPr>
+          <p:cNvPicPr>
+            <a:picLocks noChangeAspect="1"/>
+          </p:cNvPicPr>
+          <p:nvPr/>
+        </p:nvPicPr>
+        <p:blipFill>
+          <a:blip r:embed="rId3">
+            <a:extLst>
+              <a:ext uri="{28A0092B-C50C-407E-A947-70E740481C1C}">
+                <a14:useLocalDpi xmlns:a14="http://schemas.microsoft.com/office/drawing/2010/main" val="0"/>
+              </a:ext>
+            </a:extLst>
+          </a:blip>
+          <a:srcRect l="9710" t="19571" r="7806" b="28440"/>
+          <a:stretch>
+            <a:fillRect/>
+          </a:stretch>
+        </p:blipFill>
+        <p:spPr>
+          <a:xfrm>
+            <a:off x="8022714" y="5469401"/>
+            <a:ext cx="4137586" cy="997511"/>
+          </a:xfrm>
+          <a:prstGeom prst="rect">
+            <a:avLst/>
+          </a:prstGeom>
+        </p:spPr>
+      </p:pic>
       <p:sp>
         <p:nvSpPr>
           <p:cNvPr id="4" name="Content Placeholder 3">
@@ -4991,30 +8619,90 @@
         </p:nvSpPr>
         <p:spPr>
           <a:xfrm>
-            <a:off x="1371599" y="2318197"/>
-            <a:ext cx="9724031" cy="3683358"/>
+            <a:off x="4184942" y="511389"/>
+            <a:ext cx="3891193" cy="3501053"/>
           </a:xfrm>
         </p:spPr>
         <p:txBody>
           <a:bodyPr anchor="ctr">
-            <a:normAutofit/>
+            <a:normAutofit lnSpcReduction="10000"/>
           </a:bodyPr>
           <a:lstStyle/>
           <a:p>
+            <a:pPr marL="0" indent="0">
+              <a:buNone/>
+            </a:pPr>
             <a:r>
-              <a:rPr lang="en-US" sz="2000"/>
-              <a:t>Description</a:t>
+              <a:rPr lang="en-US" sz="1800" b="1"/>
+              <a:t>Description:</a:t>
             </a:r>
-          </a:p>
-          <a:p>
-            <a:endParaRPr lang="en-US" sz="2000"/>
-          </a:p>
-          <a:p>
             <a:r>
-              <a:rPr lang="en-US" sz="2000"/>
-              <a:t>Results</a:t>
+              <a:rPr lang="en-US" sz="1800"/>
+              <a:t> The baseline model is a simple Convolutional Neural Network (CNN) trained on the MNIST handwritten digit dataset. It consists of a single Conv2D layer with 32 filters (3×3, </a:t>
             </a:r>
-            <a:endParaRPr lang="en-150" sz="2000"/>
+            <a:r>
+              <a:rPr lang="en-US" sz="1800" err="1"/>
+              <a:t>ReLU</a:t>
+            </a:r>
+            <a:r>
+              <a:rPr lang="en-US" sz="1800"/>
+              <a:t> activation), followed by one MaxPooling2D layer (2×2, stride 2), then a Flatten layer, a Dense layer with 64 neurons (</a:t>
+            </a:r>
+            <a:r>
+              <a:rPr lang="en-US" sz="1800" err="1"/>
+              <a:t>ReLU</a:t>
+            </a:r>
+            <a:r>
+              <a:rPr lang="en-US" sz="1800"/>
+              <a:t>), and a final Dense output layer with 10 neurons (</a:t>
+            </a:r>
+            <a:r>
+              <a:rPr lang="en-US" sz="1800" err="1"/>
+              <a:t>Softmax</a:t>
+            </a:r>
+            <a:r>
+              <a:rPr lang="en-US" sz="1800"/>
+              <a:t>) for digit classification. The model was compiled with the Adam optimizer and sparse categorical cross-entropy loss, and trained for 5 epochs.</a:t>
+            </a:r>
+          </a:p>
+        </p:txBody>
+      </p:sp>
+      <p:sp>
+        <p:nvSpPr>
+          <p:cNvPr id="11" name="TextBox 10">
+            <a:extLst>
+              <a:ext uri="{FF2B5EF4-FFF2-40B4-BE49-F238E27FC236}">
+                <a16:creationId xmlns:a16="http://schemas.microsoft.com/office/drawing/2014/main" id="{C872659E-7831-5A60-EDD2-D7C382D4F38F}"/>
+              </a:ext>
+            </a:extLst>
+          </p:cNvPr>
+          <p:cNvSpPr txBox="1"/>
+          <p:nvPr/>
+        </p:nvSpPr>
+        <p:spPr>
+          <a:xfrm>
+            <a:off x="8076135" y="511389"/>
+            <a:ext cx="4037835" cy="5078313"/>
+          </a:xfrm>
+          <a:prstGeom prst="rect">
+            <a:avLst/>
+          </a:prstGeom>
+          <a:noFill/>
+        </p:spPr>
+        <p:txBody>
+          <a:bodyPr wrap="square">
+            <a:spAutoFit/>
+          </a:bodyPr>
+          <a:lstStyle/>
+          <a:p>
+            <a:r>
+              <a:rPr lang="en-US" sz="1800" b="1"/>
+              <a:t>Results:</a:t>
+            </a:r>
+            <a:r>
+              <a:rPr lang="en-US" sz="1800"/>
+              <a:t> The baseline model performed strongly out of the box. Training accuracy started at approximately 95% in epoch 1 and climbed steadily to ~99.2% by epoch 5. Validation accuracy began higher than training accuracy (~97.7% at epoch 1), reflecting good generalization from the start, and reached ~98.8% by the final epoch. Training loss dropped sharply from ~0.165 to ~0.022, while validation loss decreased from ~0.070 to ~0.055. The close tracking between training and validation curves indicates the model is not overfitting, and the single Conv2D block was sufficient to achieve high accuracy on this relatively simple dataset.</a:t>
+            </a:r>
           </a:p>
         </p:txBody>
       </p:sp>
@@ -5644,7 +9332,7 @@
           <p:nvPr>
             <p:extLst>
               <p:ext uri="{D42A27DB-BD31-4B8C-83A1-F6EECF244321}">
-                <p14:modId xmlns:p14="http://schemas.microsoft.com/office/powerpoint/2010/main" val="2978902649"/>
+                <p14:modId xmlns:p14="http://schemas.microsoft.com/office/powerpoint/2010/main" val="3052427906"/>
               </p:ext>
             </p:extLst>
           </p:nvPr>
@@ -5696,7 +9384,7 @@
                     <a:lstStyle/>
                     <a:p>
                       <a:r>
-                        <a:rPr lang="en-US"/>
+                        <a:rPr lang="en-US" dirty="0"/>
                         <a:t>Metric</a:t>
                       </a:r>
                     </a:p>
@@ -5709,14 +9397,14 @@
                     <a:lstStyle/>
                     <a:p>
                       <a:r>
-                        <a:rPr lang="en-US"/>
+                        <a:rPr lang="en-US" dirty="0"/>
                         <a:t>Baseline</a:t>
                       </a:r>
                       <a:br>
-                        <a:rPr lang="en-US"/>
+                        <a:rPr lang="en-US" dirty="0"/>
                       </a:br>
                       <a:r>
-                        <a:rPr lang="en-US"/>
+                        <a:rPr lang="en-US" dirty="0"/>
                         <a:t>(batch size 32)</a:t>
                       </a:r>
                     </a:p>
@@ -5974,7 +9662,7 @@
                         <a:buNone/>
                       </a:pPr>
                       <a:r>
-                        <a:rPr lang="en-US" sz="1800" b="0" i="0" u="none" strike="noStrike" noProof="0">
+                        <a:rPr lang="en-US" sz="1800" b="0" i="0" u="none" strike="noStrike" noProof="0" dirty="0">
                           <a:solidFill>
                             <a:srgbClr val="000000"/>
                           </a:solidFill>
@@ -5983,7 +9671,7 @@
                         <a:t>↓ 16.05 seconds</a:t>
                       </a:r>
                       <a:br>
-                        <a:rPr lang="en-US" sz="1800" b="0" i="0" u="none" strike="noStrike" noProof="0">
+                        <a:rPr lang="en-US" sz="1800" b="0" i="0" u="none" strike="noStrike" noProof="0" dirty="0">
                           <a:solidFill>
                             <a:srgbClr val="000000"/>
                           </a:solidFill>
@@ -5991,7 +9679,7 @@
                         </a:rPr>
                       </a:br>
                       <a:r>
-                        <a:rPr lang="en-US" sz="1800" b="0" i="0" u="none" strike="noStrike" noProof="0">
+                        <a:rPr lang="en-US" sz="1800" b="0" i="0" u="none" strike="noStrike" noProof="0" dirty="0">
                           <a:solidFill>
                             <a:srgbClr val="000000"/>
                           </a:solidFill>
@@ -5999,7 +9687,7 @@
                         </a:rPr>
                         <a:t>     (29% faster)</a:t>
                       </a:r>
-                      <a:endParaRPr lang="en-US" sz="1800"/>
+                      <a:endParaRPr lang="en-US" sz="1800" dirty="0"/>
                     </a:p>
                   </a:txBody>
                   <a:tcPr/>
@@ -7094,46 +10782,626 @@
         </p:nvSpPr>
         <p:spPr>
           <a:xfrm>
-            <a:off x="1371599" y="2318197"/>
-            <a:ext cx="9724031" cy="3683358"/>
+            <a:off x="366182" y="1789030"/>
+            <a:ext cx="5183781" cy="4773441"/>
           </a:xfrm>
         </p:spPr>
         <p:txBody>
-          <a:bodyPr anchor="ctr">
-            <a:normAutofit/>
+          <a:bodyPr vert="horz" lIns="91440" tIns="45720" rIns="91440" bIns="45720" rtlCol="0" anchor="t">
+            <a:normAutofit lnSpcReduction="10000"/>
           </a:bodyPr>
           <a:lstStyle/>
           <a:p>
             <a:r>
-              <a:rPr lang="en-US" sz="2000"/>
+              <a:rPr lang="en-US" sz="1600" b="1"/>
               <a:t>Parameters Changed:</a:t>
             </a:r>
-          </a:p>
-          <a:p>
-            <a:pPr marL="285750" indent="-285750">
-              <a:buFont typeface="Arial" panose="020B0604020202020204" pitchFamily="34" charset="0"/>
-              <a:buChar char="•"/>
+            <a:r>
+              <a:rPr lang="en-US" sz="1600"/>
+              <a:t> Reduced CNN model complexity by lowering the number of convolution filters, hidden layer neurons, and training runs to evaluate the impact on training speed and model accuracy.</a:t>
+            </a:r>
+          </a:p>
+          <a:p>
+            <a:pPr lvl="1">
+              <a:buFont typeface="Courier New" panose="020B0604020202020204" pitchFamily="34" charset="0"/>
+              <a:buChar char="o"/>
             </a:pPr>
-            <a:endParaRPr lang="en-US" sz="2000"/>
-          </a:p>
-          <a:p>
             <a:r>
-              <a:rPr lang="en-US" sz="2000"/>
+              <a:rPr lang="en-US" sz="1400"/>
+              <a:t>Training Runs (epochs): 5 → 3</a:t>
+            </a:r>
+          </a:p>
+          <a:p>
+            <a:pPr lvl="1">
+              <a:buFont typeface="Courier New" panose="020B0604020202020204" pitchFamily="34" charset="0"/>
+              <a:buChar char="o"/>
+            </a:pPr>
+            <a:r>
+              <a:rPr lang="en-US" sz="1400" dirty="0"/>
+              <a:t>Convolution Filters: 32 → 4</a:t>
+            </a:r>
+          </a:p>
+          <a:p>
+            <a:pPr lvl="1">
+              <a:buFont typeface="Courier New" panose="020B0604020202020204" pitchFamily="34" charset="0"/>
+              <a:buChar char="o"/>
+            </a:pPr>
+            <a:r>
+              <a:rPr lang="en-US" sz="1400"/>
+              <a:t>Hidden Layers: 64 → 4</a:t>
+            </a:r>
+          </a:p>
+          <a:p>
+            <a:r>
+              <a:rPr lang="en-US" sz="1600" b="1"/>
               <a:t>Hypothesis:</a:t>
             </a:r>
-          </a:p>
-          <a:p>
-            <a:endParaRPr lang="en-US" sz="2000"/>
-          </a:p>
-          <a:p>
             <a:r>
-              <a:rPr lang="en-US" sz="2000"/>
-              <a:t>Results:</a:t>
+              <a:rPr lang="en-US" sz="1600"/>
+              <a:t> Reducing the number of filters, hidden neurons, and training runs will significantly reduce training time, while attempting to maintain model accuracy above 95%.</a:t>
             </a:r>
-            <a:endParaRPr lang="en-150" sz="2000"/>
+          </a:p>
+          <a:p>
+            <a:r>
+              <a:rPr lang="en-US" sz="1600" b="1"/>
+              <a:t>Results: </a:t>
+            </a:r>
+          </a:p>
+          <a:p>
+            <a:pPr lvl="1">
+              <a:buFont typeface="Courier New" panose="020B0604020202020204" pitchFamily="34" charset="0"/>
+              <a:buChar char="o"/>
+            </a:pPr>
+            <a:r>
+              <a:rPr lang="en-US" sz="1400" b="1"/>
+              <a:t>Training time </a:t>
+            </a:r>
+            <a:r>
+              <a:rPr lang="en-US" sz="1400" b="1" i="1"/>
+              <a:t>reduced</a:t>
+            </a:r>
+            <a:r>
+              <a:rPr lang="en-US" sz="1400" b="1" dirty="0"/>
+              <a:t> </a:t>
+            </a:r>
+            <a:r>
+              <a:rPr lang="en-US" sz="1400"/>
+              <a:t>from </a:t>
+            </a:r>
+            <a:r>
+              <a:rPr lang="en-US" sz="1400" b="1" i="1"/>
+              <a:t>99.76s → 23.32s</a:t>
+            </a:r>
+            <a:endParaRPr lang="en-150" sz="1400"/>
+          </a:p>
+          <a:p>
+            <a:pPr lvl="1">
+              <a:buFont typeface="Courier New" panose="020B0604020202020204" pitchFamily="34" charset="0"/>
+              <a:buChar char="o"/>
+            </a:pPr>
+            <a:r>
+              <a:rPr lang="en-US" sz="1400" b="1"/>
+              <a:t>Accuracy dropped</a:t>
+            </a:r>
+            <a:r>
+              <a:rPr lang="en-US" sz="1400"/>
+              <a:t> from </a:t>
+            </a:r>
+            <a:r>
+              <a:rPr lang="en-US" sz="1400" b="1" i="1"/>
+              <a:t>98.67% → 80.35%</a:t>
+            </a:r>
+          </a:p>
+          <a:p>
+            <a:pPr lvl="1">
+              <a:buFont typeface="Courier New" panose="020B0604020202020204" pitchFamily="34" charset="0"/>
+              <a:buChar char="o"/>
+            </a:pPr>
+            <a:r>
+              <a:rPr lang="en-US" sz="1400" b="1" i="1"/>
+              <a:t>Loss increased</a:t>
+            </a:r>
+            <a:r>
+              <a:rPr lang="en-US" sz="1400"/>
+              <a:t>, indicating </a:t>
+            </a:r>
+            <a:r>
+              <a:rPr lang="en-US" sz="1400" b="1" i="1"/>
+              <a:t>reduced prediction quality</a:t>
+            </a:r>
+          </a:p>
+          <a:p>
+            <a:pPr lvl="1">
+              <a:buFont typeface="Courier New" panose="020B0604020202020204" pitchFamily="34" charset="0"/>
+              <a:buChar char="o"/>
+            </a:pPr>
+            <a:r>
+              <a:rPr lang="en-US" sz="1400"/>
+              <a:t>Model became too small and began underfitting</a:t>
+            </a:r>
+          </a:p>
+          <a:p>
+            <a:r>
+              <a:rPr lang="en-US" sz="1600" b="1"/>
+              <a:t>Conclusion:</a:t>
+            </a:r>
+            <a:r>
+              <a:rPr lang="en-US" sz="1600"/>
+              <a:t> Hypothesis was partially correct that smaller models train and perfom faster but lose the ability to accurately predict.</a:t>
+            </a:r>
           </a:p>
         </p:txBody>
       </p:sp>
+      <p:graphicFrame>
+        <p:nvGraphicFramePr>
+          <p:cNvPr id="7" name="Table 6">
+            <a:extLst>
+              <a:ext uri="{FF2B5EF4-FFF2-40B4-BE49-F238E27FC236}">
+                <a16:creationId xmlns:a16="http://schemas.microsoft.com/office/drawing/2014/main" id="{C014C83C-B42D-F15F-0A27-D8C9CD41FAD6}"/>
+              </a:ext>
+            </a:extLst>
+          </p:cNvPr>
+          <p:cNvGraphicFramePr>
+            <a:graphicFrameLocks noGrp="1"/>
+          </p:cNvGraphicFramePr>
+          <p:nvPr>
+            <p:extLst>
+              <p:ext uri="{D42A27DB-BD31-4B8C-83A1-F6EECF244321}">
+                <p14:modId xmlns:p14="http://schemas.microsoft.com/office/powerpoint/2010/main" val="2229702239"/>
+              </p:ext>
+            </p:extLst>
+          </p:nvPr>
+        </p:nvGraphicFramePr>
+        <p:xfrm>
+          <a:off x="5873750" y="1841500"/>
+          <a:ext cx="6131248" cy="1727916"/>
+        </p:xfrm>
+        <a:graphic>
+          <a:graphicData uri="http://schemas.openxmlformats.org/drawingml/2006/table">
+            <a:tbl>
+              <a:tblPr firstRow="1" firstCol="1" bandRow="1">
+                <a:tableStyleId>{B301B821-A1FF-4177-AEE7-76D212191A09}</a:tableStyleId>
+              </a:tblPr>
+              <a:tblGrid>
+                <a:gridCol w="2141489">
+                  <a:extLst>
+                    <a:ext uri="{9D8B030D-6E8A-4147-A177-3AD203B41FA5}">
+                      <a16:colId xmlns:a16="http://schemas.microsoft.com/office/drawing/2014/main" val="104292133"/>
+                    </a:ext>
+                  </a:extLst>
+                </a:gridCol>
+                <a:gridCol w="2141489">
+                  <a:extLst>
+                    <a:ext uri="{9D8B030D-6E8A-4147-A177-3AD203B41FA5}">
+                      <a16:colId xmlns:a16="http://schemas.microsoft.com/office/drawing/2014/main" val="1671943566"/>
+                    </a:ext>
+                  </a:extLst>
+                </a:gridCol>
+                <a:gridCol w="1848270">
+                  <a:extLst>
+                    <a:ext uri="{9D8B030D-6E8A-4147-A177-3AD203B41FA5}">
+                      <a16:colId xmlns:a16="http://schemas.microsoft.com/office/drawing/2014/main" val="140497202"/>
+                    </a:ext>
+                  </a:extLst>
+                </a:gridCol>
+              </a:tblGrid>
+              <a:tr h="287986">
+                <a:tc>
+                  <a:txBody>
+                    <a:bodyPr/>
+                    <a:lstStyle/>
+                    <a:p>
+                      <a:pPr>
+                        <a:buNone/>
+                      </a:pPr>
+                      <a:r>
+                        <a:rPr lang="en-US" sz="1200" dirty="0">
+                          <a:solidFill>
+                            <a:schemeClr val="bg1"/>
+                          </a:solidFill>
+                        </a:rPr>
+                        <a:t>Metric</a:t>
+                      </a:r>
+                    </a:p>
+                  </a:txBody>
+                  <a:tcPr anchor="ctr"/>
+                </a:tc>
+                <a:tc>
+                  <a:txBody>
+                    <a:bodyPr/>
+                    <a:lstStyle/>
+                    <a:p>
+                      <a:pPr>
+                        <a:buNone/>
+                      </a:pPr>
+                      <a:r>
+                        <a:rPr lang="en-US" sz="1200">
+                          <a:solidFill>
+                            <a:schemeClr val="bg1"/>
+                          </a:solidFill>
+                        </a:rPr>
+                        <a:t>Baseline</a:t>
+                      </a:r>
+                    </a:p>
+                  </a:txBody>
+                  <a:tcPr anchor="ctr"/>
+                </a:tc>
+                <a:tc>
+                  <a:txBody>
+                    <a:bodyPr/>
+                    <a:lstStyle/>
+                    <a:p>
+                      <a:pPr>
+                        <a:buNone/>
+                      </a:pPr>
+                      <a:r>
+                        <a:rPr lang="en-US" sz="1200">
+                          <a:solidFill>
+                            <a:schemeClr val="bg1"/>
+                          </a:solidFill>
+                        </a:rPr>
+                        <a:t>Variation</a:t>
+                      </a:r>
+                    </a:p>
+                  </a:txBody>
+                  <a:tcPr anchor="ctr"/>
+                </a:tc>
+                <a:extLst>
+                  <a:ext uri="{0D108BD9-81ED-4DB2-BD59-A6C34878D82A}">
+                    <a16:rowId xmlns:a16="http://schemas.microsoft.com/office/drawing/2014/main" val="2580938961"/>
+                  </a:ext>
+                </a:extLst>
+              </a:tr>
+              <a:tr h="287986">
+                <a:tc>
+                  <a:txBody>
+                    <a:bodyPr/>
+                    <a:lstStyle/>
+                    <a:p>
+                      <a:pPr>
+                        <a:buNone/>
+                      </a:pPr>
+                      <a:r>
+                        <a:rPr lang="en-US" sz="1200" dirty="0"/>
+                        <a:t>Test Accuracy</a:t>
+                      </a:r>
+                    </a:p>
+                  </a:txBody>
+                  <a:tcPr anchor="ctr"/>
+                </a:tc>
+                <a:tc>
+                  <a:txBody>
+                    <a:bodyPr/>
+                    <a:lstStyle/>
+                    <a:p>
+                      <a:pPr>
+                        <a:buNone/>
+                      </a:pPr>
+                      <a:r>
+                        <a:rPr lang="en-US" sz="1200"/>
+                        <a:t>98.67%</a:t>
+                      </a:r>
+                      <a:endParaRPr lang="en-US" sz="1200" dirty="0"/>
+                    </a:p>
+                  </a:txBody>
+                  <a:tcPr anchor="ctr"/>
+                </a:tc>
+                <a:tc>
+                  <a:txBody>
+                    <a:bodyPr/>
+                    <a:lstStyle/>
+                    <a:p>
+                      <a:pPr>
+                        <a:buNone/>
+                      </a:pPr>
+                      <a:r>
+                        <a:rPr lang="en-US" sz="1200"/>
+                        <a:t>80.35%</a:t>
+                      </a:r>
+                      <a:endParaRPr lang="en-US" sz="1200" dirty="0"/>
+                    </a:p>
+                  </a:txBody>
+                  <a:tcPr anchor="ctr"/>
+                </a:tc>
+                <a:extLst>
+                  <a:ext uri="{0D108BD9-81ED-4DB2-BD59-A6C34878D82A}">
+                    <a16:rowId xmlns:a16="http://schemas.microsoft.com/office/drawing/2014/main" val="2598105887"/>
+                  </a:ext>
+                </a:extLst>
+              </a:tr>
+              <a:tr h="287986">
+                <a:tc>
+                  <a:txBody>
+                    <a:bodyPr/>
+                    <a:lstStyle/>
+                    <a:p>
+                      <a:pPr>
+                        <a:buNone/>
+                      </a:pPr>
+                      <a:r>
+                        <a:rPr lang="en-US" sz="1200"/>
+                        <a:t>Test Loss</a:t>
+                      </a:r>
+                      <a:endParaRPr lang="en-US" sz="1200" dirty="0"/>
+                    </a:p>
+                  </a:txBody>
+                  <a:tcPr anchor="ctr"/>
+                </a:tc>
+                <a:tc>
+                  <a:txBody>
+                    <a:bodyPr/>
+                    <a:lstStyle/>
+                    <a:p>
+                      <a:pPr>
+                        <a:buNone/>
+                      </a:pPr>
+                      <a:r>
+                        <a:rPr lang="en-US" sz="1200" dirty="0"/>
+                        <a:t>0.0401</a:t>
+                      </a:r>
+                    </a:p>
+                  </a:txBody>
+                  <a:tcPr anchor="ctr"/>
+                </a:tc>
+                <a:tc>
+                  <a:txBody>
+                    <a:bodyPr/>
+                    <a:lstStyle/>
+                    <a:p>
+                      <a:pPr>
+                        <a:buNone/>
+                      </a:pPr>
+                      <a:r>
+                        <a:rPr lang="en-US" sz="1200" dirty="0"/>
+                        <a:t>0.6788</a:t>
+                      </a:r>
+                    </a:p>
+                  </a:txBody>
+                  <a:tcPr anchor="ctr"/>
+                </a:tc>
+                <a:extLst>
+                  <a:ext uri="{0D108BD9-81ED-4DB2-BD59-A6C34878D82A}">
+                    <a16:rowId xmlns:a16="http://schemas.microsoft.com/office/drawing/2014/main" val="537994002"/>
+                  </a:ext>
+                </a:extLst>
+              </a:tr>
+              <a:tr h="287986">
+                <a:tc>
+                  <a:txBody>
+                    <a:bodyPr/>
+                    <a:lstStyle/>
+                    <a:p>
+                      <a:pPr>
+                        <a:buNone/>
+                      </a:pPr>
+                      <a:r>
+                        <a:rPr lang="en-US" sz="1200"/>
+                        <a:t>Training Time</a:t>
+                      </a:r>
+                      <a:endParaRPr lang="en-US" sz="1200" dirty="0"/>
+                    </a:p>
+                  </a:txBody>
+                  <a:tcPr anchor="ctr"/>
+                </a:tc>
+                <a:tc>
+                  <a:txBody>
+                    <a:bodyPr/>
+                    <a:lstStyle/>
+                    <a:p>
+                      <a:pPr>
+                        <a:buNone/>
+                      </a:pPr>
+                      <a:r>
+                        <a:rPr lang="en-US" sz="1200" dirty="0"/>
+                        <a:t>99.76 s</a:t>
+                      </a:r>
+                    </a:p>
+                  </a:txBody>
+                  <a:tcPr anchor="ctr"/>
+                </a:tc>
+                <a:tc>
+                  <a:txBody>
+                    <a:bodyPr/>
+                    <a:lstStyle/>
+                    <a:p>
+                      <a:pPr>
+                        <a:buNone/>
+                      </a:pPr>
+                      <a:r>
+                        <a:rPr lang="en-US" sz="1200"/>
+                        <a:t>23.32 s</a:t>
+                      </a:r>
+                      <a:endParaRPr lang="en-US" sz="1200" dirty="0"/>
+                    </a:p>
+                  </a:txBody>
+                  <a:tcPr anchor="ctr"/>
+                </a:tc>
+                <a:extLst>
+                  <a:ext uri="{0D108BD9-81ED-4DB2-BD59-A6C34878D82A}">
+                    <a16:rowId xmlns:a16="http://schemas.microsoft.com/office/drawing/2014/main" val="3117041686"/>
+                  </a:ext>
+                </a:extLst>
+              </a:tr>
+              <a:tr h="287986">
+                <a:tc>
+                  <a:txBody>
+                    <a:bodyPr/>
+                    <a:lstStyle/>
+                    <a:p>
+                      <a:pPr>
+                        <a:buNone/>
+                      </a:pPr>
+                      <a:r>
+                        <a:rPr lang="en-US" sz="1200"/>
+                        <a:t>Evaluation Time</a:t>
+                      </a:r>
+                      <a:endParaRPr lang="en-US" sz="1200" dirty="0"/>
+                    </a:p>
+                  </a:txBody>
+                  <a:tcPr anchor="ctr"/>
+                </a:tc>
+                <a:tc>
+                  <a:txBody>
+                    <a:bodyPr/>
+                    <a:lstStyle/>
+                    <a:p>
+                      <a:pPr>
+                        <a:buNone/>
+                      </a:pPr>
+                      <a:r>
+                        <a:rPr lang="en-US" sz="1200"/>
+                        <a:t>1.43 s</a:t>
+                      </a:r>
+                      <a:endParaRPr lang="en-US" sz="1200" dirty="0"/>
+                    </a:p>
+                  </a:txBody>
+                  <a:tcPr anchor="ctr"/>
+                </a:tc>
+                <a:tc>
+                  <a:txBody>
+                    <a:bodyPr/>
+                    <a:lstStyle/>
+                    <a:p>
+                      <a:pPr>
+                        <a:buNone/>
+                      </a:pPr>
+                      <a:r>
+                        <a:rPr lang="en-US" sz="1200" dirty="0"/>
+                        <a:t>0.87 s</a:t>
+                      </a:r>
+                    </a:p>
+                  </a:txBody>
+                  <a:tcPr anchor="ctr"/>
+                </a:tc>
+                <a:extLst>
+                  <a:ext uri="{0D108BD9-81ED-4DB2-BD59-A6C34878D82A}">
+                    <a16:rowId xmlns:a16="http://schemas.microsoft.com/office/drawing/2014/main" val="3324992151"/>
+                  </a:ext>
+                </a:extLst>
+              </a:tr>
+              <a:tr h="287986">
+                <a:tc>
+                  <a:txBody>
+                    <a:bodyPr/>
+                    <a:lstStyle/>
+                    <a:p>
+                      <a:pPr>
+                        <a:buNone/>
+                      </a:pPr>
+                      <a:r>
+                        <a:rPr lang="en-US" sz="1200"/>
+                        <a:t>Prediction Time</a:t>
+                      </a:r>
+                      <a:endParaRPr lang="en-US" sz="1200" dirty="0"/>
+                    </a:p>
+                  </a:txBody>
+                  <a:tcPr anchor="ctr"/>
+                </a:tc>
+                <a:tc>
+                  <a:txBody>
+                    <a:bodyPr/>
+                    <a:lstStyle/>
+                    <a:p>
+                      <a:pPr>
+                        <a:buNone/>
+                      </a:pPr>
+                      <a:r>
+                        <a:rPr lang="en-US" sz="1200"/>
+                        <a:t>1.31 s</a:t>
+                      </a:r>
+                      <a:endParaRPr lang="en-US" sz="1200" dirty="0"/>
+                    </a:p>
+                  </a:txBody>
+                  <a:tcPr anchor="ctr"/>
+                </a:tc>
+                <a:tc>
+                  <a:txBody>
+                    <a:bodyPr/>
+                    <a:lstStyle/>
+                    <a:p>
+                      <a:pPr>
+                        <a:buNone/>
+                      </a:pPr>
+                      <a:r>
+                        <a:rPr lang="en-US" sz="1200" dirty="0"/>
+                        <a:t>0.80 s</a:t>
+                      </a:r>
+                    </a:p>
+                  </a:txBody>
+                  <a:tcPr anchor="ctr"/>
+                </a:tc>
+                <a:extLst>
+                  <a:ext uri="{0D108BD9-81ED-4DB2-BD59-A6C34878D82A}">
+                    <a16:rowId xmlns:a16="http://schemas.microsoft.com/office/drawing/2014/main" val="2771213040"/>
+                  </a:ext>
+                </a:extLst>
+              </a:tr>
+            </a:tbl>
+          </a:graphicData>
+        </a:graphic>
+      </p:graphicFrame>
+      <p:pic>
+        <p:nvPicPr>
+          <p:cNvPr id="10" name="Picture 9" descr="A graph of loss and loss&#10;&#10;AI-generated content may be incorrect.">
+            <a:extLst>
+              <a:ext uri="{FF2B5EF4-FFF2-40B4-BE49-F238E27FC236}">
+                <a16:creationId xmlns:a16="http://schemas.microsoft.com/office/drawing/2014/main" id="{F94A079D-C04F-7921-EB3F-20B43A83855D}"/>
+              </a:ext>
+            </a:extLst>
+          </p:cNvPr>
+          <p:cNvPicPr>
+            <a:picLocks noChangeAspect="1"/>
+          </p:cNvPicPr>
+          <p:nvPr/>
+        </p:nvPicPr>
+        <p:blipFill>
+          <a:blip r:embed="rId2"/>
+          <a:srcRect l="2233" r="6600"/>
+          <a:stretch>
+            <a:fillRect/>
+          </a:stretch>
+        </p:blipFill>
+        <p:spPr>
+          <a:xfrm>
+            <a:off x="7048499" y="4572000"/>
+            <a:ext cx="3729575" cy="2063751"/>
+          </a:xfrm>
+          <a:prstGeom prst="rect">
+            <a:avLst/>
+          </a:prstGeom>
+        </p:spPr>
+      </p:pic>
+      <p:pic>
+        <p:nvPicPr>
+          <p:cNvPr id="12" name="Picture 11">
+            <a:extLst>
+              <a:ext uri="{FF2B5EF4-FFF2-40B4-BE49-F238E27FC236}">
+                <a16:creationId xmlns:a16="http://schemas.microsoft.com/office/drawing/2014/main" id="{CDBC54CA-4859-0F94-EEA1-1F9796BB69BB}"/>
+              </a:ext>
+            </a:extLst>
+          </p:cNvPr>
+          <p:cNvPicPr>
+            <a:picLocks noChangeAspect="1"/>
+          </p:cNvPicPr>
+          <p:nvPr/>
+        </p:nvPicPr>
+        <p:blipFill>
+          <a:blip r:embed="rId3"/>
+          <a:srcRect t="11511" b="25899"/>
+          <a:stretch>
+            <a:fillRect/>
+          </a:stretch>
+        </p:blipFill>
+        <p:spPr>
+          <a:xfrm>
+            <a:off x="5873751" y="3672416"/>
+            <a:ext cx="6074833" cy="1005420"/>
+          </a:xfrm>
+          <a:prstGeom prst="rect">
+            <a:avLst/>
+          </a:prstGeom>
+        </p:spPr>
+      </p:pic>
     </p:spTree>
     <p:extLst>
       <p:ext uri="{BB962C8B-B14F-4D97-AF65-F5344CB8AC3E}">
@@ -7598,6 +11866,42 @@
           </a:p>
         </p:txBody>
       </p:sp>
+      <p:pic>
+        <p:nvPicPr>
+          <p:cNvPr id="3" name="Picture 2" descr="The diagram shows a graph comparing the training and validation accuracy and loss over several epochs, indicating that the model's accuracy improves over time while the validation loss decreases.&#10;&#10;AI-generated content may be incorrect.">
+            <a:extLst>
+              <a:ext uri="{FF2B5EF4-FFF2-40B4-BE49-F238E27FC236}">
+                <a16:creationId xmlns:a16="http://schemas.microsoft.com/office/drawing/2014/main" id="{FF40C100-B6A3-EDB3-F7AD-007ABD7FD925}"/>
+              </a:ext>
+            </a:extLst>
+          </p:cNvPr>
+          <p:cNvPicPr>
+            <a:picLocks noChangeAspect="1"/>
+          </p:cNvPicPr>
+          <p:nvPr/>
+        </p:nvPicPr>
+        <p:blipFill>
+          <a:blip r:embed="rId2">
+            <a:extLst>
+              <a:ext uri="{28A0092B-C50C-407E-A947-70E740481C1C}">
+                <a14:useLocalDpi xmlns:a14="http://schemas.microsoft.com/office/drawing/2010/main" val="0"/>
+              </a:ext>
+            </a:extLst>
+          </a:blip>
+          <a:stretch>
+            <a:fillRect/>
+          </a:stretch>
+        </p:blipFill>
+        <p:spPr>
+          <a:xfrm>
+            <a:off x="4513767" y="2045007"/>
+            <a:ext cx="7678229" cy="4037198"/>
+          </a:xfrm>
+          <a:prstGeom prst="rect">
+            <a:avLst/>
+          </a:prstGeom>
+        </p:spPr>
+      </p:pic>
       <p:sp>
         <p:nvSpPr>
           <p:cNvPr id="6" name="Text Placeholder 5">
@@ -7616,8 +11920,8 @@
         </p:nvSpPr>
         <p:spPr>
           <a:xfrm>
-            <a:off x="1371599" y="2318197"/>
-            <a:ext cx="9724031" cy="3683358"/>
+            <a:off x="231166" y="2221927"/>
+            <a:ext cx="4566864" cy="3683358"/>
           </a:xfrm>
         </p:spPr>
         <p:txBody>
@@ -7627,32 +11931,33 @@
           <a:lstStyle/>
           <a:p>
             <a:r>
-              <a:rPr lang="en-US" sz="2000"/>
+              <a:rPr lang="en-US" sz="2000" b="1" dirty="0"/>
               <a:t>Parameters Changed:</a:t>
             </a:r>
-          </a:p>
-          <a:p>
-            <a:pPr marL="285750" indent="-285750">
-              <a:buFont typeface="Arial" panose="020B0604020202020204" pitchFamily="34" charset="0"/>
-              <a:buChar char="•"/>
-            </a:pPr>
-            <a:endParaRPr lang="en-US" sz="2000"/>
-          </a:p>
-          <a:p>
             <a:r>
-              <a:rPr lang="en-US" sz="2000"/>
+              <a:rPr lang="en-US" sz="2000" dirty="0"/>
+              <a:t> Added two additional Conv2D + MaxPooling2D blocks (32→64→128 filters)</a:t>
+            </a:r>
+          </a:p>
+          <a:p>
+            <a:r>
+              <a:rPr lang="en-US" sz="2000" b="1" dirty="0"/>
               <a:t>Hypothesis:</a:t>
             </a:r>
-          </a:p>
-          <a:p>
-            <a:endParaRPr lang="en-US" sz="2000"/>
-          </a:p>
-          <a:p>
             <a:r>
-              <a:rPr lang="en-US" sz="2000"/>
+              <a:rPr lang="en-US" sz="2000" dirty="0"/>
+              <a:t> Deeper networks extract more complex features, improving accuracy</a:t>
+            </a:r>
+          </a:p>
+          <a:p>
+            <a:r>
+              <a:rPr lang="en-US" sz="2000" b="1" dirty="0"/>
               <a:t>Results:</a:t>
             </a:r>
-            <a:endParaRPr lang="en-150" sz="2000"/>
+            <a:r>
+              <a:rPr lang="en-US" sz="2000" dirty="0"/>
+              <a:t> V4 reached ~99.3% training accuracy vs ~99.2% baseline, with validation accuracy ~98.8% both - marginal improvement with signs of slight overfitting</a:t>
+            </a:r>
           </a:p>
         </p:txBody>
       </p:sp>
@@ -7685,7 +11990,7 @@
         <p:cNvPr id="1" name="">
           <a:extLst>
             <a:ext uri="{FF2B5EF4-FFF2-40B4-BE49-F238E27FC236}">
-              <a16:creationId xmlns:a16="http://schemas.microsoft.com/office/drawing/2014/main" id="{0BAFC57A-B69F-BD69-D798-DEF7FEDEE701}"/>
+              <a16:creationId xmlns:a16="http://schemas.microsoft.com/office/drawing/2014/main" id="{E975FEAF-7D0A-B65E-3D23-D0DD4D4F89BA}"/>
             </a:ext>
           </a:extLst>
         </p:cNvPr>
@@ -7705,7 +12010,7 @@
           <p:cNvPr id="24" name="Rectangle 23">
             <a:extLst>
               <a:ext uri="{FF2B5EF4-FFF2-40B4-BE49-F238E27FC236}">
-                <a16:creationId xmlns:a16="http://schemas.microsoft.com/office/drawing/2014/main" id="{A8A38846-AAE6-E8DC-B8CA-2DEE1BA2AA90}"/>
+                <a16:creationId xmlns:a16="http://schemas.microsoft.com/office/drawing/2014/main" id="{3B508CEF-F0A1-B962-6BD3-EF58EA0719C6}"/>
               </a:ext>
               <a:ext uri="{C183D7F6-B498-43B3-948B-1728B52AA6E4}">
                 <adec:decorative xmlns:adec="http://schemas.microsoft.com/office/drawing/2017/decorative" val="1"/>
@@ -7781,7 +12086,7 @@
           <p:cNvPr id="26" name="Rectangle 25">
             <a:extLst>
               <a:ext uri="{FF2B5EF4-FFF2-40B4-BE49-F238E27FC236}">
-                <a16:creationId xmlns:a16="http://schemas.microsoft.com/office/drawing/2014/main" id="{0FFCFE7F-2425-7994-A13C-AF782CE8D275}"/>
+                <a16:creationId xmlns:a16="http://schemas.microsoft.com/office/drawing/2014/main" id="{82AFC123-47F8-3577-0061-4282CA93AB92}"/>
               </a:ext>
               <a:ext uri="{C183D7F6-B498-43B3-948B-1728B52AA6E4}">
                 <adec:decorative xmlns:adec="http://schemas.microsoft.com/office/drawing/2017/decorative" val="1"/>
@@ -7854,7 +12159,7 @@
           <p:cNvPr id="28" name="Rectangle 27">
             <a:extLst>
               <a:ext uri="{FF2B5EF4-FFF2-40B4-BE49-F238E27FC236}">
-                <a16:creationId xmlns:a16="http://schemas.microsoft.com/office/drawing/2014/main" id="{63862266-6EBA-68BB-C9F5-972282E8F403}"/>
+                <a16:creationId xmlns:a16="http://schemas.microsoft.com/office/drawing/2014/main" id="{4BCFC1A3-2820-C492-A914-B1ECDCAF00E5}"/>
               </a:ext>
               <a:ext uri="{C183D7F6-B498-43B3-948B-1728B52AA6E4}">
                 <adec:decorative xmlns:adec="http://schemas.microsoft.com/office/drawing/2017/decorative" val="1"/>
@@ -7930,7 +12235,7 @@
           <p:cNvPr id="30" name="Rectangle 29">
             <a:extLst>
               <a:ext uri="{FF2B5EF4-FFF2-40B4-BE49-F238E27FC236}">
-                <a16:creationId xmlns:a16="http://schemas.microsoft.com/office/drawing/2014/main" id="{3F6EEC86-87B4-6C68-3C93-6F7FEF671C18}"/>
+                <a16:creationId xmlns:a16="http://schemas.microsoft.com/office/drawing/2014/main" id="{F8216A8D-A9EB-3F5F-E2B6-4A60C76558DC}"/>
               </a:ext>
               <a:ext uri="{C183D7F6-B498-43B3-948B-1728B52AA6E4}">
                 <adec:decorative xmlns:adec="http://schemas.microsoft.com/office/drawing/2017/decorative" val="1"/>
@@ -8005,7 +12310,7 @@
           <p:cNvPr id="32" name="Rectangle 31">
             <a:extLst>
               <a:ext uri="{FF2B5EF4-FFF2-40B4-BE49-F238E27FC236}">
-                <a16:creationId xmlns:a16="http://schemas.microsoft.com/office/drawing/2014/main" id="{E585E242-ACC3-4D2C-AFC7-6FB9AAA8B0DC}"/>
+                <a16:creationId xmlns:a16="http://schemas.microsoft.com/office/drawing/2014/main" id="{7944C3D3-DE13-760F-009F-C64A0636EDE8}"/>
               </a:ext>
               <a:ext uri="{C183D7F6-B498-43B3-948B-1728B52AA6E4}">
                 <adec:decorative xmlns:adec="http://schemas.microsoft.com/office/drawing/2017/decorative" val="1"/>
@@ -8081,7 +12386,7 @@
           <p:cNvPr id="4" name="Title 3">
             <a:extLst>
               <a:ext uri="{FF2B5EF4-FFF2-40B4-BE49-F238E27FC236}">
-                <a16:creationId xmlns:a16="http://schemas.microsoft.com/office/drawing/2014/main" id="{5C94464B-3659-1D3E-E08B-F862EA7D786E}"/>
+                <a16:creationId xmlns:a16="http://schemas.microsoft.com/office/drawing/2014/main" id="{6B555A65-D691-8BA6-1405-4571EB324A45}"/>
               </a:ext>
             </a:extLst>
           </p:cNvPr>
@@ -8105,30 +12410,14 @@
           <a:lstStyle/>
           <a:p>
             <a:r>
-              <a:rPr lang="en-US" sz="4000">
+              <a:rPr lang="en-US" sz="4000" dirty="0">
                 <a:solidFill>
                   <a:srgbClr val="FFFFFF"/>
                 </a:solidFill>
               </a:rPr>
-              <a:t>Variation [#]: [</a:t>
+              <a:t>Variation 5: Gerald Turner</a:t>
             </a:r>
-            <a:r>
-              <a:rPr lang="en-US" sz="4000" err="1">
-                <a:solidFill>
-                  <a:srgbClr val="FFFFFF"/>
-                </a:solidFill>
-              </a:rPr>
-              <a:t>vega</a:t>
-            </a:r>
-            <a:r>
-              <a:rPr lang="en-US" sz="4000">
-                <a:solidFill>
-                  <a:srgbClr val="FFFFFF"/>
-                </a:solidFill>
-              </a:rPr>
-              <a:t>]</a:t>
-            </a:r>
-            <a:endParaRPr lang="en-150" sz="4000">
+            <a:endParaRPr lang="en-150" sz="4000" dirty="0">
               <a:solidFill>
                 <a:srgbClr val="FFFFFF"/>
               </a:solidFill>
@@ -8141,7 +12430,7 @@
           <p:cNvPr id="6" name="Text Placeholder 5">
             <a:extLst>
               <a:ext uri="{FF2B5EF4-FFF2-40B4-BE49-F238E27FC236}">
-                <a16:creationId xmlns:a16="http://schemas.microsoft.com/office/drawing/2014/main" id="{7EFDB171-1C00-CF20-11C7-6A224CB757D5}"/>
+                <a16:creationId xmlns:a16="http://schemas.microsoft.com/office/drawing/2014/main" id="{D51FF78F-E65B-C86B-FD89-E10C13406F82}"/>
               </a:ext>
             </a:extLst>
           </p:cNvPr>
@@ -8154,50 +12443,441 @@
         </p:nvSpPr>
         <p:spPr>
           <a:xfrm>
-            <a:off x="1371599" y="2318197"/>
-            <a:ext cx="9724031" cy="3683358"/>
+            <a:off x="231166" y="1891970"/>
+            <a:ext cx="5367632" cy="4671491"/>
           </a:xfrm>
         </p:spPr>
         <p:txBody>
           <a:bodyPr anchor="ctr">
-            <a:normAutofit/>
+            <a:normAutofit fontScale="92500" lnSpcReduction="20000"/>
           </a:bodyPr>
           <a:lstStyle/>
           <a:p>
             <a:r>
-              <a:rPr lang="en-US" sz="2000"/>
+              <a:rPr lang="en-US" sz="2000" b="1" dirty="0">
+                <a:solidFill>
+                  <a:schemeClr val="tx2"/>
+                </a:solidFill>
+                <a:ea typeface="Calibri"/>
+                <a:cs typeface="Times New Roman"/>
+              </a:rPr>
               <a:t>Parameters Changed:</a:t>
             </a:r>
-          </a:p>
-          <a:p>
-            <a:pPr marL="285750" indent="-285750">
-              <a:buFont typeface="Arial" panose="020B0604020202020204" pitchFamily="34" charset="0"/>
-              <a:buChar char="•"/>
-            </a:pPr>
-            <a:endParaRPr lang="en-US" sz="2000"/>
-          </a:p>
-          <a:p>
             <a:r>
-              <a:rPr lang="en-US" sz="2000"/>
-              <a:t>Hypothesis:</a:t>
+              <a:rPr lang="en-US" sz="2000" dirty="0">
+                <a:solidFill>
+                  <a:schemeClr val="tx2"/>
+                </a:solidFill>
+                <a:ea typeface="Calibri"/>
+                <a:cs typeface="Times New Roman"/>
+              </a:rPr>
+              <a:t> </a:t>
             </a:r>
-          </a:p>
-          <a:p>
-            <a:endParaRPr lang="en-US" sz="2000"/>
-          </a:p>
-          <a:p>
             <a:r>
-              <a:rPr lang="en-US" sz="2000"/>
-              <a:t>Results:</a:t>
+              <a:rPr lang="en-US" sz="2000" dirty="0">
+                <a:solidFill>
+                  <a:schemeClr val="tx2"/>
+                </a:solidFill>
+                <a:ea typeface="+mn-lt"/>
+                <a:cs typeface="Times New Roman"/>
+              </a:rPr>
+              <a:t>Dropout layer added after convolution layers. Dropout layer added before the final dense layer. Dropout rates used: </a:t>
             </a:r>
-            <a:endParaRPr lang="en-150" sz="2000"/>
+            <a:r>
+              <a:rPr lang="en-US" sz="2000" dirty="0">
+                <a:solidFill>
+                  <a:schemeClr val="tx2"/>
+                </a:solidFill>
+                <a:ea typeface="Calibri"/>
+                <a:cs typeface="Times New Roman"/>
+              </a:rPr>
+              <a:t>Dropout(0.25)Dropout(0.5)</a:t>
+            </a:r>
+            <a:endParaRPr lang="en-US" sz="2000" dirty="0">
+              <a:solidFill>
+                <a:schemeClr val="tx2"/>
+              </a:solidFill>
+              <a:cs typeface="Times New Roman"/>
+            </a:endParaRPr>
+          </a:p>
+          <a:p>
+            <a:r>
+              <a:rPr lang="en-US" sz="2000" b="1" dirty="0">
+                <a:solidFill>
+                  <a:schemeClr val="tx2"/>
+                </a:solidFill>
+                <a:ea typeface="Calibri"/>
+                <a:cs typeface="Times New Roman"/>
+              </a:rPr>
+              <a:t>Hypothesis: </a:t>
+            </a:r>
+            <a:r>
+              <a:rPr lang="en-US" sz="2000" dirty="0">
+                <a:solidFill>
+                  <a:schemeClr val="tx2"/>
+                </a:solidFill>
+                <a:ea typeface="Calibri"/>
+                <a:cs typeface="Times New Roman"/>
+              </a:rPr>
+              <a:t>Dropout reduces overfitting and improves generalization. </a:t>
+            </a:r>
+            <a:r>
+              <a:rPr lang="en-US" sz="2000" dirty="0">
+                <a:solidFill>
+                  <a:schemeClr val="tx2"/>
+                </a:solidFill>
+                <a:ea typeface="+mn-lt"/>
+                <a:cs typeface="+mn-lt"/>
+              </a:rPr>
+              <a:t>Adding dropout layers should reduce overfitting by preventing the network from relying too heavily on specific neurons. Slight increase in training time. Improved generalization on test data. Test accuracy remains similar or slightly improves compared to the baseline.</a:t>
+            </a:r>
+            <a:r>
+              <a:rPr lang="en-US" sz="2000" dirty="0">
+                <a:solidFill>
+                  <a:schemeClr val="tx2"/>
+                </a:solidFill>
+                <a:ea typeface="Calibri"/>
+                <a:cs typeface="Times New Roman"/>
+              </a:rPr>
+              <a:t> Accuracy remained similar to baseline while improving stability.</a:t>
+            </a:r>
+            <a:endParaRPr lang="en-US" sz="2000" dirty="0">
+              <a:solidFill>
+                <a:schemeClr val="tx2"/>
+              </a:solidFill>
+              <a:cs typeface="Times New Roman"/>
+            </a:endParaRPr>
+          </a:p>
+          <a:p>
+            <a:r>
+              <a:rPr lang="en-US" sz="2000" b="1" dirty="0">
+                <a:solidFill>
+                  <a:schemeClr val="tx2"/>
+                </a:solidFill>
+                <a:ea typeface="Calibri"/>
+                <a:cs typeface="Times New Roman"/>
+              </a:rPr>
+              <a:t>Results: </a:t>
+            </a:r>
+            <a:r>
+              <a:rPr lang="en-US" sz="2000" dirty="0">
+                <a:solidFill>
+                  <a:schemeClr val="tx2"/>
+                </a:solidFill>
+                <a:ea typeface="+mn-lt"/>
+                <a:cs typeface="+mn-lt"/>
+              </a:rPr>
+              <a:t>Test Accuracy: 98.80%, Test Loss: 0.041, Training Time: 60 seconds. Observed effects: Accuracy remained very similar to baseline.</a:t>
+            </a:r>
+            <a:r>
+              <a:rPr lang="en-US" sz="2000" b="1" dirty="0">
+                <a:solidFill>
+                  <a:schemeClr val="tx2"/>
+                </a:solidFill>
+                <a:ea typeface="+mn-lt"/>
+                <a:cs typeface="+mn-lt"/>
+              </a:rPr>
+              <a:t> </a:t>
+            </a:r>
+            <a:r>
+              <a:rPr lang="en-US" sz="2000" dirty="0">
+                <a:solidFill>
+                  <a:schemeClr val="tx2"/>
+                </a:solidFill>
+                <a:ea typeface="+mn-lt"/>
+                <a:cs typeface="+mn-lt"/>
+              </a:rPr>
+              <a:t>Dropout helped stabilize predictions. Model maintained strong performance on unseen data</a:t>
+            </a:r>
+            <a:endParaRPr lang="en-US" sz="2000" dirty="0">
+              <a:solidFill>
+                <a:schemeClr val="tx2"/>
+              </a:solidFill>
+            </a:endParaRPr>
           </a:p>
         </p:txBody>
       </p:sp>
+      <p:graphicFrame>
+        <p:nvGraphicFramePr>
+          <p:cNvPr id="2" name="Table 1">
+            <a:extLst>
+              <a:ext uri="{FF2B5EF4-FFF2-40B4-BE49-F238E27FC236}">
+                <a16:creationId xmlns:a16="http://schemas.microsoft.com/office/drawing/2014/main" id="{32243835-685A-C8C7-CC13-9D21F582DF50}"/>
+              </a:ext>
+            </a:extLst>
+          </p:cNvPr>
+          <p:cNvGraphicFramePr>
+            <a:graphicFrameLocks noGrp="1"/>
+          </p:cNvGraphicFramePr>
+          <p:nvPr>
+            <p:extLst>
+              <p:ext uri="{D42A27DB-BD31-4B8C-83A1-F6EECF244321}">
+                <p14:modId xmlns:p14="http://schemas.microsoft.com/office/powerpoint/2010/main" val="2685713241"/>
+              </p:ext>
+            </p:extLst>
+          </p:nvPr>
+        </p:nvGraphicFramePr>
+        <p:xfrm>
+          <a:off x="5989834" y="2687201"/>
+          <a:ext cx="5860792" cy="2963586"/>
+        </p:xfrm>
+        <a:graphic>
+          <a:graphicData uri="http://schemas.openxmlformats.org/drawingml/2006/table">
+            <a:tbl>
+              <a:tblPr firstRow="1" bandRow="1">
+                <a:tableStyleId>{5C22544A-7EE6-4342-B048-85BDC9FD1C3A}</a:tableStyleId>
+              </a:tblPr>
+              <a:tblGrid>
+                <a:gridCol w="2060497">
+                  <a:extLst>
+                    <a:ext uri="{9D8B030D-6E8A-4147-A177-3AD203B41FA5}">
+                      <a16:colId xmlns:a16="http://schemas.microsoft.com/office/drawing/2014/main" val="4182082886"/>
+                    </a:ext>
+                  </a:extLst>
+                </a:gridCol>
+                <a:gridCol w="1880103">
+                  <a:extLst>
+                    <a:ext uri="{9D8B030D-6E8A-4147-A177-3AD203B41FA5}">
+                      <a16:colId xmlns:a16="http://schemas.microsoft.com/office/drawing/2014/main" val="490464486"/>
+                    </a:ext>
+                  </a:extLst>
+                </a:gridCol>
+                <a:gridCol w="1920192">
+                  <a:extLst>
+                    <a:ext uri="{9D8B030D-6E8A-4147-A177-3AD203B41FA5}">
+                      <a16:colId xmlns:a16="http://schemas.microsoft.com/office/drawing/2014/main" val="3695243377"/>
+                    </a:ext>
+                  </a:extLst>
+                </a:gridCol>
+              </a:tblGrid>
+              <a:tr h="552534">
+                <a:tc>
+                  <a:txBody>
+                    <a:bodyPr/>
+                    <a:lstStyle/>
+                    <a:p>
+                      <a:pPr>
+                        <a:buNone/>
+                      </a:pPr>
+                      <a:r>
+                        <a:rPr lang="en-US" sz="2000" dirty="0"/>
+                        <a:t>Metric</a:t>
+                      </a:r>
+                    </a:p>
+                  </a:txBody>
+                  <a:tcPr marL="101998" marR="101998" marT="50999" marB="50999" anchor="ctr"/>
+                </a:tc>
+                <a:tc>
+                  <a:txBody>
+                    <a:bodyPr/>
+                    <a:lstStyle/>
+                    <a:p>
+                      <a:pPr>
+                        <a:buNone/>
+                      </a:pPr>
+                      <a:r>
+                        <a:rPr lang="en-US" sz="2000"/>
+                        <a:t>Baseline</a:t>
+                      </a:r>
+                    </a:p>
+                  </a:txBody>
+                  <a:tcPr marL="101998" marR="101998" marT="50999" marB="50999" anchor="ctr"/>
+                </a:tc>
+                <a:tc>
+                  <a:txBody>
+                    <a:bodyPr/>
+                    <a:lstStyle/>
+                    <a:p>
+                      <a:pPr>
+                        <a:buNone/>
+                      </a:pPr>
+                      <a:r>
+                        <a:rPr lang="en-US" sz="2000"/>
+                        <a:t>Variation</a:t>
+                      </a:r>
+                    </a:p>
+                  </a:txBody>
+                  <a:tcPr marL="101998" marR="101998" marT="50999" marB="50999" anchor="ctr"/>
+                </a:tc>
+                <a:extLst>
+                  <a:ext uri="{0D108BD9-81ED-4DB2-BD59-A6C34878D82A}">
+                    <a16:rowId xmlns:a16="http://schemas.microsoft.com/office/drawing/2014/main" val="3176478427"/>
+                  </a:ext>
+                </a:extLst>
+              </a:tr>
+              <a:tr h="929259">
+                <a:tc>
+                  <a:txBody>
+                    <a:bodyPr/>
+                    <a:lstStyle/>
+                    <a:p>
+                      <a:pPr>
+                        <a:buNone/>
+                      </a:pPr>
+                      <a:r>
+                        <a:rPr lang="en-US" sz="2000" dirty="0"/>
+                        <a:t>Test Accuracy</a:t>
+                      </a:r>
+                    </a:p>
+                  </a:txBody>
+                  <a:tcPr marL="101998" marR="101998" marT="50999" marB="50999" anchor="ctr"/>
+                </a:tc>
+                <a:tc>
+                  <a:txBody>
+                    <a:bodyPr/>
+                    <a:lstStyle/>
+                    <a:p>
+                      <a:pPr>
+                        <a:buNone/>
+                      </a:pPr>
+                      <a:r>
+                        <a:rPr lang="en-US" sz="2000"/>
+                        <a:t>98.70%</a:t>
+                      </a:r>
+                    </a:p>
+                  </a:txBody>
+                  <a:tcPr marL="101998" marR="101998" marT="50999" marB="50999" anchor="ctr"/>
+                </a:tc>
+                <a:tc>
+                  <a:txBody>
+                    <a:bodyPr/>
+                    <a:lstStyle/>
+                    <a:p>
+                      <a:pPr>
+                        <a:buNone/>
+                      </a:pPr>
+                      <a:r>
+                        <a:rPr lang="en-US" sz="2000"/>
+                        <a:t>98.80%</a:t>
+                      </a:r>
+                    </a:p>
+                  </a:txBody>
+                  <a:tcPr marL="101998" marR="101998" marT="50999" marB="50999" anchor="ctr"/>
+                </a:tc>
+                <a:extLst>
+                  <a:ext uri="{0D108BD9-81ED-4DB2-BD59-A6C34878D82A}">
+                    <a16:rowId xmlns:a16="http://schemas.microsoft.com/office/drawing/2014/main" val="3761711185"/>
+                  </a:ext>
+                </a:extLst>
+              </a:tr>
+              <a:tr h="552534">
+                <a:tc>
+                  <a:txBody>
+                    <a:bodyPr/>
+                    <a:lstStyle/>
+                    <a:p>
+                      <a:pPr>
+                        <a:buNone/>
+                      </a:pPr>
+                      <a:r>
+                        <a:rPr lang="en-US" sz="2000"/>
+                        <a:t>Test Loss</a:t>
+                      </a:r>
+                    </a:p>
+                  </a:txBody>
+                  <a:tcPr marL="101998" marR="101998" marT="50999" marB="50999" anchor="ctr"/>
+                </a:tc>
+                <a:tc>
+                  <a:txBody>
+                    <a:bodyPr/>
+                    <a:lstStyle/>
+                    <a:p>
+                      <a:pPr>
+                        <a:buNone/>
+                      </a:pPr>
+                      <a:r>
+                        <a:rPr lang="en-US" sz="2000"/>
+                        <a:t>0.0449</a:t>
+                      </a:r>
+                    </a:p>
+                  </a:txBody>
+                  <a:tcPr marL="101998" marR="101998" marT="50999" marB="50999" anchor="ctr"/>
+                </a:tc>
+                <a:tc>
+                  <a:txBody>
+                    <a:bodyPr/>
+                    <a:lstStyle/>
+                    <a:p>
+                      <a:pPr>
+                        <a:buNone/>
+                      </a:pPr>
+                      <a:r>
+                        <a:rPr lang="en-US" sz="2000"/>
+                        <a:t>0.041</a:t>
+                      </a:r>
+                    </a:p>
+                  </a:txBody>
+                  <a:tcPr marL="101998" marR="101998" marT="50999" marB="50999" anchor="ctr"/>
+                </a:tc>
+                <a:extLst>
+                  <a:ext uri="{0D108BD9-81ED-4DB2-BD59-A6C34878D82A}">
+                    <a16:rowId xmlns:a16="http://schemas.microsoft.com/office/drawing/2014/main" val="2111070454"/>
+                  </a:ext>
+                </a:extLst>
+              </a:tr>
+              <a:tr h="929259">
+                <a:tc>
+                  <a:txBody>
+                    <a:bodyPr/>
+                    <a:lstStyle/>
+                    <a:p>
+                      <a:pPr>
+                        <a:buNone/>
+                      </a:pPr>
+                      <a:r>
+                        <a:rPr lang="en-US" sz="2000" dirty="0"/>
+                        <a:t>Training Time</a:t>
+                      </a:r>
+                    </a:p>
+                  </a:txBody>
+                  <a:tcPr marL="101998" marR="101998" marT="50999" marB="50999" anchor="ctr"/>
+                </a:tc>
+                <a:tc>
+                  <a:txBody>
+                    <a:bodyPr/>
+                    <a:lstStyle/>
+                    <a:p>
+                      <a:pPr>
+                        <a:buNone/>
+                      </a:pPr>
+                      <a:r>
+                        <a:rPr lang="en-US" sz="2000"/>
+                        <a:t>54.8 s</a:t>
+                      </a:r>
+                    </a:p>
+                  </a:txBody>
+                  <a:tcPr marL="101998" marR="101998" marT="50999" marB="50999" anchor="ctr"/>
+                </a:tc>
+                <a:tc>
+                  <a:txBody>
+                    <a:bodyPr/>
+                    <a:lstStyle/>
+                    <a:p>
+                      <a:pPr>
+                        <a:buNone/>
+                      </a:pPr>
+                      <a:r>
+                        <a:rPr lang="en-US" sz="2000" dirty="0"/>
+                        <a:t>~60 s</a:t>
+                      </a:r>
+                    </a:p>
+                  </a:txBody>
+                  <a:tcPr marL="101998" marR="101998" marT="50999" marB="50999" anchor="ctr"/>
+                </a:tc>
+                <a:extLst>
+                  <a:ext uri="{0D108BD9-81ED-4DB2-BD59-A6C34878D82A}">
+                    <a16:rowId xmlns:a16="http://schemas.microsoft.com/office/drawing/2014/main" val="1338751788"/>
+                  </a:ext>
+                </a:extLst>
+              </a:tr>
+            </a:tbl>
+          </a:graphicData>
+        </a:graphic>
+      </p:graphicFrame>
     </p:spTree>
     <p:extLst>
       <p:ext uri="{BB962C8B-B14F-4D97-AF65-F5344CB8AC3E}">
-        <p14:creationId xmlns:p14="http://schemas.microsoft.com/office/powerpoint/2010/main" val="3910318035"/>
+        <p14:creationId xmlns:p14="http://schemas.microsoft.com/office/powerpoint/2010/main" val="3554631781"/>
       </p:ext>
     </p:extLst>
   </p:cSld>
@@ -8234,7 +12914,7 @@
       </p:grpSpPr>
       <p:sp useBgFill="1">
         <p:nvSpPr>
-          <p:cNvPr id="8" name="Rectangle 7">
+          <p:cNvPr id="34" name="Rectangle 33">
             <a:extLst>
               <a:ext uri="{FF2B5EF4-FFF2-40B4-BE49-F238E27FC236}">
                 <a16:creationId xmlns:a16="http://schemas.microsoft.com/office/drawing/2014/main" id="{1B15ED52-F352-441B-82BF-E0EA34836D08}"/>
@@ -8310,7 +12990,7 @@
       </p:sp>
       <p:sp>
         <p:nvSpPr>
-          <p:cNvPr id="10" name="Rectangle 9">
+          <p:cNvPr id="35" name="Rectangle 34">
             <a:extLst>
               <a:ext uri="{FF2B5EF4-FFF2-40B4-BE49-F238E27FC236}">
                 <a16:creationId xmlns:a16="http://schemas.microsoft.com/office/drawing/2014/main" id="{3B2E3793-BFE6-45A2-9B7B-E18844431C99}"/>
@@ -8383,7 +13063,7 @@
       </p:sp>
       <p:sp>
         <p:nvSpPr>
-          <p:cNvPr id="12" name="Rectangle 11">
+          <p:cNvPr id="36" name="Rectangle 35">
             <a:extLst>
               <a:ext uri="{FF2B5EF4-FFF2-40B4-BE49-F238E27FC236}">
                 <a16:creationId xmlns:a16="http://schemas.microsoft.com/office/drawing/2014/main" id="{BC4C4868-CB8F-4AF9-9CDB-8108F2C19B67}"/>
@@ -8459,7 +13139,7 @@
       </p:sp>
       <p:sp>
         <p:nvSpPr>
-          <p:cNvPr id="14" name="Rectangle 13">
+          <p:cNvPr id="37" name="Rectangle 36">
             <a:extLst>
               <a:ext uri="{FF2B5EF4-FFF2-40B4-BE49-F238E27FC236}">
                 <a16:creationId xmlns:a16="http://schemas.microsoft.com/office/drawing/2014/main" id="{375E0459-6403-40CD-989D-56A4407CA12E}"/>
@@ -8534,7 +13214,7 @@
       </p:sp>
       <p:sp>
         <p:nvSpPr>
-          <p:cNvPr id="16" name="Rectangle 15">
+          <p:cNvPr id="38" name="Rectangle 37">
             <a:extLst>
               <a:ext uri="{FF2B5EF4-FFF2-40B4-BE49-F238E27FC236}">
                 <a16:creationId xmlns:a16="http://schemas.microsoft.com/office/drawing/2014/main" id="{53E5B1A8-3AC9-4BD1-9BBC-78CA94F2D1BA}"/>
@@ -8652,38 +13332,37 @@
           </a:p>
         </p:txBody>
       </p:sp>
-      <p:sp>
-        <p:nvSpPr>
-          <p:cNvPr id="3" name="Content Placeholder 2">
+      <p:graphicFrame>
+        <p:nvGraphicFramePr>
+          <p:cNvPr id="39" name="Content Placeholder 2">
             <a:extLst>
               <a:ext uri="{FF2B5EF4-FFF2-40B4-BE49-F238E27FC236}">
-                <a16:creationId xmlns:a16="http://schemas.microsoft.com/office/drawing/2014/main" id="{9B7AD769-5324-7BFE-0BD3-4AFF7CF57314}"/>
+                <a16:creationId xmlns:a16="http://schemas.microsoft.com/office/drawing/2014/main" id="{3A054AE5-A1BF-BD60-2138-EF539969EEC2}"/>
               </a:ext>
             </a:extLst>
           </p:cNvPr>
-          <p:cNvSpPr>
-            <a:spLocks noGrp="1"/>
-          </p:cNvSpPr>
+          <p:cNvGraphicFramePr>
+            <a:graphicFrameLocks noGrp="1"/>
+          </p:cNvGraphicFramePr>
           <p:nvPr>
             <p:ph idx="1"/>
+            <p:extLst>
+              <p:ext uri="{D42A27DB-BD31-4B8C-83A1-F6EECF244321}">
+                <p14:modId xmlns:p14="http://schemas.microsoft.com/office/powerpoint/2010/main" val="1344406462"/>
+              </p:ext>
+            </p:extLst>
           </p:nvPr>
-        </p:nvSpPr>
-        <p:spPr>
-          <a:xfrm>
-            <a:off x="1371599" y="2318197"/>
-            <a:ext cx="9724031" cy="3683358"/>
-          </a:xfrm>
-        </p:spPr>
-        <p:txBody>
-          <a:bodyPr anchor="ctr">
-            <a:normAutofit/>
-          </a:bodyPr>
-          <a:lstStyle/>
-          <a:p>
-            <a:endParaRPr lang="en-150" sz="2000"/>
-          </a:p>
-        </p:txBody>
-      </p:sp>
+        </p:nvGraphicFramePr>
+        <p:xfrm>
+          <a:off x="1371599" y="2318197"/>
+          <a:ext cx="9724031" cy="3683358"/>
+        </p:xfrm>
+        <a:graphic>
+          <a:graphicData uri="http://schemas.openxmlformats.org/drawingml/2006/diagram">
+            <dgm:relIds xmlns:dgm="http://schemas.openxmlformats.org/drawingml/2006/diagram" xmlns:r="http://schemas.openxmlformats.org/officeDocument/2006/relationships" r:dm="rId2" r:lo="rId3" r:qs="rId4" r:cs="rId5"/>
+          </a:graphicData>
+        </a:graphic>
+      </p:graphicFrame>
     </p:spTree>
     <p:extLst>
       <p:ext uri="{BB962C8B-B14F-4D97-AF65-F5344CB8AC3E}">
